--- a/docs/04_배포자료/슬라이드/7주차-유니티입문.pptx
+++ b/docs/04_배포자료/슬라이드/7주차-유니티입문.pptx
@@ -19,9 +19,10 @@
     <p:sldId id="267" r:id="rId13"/>
     <p:sldId id="268" r:id="rId14"/>
     <p:sldId id="269" r:id="rId15"/>
+    <p:sldId id="270" r:id="rId16"/>
   </p:sldIdLst>
   <p:notesMasterIdLst>
-    <p:notesMasterId r:id="rId16"/>
+    <p:notesMasterId r:id="rId17"/>
   </p:notesMasterIdLst>
   <p:sldSz cx="12192000" cy="6858000"/>
   <p:notesSz cx="6858000" cy="12192000"/>
@@ -603,7 +604,7 @@
           <a:p>
             <a:r>
               <a:rPr lang="en-US" dirty="0"/>
-              <a:t>Falling이 Decoration은 통과하고 Wall에서 멈추는지 확인시킨다. 안 멈추면 양쪽 Collider부터 본다.</a:t>
+              <a:t>Rigidbody를 뺐다 넣었다 두 번 반복한다. 능력이 부품에 있다는 걸 눈으로 확인시킨다. Add Component는 반드시 검색으로 — 3D Rigidbody를 고르는 학생이 나온다.</a:t>
             </a:r>
             <a:endParaRPr lang="en-US" dirty="0"/>
           </a:p>
@@ -691,7 +692,7 @@
           <a:p>
             <a:r>
               <a:rPr lang="en-US" dirty="0"/>
-              <a:t>이 표를 채팅에 고정하거나 공지에 박아둔다. 다음 주부터 여기에 항목이 더 붙는다.</a:t>
+              <a:t>Falling이 Decoration은 통과하고 Wall에서 멈추는지 확인시킨다. 안 멈추면 양쪽 Collider부터 본다.</a:t>
             </a:r>
             <a:endParaRPr lang="en-US" dirty="0"/>
           </a:p>
@@ -779,7 +780,7 @@
           <a:p>
             <a:r>
               <a:rPr lang="en-US" dirty="0"/>
-              <a:t>오늘은 전원이 30초씩 데모한다. 잘 만든 걸 보여주는 자리가 아니라 여기까지 왔다는 걸 확인하는 자리다. 못 만든 학생에게는 Snapshot_P2_Week07.zip 을 배포한다.</a:t>
+              <a:t>이 표를 채팅에 고정하거나 공지에 박아둔다. 다음 주부터 여기에 항목이 더 붙는다.</a:t>
             </a:r>
             <a:endParaRPr lang="en-US" dirty="0"/>
           </a:p>
@@ -867,7 +868,7 @@
           <a:p>
             <a:r>
               <a:rPr lang="en-US" dirty="0"/>
-              <a:t>경로 한글은 이번 주에 잡지 않으면 21주차 빌드에서 프로젝트를 다시 만들어야 한다. 031회차에 못을 박는다.</a:t>
+              <a:t>오늘은 전원이 30초씩 데모한다. 잘 만든 걸 보여주는 자리가 아니라 여기까지 왔다는 걸 확인하는 자리다. 못 만든 학생에게는 Snapshot_P2_Week07.zip 을 배포한다.</a:t>
             </a:r>
             <a:endParaRPr lang="en-US" dirty="0"/>
           </a:p>
@@ -955,7 +956,7 @@
           <a:p>
             <a:r>
               <a:rPr lang="en-US" dirty="0"/>
-              <a:t>'언제 코딩해요?'라는 조급함이 반드시 나온다. 날짜를 명확히 말해준다.</a:t>
+              <a:t>경로 한글은 이번 주에 잡지 않으면 21주차 빌드에서 프로젝트를 다시 만들어야 한다. 031회차에 못을 박는다.</a:t>
             </a:r>
             <a:endParaRPr lang="en-US" dirty="0"/>
           </a:p>
@@ -979,6 +980,94 @@
             <a:fld id="{F7021451-1387-4CA6-816F-3879F97B5CBC}" type="slidenum">
               <a:rPr lang="en-US"/>
               <a:t>14</a:t>
+            </a:fld>
+            <a:endParaRPr lang="en-US"/>
+          </a:p>
+        </p:txBody>
+      </p:sp>
+    </p:spTree>
+    <p:extLst>
+      <p:ext uri="{BB962C8B-B14F-4D97-AF65-F5344CB8AC3E}">
+        <p14:creationId xmlns:p14="http://schemas.microsoft.com/office/powerpoint/2010/main" val="1024086991"/>
+      </p:ext>
+    </p:extLst>
+  </p:cSld>
+  <p:clrMapOvr>
+    <a:masterClrMapping/>
+  </p:clrMapOvr>
+</p:notes>
+</file>
+
+<file path=ppt/notesSlides/notesSlide15.xml><?xml version="1.0" encoding="utf-8"?>
+<p:notes xmlns:a="http://schemas.openxmlformats.org/drawingml/2006/main" xmlns:r="http://schemas.openxmlformats.org/officeDocument/2006/relationships" xmlns:p="http://schemas.openxmlformats.org/presentationml/2006/main">
+  <p:cSld>
+    <p:spTree>
+      <p:nvGrpSpPr>
+        <p:cNvPr id="1" name=""/>
+        <p:cNvGrpSpPr/>
+        <p:nvPr/>
+      </p:nvGrpSpPr>
+      <p:grpSpPr>
+        <a:xfrm>
+          <a:off x="0" y="0"/>
+          <a:ext cx="0" cy="0"/>
+          <a:chOff x="0" y="0"/>
+          <a:chExt cx="0" cy="0"/>
+        </a:xfrm>
+      </p:grpSpPr>
+      <p:sp>
+        <p:nvSpPr>
+          <p:cNvPr id="2" name="Slide Image Placeholder 1"/>
+          <p:cNvSpPr>
+            <a:spLocks noGrp="1" noRot="1" noChangeAspect="1"/>
+          </p:cNvSpPr>
+          <p:nvPr>
+            <p:ph type="sldImg"/>
+          </p:nvPr>
+        </p:nvSpPr>
+        <p:spPr/>
+      </p:sp>
+      <p:sp>
+        <p:nvSpPr>
+          <p:cNvPr id="3" name="Notes Placeholder 2"/>
+          <p:cNvSpPr>
+            <a:spLocks noGrp="1"/>
+          </p:cNvSpPr>
+          <p:nvPr>
+            <p:ph type="body" idx="1"/>
+          </p:nvPr>
+        </p:nvSpPr>
+        <p:spPr/>
+        <p:txBody>
+          <a:bodyPr/>
+          <a:lstStyle/>
+          <a:p>
+            <a:r>
+              <a:rPr lang="en-US" dirty="0"/>
+              <a:t>'언제 코딩해요?'라는 조급함이 반드시 나온다. 날짜를 명확히 말해준다.</a:t>
+            </a:r>
+            <a:endParaRPr lang="en-US" dirty="0"/>
+          </a:p>
+        </p:txBody>
+      </p:sp>
+      <p:sp>
+        <p:nvSpPr>
+          <p:cNvPr id="4" name="Slide Number Placeholder 3"/>
+          <p:cNvSpPr>
+            <a:spLocks noGrp="1"/>
+          </p:cNvSpPr>
+          <p:nvPr>
+            <p:ph type="sldNum" sz="quarter" idx="10"/>
+          </p:nvPr>
+        </p:nvSpPr>
+        <p:spPr/>
+        <p:txBody>
+          <a:bodyPr/>
+          <a:lstStyle/>
+          <a:p>
+            <a:fld id="{F7021451-1387-4CA6-816F-3879F97B5CBC}" type="slidenum">
+              <a:rPr lang="en-US"/>
+              <a:t>15</a:t>
             </a:fld>
             <a:endParaRPr lang="en-US"/>
           </a:p>
@@ -1483,7 +1572,7 @@
           <a:p>
             <a:r>
               <a:rPr lang="en-US" dirty="0"/>
-              <a:t>'로컬 좌표계'라는 용어는 쓰지 않는다. 물어보는 학생에게만 개별로 알려준다.</a:t>
+              <a:t>설명 없이 씬부터 연다. 두 사각형이 같은 자리인데 숫자가 다른 걸 먼저 보여주고, 그다음에 이름을 붙인다. 순서가 바뀌면 용어 암기가 된다. B_Parent 의 Position X 를 6 으로 바꿔 자식이 따라가는데 자식 숫자는 (0,0) 그대로인 걸 확인시킨다. 038회차의 transform.position / localPosition 이 여기서 시작된다.</a:t>
             </a:r>
             <a:endParaRPr lang="en-US" dirty="0"/>
           </a:p>
@@ -1571,7 +1660,7 @@
           <a:p>
             <a:r>
               <a:rPr lang="en-US" dirty="0"/>
-              <a:t>팔이 흩어지면 자식 Position이 부모 기준이라는 걸 다시 짚는다. (1.5, 0)은 원점에서가 아니라 부모에서 1.5다.</a:t>
+              <a:t>'로컬 좌표계'라는 용어는 쓰지 않는다. 물어보는 학생에게만 개별로 알려준다.</a:t>
             </a:r>
             <a:endParaRPr lang="en-US" dirty="0"/>
           </a:p>
@@ -1659,7 +1748,7 @@
           <a:p>
             <a:r>
               <a:rPr lang="en-US" dirty="0"/>
-              <a:t>Rigidbody를 뺐다 넣었다 두 번 반복한다. 능력이 부품에 있다는 걸 눈으로 확인시킨다. Add Component는 반드시 검색으로 — 3D Rigidbody를 고르는 학생이 나온다.</a:t>
+              <a:t>팔이 흩어지면 자식 Position이 부모 기준이라는 걸 다시 짚는다. (1.5, 0)은 원점에서가 아니라 부모에서 1.5다.</a:t>
             </a:r>
             <a:endParaRPr lang="en-US" dirty="0"/>
           </a:p>
@@ -2486,7 +2575,7 @@
                 <a:ea typeface="Pretendard SemiBold" pitchFamily="34" charset="-122"/>
                 <a:cs typeface="Pretendard SemiBold" pitchFamily="34" charset="-120"/>
               </a:rPr>
-              <a:t>실습 — 부품 조합 네 가지.</a:t>
+              <a:t>GameObject와 Component.</a:t>
             </a:r>
             <a:endParaRPr lang="en-US" sz="2600" dirty="0"/>
           </a:p>
@@ -2525,7 +2614,7 @@
                 <a:ea typeface="Pretendard Light" pitchFamily="34" charset="-122"/>
                 <a:cs typeface="Pretendard Light" pitchFamily="34" charset="-120"/>
               </a:rPr>
-              <a:t>전부 Create Empty로 만든다.</a:t>
+              <a:t>조립이 아니라 분해로 가르친다.</a:t>
             </a:r>
             <a:endParaRPr lang="en-US" sz="1500" dirty="0"/>
           </a:p>
@@ -2533,14 +2622,131 @@
       </p:sp>
       <p:sp>
         <p:nvSpPr>
-          <p:cNvPr id="6" name="Shape 4"/>
+          <p:cNvPr id="6" name="Text 4"/>
+          <p:cNvSpPr txBox="1"/>
+          <p:nvPr/>
+        </p:nvSpPr>
+        <p:spPr>
+          <a:xfrm>
+            <a:off x="758952" y="1965960"/>
+            <a:ext cx="3291840" cy="274320"/>
+          </a:xfrm>
+          <a:prstGeom prst="rect">
+            <a:avLst/>
+          </a:prstGeom>
+          <a:noFill/>
+          <a:ln/>
+        </p:spPr>
+        <p:txBody>
+          <a:bodyPr wrap="square" lIns="0" tIns="0" rIns="0" bIns="0" rtlCol="0" anchor="ctr"/>
+          <a:lstStyle/>
+          <a:p>
+            <a:pPr indent="0" marL="0">
+              <a:buNone/>
+            </a:pPr>
+            <a:r>
+              <a:rPr lang="en-US" sz="950" dirty="0">
+                <a:solidFill>
+                  <a:srgbClr val="707070"/>
+                </a:solidFill>
+                <a:latin typeface="Pretendard SemiBold" pitchFamily="34" charset="0"/>
+                <a:ea typeface="Pretendard SemiBold" pitchFamily="34" charset="-122"/>
+                <a:cs typeface="Pretendard SemiBold" pitchFamily="34" charset="-120"/>
+              </a:rPr>
+              <a:t>부품</a:t>
+            </a:r>
+            <a:endParaRPr lang="en-US" sz="950" dirty="0"/>
+          </a:p>
+        </p:txBody>
+      </p:sp>
+      <p:sp>
+        <p:nvSpPr>
+          <p:cNvPr id="7" name="Text 5"/>
+          <p:cNvSpPr txBox="1"/>
+          <p:nvPr/>
+        </p:nvSpPr>
+        <p:spPr>
+          <a:xfrm>
+            <a:off x="4690872" y="1965960"/>
+            <a:ext cx="2926080" cy="274320"/>
+          </a:xfrm>
+          <a:prstGeom prst="rect">
+            <a:avLst/>
+          </a:prstGeom>
+          <a:noFill/>
+          <a:ln/>
+        </p:spPr>
+        <p:txBody>
+          <a:bodyPr wrap="square" lIns="0" tIns="0" rIns="0" bIns="0" rtlCol="0" anchor="ctr"/>
+          <a:lstStyle/>
+          <a:p>
+            <a:pPr indent="0" marL="0">
+              <a:buNone/>
+            </a:pPr>
+            <a:r>
+              <a:rPr lang="en-US" sz="950" dirty="0">
+                <a:solidFill>
+                  <a:srgbClr val="707070"/>
+                </a:solidFill>
+                <a:latin typeface="Pretendard SemiBold" pitchFamily="34" charset="0"/>
+                <a:ea typeface="Pretendard SemiBold" pitchFamily="34" charset="-122"/>
+                <a:cs typeface="Pretendard SemiBold" pitchFamily="34" charset="-120"/>
+              </a:rPr>
+              <a:t>없으면</a:t>
+            </a:r>
+            <a:endParaRPr lang="en-US" sz="950" dirty="0"/>
+          </a:p>
+        </p:txBody>
+      </p:sp>
+      <p:sp>
+        <p:nvSpPr>
+          <p:cNvPr id="8" name="Text 6"/>
+          <p:cNvSpPr txBox="1"/>
+          <p:nvPr/>
+        </p:nvSpPr>
+        <p:spPr>
+          <a:xfrm>
+            <a:off x="7799832" y="1965960"/>
+            <a:ext cx="2926080" cy="274320"/>
+          </a:xfrm>
+          <a:prstGeom prst="rect">
+            <a:avLst/>
+          </a:prstGeom>
+          <a:noFill/>
+          <a:ln/>
+        </p:spPr>
+        <p:txBody>
+          <a:bodyPr wrap="square" lIns="0" tIns="0" rIns="0" bIns="0" rtlCol="0" anchor="ctr"/>
+          <a:lstStyle/>
+          <a:p>
+            <a:pPr indent="0" marL="0">
+              <a:buNone/>
+            </a:pPr>
+            <a:r>
+              <a:rPr lang="en-US" sz="950" dirty="0">
+                <a:solidFill>
+                  <a:srgbClr val="707070"/>
+                </a:solidFill>
+                <a:latin typeface="Pretendard SemiBold" pitchFamily="34" charset="0"/>
+                <a:ea typeface="Pretendard SemiBold" pitchFamily="34" charset="-122"/>
+                <a:cs typeface="Pretendard SemiBold" pitchFamily="34" charset="-120"/>
+              </a:rPr>
+              <a:t>있으면</a:t>
+            </a:r>
+            <a:endParaRPr lang="en-US" sz="950" dirty="0"/>
+          </a:p>
+        </p:txBody>
+      </p:sp>
+      <p:sp>
+        <p:nvSpPr>
+          <p:cNvPr id="9" name="Shape 7"/>
           <p:cNvSpPr/>
           <p:nvPr/>
         </p:nvSpPr>
         <p:spPr>
           <a:xfrm>
-            <a:off x="758952" y="2148840"/>
-            <a:ext cx="4937760" cy="0"/>
+            <a:off x="758952" y="2395728"/>
+            <a:ext cx="10673791" cy="0"/>
           </a:xfrm>
           <a:prstGeom prst="line">
             <a:avLst/>
@@ -2556,500 +2762,18 @@
       </p:sp>
       <p:sp>
         <p:nvSpPr>
-          <p:cNvPr id="7" name="Text 5"/>
-          <p:cNvSpPr txBox="1"/>
-          <p:nvPr/>
-        </p:nvSpPr>
-        <p:spPr>
-          <a:xfrm>
-            <a:off x="758952" y="2331720"/>
-            <a:ext cx="2194560" cy="384048"/>
-          </a:xfrm>
-          <a:prstGeom prst="rect">
-            <a:avLst/>
-          </a:prstGeom>
-          <a:noFill/>
-          <a:ln/>
-        </p:spPr>
-        <p:txBody>
-          <a:bodyPr wrap="square" lIns="0" tIns="0" rIns="0" bIns="0" rtlCol="0" anchor="ctr"/>
-          <a:lstStyle/>
-          <a:p>
-            <a:pPr indent="0" marL="0">
-              <a:buNone/>
-            </a:pPr>
-            <a:r>
-              <a:rPr lang="en-US" sz="1200" dirty="0">
-                <a:solidFill>
-                  <a:srgbClr val="141414"/>
-                </a:solidFill>
-                <a:latin typeface="Pretendard Medium" pitchFamily="34" charset="0"/>
-                <a:ea typeface="Pretendard Medium" pitchFamily="34" charset="-122"/>
-                <a:cs typeface="Pretendard Medium" pitchFamily="34" charset="-120"/>
-              </a:rPr>
-              <a:t>Invisible</a:t>
-            </a:r>
-            <a:endParaRPr lang="en-US" sz="1200" dirty="0"/>
-          </a:p>
-        </p:txBody>
-      </p:sp>
-      <p:sp>
-        <p:nvSpPr>
-          <p:cNvPr id="8" name="Text 6"/>
-          <p:cNvSpPr txBox="1"/>
-          <p:nvPr/>
-        </p:nvSpPr>
-        <p:spPr>
-          <a:xfrm>
-            <a:off x="3044952" y="2331720"/>
-            <a:ext cx="2651760" cy="384048"/>
-          </a:xfrm>
-          <a:prstGeom prst="rect">
-            <a:avLst/>
-          </a:prstGeom>
-          <a:noFill/>
-          <a:ln/>
-        </p:spPr>
-        <p:txBody>
-          <a:bodyPr wrap="square" lIns="0" tIns="0" rIns="0" bIns="0" rtlCol="0" anchor="ctr"/>
-          <a:lstStyle/>
-          <a:p>
-            <a:pPr indent="0" marL="0">
-              <a:buNone/>
-            </a:pPr>
-            <a:r>
-              <a:rPr lang="en-US" sz="1100" dirty="0">
-                <a:solidFill>
-                  <a:srgbClr val="707070"/>
-                </a:solidFill>
-                <a:latin typeface="Pretendard" pitchFamily="34" charset="0"/>
-                <a:ea typeface="Pretendard" pitchFamily="34" charset="-122"/>
-                <a:cs typeface="Pretendard" pitchFamily="34" charset="-120"/>
-              </a:rPr>
-              <a:t>Transform만</a:t>
-            </a:r>
-            <a:endParaRPr lang="en-US" sz="1100" dirty="0"/>
-          </a:p>
-        </p:txBody>
-      </p:sp>
-      <p:sp>
-        <p:nvSpPr>
-          <p:cNvPr id="9" name="Shape 7"/>
+          <p:cNvPr id="10" name="Shape 8"/>
           <p:cNvSpPr/>
           <p:nvPr/>
         </p:nvSpPr>
         <p:spPr>
           <a:xfrm>
-            <a:off x="758952" y="2843784"/>
-            <a:ext cx="4937760" cy="0"/>
-          </a:xfrm>
-          <a:prstGeom prst="line">
-            <a:avLst/>
-          </a:prstGeom>
-          <a:noFill/>
-          <a:ln w="12700">
-            <a:solidFill>
-              <a:srgbClr val="F0F0F0"/>
-            </a:solidFill>
-            <a:prstDash val="solid"/>
-          </a:ln>
-        </p:spPr>
-      </p:sp>
-      <p:sp>
-        <p:nvSpPr>
-          <p:cNvPr id="10" name="Text 8"/>
-          <p:cNvSpPr txBox="1"/>
-          <p:nvPr/>
-        </p:nvSpPr>
-        <p:spPr>
-          <a:xfrm>
-            <a:off x="758952" y="2990088"/>
-            <a:ext cx="2194560" cy="384048"/>
-          </a:xfrm>
-          <a:prstGeom prst="rect">
-            <a:avLst/>
-          </a:prstGeom>
-          <a:noFill/>
-          <a:ln/>
-        </p:spPr>
-        <p:txBody>
-          <a:bodyPr wrap="square" lIns="0" tIns="0" rIns="0" bIns="0" rtlCol="0" anchor="ctr"/>
-          <a:lstStyle/>
-          <a:p>
-            <a:pPr indent="0" marL="0">
-              <a:buNone/>
-            </a:pPr>
-            <a:r>
-              <a:rPr lang="en-US" sz="1200" dirty="0">
-                <a:solidFill>
-                  <a:srgbClr val="141414"/>
-                </a:solidFill>
-                <a:latin typeface="Pretendard Medium" pitchFamily="34" charset="0"/>
-                <a:ea typeface="Pretendard Medium" pitchFamily="34" charset="-122"/>
-                <a:cs typeface="Pretendard Medium" pitchFamily="34" charset="-120"/>
-              </a:rPr>
-              <a:t>Decoration</a:t>
-            </a:r>
-            <a:endParaRPr lang="en-US" sz="1200" dirty="0"/>
-          </a:p>
-        </p:txBody>
-      </p:sp>
-      <p:sp>
-        <p:nvSpPr>
-          <p:cNvPr id="11" name="Text 9"/>
-          <p:cNvSpPr txBox="1"/>
-          <p:nvPr/>
-        </p:nvSpPr>
-        <p:spPr>
-          <a:xfrm>
-            <a:off x="3044952" y="2990088"/>
-            <a:ext cx="2651760" cy="384048"/>
-          </a:xfrm>
-          <a:prstGeom prst="rect">
-            <a:avLst/>
-          </a:prstGeom>
-          <a:noFill/>
-          <a:ln/>
-        </p:spPr>
-        <p:txBody>
-          <a:bodyPr wrap="square" lIns="0" tIns="0" rIns="0" bIns="0" rtlCol="0" anchor="ctr"/>
-          <a:lstStyle/>
-          <a:p>
-            <a:pPr indent="0" marL="0">
-              <a:buNone/>
-            </a:pPr>
-            <a:r>
-              <a:rPr lang="en-US" sz="1100" dirty="0">
-                <a:solidFill>
-                  <a:srgbClr val="707070"/>
-                </a:solidFill>
-                <a:latin typeface="Pretendard" pitchFamily="34" charset="0"/>
-                <a:ea typeface="Pretendard" pitchFamily="34" charset="-122"/>
-                <a:cs typeface="Pretendard" pitchFamily="34" charset="-120"/>
-              </a:rPr>
-              <a:t>+ Sprite Renderer</a:t>
-            </a:r>
-            <a:endParaRPr lang="en-US" sz="1100" dirty="0"/>
-          </a:p>
-        </p:txBody>
-      </p:sp>
-      <p:sp>
-        <p:nvSpPr>
-          <p:cNvPr id="12" name="Shape 10"/>
-          <p:cNvSpPr/>
-          <p:nvPr/>
-        </p:nvSpPr>
-        <p:spPr>
-          <a:xfrm>
-            <a:off x="758952" y="3502152"/>
-            <a:ext cx="4937760" cy="0"/>
-          </a:xfrm>
-          <a:prstGeom prst="line">
-            <a:avLst/>
-          </a:prstGeom>
-          <a:noFill/>
-          <a:ln w="12700">
-            <a:solidFill>
-              <a:srgbClr val="F0F0F0"/>
-            </a:solidFill>
-            <a:prstDash val="solid"/>
-          </a:ln>
-        </p:spPr>
-      </p:sp>
-      <p:sp>
-        <p:nvSpPr>
-          <p:cNvPr id="13" name="Text 11"/>
-          <p:cNvSpPr txBox="1"/>
-          <p:nvPr/>
-        </p:nvSpPr>
-        <p:spPr>
-          <a:xfrm>
-            <a:off x="758952" y="3648456"/>
-            <a:ext cx="2194560" cy="384048"/>
-          </a:xfrm>
-          <a:prstGeom prst="rect">
-            <a:avLst/>
-          </a:prstGeom>
-          <a:noFill/>
-          <a:ln/>
-        </p:spPr>
-        <p:txBody>
-          <a:bodyPr wrap="square" lIns="0" tIns="0" rIns="0" bIns="0" rtlCol="0" anchor="ctr"/>
-          <a:lstStyle/>
-          <a:p>
-            <a:pPr indent="0" marL="0">
-              <a:buNone/>
-            </a:pPr>
-            <a:r>
-              <a:rPr lang="en-US" sz="1200" dirty="0">
-                <a:solidFill>
-                  <a:srgbClr val="141414"/>
-                </a:solidFill>
-                <a:latin typeface="Pretendard Medium" pitchFamily="34" charset="0"/>
-                <a:ea typeface="Pretendard Medium" pitchFamily="34" charset="-122"/>
-                <a:cs typeface="Pretendard Medium" pitchFamily="34" charset="-120"/>
-              </a:rPr>
-              <a:t>Wall</a:t>
-            </a:r>
-            <a:endParaRPr lang="en-US" sz="1200" dirty="0"/>
-          </a:p>
-        </p:txBody>
-      </p:sp>
-      <p:sp>
-        <p:nvSpPr>
-          <p:cNvPr id="14" name="Text 12"/>
-          <p:cNvSpPr txBox="1"/>
-          <p:nvPr/>
-        </p:nvSpPr>
-        <p:spPr>
-          <a:xfrm>
-            <a:off x="3044952" y="3648456"/>
-            <a:ext cx="2651760" cy="384048"/>
-          </a:xfrm>
-          <a:prstGeom prst="rect">
-            <a:avLst/>
-          </a:prstGeom>
-          <a:noFill/>
-          <a:ln/>
-        </p:spPr>
-        <p:txBody>
-          <a:bodyPr wrap="square" lIns="0" tIns="0" rIns="0" bIns="0" rtlCol="0" anchor="ctr"/>
-          <a:lstStyle/>
-          <a:p>
-            <a:pPr indent="0" marL="0">
-              <a:buNone/>
-            </a:pPr>
-            <a:r>
-              <a:rPr lang="en-US" sz="1100" dirty="0">
-                <a:solidFill>
-                  <a:srgbClr val="707070"/>
-                </a:solidFill>
-                <a:latin typeface="Pretendard" pitchFamily="34" charset="0"/>
-                <a:ea typeface="Pretendard" pitchFamily="34" charset="-122"/>
-                <a:cs typeface="Pretendard" pitchFamily="34" charset="-120"/>
-              </a:rPr>
-              <a:t>+ Collider 2D</a:t>
-            </a:r>
-            <a:endParaRPr lang="en-US" sz="1100" dirty="0"/>
-          </a:p>
-        </p:txBody>
-      </p:sp>
-      <p:sp>
-        <p:nvSpPr>
-          <p:cNvPr id="15" name="Shape 13"/>
-          <p:cNvSpPr/>
-          <p:nvPr/>
-        </p:nvSpPr>
-        <p:spPr>
-          <a:xfrm>
-            <a:off x="758952" y="4160520"/>
-            <a:ext cx="4937760" cy="0"/>
-          </a:xfrm>
-          <a:prstGeom prst="line">
-            <a:avLst/>
-          </a:prstGeom>
-          <a:noFill/>
-          <a:ln w="12700">
-            <a:solidFill>
-              <a:srgbClr val="F0F0F0"/>
-            </a:solidFill>
-            <a:prstDash val="solid"/>
-          </a:ln>
-        </p:spPr>
-      </p:sp>
-      <p:sp>
-        <p:nvSpPr>
-          <p:cNvPr id="16" name="Text 14"/>
-          <p:cNvSpPr txBox="1"/>
-          <p:nvPr/>
-        </p:nvSpPr>
-        <p:spPr>
-          <a:xfrm>
-            <a:off x="758952" y="4306824"/>
-            <a:ext cx="2194560" cy="384048"/>
-          </a:xfrm>
-          <a:prstGeom prst="rect">
-            <a:avLst/>
-          </a:prstGeom>
-          <a:noFill/>
-          <a:ln/>
-        </p:spPr>
-        <p:txBody>
-          <a:bodyPr wrap="square" lIns="0" tIns="0" rIns="0" bIns="0" rtlCol="0" anchor="ctr"/>
-          <a:lstStyle/>
-          <a:p>
-            <a:pPr indent="0" marL="0">
-              <a:buNone/>
-            </a:pPr>
-            <a:r>
-              <a:rPr lang="en-US" sz="1200" dirty="0">
-                <a:solidFill>
-                  <a:srgbClr val="141414"/>
-                </a:solidFill>
-                <a:latin typeface="Pretendard Medium" pitchFamily="34" charset="0"/>
-                <a:ea typeface="Pretendard Medium" pitchFamily="34" charset="-122"/>
-                <a:cs typeface="Pretendard Medium" pitchFamily="34" charset="-120"/>
-              </a:rPr>
-              <a:t>Falling</a:t>
-            </a:r>
-            <a:endParaRPr lang="en-US" sz="1200" dirty="0"/>
-          </a:p>
-        </p:txBody>
-      </p:sp>
-      <p:sp>
-        <p:nvSpPr>
-          <p:cNvPr id="17" name="Text 15"/>
-          <p:cNvSpPr txBox="1"/>
-          <p:nvPr/>
-        </p:nvSpPr>
-        <p:spPr>
-          <a:xfrm>
-            <a:off x="3044952" y="4306824"/>
-            <a:ext cx="2651760" cy="384048"/>
-          </a:xfrm>
-          <a:prstGeom prst="rect">
-            <a:avLst/>
-          </a:prstGeom>
-          <a:noFill/>
-          <a:ln/>
-        </p:spPr>
-        <p:txBody>
-          <a:bodyPr wrap="square" lIns="0" tIns="0" rIns="0" bIns="0" rtlCol="0" anchor="ctr"/>
-          <a:lstStyle/>
-          <a:p>
-            <a:pPr indent="0" marL="0">
-              <a:buNone/>
-            </a:pPr>
-            <a:r>
-              <a:rPr lang="en-US" sz="1100" dirty="0">
-                <a:solidFill>
-                  <a:srgbClr val="707070"/>
-                </a:solidFill>
-                <a:latin typeface="Pretendard" pitchFamily="34" charset="0"/>
-                <a:ea typeface="Pretendard" pitchFamily="34" charset="-122"/>
-                <a:cs typeface="Pretendard" pitchFamily="34" charset="-120"/>
-              </a:rPr>
-              <a:t>+ Rigidbody 2D</a:t>
-            </a:r>
-            <a:endParaRPr lang="en-US" sz="1100" dirty="0"/>
-          </a:p>
-        </p:txBody>
-      </p:sp>
-      <p:sp>
-        <p:nvSpPr>
-          <p:cNvPr id="18" name="Shape 16"/>
-          <p:cNvSpPr/>
-          <p:nvPr/>
-        </p:nvSpPr>
-        <p:spPr>
-          <a:xfrm>
-            <a:off x="758952" y="4818888"/>
-            <a:ext cx="4937760" cy="0"/>
-          </a:xfrm>
-          <a:prstGeom prst="line">
-            <a:avLst/>
-          </a:prstGeom>
-          <a:noFill/>
-          <a:ln w="12700">
-            <a:solidFill>
-              <a:srgbClr val="F0F0F0"/>
-            </a:solidFill>
-            <a:prstDash val="solid"/>
-          </a:ln>
-        </p:spPr>
-      </p:sp>
-      <p:sp>
-        <p:nvSpPr>
-          <p:cNvPr id="19" name="Text 17"/>
-          <p:cNvSpPr txBox="1"/>
-          <p:nvPr/>
-        </p:nvSpPr>
-        <p:spPr>
-          <a:xfrm>
-            <a:off x="758952" y="5212080"/>
-            <a:ext cx="5120640" cy="384048"/>
-          </a:xfrm>
-          <a:prstGeom prst="rect">
-            <a:avLst/>
-          </a:prstGeom>
-          <a:noFill/>
-          <a:ln/>
-        </p:spPr>
-        <p:txBody>
-          <a:bodyPr wrap="square" lIns="0" tIns="0" rIns="0" bIns="0" rtlCol="0" anchor="ctr"/>
-          <a:lstStyle/>
-          <a:p>
-            <a:pPr indent="0" marL="0">
-              <a:buNone/>
-            </a:pPr>
-            <a:r>
-              <a:rPr lang="en-US" sz="1900" dirty="0">
-                <a:solidFill>
-                  <a:srgbClr val="141414"/>
-                </a:solidFill>
-                <a:latin typeface="Pretendard SemiBold" pitchFamily="34" charset="0"/>
-                <a:ea typeface="Pretendard SemiBold" pitchFamily="34" charset="-122"/>
-                <a:cs typeface="Pretendard SemiBold" pitchFamily="34" charset="-120"/>
-              </a:rPr>
-              <a:t>떨어지는 쪽에도 Collider가 있어야 부딪힌다.</a:t>
-            </a:r>
-            <a:endParaRPr lang="en-US" sz="1900" dirty="0"/>
-          </a:p>
-        </p:txBody>
-      </p:sp>
-      <p:sp>
-        <p:nvSpPr>
-          <p:cNvPr id="20" name="Text 18"/>
-          <p:cNvSpPr txBox="1"/>
-          <p:nvPr/>
-        </p:nvSpPr>
-        <p:spPr>
-          <a:xfrm>
-            <a:off x="758952" y="5687568"/>
-            <a:ext cx="5120640" cy="329184"/>
-          </a:xfrm>
-          <a:prstGeom prst="rect">
-            <a:avLst/>
-          </a:prstGeom>
-          <a:noFill/>
-          <a:ln/>
-        </p:spPr>
-        <p:txBody>
-          <a:bodyPr wrap="square" lIns="0" tIns="0" rIns="0" bIns="0" rtlCol="0" anchor="ctr"/>
-          <a:lstStyle/>
-          <a:p>
-            <a:pPr indent="0" marL="0">
-              <a:buNone/>
-            </a:pPr>
-            <a:r>
-              <a:rPr lang="en-US" sz="1200" dirty="0">
-                <a:solidFill>
-                  <a:srgbClr val="707070"/>
-                </a:solidFill>
-                <a:latin typeface="Pretendard Light" pitchFamily="34" charset="0"/>
-                <a:ea typeface="Pretendard Light" pitchFamily="34" charset="-122"/>
-                <a:cs typeface="Pretendard Light" pitchFamily="34" charset="-120"/>
-              </a:rPr>
-              <a:t>양쪽 다 필요하다. 한쪽만 있으면 그냥 통과한다.</a:t>
-            </a:r>
-            <a:endParaRPr lang="en-US" sz="1200" dirty="0"/>
-          </a:p>
-        </p:txBody>
-      </p:sp>
-      <p:sp>
-        <p:nvSpPr>
-          <p:cNvPr id="21" name="Shape 19"/>
-          <p:cNvSpPr/>
-          <p:nvPr/>
-        </p:nvSpPr>
-        <p:spPr>
-          <a:xfrm>
-            <a:off x="6263640" y="1965960"/>
-            <a:ext cx="5166360" cy="3858768"/>
+            <a:off x="502920" y="2468880"/>
+            <a:ext cx="11185855" cy="676656"/>
           </a:xfrm>
           <a:prstGeom prst="roundRect">
             <a:avLst>
-              <a:gd name="adj" fmla="val 5924"/>
+              <a:gd name="adj" fmla="val 22568"/>
             </a:avLst>
           </a:prstGeom>
           <a:solidFill>
@@ -3063,56 +2787,71 @@
           </a:ln>
         </p:spPr>
       </p:sp>
-      <p:pic>
-        <p:nvPicPr>
-          <p:cNvPr id="22" name="Image 0" descr="C:\Users\user\AppData\Local\Temp\claude\C--Users-user-Github-WaveBreaker\fd97bec6-cef8-4bf5-a447-9a0fa572b36e\scratchpad\shots2\final\034_Component.png">    </p:cNvPr>
-          <p:cNvPicPr>
-            <a:picLocks noChangeAspect="1"/>
-          </p:cNvPicPr>
-          <p:nvPr/>
-        </p:nvPicPr>
-        <p:blipFill>
-          <a:blip r:embed="rId1"/>
-          <a:stretch>
-            <a:fillRect/>
-          </a:stretch>
-        </p:blipFill>
-        <p:spPr>
-          <a:xfrm>
-            <a:off x="6464808" y="2167128"/>
-            <a:ext cx="4764024" cy="2980944"/>
-          </a:xfrm>
-          <a:prstGeom prst="rect">
-            <a:avLst/>
-          </a:prstGeom>
-        </p:spPr>
-      </p:pic>
-      <p:sp>
-        <p:nvSpPr>
-          <p:cNvPr id="23" name="Text 20"/>
-          <p:cNvSpPr txBox="1"/>
-          <p:nvPr/>
-        </p:nvSpPr>
-        <p:spPr>
-          <a:xfrm>
-            <a:off x="6464808" y="5221224"/>
-            <a:ext cx="4764024" cy="310896"/>
-          </a:xfrm>
-          <a:prstGeom prst="rect">
-            <a:avLst/>
-          </a:prstGeom>
-          <a:noFill/>
-          <a:ln/>
-        </p:spPr>
-        <p:txBody>
-          <a:bodyPr wrap="square" lIns="0" tIns="0" rIns="0" bIns="0" rtlCol="0" anchor="ctr"/>
-          <a:lstStyle/>
-          <a:p>
-            <a:pPr algn="ctr" indent="0" marL="0">
-              <a:buNone/>
-            </a:pPr>
-            <a:r>
-              <a:rPr lang="en-US" sz="950" dirty="0">
+      <p:sp>
+        <p:nvSpPr>
+          <p:cNvPr id="11" name="Text 9"/>
+          <p:cNvSpPr txBox="1"/>
+          <p:nvPr/>
+        </p:nvSpPr>
+        <p:spPr>
+          <a:xfrm>
+            <a:off x="758952" y="2578608"/>
+            <a:ext cx="3749040" cy="420624"/>
+          </a:xfrm>
+          <a:prstGeom prst="rect">
+            <a:avLst/>
+          </a:prstGeom>
+          <a:noFill/>
+          <a:ln/>
+        </p:spPr>
+        <p:txBody>
+          <a:bodyPr wrap="square" lIns="0" tIns="0" rIns="0" bIns="0" rtlCol="0" anchor="ctr"/>
+          <a:lstStyle/>
+          <a:p>
+            <a:pPr indent="0" marL="0">
+              <a:buNone/>
+            </a:pPr>
+            <a:r>
+              <a:rPr lang="en-US" sz="1550" dirty="0">
+                <a:solidFill>
+                  <a:srgbClr val="141414"/>
+                </a:solidFill>
+                <a:latin typeface="Pretendard SemiBold" pitchFamily="34" charset="0"/>
+                <a:ea typeface="Pretendard SemiBold" pitchFamily="34" charset="-122"/>
+                <a:cs typeface="Pretendard SemiBold" pitchFamily="34" charset="-120"/>
+              </a:rPr>
+              <a:t>Transform</a:t>
+            </a:r>
+            <a:endParaRPr lang="en-US" sz="1550" dirty="0"/>
+          </a:p>
+        </p:txBody>
+      </p:sp>
+      <p:sp>
+        <p:nvSpPr>
+          <p:cNvPr id="12" name="Text 10"/>
+          <p:cNvSpPr txBox="1"/>
+          <p:nvPr/>
+        </p:nvSpPr>
+        <p:spPr>
+          <a:xfrm>
+            <a:off x="4690872" y="2578608"/>
+            <a:ext cx="2926080" cy="420624"/>
+          </a:xfrm>
+          <a:prstGeom prst="rect">
+            <a:avLst/>
+          </a:prstGeom>
+          <a:noFill/>
+          <a:ln/>
+        </p:spPr>
+        <p:txBody>
+          <a:bodyPr wrap="square" lIns="0" tIns="0" rIns="0" bIns="0" rtlCol="0" anchor="ctr"/>
+          <a:lstStyle/>
+          <a:p>
+            <a:pPr indent="0" marL="0">
+              <a:buNone/>
+            </a:pPr>
+            <a:r>
+              <a:rPr lang="en-US" sz="1200" dirty="0">
                 <a:solidFill>
                   <a:srgbClr val="ADADAD"/>
                 </a:solidFill>
@@ -3120,9 +2859,530 @@
                 <a:ea typeface="Pretendard" pitchFamily="34" charset="-122"/>
                 <a:cs typeface="Pretendard" pitchFamily="34" charset="-120"/>
               </a:rPr>
-              <a:t>완성 상태 — Falling이 Wall에서 멈춘다</a:t>
-            </a:r>
-            <a:endParaRPr lang="en-US" sz="950" dirty="0"/>
+              <a:t>존재 불가</a:t>
+            </a:r>
+            <a:endParaRPr lang="en-US" sz="1200" dirty="0"/>
+          </a:p>
+        </p:txBody>
+      </p:sp>
+      <p:sp>
+        <p:nvSpPr>
+          <p:cNvPr id="13" name="Text 11"/>
+          <p:cNvSpPr txBox="1"/>
+          <p:nvPr/>
+        </p:nvSpPr>
+        <p:spPr>
+          <a:xfrm>
+            <a:off x="7799832" y="2578608"/>
+            <a:ext cx="3108960" cy="420624"/>
+          </a:xfrm>
+          <a:prstGeom prst="rect">
+            <a:avLst/>
+          </a:prstGeom>
+          <a:noFill/>
+          <a:ln/>
+        </p:spPr>
+        <p:txBody>
+          <a:bodyPr wrap="square" lIns="0" tIns="0" rIns="0" bIns="0" rtlCol="0" anchor="ctr"/>
+          <a:lstStyle/>
+          <a:p>
+            <a:pPr indent="0" marL="0">
+              <a:buNone/>
+            </a:pPr>
+            <a:r>
+              <a:rPr lang="en-US" sz="1200" dirty="0">
+                <a:solidFill>
+                  <a:srgbClr val="141414"/>
+                </a:solidFill>
+                <a:latin typeface="Pretendard" pitchFamily="34" charset="0"/>
+                <a:ea typeface="Pretendard" pitchFamily="34" charset="-122"/>
+                <a:cs typeface="Pretendard" pitchFamily="34" charset="-120"/>
+              </a:rPr>
+              <a:t>위치 · 회전 · 크기</a:t>
+            </a:r>
+            <a:endParaRPr lang="en-US" sz="1200" dirty="0"/>
+          </a:p>
+        </p:txBody>
+      </p:sp>
+      <p:sp>
+        <p:nvSpPr>
+          <p:cNvPr id="14" name="Shape 12"/>
+          <p:cNvSpPr/>
+          <p:nvPr/>
+        </p:nvSpPr>
+        <p:spPr>
+          <a:xfrm>
+            <a:off x="758952" y="3163824"/>
+            <a:ext cx="10673791" cy="0"/>
+          </a:xfrm>
+          <a:prstGeom prst="line">
+            <a:avLst/>
+          </a:prstGeom>
+          <a:noFill/>
+          <a:ln w="12700">
+            <a:solidFill>
+              <a:srgbClr val="F0F0F0"/>
+            </a:solidFill>
+            <a:prstDash val="solid"/>
+          </a:ln>
+        </p:spPr>
+      </p:sp>
+      <p:sp>
+        <p:nvSpPr>
+          <p:cNvPr id="15" name="Text 13"/>
+          <p:cNvSpPr txBox="1"/>
+          <p:nvPr/>
+        </p:nvSpPr>
+        <p:spPr>
+          <a:xfrm>
+            <a:off x="758952" y="3383280"/>
+            <a:ext cx="3749040" cy="420624"/>
+          </a:xfrm>
+          <a:prstGeom prst="rect">
+            <a:avLst/>
+          </a:prstGeom>
+          <a:noFill/>
+          <a:ln/>
+        </p:spPr>
+        <p:txBody>
+          <a:bodyPr wrap="square" lIns="0" tIns="0" rIns="0" bIns="0" rtlCol="0" anchor="ctr"/>
+          <a:lstStyle/>
+          <a:p>
+            <a:pPr indent="0" marL="0">
+              <a:buNone/>
+            </a:pPr>
+            <a:r>
+              <a:rPr lang="en-US" sz="1550" dirty="0">
+                <a:solidFill>
+                  <a:srgbClr val="141414"/>
+                </a:solidFill>
+                <a:latin typeface="Pretendard SemiBold" pitchFamily="34" charset="0"/>
+                <a:ea typeface="Pretendard SemiBold" pitchFamily="34" charset="-122"/>
+                <a:cs typeface="Pretendard SemiBold" pitchFamily="34" charset="-120"/>
+              </a:rPr>
+              <a:t>Sprite Renderer</a:t>
+            </a:r>
+            <a:endParaRPr lang="en-US" sz="1550" dirty="0"/>
+          </a:p>
+        </p:txBody>
+      </p:sp>
+      <p:sp>
+        <p:nvSpPr>
+          <p:cNvPr id="16" name="Text 14"/>
+          <p:cNvSpPr txBox="1"/>
+          <p:nvPr/>
+        </p:nvSpPr>
+        <p:spPr>
+          <a:xfrm>
+            <a:off x="4690872" y="3383280"/>
+            <a:ext cx="2926080" cy="420624"/>
+          </a:xfrm>
+          <a:prstGeom prst="rect">
+            <a:avLst/>
+          </a:prstGeom>
+          <a:noFill/>
+          <a:ln/>
+        </p:spPr>
+        <p:txBody>
+          <a:bodyPr wrap="square" lIns="0" tIns="0" rIns="0" bIns="0" rtlCol="0" anchor="ctr"/>
+          <a:lstStyle/>
+          <a:p>
+            <a:pPr indent="0" marL="0">
+              <a:buNone/>
+            </a:pPr>
+            <a:r>
+              <a:rPr lang="en-US" sz="1200" dirty="0">
+                <a:solidFill>
+                  <a:srgbClr val="ADADAD"/>
+                </a:solidFill>
+                <a:latin typeface="Pretendard" pitchFamily="34" charset="0"/>
+                <a:ea typeface="Pretendard" pitchFamily="34" charset="-122"/>
+                <a:cs typeface="Pretendard" pitchFamily="34" charset="-120"/>
+              </a:rPr>
+              <a:t>안 보인다</a:t>
+            </a:r>
+            <a:endParaRPr lang="en-US" sz="1200" dirty="0"/>
+          </a:p>
+        </p:txBody>
+      </p:sp>
+      <p:sp>
+        <p:nvSpPr>
+          <p:cNvPr id="17" name="Text 15"/>
+          <p:cNvSpPr txBox="1"/>
+          <p:nvPr/>
+        </p:nvSpPr>
+        <p:spPr>
+          <a:xfrm>
+            <a:off x="7799832" y="3383280"/>
+            <a:ext cx="3108960" cy="420624"/>
+          </a:xfrm>
+          <a:prstGeom prst="rect">
+            <a:avLst/>
+          </a:prstGeom>
+          <a:noFill/>
+          <a:ln/>
+        </p:spPr>
+        <p:txBody>
+          <a:bodyPr wrap="square" lIns="0" tIns="0" rIns="0" bIns="0" rtlCol="0" anchor="ctr"/>
+          <a:lstStyle/>
+          <a:p>
+            <a:pPr indent="0" marL="0">
+              <a:buNone/>
+            </a:pPr>
+            <a:r>
+              <a:rPr lang="en-US" sz="1200" dirty="0">
+                <a:solidFill>
+                  <a:srgbClr val="141414"/>
+                </a:solidFill>
+                <a:latin typeface="Pretendard" pitchFamily="34" charset="0"/>
+                <a:ea typeface="Pretendard" pitchFamily="34" charset="-122"/>
+                <a:cs typeface="Pretendard" pitchFamily="34" charset="-120"/>
+              </a:rPr>
+              <a:t>그림이 보인다</a:t>
+            </a:r>
+            <a:endParaRPr lang="en-US" sz="1200" dirty="0"/>
+          </a:p>
+        </p:txBody>
+      </p:sp>
+      <p:sp>
+        <p:nvSpPr>
+          <p:cNvPr id="18" name="Shape 16"/>
+          <p:cNvSpPr/>
+          <p:nvPr/>
+        </p:nvSpPr>
+        <p:spPr>
+          <a:xfrm>
+            <a:off x="758952" y="3968496"/>
+            <a:ext cx="10673791" cy="0"/>
+          </a:xfrm>
+          <a:prstGeom prst="line">
+            <a:avLst/>
+          </a:prstGeom>
+          <a:noFill/>
+          <a:ln w="12700">
+            <a:solidFill>
+              <a:srgbClr val="F0F0F0"/>
+            </a:solidFill>
+            <a:prstDash val="solid"/>
+          </a:ln>
+        </p:spPr>
+      </p:sp>
+      <p:sp>
+        <p:nvSpPr>
+          <p:cNvPr id="19" name="Text 17"/>
+          <p:cNvSpPr txBox="1"/>
+          <p:nvPr/>
+        </p:nvSpPr>
+        <p:spPr>
+          <a:xfrm>
+            <a:off x="758952" y="4187952"/>
+            <a:ext cx="3749040" cy="420624"/>
+          </a:xfrm>
+          <a:prstGeom prst="rect">
+            <a:avLst/>
+          </a:prstGeom>
+          <a:noFill/>
+          <a:ln/>
+        </p:spPr>
+        <p:txBody>
+          <a:bodyPr wrap="square" lIns="0" tIns="0" rIns="0" bIns="0" rtlCol="0" anchor="ctr"/>
+          <a:lstStyle/>
+          <a:p>
+            <a:pPr indent="0" marL="0">
+              <a:buNone/>
+            </a:pPr>
+            <a:r>
+              <a:rPr lang="en-US" sz="1550" dirty="0">
+                <a:solidFill>
+                  <a:srgbClr val="141414"/>
+                </a:solidFill>
+                <a:latin typeface="Pretendard SemiBold" pitchFamily="34" charset="0"/>
+                <a:ea typeface="Pretendard SemiBold" pitchFamily="34" charset="-122"/>
+                <a:cs typeface="Pretendard SemiBold" pitchFamily="34" charset="-120"/>
+              </a:rPr>
+              <a:t>Collider 2D</a:t>
+            </a:r>
+            <a:endParaRPr lang="en-US" sz="1550" dirty="0"/>
+          </a:p>
+        </p:txBody>
+      </p:sp>
+      <p:sp>
+        <p:nvSpPr>
+          <p:cNvPr id="20" name="Text 18"/>
+          <p:cNvSpPr txBox="1"/>
+          <p:nvPr/>
+        </p:nvSpPr>
+        <p:spPr>
+          <a:xfrm>
+            <a:off x="4690872" y="4187952"/>
+            <a:ext cx="2926080" cy="420624"/>
+          </a:xfrm>
+          <a:prstGeom prst="rect">
+            <a:avLst/>
+          </a:prstGeom>
+          <a:noFill/>
+          <a:ln/>
+        </p:spPr>
+        <p:txBody>
+          <a:bodyPr wrap="square" lIns="0" tIns="0" rIns="0" bIns="0" rtlCol="0" anchor="ctr"/>
+          <a:lstStyle/>
+          <a:p>
+            <a:pPr indent="0" marL="0">
+              <a:buNone/>
+            </a:pPr>
+            <a:r>
+              <a:rPr lang="en-US" sz="1200" dirty="0">
+                <a:solidFill>
+                  <a:srgbClr val="ADADAD"/>
+                </a:solidFill>
+                <a:latin typeface="Pretendard" pitchFamily="34" charset="0"/>
+                <a:ea typeface="Pretendard" pitchFamily="34" charset="-122"/>
+                <a:cs typeface="Pretendard" pitchFamily="34" charset="-120"/>
+              </a:rPr>
+              <a:t>통과한다</a:t>
+            </a:r>
+            <a:endParaRPr lang="en-US" sz="1200" dirty="0"/>
+          </a:p>
+        </p:txBody>
+      </p:sp>
+      <p:sp>
+        <p:nvSpPr>
+          <p:cNvPr id="21" name="Text 19"/>
+          <p:cNvSpPr txBox="1"/>
+          <p:nvPr/>
+        </p:nvSpPr>
+        <p:spPr>
+          <a:xfrm>
+            <a:off x="7799832" y="4187952"/>
+            <a:ext cx="3108960" cy="420624"/>
+          </a:xfrm>
+          <a:prstGeom prst="rect">
+            <a:avLst/>
+          </a:prstGeom>
+          <a:noFill/>
+          <a:ln/>
+        </p:spPr>
+        <p:txBody>
+          <a:bodyPr wrap="square" lIns="0" tIns="0" rIns="0" bIns="0" rtlCol="0" anchor="ctr"/>
+          <a:lstStyle/>
+          <a:p>
+            <a:pPr indent="0" marL="0">
+              <a:buNone/>
+            </a:pPr>
+            <a:r>
+              <a:rPr lang="en-US" sz="1200" dirty="0">
+                <a:solidFill>
+                  <a:srgbClr val="141414"/>
+                </a:solidFill>
+                <a:latin typeface="Pretendard" pitchFamily="34" charset="0"/>
+                <a:ea typeface="Pretendard" pitchFamily="34" charset="-122"/>
+                <a:cs typeface="Pretendard" pitchFamily="34" charset="-120"/>
+              </a:rPr>
+              <a:t>부딪힌다</a:t>
+            </a:r>
+            <a:endParaRPr lang="en-US" sz="1200" dirty="0"/>
+          </a:p>
+        </p:txBody>
+      </p:sp>
+      <p:sp>
+        <p:nvSpPr>
+          <p:cNvPr id="22" name="Shape 20"/>
+          <p:cNvSpPr/>
+          <p:nvPr/>
+        </p:nvSpPr>
+        <p:spPr>
+          <a:xfrm>
+            <a:off x="758952" y="4773168"/>
+            <a:ext cx="10673791" cy="0"/>
+          </a:xfrm>
+          <a:prstGeom prst="line">
+            <a:avLst/>
+          </a:prstGeom>
+          <a:noFill/>
+          <a:ln w="12700">
+            <a:solidFill>
+              <a:srgbClr val="F0F0F0"/>
+            </a:solidFill>
+            <a:prstDash val="solid"/>
+          </a:ln>
+        </p:spPr>
+      </p:sp>
+      <p:sp>
+        <p:nvSpPr>
+          <p:cNvPr id="23" name="Text 21"/>
+          <p:cNvSpPr txBox="1"/>
+          <p:nvPr/>
+        </p:nvSpPr>
+        <p:spPr>
+          <a:xfrm>
+            <a:off x="758952" y="4992624"/>
+            <a:ext cx="3749040" cy="420624"/>
+          </a:xfrm>
+          <a:prstGeom prst="rect">
+            <a:avLst/>
+          </a:prstGeom>
+          <a:noFill/>
+          <a:ln/>
+        </p:spPr>
+        <p:txBody>
+          <a:bodyPr wrap="square" lIns="0" tIns="0" rIns="0" bIns="0" rtlCol="0" anchor="ctr"/>
+          <a:lstStyle/>
+          <a:p>
+            <a:pPr indent="0" marL="0">
+              <a:buNone/>
+            </a:pPr>
+            <a:r>
+              <a:rPr lang="en-US" sz="1550" dirty="0">
+                <a:solidFill>
+                  <a:srgbClr val="141414"/>
+                </a:solidFill>
+                <a:latin typeface="Pretendard SemiBold" pitchFamily="34" charset="0"/>
+                <a:ea typeface="Pretendard SemiBold" pitchFamily="34" charset="-122"/>
+                <a:cs typeface="Pretendard SemiBold" pitchFamily="34" charset="-120"/>
+              </a:rPr>
+              <a:t>Rigidbody 2D</a:t>
+            </a:r>
+            <a:endParaRPr lang="en-US" sz="1550" dirty="0"/>
+          </a:p>
+        </p:txBody>
+      </p:sp>
+      <p:sp>
+        <p:nvSpPr>
+          <p:cNvPr id="24" name="Text 22"/>
+          <p:cNvSpPr txBox="1"/>
+          <p:nvPr/>
+        </p:nvSpPr>
+        <p:spPr>
+          <a:xfrm>
+            <a:off x="4690872" y="4992624"/>
+            <a:ext cx="2926080" cy="420624"/>
+          </a:xfrm>
+          <a:prstGeom prst="rect">
+            <a:avLst/>
+          </a:prstGeom>
+          <a:noFill/>
+          <a:ln/>
+        </p:spPr>
+        <p:txBody>
+          <a:bodyPr wrap="square" lIns="0" tIns="0" rIns="0" bIns="0" rtlCol="0" anchor="ctr"/>
+          <a:lstStyle/>
+          <a:p>
+            <a:pPr indent="0" marL="0">
+              <a:buNone/>
+            </a:pPr>
+            <a:r>
+              <a:rPr lang="en-US" sz="1200" dirty="0">
+                <a:solidFill>
+                  <a:srgbClr val="ADADAD"/>
+                </a:solidFill>
+                <a:latin typeface="Pretendard" pitchFamily="34" charset="0"/>
+                <a:ea typeface="Pretendard" pitchFamily="34" charset="-122"/>
+                <a:cs typeface="Pretendard" pitchFamily="34" charset="-120"/>
+              </a:rPr>
+              <a:t>가만히 있는다</a:t>
+            </a:r>
+            <a:endParaRPr lang="en-US" sz="1200" dirty="0"/>
+          </a:p>
+        </p:txBody>
+      </p:sp>
+      <p:sp>
+        <p:nvSpPr>
+          <p:cNvPr id="25" name="Text 23"/>
+          <p:cNvSpPr txBox="1"/>
+          <p:nvPr/>
+        </p:nvSpPr>
+        <p:spPr>
+          <a:xfrm>
+            <a:off x="7799832" y="4992624"/>
+            <a:ext cx="3108960" cy="420624"/>
+          </a:xfrm>
+          <a:prstGeom prst="rect">
+            <a:avLst/>
+          </a:prstGeom>
+          <a:noFill/>
+          <a:ln/>
+        </p:spPr>
+        <p:txBody>
+          <a:bodyPr wrap="square" lIns="0" tIns="0" rIns="0" bIns="0" rtlCol="0" anchor="ctr"/>
+          <a:lstStyle/>
+          <a:p>
+            <a:pPr indent="0" marL="0">
+              <a:buNone/>
+            </a:pPr>
+            <a:r>
+              <a:rPr lang="en-US" sz="1200" dirty="0">
+                <a:solidFill>
+                  <a:srgbClr val="141414"/>
+                </a:solidFill>
+                <a:latin typeface="Pretendard" pitchFamily="34" charset="0"/>
+                <a:ea typeface="Pretendard" pitchFamily="34" charset="-122"/>
+                <a:cs typeface="Pretendard" pitchFamily="34" charset="-120"/>
+              </a:rPr>
+              <a:t>중력을 받는다</a:t>
+            </a:r>
+            <a:endParaRPr lang="en-US" sz="1200" dirty="0"/>
+          </a:p>
+        </p:txBody>
+      </p:sp>
+      <p:sp>
+        <p:nvSpPr>
+          <p:cNvPr id="26" name="Shape 24"/>
+          <p:cNvSpPr/>
+          <p:nvPr/>
+        </p:nvSpPr>
+        <p:spPr>
+          <a:xfrm>
+            <a:off x="758952" y="5577840"/>
+            <a:ext cx="10673791" cy="0"/>
+          </a:xfrm>
+          <a:prstGeom prst="line">
+            <a:avLst/>
+          </a:prstGeom>
+          <a:noFill/>
+          <a:ln w="12700">
+            <a:solidFill>
+              <a:srgbClr val="F0F0F0"/>
+            </a:solidFill>
+            <a:prstDash val="solid"/>
+          </a:ln>
+        </p:spPr>
+      </p:sp>
+      <p:sp>
+        <p:nvSpPr>
+          <p:cNvPr id="27" name="Text 25"/>
+          <p:cNvSpPr txBox="1"/>
+          <p:nvPr/>
+        </p:nvSpPr>
+        <p:spPr>
+          <a:xfrm>
+            <a:off x="758952" y="5806440"/>
+            <a:ext cx="8229600" cy="402336"/>
+          </a:xfrm>
+          <a:prstGeom prst="rect">
+            <a:avLst/>
+          </a:prstGeom>
+          <a:noFill/>
+          <a:ln/>
+        </p:spPr>
+        <p:txBody>
+          <a:bodyPr wrap="square" lIns="0" tIns="0" rIns="0" bIns="0" rtlCol="0" anchor="ctr"/>
+          <a:lstStyle/>
+          <a:p>
+            <a:pPr indent="0" marL="0">
+              <a:buNone/>
+            </a:pPr>
+            <a:r>
+              <a:rPr lang="en-US" sz="1900" dirty="0">
+                <a:solidFill>
+                  <a:srgbClr val="141414"/>
+                </a:solidFill>
+                <a:latin typeface="Pretendard SemiBold" pitchFamily="34" charset="0"/>
+                <a:ea typeface="Pretendard SemiBold" pitchFamily="34" charset="-122"/>
+                <a:cs typeface="Pretendard SemiBold" pitchFamily="34" charset="-120"/>
+              </a:rPr>
+              <a:t>벽과 떨어지는 상자의 차이는 부품 하나다.</a:t>
+            </a:r>
+            <a:endParaRPr lang="en-US" sz="1900" dirty="0"/>
           </a:p>
         </p:txBody>
       </p:sp>
@@ -3218,7 +3478,7 @@
                 <a:ea typeface="Pretendard SemiBold" pitchFamily="34" charset="-122"/>
                 <a:cs typeface="Pretendard SemiBold" pitchFamily="34" charset="-120"/>
               </a:rPr>
-              <a:t>035</a:t>
+              <a:t>034</a:t>
             </a:r>
             <a:endParaRPr lang="en-US" sz="950" dirty="0"/>
           </a:p>
@@ -3257,7 +3517,7 @@
                 <a:ea typeface="Pretendard SemiBold" pitchFamily="34" charset="-122"/>
                 <a:cs typeface="Pretendard SemiBold" pitchFamily="34" charset="-120"/>
               </a:rPr>
-              <a:t>막혔을 때 확인 순서.</a:t>
+              <a:t>실습 — 부품 조합 네 가지.</a:t>
             </a:r>
             <a:endParaRPr lang="en-US" sz="2600" dirty="0"/>
           </a:p>
@@ -3296,7 +3556,7 @@
                 <a:ea typeface="Pretendard Light" pitchFamily="34" charset="-122"/>
                 <a:cs typeface="Pretendard Light" pitchFamily="34" charset="-120"/>
               </a:rPr>
-              <a:t>오늘의 진짜 수업 — 새 문법은 하나도 안 나간다.</a:t>
+              <a:t>전부 Create Empty로 만든다.</a:t>
             </a:r>
             <a:endParaRPr lang="en-US" sz="1500" dirty="0"/>
           </a:p>
@@ -3310,8 +3570,8 @@
         </p:nvSpPr>
         <p:spPr>
           <a:xfrm>
-            <a:off x="758952" y="2011680"/>
-            <a:ext cx="10673791" cy="0"/>
+            <a:off x="758952" y="2148840"/>
+            <a:ext cx="4937760" cy="0"/>
           </a:xfrm>
           <a:prstGeom prst="line">
             <a:avLst/>
@@ -3333,8 +3593,47 @@
         </p:nvSpPr>
         <p:spPr>
           <a:xfrm>
-            <a:off x="758952" y="2212848"/>
-            <a:ext cx="457200" cy="420624"/>
+            <a:off x="758952" y="2331720"/>
+            <a:ext cx="2194560" cy="384048"/>
+          </a:xfrm>
+          <a:prstGeom prst="rect">
+            <a:avLst/>
+          </a:prstGeom>
+          <a:noFill/>
+          <a:ln/>
+        </p:spPr>
+        <p:txBody>
+          <a:bodyPr wrap="square" lIns="0" tIns="0" rIns="0" bIns="0" rtlCol="0" anchor="ctr"/>
+          <a:lstStyle/>
+          <a:p>
+            <a:pPr indent="0" marL="0">
+              <a:buNone/>
+            </a:pPr>
+            <a:r>
+              <a:rPr lang="en-US" sz="1200" dirty="0">
+                <a:solidFill>
+                  <a:srgbClr val="141414"/>
+                </a:solidFill>
+                <a:latin typeface="Pretendard Medium" pitchFamily="34" charset="0"/>
+                <a:ea typeface="Pretendard Medium" pitchFamily="34" charset="-122"/>
+                <a:cs typeface="Pretendard Medium" pitchFamily="34" charset="-120"/>
+              </a:rPr>
+              <a:t>Invisible</a:t>
+            </a:r>
+            <a:endParaRPr lang="en-US" sz="1200" dirty="0"/>
+          </a:p>
+        </p:txBody>
+      </p:sp>
+      <p:sp>
+        <p:nvSpPr>
+          <p:cNvPr id="8" name="Text 6"/>
+          <p:cNvSpPr txBox="1"/>
+          <p:nvPr/>
+        </p:nvSpPr>
+        <p:spPr>
+          <a:xfrm>
+            <a:off x="3044952" y="2331720"/>
+            <a:ext cx="2651760" cy="384048"/>
           </a:xfrm>
           <a:prstGeom prst="rect">
             <a:avLst/>
@@ -3352,13 +3651,13 @@
             <a:r>
               <a:rPr lang="en-US" sz="1100" dirty="0">
                 <a:solidFill>
-                  <a:srgbClr val="ADADAD"/>
+                  <a:srgbClr val="707070"/>
                 </a:solidFill>
                 <a:latin typeface="Pretendard" pitchFamily="34" charset="0"/>
                 <a:ea typeface="Pretendard" pitchFamily="34" charset="-122"/>
                 <a:cs typeface="Pretendard" pitchFamily="34" charset="-120"/>
               </a:rPr>
-              <a:t>1</a:t>
+              <a:t>Transform만</a:t>
             </a:r>
             <a:endParaRPr lang="en-US" sz="1100" dirty="0"/>
           </a:p>
@@ -3366,92 +3665,14 @@
       </p:sp>
       <p:sp>
         <p:nvSpPr>
-          <p:cNvPr id="8" name="Text 6"/>
-          <p:cNvSpPr txBox="1"/>
-          <p:nvPr/>
-        </p:nvSpPr>
-        <p:spPr>
-          <a:xfrm>
-            <a:off x="1261872" y="2212848"/>
-            <a:ext cx="4754880" cy="420624"/>
-          </a:xfrm>
-          <a:prstGeom prst="rect">
-            <a:avLst/>
-          </a:prstGeom>
-          <a:noFill/>
-          <a:ln/>
-        </p:spPr>
-        <p:txBody>
-          <a:bodyPr wrap="square" lIns="0" tIns="0" rIns="0" bIns="0" rtlCol="0" anchor="ctr"/>
-          <a:lstStyle/>
-          <a:p>
-            <a:pPr indent="0" marL="0">
-              <a:buNone/>
-            </a:pPr>
-            <a:r>
-              <a:rPr lang="en-US" sz="1550" dirty="0">
-                <a:solidFill>
-                  <a:srgbClr val="141414"/>
-                </a:solidFill>
-                <a:latin typeface="Pretendard SemiBold" pitchFamily="34" charset="0"/>
-                <a:ea typeface="Pretendard SemiBold" pitchFamily="34" charset="-122"/>
-                <a:cs typeface="Pretendard SemiBold" pitchFamily="34" charset="-120"/>
-              </a:rPr>
-              <a:t>물체가 화면 안에 있나</a:t>
-            </a:r>
-            <a:endParaRPr lang="en-US" sz="1550" dirty="0"/>
-          </a:p>
-        </p:txBody>
-      </p:sp>
-      <p:sp>
-        <p:nvSpPr>
-          <p:cNvPr id="9" name="Text 7"/>
-          <p:cNvSpPr txBox="1"/>
-          <p:nvPr/>
-        </p:nvSpPr>
-        <p:spPr>
-          <a:xfrm>
-            <a:off x="6245352" y="2212848"/>
-            <a:ext cx="5187391" cy="420624"/>
-          </a:xfrm>
-          <a:prstGeom prst="rect">
-            <a:avLst/>
-          </a:prstGeom>
-          <a:noFill/>
-          <a:ln/>
-        </p:spPr>
-        <p:txBody>
-          <a:bodyPr wrap="square" lIns="0" tIns="0" rIns="0" bIns="0" rtlCol="0" anchor="ctr"/>
-          <a:lstStyle/>
-          <a:p>
-            <a:pPr indent="0" marL="0">
-              <a:buNone/>
-            </a:pPr>
-            <a:r>
-              <a:rPr lang="en-US" sz="1200" dirty="0">
-                <a:solidFill>
-                  <a:srgbClr val="707070"/>
-                </a:solidFill>
-                <a:latin typeface="Pretendard" pitchFamily="34" charset="0"/>
-                <a:ea typeface="Pretendard" pitchFamily="34" charset="-122"/>
-                <a:cs typeface="Pretendard" pitchFamily="34" charset="-120"/>
-              </a:rPr>
-              <a:t>Hierarchy 클릭 → F</a:t>
-            </a:r>
-            <a:endParaRPr lang="en-US" sz="1200" dirty="0"/>
-          </a:p>
-        </p:txBody>
-      </p:sp>
-      <p:sp>
-        <p:nvSpPr>
-          <p:cNvPr id="10" name="Shape 8"/>
+          <p:cNvPr id="9" name="Shape 7"/>
           <p:cNvSpPr/>
           <p:nvPr/>
         </p:nvSpPr>
         <p:spPr>
           <a:xfrm>
-            <a:off x="758952" y="2798064"/>
-            <a:ext cx="10673791" cy="0"/>
+            <a:off x="758952" y="2843784"/>
+            <a:ext cx="4937760" cy="0"/>
           </a:xfrm>
           <a:prstGeom prst="line">
             <a:avLst/>
@@ -3467,14 +3688,53 @@
       </p:sp>
       <p:sp>
         <p:nvSpPr>
+          <p:cNvPr id="10" name="Text 8"/>
+          <p:cNvSpPr txBox="1"/>
+          <p:nvPr/>
+        </p:nvSpPr>
+        <p:spPr>
+          <a:xfrm>
+            <a:off x="758952" y="2990088"/>
+            <a:ext cx="2194560" cy="384048"/>
+          </a:xfrm>
+          <a:prstGeom prst="rect">
+            <a:avLst/>
+          </a:prstGeom>
+          <a:noFill/>
+          <a:ln/>
+        </p:spPr>
+        <p:txBody>
+          <a:bodyPr wrap="square" lIns="0" tIns="0" rIns="0" bIns="0" rtlCol="0" anchor="ctr"/>
+          <a:lstStyle/>
+          <a:p>
+            <a:pPr indent="0" marL="0">
+              <a:buNone/>
+            </a:pPr>
+            <a:r>
+              <a:rPr lang="en-US" sz="1200" dirty="0">
+                <a:solidFill>
+                  <a:srgbClr val="141414"/>
+                </a:solidFill>
+                <a:latin typeface="Pretendard Medium" pitchFamily="34" charset="0"/>
+                <a:ea typeface="Pretendard Medium" pitchFamily="34" charset="-122"/>
+                <a:cs typeface="Pretendard Medium" pitchFamily="34" charset="-120"/>
+              </a:rPr>
+              <a:t>Decoration</a:t>
+            </a:r>
+            <a:endParaRPr lang="en-US" sz="1200" dirty="0"/>
+          </a:p>
+        </p:txBody>
+      </p:sp>
+      <p:sp>
+        <p:nvSpPr>
           <p:cNvPr id="11" name="Text 9"/>
           <p:cNvSpPr txBox="1"/>
           <p:nvPr/>
         </p:nvSpPr>
         <p:spPr>
           <a:xfrm>
-            <a:off x="758952" y="2980944"/>
-            <a:ext cx="457200" cy="420624"/>
+            <a:off x="3044952" y="2990088"/>
+            <a:ext cx="2651760" cy="384048"/>
           </a:xfrm>
           <a:prstGeom prst="rect">
             <a:avLst/>
@@ -3492,13 +3752,13 @@
             <a:r>
               <a:rPr lang="en-US" sz="1100" dirty="0">
                 <a:solidFill>
-                  <a:srgbClr val="ADADAD"/>
+                  <a:srgbClr val="707070"/>
                 </a:solidFill>
                 <a:latin typeface="Pretendard" pitchFamily="34" charset="0"/>
                 <a:ea typeface="Pretendard" pitchFamily="34" charset="-122"/>
                 <a:cs typeface="Pretendard" pitchFamily="34" charset="-120"/>
               </a:rPr>
-              <a:t>2</a:t>
+              <a:t>+ Sprite Renderer</a:t>
             </a:r>
             <a:endParaRPr lang="en-US" sz="1100" dirty="0"/>
           </a:p>
@@ -3506,92 +3766,14 @@
       </p:sp>
       <p:sp>
         <p:nvSpPr>
-          <p:cNvPr id="12" name="Text 10"/>
-          <p:cNvSpPr txBox="1"/>
-          <p:nvPr/>
-        </p:nvSpPr>
-        <p:spPr>
-          <a:xfrm>
-            <a:off x="1261872" y="2980944"/>
-            <a:ext cx="4754880" cy="420624"/>
-          </a:xfrm>
-          <a:prstGeom prst="rect">
-            <a:avLst/>
-          </a:prstGeom>
-          <a:noFill/>
-          <a:ln/>
-        </p:spPr>
-        <p:txBody>
-          <a:bodyPr wrap="square" lIns="0" tIns="0" rIns="0" bIns="0" rtlCol="0" anchor="ctr"/>
-          <a:lstStyle/>
-          <a:p>
-            <a:pPr indent="0" marL="0">
-              <a:buNone/>
-            </a:pPr>
-            <a:r>
-              <a:rPr lang="en-US" sz="1550" dirty="0">
-                <a:solidFill>
-                  <a:srgbClr val="141414"/>
-                </a:solidFill>
-                <a:latin typeface="Pretendard SemiBold" pitchFamily="34" charset="0"/>
-                <a:ea typeface="Pretendard SemiBold" pitchFamily="34" charset="-122"/>
-                <a:cs typeface="Pretendard SemiBold" pitchFamily="34" charset="-120"/>
-              </a:rPr>
-              <a:t>Inspector 값이 이상하지 않나</a:t>
-            </a:r>
-            <a:endParaRPr lang="en-US" sz="1550" dirty="0"/>
-          </a:p>
-        </p:txBody>
-      </p:sp>
-      <p:sp>
-        <p:nvSpPr>
-          <p:cNvPr id="13" name="Text 11"/>
-          <p:cNvSpPr txBox="1"/>
-          <p:nvPr/>
-        </p:nvSpPr>
-        <p:spPr>
-          <a:xfrm>
-            <a:off x="6245352" y="2980944"/>
-            <a:ext cx="5187391" cy="420624"/>
-          </a:xfrm>
-          <a:prstGeom prst="rect">
-            <a:avLst/>
-          </a:prstGeom>
-          <a:noFill/>
-          <a:ln/>
-        </p:spPr>
-        <p:txBody>
-          <a:bodyPr wrap="square" lIns="0" tIns="0" rIns="0" bIns="0" rtlCol="0" anchor="ctr"/>
-          <a:lstStyle/>
-          <a:p>
-            <a:pPr indent="0" marL="0">
-              <a:buNone/>
-            </a:pPr>
-            <a:r>
-              <a:rPr lang="en-US" sz="1200" dirty="0">
-                <a:solidFill>
-                  <a:srgbClr val="707070"/>
-                </a:solidFill>
-                <a:latin typeface="Pretendard" pitchFamily="34" charset="0"/>
-                <a:ea typeface="Pretendard" pitchFamily="34" charset="-122"/>
-                <a:cs typeface="Pretendard" pitchFamily="34" charset="-120"/>
-              </a:rPr>
-              <a:t>Scale 0 / Rotation X·Y / Position Z</a:t>
-            </a:r>
-            <a:endParaRPr lang="en-US" sz="1200" dirty="0"/>
-          </a:p>
-        </p:txBody>
-      </p:sp>
-      <p:sp>
-        <p:nvSpPr>
-          <p:cNvPr id="14" name="Shape 12"/>
+          <p:cNvPr id="12" name="Shape 10"/>
           <p:cNvSpPr/>
           <p:nvPr/>
         </p:nvSpPr>
         <p:spPr>
           <a:xfrm>
-            <a:off x="758952" y="3566160"/>
-            <a:ext cx="10673791" cy="0"/>
+            <a:off x="758952" y="3502152"/>
+            <a:ext cx="4937760" cy="0"/>
           </a:xfrm>
           <a:prstGeom prst="line">
             <a:avLst/>
@@ -3607,14 +3789,53 @@
       </p:sp>
       <p:sp>
         <p:nvSpPr>
-          <p:cNvPr id="15" name="Text 13"/>
-          <p:cNvSpPr txBox="1"/>
-          <p:nvPr/>
-        </p:nvSpPr>
-        <p:spPr>
-          <a:xfrm>
-            <a:off x="758952" y="3749040"/>
-            <a:ext cx="457200" cy="420624"/>
+          <p:cNvPr id="13" name="Text 11"/>
+          <p:cNvSpPr txBox="1"/>
+          <p:nvPr/>
+        </p:nvSpPr>
+        <p:spPr>
+          <a:xfrm>
+            <a:off x="758952" y="3648456"/>
+            <a:ext cx="2194560" cy="384048"/>
+          </a:xfrm>
+          <a:prstGeom prst="rect">
+            <a:avLst/>
+          </a:prstGeom>
+          <a:noFill/>
+          <a:ln/>
+        </p:spPr>
+        <p:txBody>
+          <a:bodyPr wrap="square" lIns="0" tIns="0" rIns="0" bIns="0" rtlCol="0" anchor="ctr"/>
+          <a:lstStyle/>
+          <a:p>
+            <a:pPr indent="0" marL="0">
+              <a:buNone/>
+            </a:pPr>
+            <a:r>
+              <a:rPr lang="en-US" sz="1200" dirty="0">
+                <a:solidFill>
+                  <a:srgbClr val="141414"/>
+                </a:solidFill>
+                <a:latin typeface="Pretendard Medium" pitchFamily="34" charset="0"/>
+                <a:ea typeface="Pretendard Medium" pitchFamily="34" charset="-122"/>
+                <a:cs typeface="Pretendard Medium" pitchFamily="34" charset="-120"/>
+              </a:rPr>
+              <a:t>Wall</a:t>
+            </a:r>
+            <a:endParaRPr lang="en-US" sz="1200" dirty="0"/>
+          </a:p>
+        </p:txBody>
+      </p:sp>
+      <p:sp>
+        <p:nvSpPr>
+          <p:cNvPr id="14" name="Text 12"/>
+          <p:cNvSpPr txBox="1"/>
+          <p:nvPr/>
+        </p:nvSpPr>
+        <p:spPr>
+          <a:xfrm>
+            <a:off x="3044952" y="3648456"/>
+            <a:ext cx="2651760" cy="384048"/>
           </a:xfrm>
           <a:prstGeom prst="rect">
             <a:avLst/>
@@ -3632,13 +3853,13 @@
             <a:r>
               <a:rPr lang="en-US" sz="1100" dirty="0">
                 <a:solidFill>
-                  <a:srgbClr val="ADADAD"/>
+                  <a:srgbClr val="707070"/>
                 </a:solidFill>
                 <a:latin typeface="Pretendard" pitchFamily="34" charset="0"/>
                 <a:ea typeface="Pretendard" pitchFamily="34" charset="-122"/>
                 <a:cs typeface="Pretendard" pitchFamily="34" charset="-120"/>
               </a:rPr>
-              <a:t>3</a:t>
+              <a:t>+ Collider 2D</a:t>
             </a:r>
             <a:endParaRPr lang="en-US" sz="1100" dirty="0"/>
           </a:p>
@@ -3646,92 +3867,14 @@
       </p:sp>
       <p:sp>
         <p:nvSpPr>
-          <p:cNvPr id="16" name="Text 14"/>
-          <p:cNvSpPr txBox="1"/>
-          <p:nvPr/>
-        </p:nvSpPr>
-        <p:spPr>
-          <a:xfrm>
-            <a:off x="1261872" y="3749040"/>
-            <a:ext cx="4754880" cy="420624"/>
-          </a:xfrm>
-          <a:prstGeom prst="rect">
-            <a:avLst/>
-          </a:prstGeom>
-          <a:noFill/>
-          <a:ln/>
-        </p:spPr>
-        <p:txBody>
-          <a:bodyPr wrap="square" lIns="0" tIns="0" rIns="0" bIns="0" rtlCol="0" anchor="ctr"/>
-          <a:lstStyle/>
-          <a:p>
-            <a:pPr indent="0" marL="0">
-              <a:buNone/>
-            </a:pPr>
-            <a:r>
-              <a:rPr lang="en-US" sz="1550" dirty="0">
-                <a:solidFill>
-                  <a:srgbClr val="141414"/>
-                </a:solidFill>
-                <a:latin typeface="Pretendard SemiBold" pitchFamily="34" charset="0"/>
-                <a:ea typeface="Pretendard SemiBold" pitchFamily="34" charset="-122"/>
-                <a:cs typeface="Pretendard SemiBold" pitchFamily="34" charset="-120"/>
-              </a:rPr>
-              <a:t>부품이 다 붙어 있나</a:t>
-            </a:r>
-            <a:endParaRPr lang="en-US" sz="1550" dirty="0"/>
-          </a:p>
-        </p:txBody>
-      </p:sp>
-      <p:sp>
-        <p:nvSpPr>
-          <p:cNvPr id="17" name="Text 15"/>
-          <p:cNvSpPr txBox="1"/>
-          <p:nvPr/>
-        </p:nvSpPr>
-        <p:spPr>
-          <a:xfrm>
-            <a:off x="6245352" y="3749040"/>
-            <a:ext cx="5187391" cy="420624"/>
-          </a:xfrm>
-          <a:prstGeom prst="rect">
-            <a:avLst/>
-          </a:prstGeom>
-          <a:noFill/>
-          <a:ln/>
-        </p:spPr>
-        <p:txBody>
-          <a:bodyPr wrap="square" lIns="0" tIns="0" rIns="0" bIns="0" rtlCol="0" anchor="ctr"/>
-          <a:lstStyle/>
-          <a:p>
-            <a:pPr indent="0" marL="0">
-              <a:buNone/>
-            </a:pPr>
-            <a:r>
-              <a:rPr lang="en-US" sz="1200" dirty="0">
-                <a:solidFill>
-                  <a:srgbClr val="707070"/>
-                </a:solidFill>
-                <a:latin typeface="Pretendard" pitchFamily="34" charset="0"/>
-                <a:ea typeface="Pretendard" pitchFamily="34" charset="-122"/>
-                <a:cs typeface="Pretendard" pitchFamily="34" charset="-120"/>
-              </a:rPr>
-              <a:t>안 보이면 Sprite Renderer, 안 부딪히면 Collider</a:t>
-            </a:r>
-            <a:endParaRPr lang="en-US" sz="1200" dirty="0"/>
-          </a:p>
-        </p:txBody>
-      </p:sp>
-      <p:sp>
-        <p:nvSpPr>
-          <p:cNvPr id="18" name="Shape 16"/>
+          <p:cNvPr id="15" name="Shape 13"/>
           <p:cNvSpPr/>
           <p:nvPr/>
         </p:nvSpPr>
         <p:spPr>
           <a:xfrm>
-            <a:off x="758952" y="4334256"/>
-            <a:ext cx="10673791" cy="0"/>
+            <a:off x="758952" y="4160520"/>
+            <a:ext cx="4937760" cy="0"/>
           </a:xfrm>
           <a:prstGeom prst="line">
             <a:avLst/>
@@ -3747,14 +3890,53 @@
       </p:sp>
       <p:sp>
         <p:nvSpPr>
-          <p:cNvPr id="19" name="Text 17"/>
-          <p:cNvSpPr txBox="1"/>
-          <p:nvPr/>
-        </p:nvSpPr>
-        <p:spPr>
-          <a:xfrm>
-            <a:off x="758952" y="4517136"/>
-            <a:ext cx="457200" cy="420624"/>
+          <p:cNvPr id="16" name="Text 14"/>
+          <p:cNvSpPr txBox="1"/>
+          <p:nvPr/>
+        </p:nvSpPr>
+        <p:spPr>
+          <a:xfrm>
+            <a:off x="758952" y="4306824"/>
+            <a:ext cx="2194560" cy="384048"/>
+          </a:xfrm>
+          <a:prstGeom prst="rect">
+            <a:avLst/>
+          </a:prstGeom>
+          <a:noFill/>
+          <a:ln/>
+        </p:spPr>
+        <p:txBody>
+          <a:bodyPr wrap="square" lIns="0" tIns="0" rIns="0" bIns="0" rtlCol="0" anchor="ctr"/>
+          <a:lstStyle/>
+          <a:p>
+            <a:pPr indent="0" marL="0">
+              <a:buNone/>
+            </a:pPr>
+            <a:r>
+              <a:rPr lang="en-US" sz="1200" dirty="0">
+                <a:solidFill>
+                  <a:srgbClr val="141414"/>
+                </a:solidFill>
+                <a:latin typeface="Pretendard Medium" pitchFamily="34" charset="0"/>
+                <a:ea typeface="Pretendard Medium" pitchFamily="34" charset="-122"/>
+                <a:cs typeface="Pretendard Medium" pitchFamily="34" charset="-120"/>
+              </a:rPr>
+              <a:t>Falling</a:t>
+            </a:r>
+            <a:endParaRPr lang="en-US" sz="1200" dirty="0"/>
+          </a:p>
+        </p:txBody>
+      </p:sp>
+      <p:sp>
+        <p:nvSpPr>
+          <p:cNvPr id="17" name="Text 15"/>
+          <p:cNvSpPr txBox="1"/>
+          <p:nvPr/>
+        </p:nvSpPr>
+        <p:spPr>
+          <a:xfrm>
+            <a:off x="3044952" y="4306824"/>
+            <a:ext cx="2651760" cy="384048"/>
           </a:xfrm>
           <a:prstGeom prst="rect">
             <a:avLst/>
@@ -3772,13 +3954,13 @@
             <a:r>
               <a:rPr lang="en-US" sz="1100" dirty="0">
                 <a:solidFill>
-                  <a:srgbClr val="ADADAD"/>
+                  <a:srgbClr val="707070"/>
                 </a:solidFill>
                 <a:latin typeface="Pretendard" pitchFamily="34" charset="0"/>
                 <a:ea typeface="Pretendard" pitchFamily="34" charset="-122"/>
                 <a:cs typeface="Pretendard" pitchFamily="34" charset="-120"/>
               </a:rPr>
-              <a:t>4</a:t>
+              <a:t>+ Rigidbody 2D</a:t>
             </a:r>
             <a:endParaRPr lang="en-US" sz="1100" dirty="0"/>
           </a:p>
@@ -3786,92 +3968,14 @@
       </p:sp>
       <p:sp>
         <p:nvSpPr>
-          <p:cNvPr id="20" name="Text 18"/>
-          <p:cNvSpPr txBox="1"/>
-          <p:nvPr/>
-        </p:nvSpPr>
-        <p:spPr>
-          <a:xfrm>
-            <a:off x="1261872" y="4517136"/>
-            <a:ext cx="4754880" cy="420624"/>
-          </a:xfrm>
-          <a:prstGeom prst="rect">
-            <a:avLst/>
-          </a:prstGeom>
-          <a:noFill/>
-          <a:ln/>
-        </p:spPr>
-        <p:txBody>
-          <a:bodyPr wrap="square" lIns="0" tIns="0" rIns="0" bIns="0" rtlCol="0" anchor="ctr"/>
-          <a:lstStyle/>
-          <a:p>
-            <a:pPr indent="0" marL="0">
-              <a:buNone/>
-            </a:pPr>
-            <a:r>
-              <a:rPr lang="en-US" sz="1550" dirty="0">
-                <a:solidFill>
-                  <a:srgbClr val="141414"/>
-                </a:solidFill>
-                <a:latin typeface="Pretendard SemiBold" pitchFamily="34" charset="0"/>
-                <a:ea typeface="Pretendard SemiBold" pitchFamily="34" charset="-122"/>
-                <a:cs typeface="Pretendard SemiBold" pitchFamily="34" charset="-120"/>
-              </a:rPr>
-              <a:t>체크박스가 켜져 있나</a:t>
-            </a:r>
-            <a:endParaRPr lang="en-US" sz="1550" dirty="0"/>
-          </a:p>
-        </p:txBody>
-      </p:sp>
-      <p:sp>
-        <p:nvSpPr>
-          <p:cNvPr id="21" name="Text 19"/>
-          <p:cNvSpPr txBox="1"/>
-          <p:nvPr/>
-        </p:nvSpPr>
-        <p:spPr>
-          <a:xfrm>
-            <a:off x="6245352" y="4517136"/>
-            <a:ext cx="5187391" cy="420624"/>
-          </a:xfrm>
-          <a:prstGeom prst="rect">
-            <a:avLst/>
-          </a:prstGeom>
-          <a:noFill/>
-          <a:ln/>
-        </p:spPr>
-        <p:txBody>
-          <a:bodyPr wrap="square" lIns="0" tIns="0" rIns="0" bIns="0" rtlCol="0" anchor="ctr"/>
-          <a:lstStyle/>
-          <a:p>
-            <a:pPr indent="0" marL="0">
-              <a:buNone/>
-            </a:pPr>
-            <a:r>
-              <a:rPr lang="en-US" sz="1200" dirty="0">
-                <a:solidFill>
-                  <a:srgbClr val="707070"/>
-                </a:solidFill>
-                <a:latin typeface="Pretendard" pitchFamily="34" charset="0"/>
-                <a:ea typeface="Pretendard" pitchFamily="34" charset="-122"/>
-                <a:cs typeface="Pretendard" pitchFamily="34" charset="-120"/>
-              </a:rPr>
-              <a:t>오브젝트와 컴포넌트 둘 다</a:t>
-            </a:r>
-            <a:endParaRPr lang="en-US" sz="1200" dirty="0"/>
-          </a:p>
-        </p:txBody>
-      </p:sp>
-      <p:sp>
-        <p:nvSpPr>
-          <p:cNvPr id="22" name="Shape 20"/>
+          <p:cNvPr id="18" name="Shape 16"/>
           <p:cNvSpPr/>
           <p:nvPr/>
         </p:nvSpPr>
         <p:spPr>
           <a:xfrm>
-            <a:off x="758952" y="5102352"/>
-            <a:ext cx="10673791" cy="0"/>
+            <a:off x="758952" y="4818888"/>
+            <a:ext cx="4937760" cy="0"/>
           </a:xfrm>
           <a:prstGeom prst="line">
             <a:avLst/>
@@ -3887,30 +3991,159 @@
       </p:sp>
       <p:sp>
         <p:nvSpPr>
-          <p:cNvPr id="23" name="Text 21"/>
-          <p:cNvSpPr txBox="1"/>
-          <p:nvPr/>
-        </p:nvSpPr>
-        <p:spPr>
-          <a:xfrm>
-            <a:off x="758952" y="5285232"/>
-            <a:ext cx="457200" cy="420624"/>
-          </a:xfrm>
-          <a:prstGeom prst="rect">
-            <a:avLst/>
-          </a:prstGeom>
-          <a:noFill/>
-          <a:ln/>
-        </p:spPr>
-        <p:txBody>
-          <a:bodyPr wrap="square" lIns="0" tIns="0" rIns="0" bIns="0" rtlCol="0" anchor="ctr"/>
-          <a:lstStyle/>
-          <a:p>
-            <a:pPr indent="0" marL="0">
-              <a:buNone/>
-            </a:pPr>
-            <a:r>
-              <a:rPr lang="en-US" sz="1100" dirty="0">
+          <p:cNvPr id="19" name="Text 17"/>
+          <p:cNvSpPr txBox="1"/>
+          <p:nvPr/>
+        </p:nvSpPr>
+        <p:spPr>
+          <a:xfrm>
+            <a:off x="758952" y="5212080"/>
+            <a:ext cx="5120640" cy="384048"/>
+          </a:xfrm>
+          <a:prstGeom prst="rect">
+            <a:avLst/>
+          </a:prstGeom>
+          <a:noFill/>
+          <a:ln/>
+        </p:spPr>
+        <p:txBody>
+          <a:bodyPr wrap="square" lIns="0" tIns="0" rIns="0" bIns="0" rtlCol="0" anchor="ctr"/>
+          <a:lstStyle/>
+          <a:p>
+            <a:pPr indent="0" marL="0">
+              <a:buNone/>
+            </a:pPr>
+            <a:r>
+              <a:rPr lang="en-US" sz="1900" dirty="0">
+                <a:solidFill>
+                  <a:srgbClr val="141414"/>
+                </a:solidFill>
+                <a:latin typeface="Pretendard SemiBold" pitchFamily="34" charset="0"/>
+                <a:ea typeface="Pretendard SemiBold" pitchFamily="34" charset="-122"/>
+                <a:cs typeface="Pretendard SemiBold" pitchFamily="34" charset="-120"/>
+              </a:rPr>
+              <a:t>떨어지는 쪽에도 Collider가 있어야 부딪힌다.</a:t>
+            </a:r>
+            <a:endParaRPr lang="en-US" sz="1900" dirty="0"/>
+          </a:p>
+        </p:txBody>
+      </p:sp>
+      <p:sp>
+        <p:nvSpPr>
+          <p:cNvPr id="20" name="Text 18"/>
+          <p:cNvSpPr txBox="1"/>
+          <p:nvPr/>
+        </p:nvSpPr>
+        <p:spPr>
+          <a:xfrm>
+            <a:off x="758952" y="5687568"/>
+            <a:ext cx="5120640" cy="329184"/>
+          </a:xfrm>
+          <a:prstGeom prst="rect">
+            <a:avLst/>
+          </a:prstGeom>
+          <a:noFill/>
+          <a:ln/>
+        </p:spPr>
+        <p:txBody>
+          <a:bodyPr wrap="square" lIns="0" tIns="0" rIns="0" bIns="0" rtlCol="0" anchor="ctr"/>
+          <a:lstStyle/>
+          <a:p>
+            <a:pPr indent="0" marL="0">
+              <a:buNone/>
+            </a:pPr>
+            <a:r>
+              <a:rPr lang="en-US" sz="1200" dirty="0">
+                <a:solidFill>
+                  <a:srgbClr val="707070"/>
+                </a:solidFill>
+                <a:latin typeface="Pretendard Light" pitchFamily="34" charset="0"/>
+                <a:ea typeface="Pretendard Light" pitchFamily="34" charset="-122"/>
+                <a:cs typeface="Pretendard Light" pitchFamily="34" charset="-120"/>
+              </a:rPr>
+              <a:t>양쪽 다 필요하다. 한쪽만 있으면 그냥 통과한다.</a:t>
+            </a:r>
+            <a:endParaRPr lang="en-US" sz="1200" dirty="0"/>
+          </a:p>
+        </p:txBody>
+      </p:sp>
+      <p:sp>
+        <p:nvSpPr>
+          <p:cNvPr id="21" name="Shape 19"/>
+          <p:cNvSpPr/>
+          <p:nvPr/>
+        </p:nvSpPr>
+        <p:spPr>
+          <a:xfrm>
+            <a:off x="6263640" y="1965960"/>
+            <a:ext cx="5166360" cy="3858768"/>
+          </a:xfrm>
+          <a:prstGeom prst="roundRect">
+            <a:avLst>
+              <a:gd name="adj" fmla="val 5924"/>
+            </a:avLst>
+          </a:prstGeom>
+          <a:solidFill>
+            <a:srgbClr val="F3F3F3"/>
+          </a:solidFill>
+          <a:ln w="12700">
+            <a:solidFill>
+              <a:srgbClr val="333333"/>
+            </a:solidFill>
+            <a:prstDash val="solid"/>
+          </a:ln>
+        </p:spPr>
+      </p:sp>
+      <p:pic>
+        <p:nvPicPr>
+          <p:cNvPr id="22" name="Image 0" descr="C:\Users\user\AppData\Local\Temp\claude\C--Users-user-Github-WaveBreaker\fd97bec6-cef8-4bf5-a447-9a0fa572b36e\scratchpad\shots2\final\034_Component.png">    </p:cNvPr>
+          <p:cNvPicPr>
+            <a:picLocks noChangeAspect="1"/>
+          </p:cNvPicPr>
+          <p:nvPr/>
+        </p:nvPicPr>
+        <p:blipFill>
+          <a:blip r:embed="rId1"/>
+          <a:stretch>
+            <a:fillRect/>
+          </a:stretch>
+        </p:blipFill>
+        <p:spPr>
+          <a:xfrm>
+            <a:off x="6464808" y="2167128"/>
+            <a:ext cx="4764024" cy="2980944"/>
+          </a:xfrm>
+          <a:prstGeom prst="rect">
+            <a:avLst/>
+          </a:prstGeom>
+        </p:spPr>
+      </p:pic>
+      <p:sp>
+        <p:nvSpPr>
+          <p:cNvPr id="23" name="Text 20"/>
+          <p:cNvSpPr txBox="1"/>
+          <p:nvPr/>
+        </p:nvSpPr>
+        <p:spPr>
+          <a:xfrm>
+            <a:off x="6464808" y="5221224"/>
+            <a:ext cx="4764024" cy="310896"/>
+          </a:xfrm>
+          <a:prstGeom prst="rect">
+            <a:avLst/>
+          </a:prstGeom>
+          <a:noFill/>
+          <a:ln/>
+        </p:spPr>
+        <p:txBody>
+          <a:bodyPr wrap="square" lIns="0" tIns="0" rIns="0" bIns="0" rtlCol="0" anchor="ctr"/>
+          <a:lstStyle/>
+          <a:p>
+            <a:pPr algn="ctr" indent="0" marL="0">
+              <a:buNone/>
+            </a:pPr>
+            <a:r>
+              <a:rPr lang="en-US" sz="950" dirty="0">
                 <a:solidFill>
                   <a:srgbClr val="ADADAD"/>
                 </a:solidFill>
@@ -3918,149 +4151,9 @@
                 <a:ea typeface="Pretendard" pitchFamily="34" charset="-122"/>
                 <a:cs typeface="Pretendard" pitchFamily="34" charset="-120"/>
               </a:rPr>
-              <a:t>5</a:t>
-            </a:r>
-            <a:endParaRPr lang="en-US" sz="1100" dirty="0"/>
-          </a:p>
-        </p:txBody>
-      </p:sp>
-      <p:sp>
-        <p:nvSpPr>
-          <p:cNvPr id="24" name="Text 22"/>
-          <p:cNvSpPr txBox="1"/>
-          <p:nvPr/>
-        </p:nvSpPr>
-        <p:spPr>
-          <a:xfrm>
-            <a:off x="1261872" y="5285232"/>
-            <a:ext cx="4754880" cy="420624"/>
-          </a:xfrm>
-          <a:prstGeom prst="rect">
-            <a:avLst/>
-          </a:prstGeom>
-          <a:noFill/>
-          <a:ln/>
-        </p:spPr>
-        <p:txBody>
-          <a:bodyPr wrap="square" lIns="0" tIns="0" rIns="0" bIns="0" rtlCol="0" anchor="ctr"/>
-          <a:lstStyle/>
-          <a:p>
-            <a:pPr indent="0" marL="0">
-              <a:buNone/>
-            </a:pPr>
-            <a:r>
-              <a:rPr lang="en-US" sz="1550" dirty="0">
-                <a:solidFill>
-                  <a:srgbClr val="141414"/>
-                </a:solidFill>
-                <a:latin typeface="Pretendard SemiBold" pitchFamily="34" charset="0"/>
-                <a:ea typeface="Pretendard SemiBold" pitchFamily="34" charset="-122"/>
-                <a:cs typeface="Pretendard SemiBold" pitchFamily="34" charset="-120"/>
-              </a:rPr>
-              <a:t>Console에 빨간 줄이 있나</a:t>
-            </a:r>
-            <a:endParaRPr lang="en-US" sz="1550" dirty="0"/>
-          </a:p>
-        </p:txBody>
-      </p:sp>
-      <p:sp>
-        <p:nvSpPr>
-          <p:cNvPr id="25" name="Text 23"/>
-          <p:cNvSpPr txBox="1"/>
-          <p:nvPr/>
-        </p:nvSpPr>
-        <p:spPr>
-          <a:xfrm>
-            <a:off x="6245352" y="5285232"/>
-            <a:ext cx="5187391" cy="420624"/>
-          </a:xfrm>
-          <a:prstGeom prst="rect">
-            <a:avLst/>
-          </a:prstGeom>
-          <a:noFill/>
-          <a:ln/>
-        </p:spPr>
-        <p:txBody>
-          <a:bodyPr wrap="square" lIns="0" tIns="0" rIns="0" bIns="0" rtlCol="0" anchor="ctr"/>
-          <a:lstStyle/>
-          <a:p>
-            <a:pPr indent="0" marL="0">
-              <a:buNone/>
-            </a:pPr>
-            <a:r>
-              <a:rPr lang="en-US" sz="1200" dirty="0">
-                <a:solidFill>
-                  <a:srgbClr val="707070"/>
-                </a:solidFill>
-                <a:latin typeface="Pretendard" pitchFamily="34" charset="0"/>
-                <a:ea typeface="Pretendard" pitchFamily="34" charset="-122"/>
-                <a:cs typeface="Pretendard" pitchFamily="34" charset="-120"/>
-              </a:rPr>
-              <a:t>있으면 더블클릭</a:t>
-            </a:r>
-            <a:endParaRPr lang="en-US" sz="1200" dirty="0"/>
-          </a:p>
-        </p:txBody>
-      </p:sp>
-      <p:sp>
-        <p:nvSpPr>
-          <p:cNvPr id="26" name="Shape 24"/>
-          <p:cNvSpPr/>
-          <p:nvPr/>
-        </p:nvSpPr>
-        <p:spPr>
-          <a:xfrm>
-            <a:off x="758952" y="5870448"/>
-            <a:ext cx="10673791" cy="0"/>
-          </a:xfrm>
-          <a:prstGeom prst="line">
-            <a:avLst/>
-          </a:prstGeom>
-          <a:noFill/>
-          <a:ln w="12700">
-            <a:solidFill>
-              <a:srgbClr val="F0F0F0"/>
-            </a:solidFill>
-            <a:prstDash val="solid"/>
-          </a:ln>
-        </p:spPr>
-      </p:sp>
-      <p:sp>
-        <p:nvSpPr>
-          <p:cNvPr id="27" name="Text 25"/>
-          <p:cNvSpPr txBox="1"/>
-          <p:nvPr/>
-        </p:nvSpPr>
-        <p:spPr>
-          <a:xfrm>
-            <a:off x="758952" y="5897880"/>
-            <a:ext cx="8229600" cy="365760"/>
-          </a:xfrm>
-          <a:prstGeom prst="rect">
-            <a:avLst/>
-          </a:prstGeom>
-          <a:noFill/>
-          <a:ln/>
-        </p:spPr>
-        <p:txBody>
-          <a:bodyPr wrap="square" lIns="0" tIns="0" rIns="0" bIns="0" rtlCol="0" anchor="ctr"/>
-          <a:lstStyle/>
-          <a:p>
-            <a:pPr indent="0" marL="0">
-              <a:buNone/>
-            </a:pPr>
-            <a:r>
-              <a:rPr lang="en-US" sz="1500" dirty="0">
-                <a:solidFill>
-                  <a:srgbClr val="707070"/>
-                </a:solidFill>
-                <a:latin typeface="Pretendard Light" pitchFamily="34" charset="0"/>
-                <a:ea typeface="Pretendard Light" pitchFamily="34" charset="-122"/>
-                <a:cs typeface="Pretendard Light" pitchFamily="34" charset="-120"/>
-              </a:rPr>
-              <a:t>이 다섯 개로 열 번 중 아홉 번은 해결된다.</a:t>
-            </a:r>
-            <a:endParaRPr lang="en-US" sz="1500" dirty="0"/>
+              <a:t>완성 상태 — Falling이 Wall에서 멈춘다</a:t>
+            </a:r>
+            <a:endParaRPr lang="en-US" sz="950" dirty="0"/>
           </a:p>
         </p:txBody>
       </p:sp>
@@ -4195,7 +4288,7 @@
                 <a:ea typeface="Pretendard SemiBold" pitchFamily="34" charset="-122"/>
                 <a:cs typeface="Pretendard SemiBold" pitchFamily="34" charset="-120"/>
               </a:rPr>
-              <a:t>실습 — 내 놀이터 만들기.</a:t>
+              <a:t>막혔을 때 확인 순서.</a:t>
             </a:r>
             <a:endParaRPr lang="en-US" sz="2600" dirty="0"/>
           </a:p>
@@ -4234,7 +4327,7 @@
                 <a:ea typeface="Pretendard Light" pitchFamily="34" charset="-122"/>
                 <a:cs typeface="Pretendard Light" pitchFamily="34" charset="-120"/>
               </a:rPr>
-              <a:t>7주차에 배운 것만으로 장면을 구성한다.</a:t>
+              <a:t>오늘의 진짜 수업 — 새 문법은 하나도 안 나간다.</a:t>
             </a:r>
             <a:endParaRPr lang="en-US" sz="1500" dirty="0"/>
           </a:p>
@@ -4248,137 +4341,8 @@
         </p:nvSpPr>
         <p:spPr>
           <a:xfrm>
-            <a:off x="758952" y="1965960"/>
-            <a:ext cx="6629400" cy="4224528"/>
-          </a:xfrm>
-          <a:prstGeom prst="roundRect">
-            <a:avLst>
-              <a:gd name="adj" fmla="val 5411"/>
-            </a:avLst>
-          </a:prstGeom>
-          <a:solidFill>
-            <a:srgbClr val="F3F3F3"/>
-          </a:solidFill>
-          <a:ln w="12700">
-            <a:solidFill>
-              <a:srgbClr val="333333"/>
-            </a:solidFill>
-            <a:prstDash val="solid"/>
-          </a:ln>
-        </p:spPr>
-      </p:sp>
-      <p:pic>
-        <p:nvPicPr>
-          <p:cNvPr id="7" name="Image 0" descr="C:\Users\user\AppData\Local\Temp\claude\C--Users-user-Github-WaveBreaker\fd97bec6-cef8-4bf5-a447-9a0fa572b36e\scratchpad\shots2\final\035_Playground.png">    </p:cNvPr>
-          <p:cNvPicPr>
-            <a:picLocks noChangeAspect="1"/>
-          </p:cNvPicPr>
-          <p:nvPr/>
-        </p:nvPicPr>
-        <p:blipFill>
-          <a:blip r:embed="rId1"/>
-          <a:stretch>
-            <a:fillRect/>
-          </a:stretch>
-        </p:blipFill>
-        <p:spPr>
-          <a:xfrm>
-            <a:off x="960120" y="2167128"/>
-            <a:ext cx="6227064" cy="3346704"/>
-          </a:xfrm>
-          <a:prstGeom prst="rect">
-            <a:avLst/>
-          </a:prstGeom>
-        </p:spPr>
-      </p:pic>
-      <p:sp>
-        <p:nvSpPr>
-          <p:cNvPr id="8" name="Text 5"/>
-          <p:cNvSpPr txBox="1"/>
-          <p:nvPr/>
-        </p:nvSpPr>
-        <p:spPr>
-          <a:xfrm>
-            <a:off x="960120" y="5586984"/>
-            <a:ext cx="6227064" cy="310896"/>
-          </a:xfrm>
-          <a:prstGeom prst="rect">
-            <a:avLst/>
-          </a:prstGeom>
-          <a:noFill/>
-          <a:ln/>
-        </p:spPr>
-        <p:txBody>
-          <a:bodyPr wrap="square" lIns="0" tIns="0" rIns="0" bIns="0" rtlCol="0" anchor="ctr"/>
-          <a:lstStyle/>
-          <a:p>
-            <a:pPr algn="ctr" indent="0" marL="0">
-              <a:buNone/>
-            </a:pPr>
-            <a:r>
-              <a:rPr lang="en-US" sz="950" dirty="0">
-                <a:solidFill>
-                  <a:srgbClr val="ADADAD"/>
-                </a:solidFill>
-                <a:latin typeface="Pretendard" pitchFamily="34" charset="0"/>
-                <a:ea typeface="Pretendard" pitchFamily="34" charset="-122"/>
-                <a:cs typeface="Pretendard" pitchFamily="34" charset="-120"/>
-              </a:rPr>
-              <a:t>완성 예시 — Play 중</a:t>
-            </a:r>
-            <a:endParaRPr lang="en-US" sz="950" dirty="0"/>
-          </a:p>
-        </p:txBody>
-      </p:sp>
-      <p:sp>
-        <p:nvSpPr>
-          <p:cNvPr id="9" name="Text 6"/>
-          <p:cNvSpPr txBox="1"/>
-          <p:nvPr/>
-        </p:nvSpPr>
-        <p:spPr>
-          <a:xfrm>
-            <a:off x="7818120" y="1965960"/>
-            <a:ext cx="3614623" cy="274320"/>
-          </a:xfrm>
-          <a:prstGeom prst="rect">
-            <a:avLst/>
-          </a:prstGeom>
-          <a:noFill/>
-          <a:ln/>
-        </p:spPr>
-        <p:txBody>
-          <a:bodyPr wrap="square" lIns="0" tIns="0" rIns="0" bIns="0" rtlCol="0" anchor="ctr"/>
-          <a:lstStyle/>
-          <a:p>
-            <a:pPr indent="0" marL="0">
-              <a:buNone/>
-            </a:pPr>
-            <a:r>
-              <a:rPr lang="en-US" sz="950" dirty="0">
-                <a:solidFill>
-                  <a:srgbClr val="707070"/>
-                </a:solidFill>
-                <a:latin typeface="Pretendard SemiBold" pitchFamily="34" charset="0"/>
-                <a:ea typeface="Pretendard SemiBold" pitchFamily="34" charset="-122"/>
-                <a:cs typeface="Pretendard SemiBold" pitchFamily="34" charset="-120"/>
-              </a:rPr>
-              <a:t>요구 조건</a:t>
-            </a:r>
-            <a:endParaRPr lang="en-US" sz="950" dirty="0"/>
-          </a:p>
-        </p:txBody>
-      </p:sp>
-      <p:sp>
-        <p:nvSpPr>
-          <p:cNvPr id="10" name="Shape 7"/>
-          <p:cNvSpPr/>
-          <p:nvPr/>
-        </p:nvSpPr>
-        <p:spPr>
-          <a:xfrm>
-            <a:off x="7818120" y="2377440"/>
-            <a:ext cx="3614623" cy="0"/>
+            <a:off x="758952" y="2011680"/>
+            <a:ext cx="10673791" cy="0"/>
           </a:xfrm>
           <a:prstGeom prst="line">
             <a:avLst/>
@@ -4394,38 +4358,116 @@
       </p:sp>
       <p:sp>
         <p:nvSpPr>
-          <p:cNvPr id="11" name="Text 8"/>
-          <p:cNvSpPr txBox="1"/>
-          <p:nvPr/>
-        </p:nvSpPr>
-        <p:spPr>
-          <a:xfrm>
-            <a:off x="7818120" y="2560320"/>
-            <a:ext cx="3614623" cy="365760"/>
-          </a:xfrm>
-          <a:prstGeom prst="rect">
-            <a:avLst/>
-          </a:prstGeom>
-          <a:noFill/>
-          <a:ln/>
-        </p:spPr>
-        <p:txBody>
-          <a:bodyPr wrap="square" lIns="0" tIns="0" rIns="0" bIns="0" rtlCol="0" anchor="ctr"/>
-          <a:lstStyle/>
-          <a:p>
-            <a:pPr indent="0" marL="0">
-              <a:buNone/>
-            </a:pPr>
-            <a:r>
-              <a:rPr lang="en-US" sz="1200" dirty="0">
-                <a:solidFill>
-                  <a:srgbClr val="141414"/>
+          <p:cNvPr id="7" name="Text 5"/>
+          <p:cNvSpPr txBox="1"/>
+          <p:nvPr/>
+        </p:nvSpPr>
+        <p:spPr>
+          <a:xfrm>
+            <a:off x="758952" y="2212848"/>
+            <a:ext cx="457200" cy="420624"/>
+          </a:xfrm>
+          <a:prstGeom prst="rect">
+            <a:avLst/>
+          </a:prstGeom>
+          <a:noFill/>
+          <a:ln/>
+        </p:spPr>
+        <p:txBody>
+          <a:bodyPr wrap="square" lIns="0" tIns="0" rIns="0" bIns="0" rtlCol="0" anchor="ctr"/>
+          <a:lstStyle/>
+          <a:p>
+            <a:pPr indent="0" marL="0">
+              <a:buNone/>
+            </a:pPr>
+            <a:r>
+              <a:rPr lang="en-US" sz="1100" dirty="0">
+                <a:solidFill>
+                  <a:srgbClr val="ADADAD"/>
                 </a:solidFill>
                 <a:latin typeface="Pretendard" pitchFamily="34" charset="0"/>
                 <a:ea typeface="Pretendard" pitchFamily="34" charset="-122"/>
                 <a:cs typeface="Pretendard" pitchFamily="34" charset="-120"/>
               </a:rPr>
-              <a:t>바닥 (Collider 있음, Rigidbody 없음)</a:t>
+              <a:t>1</a:t>
+            </a:r>
+            <a:endParaRPr lang="en-US" sz="1100" dirty="0"/>
+          </a:p>
+        </p:txBody>
+      </p:sp>
+      <p:sp>
+        <p:nvSpPr>
+          <p:cNvPr id="8" name="Text 6"/>
+          <p:cNvSpPr txBox="1"/>
+          <p:nvPr/>
+        </p:nvSpPr>
+        <p:spPr>
+          <a:xfrm>
+            <a:off x="1261872" y="2212848"/>
+            <a:ext cx="4754880" cy="420624"/>
+          </a:xfrm>
+          <a:prstGeom prst="rect">
+            <a:avLst/>
+          </a:prstGeom>
+          <a:noFill/>
+          <a:ln/>
+        </p:spPr>
+        <p:txBody>
+          <a:bodyPr wrap="square" lIns="0" tIns="0" rIns="0" bIns="0" rtlCol="0" anchor="ctr"/>
+          <a:lstStyle/>
+          <a:p>
+            <a:pPr indent="0" marL="0">
+              <a:buNone/>
+            </a:pPr>
+            <a:r>
+              <a:rPr lang="en-US" sz="1550" dirty="0">
+                <a:solidFill>
+                  <a:srgbClr val="141414"/>
+                </a:solidFill>
+                <a:latin typeface="Pretendard SemiBold" pitchFamily="34" charset="0"/>
+                <a:ea typeface="Pretendard SemiBold" pitchFamily="34" charset="-122"/>
+                <a:cs typeface="Pretendard SemiBold" pitchFamily="34" charset="-120"/>
+              </a:rPr>
+              <a:t>물체가 화면 안에 있나</a:t>
+            </a:r>
+            <a:endParaRPr lang="en-US" sz="1550" dirty="0"/>
+          </a:p>
+        </p:txBody>
+      </p:sp>
+      <p:sp>
+        <p:nvSpPr>
+          <p:cNvPr id="9" name="Text 7"/>
+          <p:cNvSpPr txBox="1"/>
+          <p:nvPr/>
+        </p:nvSpPr>
+        <p:spPr>
+          <a:xfrm>
+            <a:off x="6245352" y="2212848"/>
+            <a:ext cx="5187391" cy="420624"/>
+          </a:xfrm>
+          <a:prstGeom prst="rect">
+            <a:avLst/>
+          </a:prstGeom>
+          <a:noFill/>
+          <a:ln/>
+        </p:spPr>
+        <p:txBody>
+          <a:bodyPr wrap="square" lIns="0" tIns="0" rIns="0" bIns="0" rtlCol="0" anchor="ctr"/>
+          <a:lstStyle/>
+          <a:p>
+            <a:pPr indent="0" marL="0">
+              <a:buNone/>
+            </a:pPr>
+            <a:r>
+              <a:rPr lang="en-US" sz="1200" dirty="0">
+                <a:solidFill>
+                  <a:srgbClr val="707070"/>
+                </a:solidFill>
+                <a:latin typeface="Pretendard" pitchFamily="34" charset="0"/>
+                <a:ea typeface="Pretendard" pitchFamily="34" charset="-122"/>
+                <a:cs typeface="Pretendard" pitchFamily="34" charset="-120"/>
+              </a:rPr>
+              <a:t>Hierarchy 클릭 → F</a:t>
             </a:r>
             <a:endParaRPr lang="en-US" sz="1200" dirty="0"/>
           </a:p>
@@ -4433,14 +4475,14 @@
       </p:sp>
       <p:sp>
         <p:nvSpPr>
-          <p:cNvPr id="12" name="Shape 9"/>
+          <p:cNvPr id="10" name="Shape 8"/>
           <p:cNvSpPr/>
           <p:nvPr/>
         </p:nvSpPr>
         <p:spPr>
           <a:xfrm>
-            <a:off x="7818120" y="3035808"/>
-            <a:ext cx="3614623" cy="0"/>
+            <a:off x="758952" y="2798064"/>
+            <a:ext cx="10673791" cy="0"/>
           </a:xfrm>
           <a:prstGeom prst="line">
             <a:avLst/>
@@ -4456,38 +4498,116 @@
       </p:sp>
       <p:sp>
         <p:nvSpPr>
-          <p:cNvPr id="13" name="Text 10"/>
-          <p:cNvSpPr txBox="1"/>
-          <p:nvPr/>
-        </p:nvSpPr>
-        <p:spPr>
-          <a:xfrm>
-            <a:off x="7818120" y="3145536"/>
-            <a:ext cx="3614623" cy="365760"/>
-          </a:xfrm>
-          <a:prstGeom prst="rect">
-            <a:avLst/>
-          </a:prstGeom>
-          <a:noFill/>
-          <a:ln/>
-        </p:spPr>
-        <p:txBody>
-          <a:bodyPr wrap="square" lIns="0" tIns="0" rIns="0" bIns="0" rtlCol="0" anchor="ctr"/>
-          <a:lstStyle/>
-          <a:p>
-            <a:pPr indent="0" marL="0">
-              <a:buNone/>
-            </a:pPr>
-            <a:r>
-              <a:rPr lang="en-US" sz="1200" dirty="0">
-                <a:solidFill>
-                  <a:srgbClr val="141414"/>
+          <p:cNvPr id="11" name="Text 9"/>
+          <p:cNvSpPr txBox="1"/>
+          <p:nvPr/>
+        </p:nvSpPr>
+        <p:spPr>
+          <a:xfrm>
+            <a:off x="758952" y="2980944"/>
+            <a:ext cx="457200" cy="420624"/>
+          </a:xfrm>
+          <a:prstGeom prst="rect">
+            <a:avLst/>
+          </a:prstGeom>
+          <a:noFill/>
+          <a:ln/>
+        </p:spPr>
+        <p:txBody>
+          <a:bodyPr wrap="square" lIns="0" tIns="0" rIns="0" bIns="0" rtlCol="0" anchor="ctr"/>
+          <a:lstStyle/>
+          <a:p>
+            <a:pPr indent="0" marL="0">
+              <a:buNone/>
+            </a:pPr>
+            <a:r>
+              <a:rPr lang="en-US" sz="1100" dirty="0">
+                <a:solidFill>
+                  <a:srgbClr val="ADADAD"/>
                 </a:solidFill>
                 <a:latin typeface="Pretendard" pitchFamily="34" charset="0"/>
                 <a:ea typeface="Pretendard" pitchFamily="34" charset="-122"/>
                 <a:cs typeface="Pretendard" pitchFamily="34" charset="-120"/>
               </a:rPr>
-              <a:t>떨어지는 물체 3개 이상</a:t>
+              <a:t>2</a:t>
+            </a:r>
+            <a:endParaRPr lang="en-US" sz="1100" dirty="0"/>
+          </a:p>
+        </p:txBody>
+      </p:sp>
+      <p:sp>
+        <p:nvSpPr>
+          <p:cNvPr id="12" name="Text 10"/>
+          <p:cNvSpPr txBox="1"/>
+          <p:nvPr/>
+        </p:nvSpPr>
+        <p:spPr>
+          <a:xfrm>
+            <a:off x="1261872" y="2980944"/>
+            <a:ext cx="4754880" cy="420624"/>
+          </a:xfrm>
+          <a:prstGeom prst="rect">
+            <a:avLst/>
+          </a:prstGeom>
+          <a:noFill/>
+          <a:ln/>
+        </p:spPr>
+        <p:txBody>
+          <a:bodyPr wrap="square" lIns="0" tIns="0" rIns="0" bIns="0" rtlCol="0" anchor="ctr"/>
+          <a:lstStyle/>
+          <a:p>
+            <a:pPr indent="0" marL="0">
+              <a:buNone/>
+            </a:pPr>
+            <a:r>
+              <a:rPr lang="en-US" sz="1550" dirty="0">
+                <a:solidFill>
+                  <a:srgbClr val="141414"/>
+                </a:solidFill>
+                <a:latin typeface="Pretendard SemiBold" pitchFamily="34" charset="0"/>
+                <a:ea typeface="Pretendard SemiBold" pitchFamily="34" charset="-122"/>
+                <a:cs typeface="Pretendard SemiBold" pitchFamily="34" charset="-120"/>
+              </a:rPr>
+              <a:t>Inspector 값이 이상하지 않나</a:t>
+            </a:r>
+            <a:endParaRPr lang="en-US" sz="1550" dirty="0"/>
+          </a:p>
+        </p:txBody>
+      </p:sp>
+      <p:sp>
+        <p:nvSpPr>
+          <p:cNvPr id="13" name="Text 11"/>
+          <p:cNvSpPr txBox="1"/>
+          <p:nvPr/>
+        </p:nvSpPr>
+        <p:spPr>
+          <a:xfrm>
+            <a:off x="6245352" y="2980944"/>
+            <a:ext cx="5187391" cy="420624"/>
+          </a:xfrm>
+          <a:prstGeom prst="rect">
+            <a:avLst/>
+          </a:prstGeom>
+          <a:noFill/>
+          <a:ln/>
+        </p:spPr>
+        <p:txBody>
+          <a:bodyPr wrap="square" lIns="0" tIns="0" rIns="0" bIns="0" rtlCol="0" anchor="ctr"/>
+          <a:lstStyle/>
+          <a:p>
+            <a:pPr indent="0" marL="0">
+              <a:buNone/>
+            </a:pPr>
+            <a:r>
+              <a:rPr lang="en-US" sz="1200" dirty="0">
+                <a:solidFill>
+                  <a:srgbClr val="707070"/>
+                </a:solidFill>
+                <a:latin typeface="Pretendard" pitchFamily="34" charset="0"/>
+                <a:ea typeface="Pretendard" pitchFamily="34" charset="-122"/>
+                <a:cs typeface="Pretendard" pitchFamily="34" charset="-120"/>
+              </a:rPr>
+              <a:t>Scale 0 / Rotation X·Y / Position Z</a:t>
             </a:r>
             <a:endParaRPr lang="en-US" sz="1200" dirty="0"/>
           </a:p>
@@ -4495,14 +4615,14 @@
       </p:sp>
       <p:sp>
         <p:nvSpPr>
-          <p:cNvPr id="14" name="Shape 11"/>
+          <p:cNvPr id="14" name="Shape 12"/>
           <p:cNvSpPr/>
           <p:nvPr/>
         </p:nvSpPr>
         <p:spPr>
           <a:xfrm>
-            <a:off x="7818120" y="3621024"/>
-            <a:ext cx="3614623" cy="0"/>
+            <a:off x="758952" y="3566160"/>
+            <a:ext cx="10673791" cy="0"/>
           </a:xfrm>
           <a:prstGeom prst="line">
             <a:avLst/>
@@ -4518,38 +4638,116 @@
       </p:sp>
       <p:sp>
         <p:nvSpPr>
-          <p:cNvPr id="15" name="Text 12"/>
-          <p:cNvSpPr txBox="1"/>
-          <p:nvPr/>
-        </p:nvSpPr>
-        <p:spPr>
-          <a:xfrm>
-            <a:off x="7818120" y="3730752"/>
-            <a:ext cx="3614623" cy="365760"/>
-          </a:xfrm>
-          <a:prstGeom prst="rect">
-            <a:avLst/>
-          </a:prstGeom>
-          <a:noFill/>
-          <a:ln/>
-        </p:spPr>
-        <p:txBody>
-          <a:bodyPr wrap="square" lIns="0" tIns="0" rIns="0" bIns="0" rtlCol="0" anchor="ctr"/>
-          <a:lstStyle/>
-          <a:p>
-            <a:pPr indent="0" marL="0">
-              <a:buNone/>
-            </a:pPr>
-            <a:r>
-              <a:rPr lang="en-US" sz="1200" dirty="0">
-                <a:solidFill>
-                  <a:srgbClr val="141414"/>
+          <p:cNvPr id="15" name="Text 13"/>
+          <p:cNvSpPr txBox="1"/>
+          <p:nvPr/>
+        </p:nvSpPr>
+        <p:spPr>
+          <a:xfrm>
+            <a:off x="758952" y="3749040"/>
+            <a:ext cx="457200" cy="420624"/>
+          </a:xfrm>
+          <a:prstGeom prst="rect">
+            <a:avLst/>
+          </a:prstGeom>
+          <a:noFill/>
+          <a:ln/>
+        </p:spPr>
+        <p:txBody>
+          <a:bodyPr wrap="square" lIns="0" tIns="0" rIns="0" bIns="0" rtlCol="0" anchor="ctr"/>
+          <a:lstStyle/>
+          <a:p>
+            <a:pPr indent="0" marL="0">
+              <a:buNone/>
+            </a:pPr>
+            <a:r>
+              <a:rPr lang="en-US" sz="1100" dirty="0">
+                <a:solidFill>
+                  <a:srgbClr val="ADADAD"/>
                 </a:solidFill>
                 <a:latin typeface="Pretendard" pitchFamily="34" charset="0"/>
                 <a:ea typeface="Pretendard" pitchFamily="34" charset="-122"/>
                 <a:cs typeface="Pretendard" pitchFamily="34" charset="-120"/>
               </a:rPr>
-              <a:t>부모자식 구조 최소 한 곳</a:t>
+              <a:t>3</a:t>
+            </a:r>
+            <a:endParaRPr lang="en-US" sz="1100" dirty="0"/>
+          </a:p>
+        </p:txBody>
+      </p:sp>
+      <p:sp>
+        <p:nvSpPr>
+          <p:cNvPr id="16" name="Text 14"/>
+          <p:cNvSpPr txBox="1"/>
+          <p:nvPr/>
+        </p:nvSpPr>
+        <p:spPr>
+          <a:xfrm>
+            <a:off x="1261872" y="3749040"/>
+            <a:ext cx="4754880" cy="420624"/>
+          </a:xfrm>
+          <a:prstGeom prst="rect">
+            <a:avLst/>
+          </a:prstGeom>
+          <a:noFill/>
+          <a:ln/>
+        </p:spPr>
+        <p:txBody>
+          <a:bodyPr wrap="square" lIns="0" tIns="0" rIns="0" bIns="0" rtlCol="0" anchor="ctr"/>
+          <a:lstStyle/>
+          <a:p>
+            <a:pPr indent="0" marL="0">
+              <a:buNone/>
+            </a:pPr>
+            <a:r>
+              <a:rPr lang="en-US" sz="1550" dirty="0">
+                <a:solidFill>
+                  <a:srgbClr val="141414"/>
+                </a:solidFill>
+                <a:latin typeface="Pretendard SemiBold" pitchFamily="34" charset="0"/>
+                <a:ea typeface="Pretendard SemiBold" pitchFamily="34" charset="-122"/>
+                <a:cs typeface="Pretendard SemiBold" pitchFamily="34" charset="-120"/>
+              </a:rPr>
+              <a:t>부품이 다 붙어 있나</a:t>
+            </a:r>
+            <a:endParaRPr lang="en-US" sz="1550" dirty="0"/>
+          </a:p>
+        </p:txBody>
+      </p:sp>
+      <p:sp>
+        <p:nvSpPr>
+          <p:cNvPr id="17" name="Text 15"/>
+          <p:cNvSpPr txBox="1"/>
+          <p:nvPr/>
+        </p:nvSpPr>
+        <p:spPr>
+          <a:xfrm>
+            <a:off x="6245352" y="3749040"/>
+            <a:ext cx="5187391" cy="420624"/>
+          </a:xfrm>
+          <a:prstGeom prst="rect">
+            <a:avLst/>
+          </a:prstGeom>
+          <a:noFill/>
+          <a:ln/>
+        </p:spPr>
+        <p:txBody>
+          <a:bodyPr wrap="square" lIns="0" tIns="0" rIns="0" bIns="0" rtlCol="0" anchor="ctr"/>
+          <a:lstStyle/>
+          <a:p>
+            <a:pPr indent="0" marL="0">
+              <a:buNone/>
+            </a:pPr>
+            <a:r>
+              <a:rPr lang="en-US" sz="1200" dirty="0">
+                <a:solidFill>
+                  <a:srgbClr val="707070"/>
+                </a:solidFill>
+                <a:latin typeface="Pretendard" pitchFamily="34" charset="0"/>
+                <a:ea typeface="Pretendard" pitchFamily="34" charset="-122"/>
+                <a:cs typeface="Pretendard" pitchFamily="34" charset="-120"/>
+              </a:rPr>
+              <a:t>안 보이면 Sprite Renderer, 안 부딪히면 Collider</a:t>
             </a:r>
             <a:endParaRPr lang="en-US" sz="1200" dirty="0"/>
           </a:p>
@@ -4557,14 +4755,14 @@
       </p:sp>
       <p:sp>
         <p:nvSpPr>
-          <p:cNvPr id="16" name="Shape 13"/>
+          <p:cNvPr id="18" name="Shape 16"/>
           <p:cNvSpPr/>
           <p:nvPr/>
         </p:nvSpPr>
         <p:spPr>
           <a:xfrm>
-            <a:off x="7818120" y="4206240"/>
-            <a:ext cx="3614623" cy="0"/>
+            <a:off x="758952" y="4334256"/>
+            <a:ext cx="10673791" cy="0"/>
           </a:xfrm>
           <a:prstGeom prst="line">
             <a:avLst/>
@@ -4580,38 +4778,116 @@
       </p:sp>
       <p:sp>
         <p:nvSpPr>
-          <p:cNvPr id="17" name="Text 14"/>
-          <p:cNvSpPr txBox="1"/>
-          <p:nvPr/>
-        </p:nvSpPr>
-        <p:spPr>
-          <a:xfrm>
-            <a:off x="7818120" y="4315968"/>
-            <a:ext cx="3614623" cy="365760"/>
-          </a:xfrm>
-          <a:prstGeom prst="rect">
-            <a:avLst/>
-          </a:prstGeom>
-          <a:noFill/>
-          <a:ln/>
-        </p:spPr>
-        <p:txBody>
-          <a:bodyPr wrap="square" lIns="0" tIns="0" rIns="0" bIns="0" rtlCol="0" anchor="ctr"/>
-          <a:lstStyle/>
-          <a:p>
-            <a:pPr indent="0" marL="0">
-              <a:buNone/>
-            </a:pPr>
-            <a:r>
-              <a:rPr lang="en-US" sz="1200" dirty="0">
-                <a:solidFill>
-                  <a:srgbClr val="141414"/>
+          <p:cNvPr id="19" name="Text 17"/>
+          <p:cNvSpPr txBox="1"/>
+          <p:nvPr/>
+        </p:nvSpPr>
+        <p:spPr>
+          <a:xfrm>
+            <a:off x="758952" y="4517136"/>
+            <a:ext cx="457200" cy="420624"/>
+          </a:xfrm>
+          <a:prstGeom prst="rect">
+            <a:avLst/>
+          </a:prstGeom>
+          <a:noFill/>
+          <a:ln/>
+        </p:spPr>
+        <p:txBody>
+          <a:bodyPr wrap="square" lIns="0" tIns="0" rIns="0" bIns="0" rtlCol="0" anchor="ctr"/>
+          <a:lstStyle/>
+          <a:p>
+            <a:pPr indent="0" marL="0">
+              <a:buNone/>
+            </a:pPr>
+            <a:r>
+              <a:rPr lang="en-US" sz="1100" dirty="0">
+                <a:solidFill>
+                  <a:srgbClr val="ADADAD"/>
                 </a:solidFill>
                 <a:latin typeface="Pretendard" pitchFamily="34" charset="0"/>
                 <a:ea typeface="Pretendard" pitchFamily="34" charset="-122"/>
                 <a:cs typeface="Pretendard" pitchFamily="34" charset="-120"/>
               </a:rPr>
-              <a:t>회전된 물체 하나</a:t>
+              <a:t>4</a:t>
+            </a:r>
+            <a:endParaRPr lang="en-US" sz="1100" dirty="0"/>
+          </a:p>
+        </p:txBody>
+      </p:sp>
+      <p:sp>
+        <p:nvSpPr>
+          <p:cNvPr id="20" name="Text 18"/>
+          <p:cNvSpPr txBox="1"/>
+          <p:nvPr/>
+        </p:nvSpPr>
+        <p:spPr>
+          <a:xfrm>
+            <a:off x="1261872" y="4517136"/>
+            <a:ext cx="4754880" cy="420624"/>
+          </a:xfrm>
+          <a:prstGeom prst="rect">
+            <a:avLst/>
+          </a:prstGeom>
+          <a:noFill/>
+          <a:ln/>
+        </p:spPr>
+        <p:txBody>
+          <a:bodyPr wrap="square" lIns="0" tIns="0" rIns="0" bIns="0" rtlCol="0" anchor="ctr"/>
+          <a:lstStyle/>
+          <a:p>
+            <a:pPr indent="0" marL="0">
+              <a:buNone/>
+            </a:pPr>
+            <a:r>
+              <a:rPr lang="en-US" sz="1550" dirty="0">
+                <a:solidFill>
+                  <a:srgbClr val="141414"/>
+                </a:solidFill>
+                <a:latin typeface="Pretendard SemiBold" pitchFamily="34" charset="0"/>
+                <a:ea typeface="Pretendard SemiBold" pitchFamily="34" charset="-122"/>
+                <a:cs typeface="Pretendard SemiBold" pitchFamily="34" charset="-120"/>
+              </a:rPr>
+              <a:t>체크박스가 켜져 있나</a:t>
+            </a:r>
+            <a:endParaRPr lang="en-US" sz="1550" dirty="0"/>
+          </a:p>
+        </p:txBody>
+      </p:sp>
+      <p:sp>
+        <p:nvSpPr>
+          <p:cNvPr id="21" name="Text 19"/>
+          <p:cNvSpPr txBox="1"/>
+          <p:nvPr/>
+        </p:nvSpPr>
+        <p:spPr>
+          <a:xfrm>
+            <a:off x="6245352" y="4517136"/>
+            <a:ext cx="5187391" cy="420624"/>
+          </a:xfrm>
+          <a:prstGeom prst="rect">
+            <a:avLst/>
+          </a:prstGeom>
+          <a:noFill/>
+          <a:ln/>
+        </p:spPr>
+        <p:txBody>
+          <a:bodyPr wrap="square" lIns="0" tIns="0" rIns="0" bIns="0" rtlCol="0" anchor="ctr"/>
+          <a:lstStyle/>
+          <a:p>
+            <a:pPr indent="0" marL="0">
+              <a:buNone/>
+            </a:pPr>
+            <a:r>
+              <a:rPr lang="en-US" sz="1200" dirty="0">
+                <a:solidFill>
+                  <a:srgbClr val="707070"/>
+                </a:solidFill>
+                <a:latin typeface="Pretendard" pitchFamily="34" charset="0"/>
+                <a:ea typeface="Pretendard" pitchFamily="34" charset="-122"/>
+                <a:cs typeface="Pretendard" pitchFamily="34" charset="-120"/>
+              </a:rPr>
+              <a:t>오브젝트와 컴포넌트 둘 다</a:t>
             </a:r>
             <a:endParaRPr lang="en-US" sz="1200" dirty="0"/>
           </a:p>
@@ -4619,14 +4895,14 @@
       </p:sp>
       <p:sp>
         <p:nvSpPr>
-          <p:cNvPr id="18" name="Shape 15"/>
+          <p:cNvPr id="22" name="Shape 20"/>
           <p:cNvSpPr/>
           <p:nvPr/>
         </p:nvSpPr>
         <p:spPr>
           <a:xfrm>
-            <a:off x="7818120" y="4791456"/>
-            <a:ext cx="3614623" cy="0"/>
+            <a:off x="758952" y="5102352"/>
+            <a:ext cx="10673791" cy="0"/>
           </a:xfrm>
           <a:prstGeom prst="line">
             <a:avLst/>
@@ -4642,38 +4918,116 @@
       </p:sp>
       <p:sp>
         <p:nvSpPr>
-          <p:cNvPr id="19" name="Text 16"/>
-          <p:cNvSpPr txBox="1"/>
-          <p:nvPr/>
-        </p:nvSpPr>
-        <p:spPr>
-          <a:xfrm>
-            <a:off x="7818120" y="4901184"/>
-            <a:ext cx="3614623" cy="365760"/>
-          </a:xfrm>
-          <a:prstGeom prst="rect">
-            <a:avLst/>
-          </a:prstGeom>
-          <a:noFill/>
-          <a:ln/>
-        </p:spPr>
-        <p:txBody>
-          <a:bodyPr wrap="square" lIns="0" tIns="0" rIns="0" bIns="0" rtlCol="0" anchor="ctr"/>
-          <a:lstStyle/>
-          <a:p>
-            <a:pPr indent="0" marL="0">
-              <a:buNone/>
-            </a:pPr>
-            <a:r>
-              <a:rPr lang="en-US" sz="1200" dirty="0">
-                <a:solidFill>
-                  <a:srgbClr val="141414"/>
+          <p:cNvPr id="23" name="Text 21"/>
+          <p:cNvSpPr txBox="1"/>
+          <p:nvPr/>
+        </p:nvSpPr>
+        <p:spPr>
+          <a:xfrm>
+            <a:off x="758952" y="5285232"/>
+            <a:ext cx="457200" cy="420624"/>
+          </a:xfrm>
+          <a:prstGeom prst="rect">
+            <a:avLst/>
+          </a:prstGeom>
+          <a:noFill/>
+          <a:ln/>
+        </p:spPr>
+        <p:txBody>
+          <a:bodyPr wrap="square" lIns="0" tIns="0" rIns="0" bIns="0" rtlCol="0" anchor="ctr"/>
+          <a:lstStyle/>
+          <a:p>
+            <a:pPr indent="0" marL="0">
+              <a:buNone/>
+            </a:pPr>
+            <a:r>
+              <a:rPr lang="en-US" sz="1100" dirty="0">
+                <a:solidFill>
+                  <a:srgbClr val="ADADAD"/>
                 </a:solidFill>
                 <a:latin typeface="Pretendard" pitchFamily="34" charset="0"/>
                 <a:ea typeface="Pretendard" pitchFamily="34" charset="-122"/>
                 <a:cs typeface="Pretendard" pitchFamily="34" charset="-120"/>
               </a:rPr>
-              <a:t>뒤집힌 물체 하나</a:t>
+              <a:t>5</a:t>
+            </a:r>
+            <a:endParaRPr lang="en-US" sz="1100" dirty="0"/>
+          </a:p>
+        </p:txBody>
+      </p:sp>
+      <p:sp>
+        <p:nvSpPr>
+          <p:cNvPr id="24" name="Text 22"/>
+          <p:cNvSpPr txBox="1"/>
+          <p:nvPr/>
+        </p:nvSpPr>
+        <p:spPr>
+          <a:xfrm>
+            <a:off x="1261872" y="5285232"/>
+            <a:ext cx="4754880" cy="420624"/>
+          </a:xfrm>
+          <a:prstGeom prst="rect">
+            <a:avLst/>
+          </a:prstGeom>
+          <a:noFill/>
+          <a:ln/>
+        </p:spPr>
+        <p:txBody>
+          <a:bodyPr wrap="square" lIns="0" tIns="0" rIns="0" bIns="0" rtlCol="0" anchor="ctr"/>
+          <a:lstStyle/>
+          <a:p>
+            <a:pPr indent="0" marL="0">
+              <a:buNone/>
+            </a:pPr>
+            <a:r>
+              <a:rPr lang="en-US" sz="1550" dirty="0">
+                <a:solidFill>
+                  <a:srgbClr val="141414"/>
+                </a:solidFill>
+                <a:latin typeface="Pretendard SemiBold" pitchFamily="34" charset="0"/>
+                <a:ea typeface="Pretendard SemiBold" pitchFamily="34" charset="-122"/>
+                <a:cs typeface="Pretendard SemiBold" pitchFamily="34" charset="-120"/>
+              </a:rPr>
+              <a:t>Console에 빨간 줄이 있나</a:t>
+            </a:r>
+            <a:endParaRPr lang="en-US" sz="1550" dirty="0"/>
+          </a:p>
+        </p:txBody>
+      </p:sp>
+      <p:sp>
+        <p:nvSpPr>
+          <p:cNvPr id="25" name="Text 23"/>
+          <p:cNvSpPr txBox="1"/>
+          <p:nvPr/>
+        </p:nvSpPr>
+        <p:spPr>
+          <a:xfrm>
+            <a:off x="6245352" y="5285232"/>
+            <a:ext cx="5187391" cy="420624"/>
+          </a:xfrm>
+          <a:prstGeom prst="rect">
+            <a:avLst/>
+          </a:prstGeom>
+          <a:noFill/>
+          <a:ln/>
+        </p:spPr>
+        <p:txBody>
+          <a:bodyPr wrap="square" lIns="0" tIns="0" rIns="0" bIns="0" rtlCol="0" anchor="ctr"/>
+          <a:lstStyle/>
+          <a:p>
+            <a:pPr indent="0" marL="0">
+              <a:buNone/>
+            </a:pPr>
+            <a:r>
+              <a:rPr lang="en-US" sz="1200" dirty="0">
+                <a:solidFill>
+                  <a:srgbClr val="707070"/>
+                </a:solidFill>
+                <a:latin typeface="Pretendard" pitchFamily="34" charset="0"/>
+                <a:ea typeface="Pretendard" pitchFamily="34" charset="-122"/>
+                <a:cs typeface="Pretendard" pitchFamily="34" charset="-120"/>
+              </a:rPr>
+              <a:t>있으면 더블클릭</a:t>
             </a:r>
             <a:endParaRPr lang="en-US" sz="1200" dirty="0"/>
           </a:p>
@@ -4681,14 +5035,14 @@
       </p:sp>
       <p:sp>
         <p:nvSpPr>
-          <p:cNvPr id="20" name="Shape 17"/>
+          <p:cNvPr id="26" name="Shape 24"/>
           <p:cNvSpPr/>
           <p:nvPr/>
         </p:nvSpPr>
         <p:spPr>
           <a:xfrm>
-            <a:off x="7818120" y="5376672"/>
-            <a:ext cx="3614623" cy="0"/>
+            <a:off x="758952" y="5870448"/>
+            <a:ext cx="10673791" cy="0"/>
           </a:xfrm>
           <a:prstGeom prst="line">
             <a:avLst/>
@@ -4704,65 +5058,42 @@
       </p:sp>
       <p:sp>
         <p:nvSpPr>
-          <p:cNvPr id="21" name="Text 18"/>
-          <p:cNvSpPr txBox="1"/>
-          <p:nvPr/>
-        </p:nvSpPr>
-        <p:spPr>
-          <a:xfrm>
-            <a:off x="7818120" y="5486400"/>
-            <a:ext cx="3614623" cy="365760"/>
-          </a:xfrm>
-          <a:prstGeom prst="rect">
-            <a:avLst/>
-          </a:prstGeom>
-          <a:noFill/>
-          <a:ln/>
-        </p:spPr>
-        <p:txBody>
-          <a:bodyPr wrap="square" lIns="0" tIns="0" rIns="0" bIns="0" rtlCol="0" anchor="ctr"/>
-          <a:lstStyle/>
-          <a:p>
-            <a:pPr indent="0" marL="0">
-              <a:buNone/>
-            </a:pPr>
-            <a:r>
-              <a:rPr lang="en-US" sz="1200" dirty="0">
-                <a:solidFill>
-                  <a:srgbClr val="141414"/>
-                </a:solidFill>
-                <a:latin typeface="Pretendard" pitchFamily="34" charset="0"/>
-                <a:ea typeface="Pretendard" pitchFamily="34" charset="-122"/>
-                <a:cs typeface="Pretendard" pitchFamily="34" charset="-120"/>
-              </a:rPr>
-              <a:t>이름 정리, 좌표는 정수로</a:t>
-            </a:r>
-            <a:endParaRPr lang="en-US" sz="1200" dirty="0"/>
-          </a:p>
-        </p:txBody>
-      </p:sp>
-      <p:sp>
-        <p:nvSpPr>
-          <p:cNvPr id="22" name="Shape 19"/>
-          <p:cNvSpPr/>
-          <p:nvPr/>
-        </p:nvSpPr>
-        <p:spPr>
-          <a:xfrm>
-            <a:off x="7818120" y="5961888"/>
-            <a:ext cx="3614623" cy="0"/>
-          </a:xfrm>
-          <a:prstGeom prst="line">
-            <a:avLst/>
-          </a:prstGeom>
-          <a:noFill/>
-          <a:ln w="12700">
-            <a:solidFill>
-              <a:srgbClr val="F0F0F0"/>
-            </a:solidFill>
-            <a:prstDash val="solid"/>
-          </a:ln>
-        </p:spPr>
+          <p:cNvPr id="27" name="Text 25"/>
+          <p:cNvSpPr txBox="1"/>
+          <p:nvPr/>
+        </p:nvSpPr>
+        <p:spPr>
+          <a:xfrm>
+            <a:off x="758952" y="5897880"/>
+            <a:ext cx="8229600" cy="365760"/>
+          </a:xfrm>
+          <a:prstGeom prst="rect">
+            <a:avLst/>
+          </a:prstGeom>
+          <a:noFill/>
+          <a:ln/>
+        </p:spPr>
+        <p:txBody>
+          <a:bodyPr wrap="square" lIns="0" tIns="0" rIns="0" bIns="0" rtlCol="0" anchor="ctr"/>
+          <a:lstStyle/>
+          <a:p>
+            <a:pPr indent="0" marL="0">
+              <a:buNone/>
+            </a:pPr>
+            <a:r>
+              <a:rPr lang="en-US" sz="1500" dirty="0">
+                <a:solidFill>
+                  <a:srgbClr val="707070"/>
+                </a:solidFill>
+                <a:latin typeface="Pretendard Light" pitchFamily="34" charset="0"/>
+                <a:ea typeface="Pretendard Light" pitchFamily="34" charset="-122"/>
+                <a:cs typeface="Pretendard Light" pitchFamily="34" charset="-120"/>
+              </a:rPr>
+              <a:t>이 다섯 개로 열 번 중 아홉 번은 해결된다.</a:t>
+            </a:r>
+            <a:endParaRPr lang="en-US" sz="1500" dirty="0"/>
+          </a:p>
+        </p:txBody>
       </p:sp>
     </p:spTree>
   </p:cSld>
@@ -4798,679 +5129,18 @@
       </p:grpSpPr>
       <p:sp>
         <p:nvSpPr>
-          <p:cNvPr id="2" name="Text 0"/>
-          <p:cNvSpPr txBox="1"/>
-          <p:nvPr/>
-        </p:nvSpPr>
-        <p:spPr>
-          <a:xfrm>
-            <a:off x="758952" y="566928"/>
-            <a:ext cx="10673791" cy="457200"/>
-          </a:xfrm>
-          <a:prstGeom prst="rect">
-            <a:avLst/>
-          </a:prstGeom>
-          <a:noFill/>
-          <a:ln/>
-        </p:spPr>
-        <p:txBody>
-          <a:bodyPr wrap="square" lIns="0" tIns="0" rIns="0" bIns="0" rtlCol="0" anchor="ctr"/>
-          <a:lstStyle/>
-          <a:p>
-            <a:pPr indent="0" marL="0">
-              <a:buNone/>
-            </a:pPr>
-            <a:r>
-              <a:rPr lang="en-US" sz="2600" dirty="0">
-                <a:solidFill>
-                  <a:srgbClr val="141414"/>
-                </a:solidFill>
-                <a:latin typeface="Pretendard SemiBold" pitchFamily="34" charset="0"/>
-                <a:ea typeface="Pretendard SemiBold" pitchFamily="34" charset="-122"/>
-                <a:cs typeface="Pretendard SemiBold" pitchFamily="34" charset="-120"/>
-              </a:rPr>
-              <a:t>이번 주 흔한 사고.</a:t>
-            </a:r>
-            <a:endParaRPr lang="en-US" sz="2600" dirty="0"/>
-          </a:p>
-        </p:txBody>
-      </p:sp>
-      <p:sp>
-        <p:nvSpPr>
-          <p:cNvPr id="3" name="Text 1"/>
-          <p:cNvSpPr txBox="1"/>
-          <p:nvPr/>
-        </p:nvSpPr>
-        <p:spPr>
-          <a:xfrm>
-            <a:off x="758952" y="1060704"/>
-            <a:ext cx="10673791" cy="329184"/>
-          </a:xfrm>
-          <a:prstGeom prst="rect">
-            <a:avLst/>
-          </a:prstGeom>
-          <a:noFill/>
-          <a:ln/>
-        </p:spPr>
-        <p:txBody>
-          <a:bodyPr wrap="square" lIns="0" tIns="0" rIns="0" bIns="0" rtlCol="0" anchor="ctr"/>
-          <a:lstStyle/>
-          <a:p>
-            <a:pPr indent="0" marL="0">
-              <a:buNone/>
-            </a:pPr>
-            <a:r>
-              <a:rPr lang="en-US" sz="1500" dirty="0">
-                <a:solidFill>
-                  <a:srgbClr val="707070"/>
-                </a:solidFill>
-                <a:latin typeface="Pretendard Light" pitchFamily="34" charset="0"/>
-                <a:ea typeface="Pretendard Light" pitchFamily="34" charset="-122"/>
-                <a:cs typeface="Pretendard Light" pitchFamily="34" charset="-120"/>
-              </a:rPr>
-              <a:t>미리 알고 있으면 대응이 빨라진다. 강사용.</a:t>
-            </a:r>
-            <a:endParaRPr lang="en-US" sz="1500" dirty="0"/>
-          </a:p>
-        </p:txBody>
-      </p:sp>
-      <p:sp>
-        <p:nvSpPr>
-          <p:cNvPr id="4" name="Shape 2"/>
+          <p:cNvPr id="2" name="Shape 0"/>
           <p:cNvSpPr/>
           <p:nvPr/>
         </p:nvSpPr>
         <p:spPr>
           <a:xfrm>
-            <a:off x="758952" y="2011680"/>
-            <a:ext cx="10673791" cy="0"/>
-          </a:xfrm>
-          <a:prstGeom prst="line">
-            <a:avLst/>
-          </a:prstGeom>
-          <a:noFill/>
-          <a:ln w="12700">
-            <a:solidFill>
-              <a:srgbClr val="E0E0E0"/>
-            </a:solidFill>
-            <a:prstDash val="solid"/>
-          </a:ln>
-        </p:spPr>
-      </p:sp>
-      <p:sp>
-        <p:nvSpPr>
-          <p:cNvPr id="5" name="Text 3"/>
-          <p:cNvSpPr txBox="1"/>
-          <p:nvPr/>
-        </p:nvSpPr>
-        <p:spPr>
-          <a:xfrm>
-            <a:off x="758952" y="2194560"/>
-            <a:ext cx="3749040" cy="420624"/>
-          </a:xfrm>
-          <a:prstGeom prst="rect">
-            <a:avLst/>
-          </a:prstGeom>
-          <a:noFill/>
-          <a:ln/>
-        </p:spPr>
-        <p:txBody>
-          <a:bodyPr wrap="square" lIns="0" tIns="0" rIns="0" bIns="0" rtlCol="0" anchor="ctr"/>
-          <a:lstStyle/>
-          <a:p>
-            <a:pPr indent="0" marL="0">
-              <a:buNone/>
-            </a:pPr>
-            <a:r>
-              <a:rPr lang="en-US" sz="1550" dirty="0">
-                <a:solidFill>
-                  <a:srgbClr val="141414"/>
-                </a:solidFill>
-                <a:latin typeface="Pretendard SemiBold" pitchFamily="34" charset="0"/>
-                <a:ea typeface="Pretendard SemiBold" pitchFamily="34" charset="-122"/>
-                <a:cs typeface="Pretendard SemiBold" pitchFamily="34" charset="-120"/>
-              </a:rPr>
-              <a:t>물체가 안 보여요</a:t>
-            </a:r>
-            <a:endParaRPr lang="en-US" sz="1550" dirty="0"/>
-          </a:p>
-        </p:txBody>
-      </p:sp>
-      <p:sp>
-        <p:nvSpPr>
-          <p:cNvPr id="6" name="Text 4"/>
-          <p:cNvSpPr txBox="1"/>
-          <p:nvPr/>
-        </p:nvSpPr>
-        <p:spPr>
-          <a:xfrm>
-            <a:off x="4690872" y="2194560"/>
-            <a:ext cx="3200400" cy="420624"/>
-          </a:xfrm>
-          <a:prstGeom prst="rect">
-            <a:avLst/>
-          </a:prstGeom>
-          <a:noFill/>
-          <a:ln/>
-        </p:spPr>
-        <p:txBody>
-          <a:bodyPr wrap="square" lIns="0" tIns="0" rIns="0" bIns="0" rtlCol="0" anchor="ctr"/>
-          <a:lstStyle/>
-          <a:p>
-            <a:pPr indent="0" marL="0">
-              <a:buNone/>
-            </a:pPr>
-            <a:r>
-              <a:rPr lang="en-US" sz="1200" dirty="0">
-                <a:solidFill>
-                  <a:srgbClr val="ADADAD"/>
-                </a:solidFill>
-                <a:latin typeface="Pretendard" pitchFamily="34" charset="0"/>
-                <a:ea typeface="Pretendard" pitchFamily="34" charset="-122"/>
-                <a:cs typeface="Pretendard" pitchFamily="34" charset="-120"/>
-              </a:rPr>
-              <a:t>화면 밖 또는 카메라 밖</a:t>
-            </a:r>
-            <a:endParaRPr lang="en-US" sz="1200" dirty="0"/>
-          </a:p>
-        </p:txBody>
-      </p:sp>
-      <p:sp>
-        <p:nvSpPr>
-          <p:cNvPr id="7" name="Text 5"/>
-          <p:cNvSpPr txBox="1"/>
-          <p:nvPr/>
-        </p:nvSpPr>
-        <p:spPr>
-          <a:xfrm>
-            <a:off x="8074152" y="2194560"/>
-            <a:ext cx="3108960" cy="420624"/>
-          </a:xfrm>
-          <a:prstGeom prst="rect">
-            <a:avLst/>
-          </a:prstGeom>
-          <a:noFill/>
-          <a:ln/>
-        </p:spPr>
-        <p:txBody>
-          <a:bodyPr wrap="square" lIns="0" tIns="0" rIns="0" bIns="0" rtlCol="0" anchor="ctr"/>
-          <a:lstStyle/>
-          <a:p>
-            <a:pPr indent="0" marL="0">
-              <a:buNone/>
-            </a:pPr>
-            <a:r>
-              <a:rPr lang="en-US" sz="1200" dirty="0">
-                <a:solidFill>
-                  <a:srgbClr val="141414"/>
-                </a:solidFill>
-                <a:latin typeface="Pretendard" pitchFamily="34" charset="0"/>
-                <a:ea typeface="Pretendard" pitchFamily="34" charset="-122"/>
-                <a:cs typeface="Pretendard" pitchFamily="34" charset="-120"/>
-              </a:rPr>
-              <a:t>클릭하고 F</a:t>
-            </a:r>
-            <a:endParaRPr lang="en-US" sz="1200" dirty="0"/>
-          </a:p>
-        </p:txBody>
-      </p:sp>
-      <p:sp>
-        <p:nvSpPr>
-          <p:cNvPr id="8" name="Shape 6"/>
-          <p:cNvSpPr/>
-          <p:nvPr/>
-        </p:nvSpPr>
-        <p:spPr>
-          <a:xfrm>
-            <a:off x="758952" y="2761488"/>
-            <a:ext cx="10673791" cy="0"/>
-          </a:xfrm>
-          <a:prstGeom prst="line">
-            <a:avLst/>
-          </a:prstGeom>
-          <a:noFill/>
-          <a:ln w="12700">
-            <a:solidFill>
-              <a:srgbClr val="F0F0F0"/>
-            </a:solidFill>
-            <a:prstDash val="solid"/>
-          </a:ln>
-        </p:spPr>
-      </p:sp>
-      <p:sp>
-        <p:nvSpPr>
-          <p:cNvPr id="9" name="Text 7"/>
-          <p:cNvSpPr txBox="1"/>
-          <p:nvPr/>
-        </p:nvSpPr>
-        <p:spPr>
-          <a:xfrm>
-            <a:off x="758952" y="2926080"/>
-            <a:ext cx="3749040" cy="420624"/>
-          </a:xfrm>
-          <a:prstGeom prst="rect">
-            <a:avLst/>
-          </a:prstGeom>
-          <a:noFill/>
-          <a:ln/>
-        </p:spPr>
-        <p:txBody>
-          <a:bodyPr wrap="square" lIns="0" tIns="0" rIns="0" bIns="0" rtlCol="0" anchor="ctr"/>
-          <a:lstStyle/>
-          <a:p>
-            <a:pPr indent="0" marL="0">
-              <a:buNone/>
-            </a:pPr>
-            <a:r>
-              <a:rPr lang="en-US" sz="1550" dirty="0">
-                <a:solidFill>
-                  <a:srgbClr val="141414"/>
-                </a:solidFill>
-                <a:latin typeface="Pretendard SemiBold" pitchFamily="34" charset="0"/>
-                <a:ea typeface="Pretendard SemiBold" pitchFamily="34" charset="-122"/>
-                <a:cs typeface="Pretendard SemiBold" pitchFamily="34" charset="-120"/>
-              </a:rPr>
-              <a:t>창을 닫아버림</a:t>
-            </a:r>
-            <a:endParaRPr lang="en-US" sz="1550" dirty="0"/>
-          </a:p>
-        </p:txBody>
-      </p:sp>
-      <p:sp>
-        <p:nvSpPr>
-          <p:cNvPr id="10" name="Text 8"/>
-          <p:cNvSpPr txBox="1"/>
-          <p:nvPr/>
-        </p:nvSpPr>
-        <p:spPr>
-          <a:xfrm>
-            <a:off x="4690872" y="2926080"/>
-            <a:ext cx="3200400" cy="420624"/>
-          </a:xfrm>
-          <a:prstGeom prst="rect">
-            <a:avLst/>
-          </a:prstGeom>
-          <a:noFill/>
-          <a:ln/>
-        </p:spPr>
-        <p:txBody>
-          <a:bodyPr wrap="square" lIns="0" tIns="0" rIns="0" bIns="0" rtlCol="0" anchor="ctr"/>
-          <a:lstStyle/>
-          <a:p>
-            <a:pPr indent="0" marL="0">
-              <a:buNone/>
-            </a:pPr>
-            <a:r>
-              <a:rPr lang="en-US" sz="1200" dirty="0">
-                <a:solidFill>
-                  <a:srgbClr val="ADADAD"/>
-                </a:solidFill>
-                <a:latin typeface="Pretendard" pitchFamily="34" charset="0"/>
-                <a:ea typeface="Pretendard" pitchFamily="34" charset="-122"/>
-                <a:cs typeface="Pretendard" pitchFamily="34" charset="-120"/>
-              </a:rPr>
-              <a:t>탭을 실수로 드래그</a:t>
-            </a:r>
-            <a:endParaRPr lang="en-US" sz="1200" dirty="0"/>
-          </a:p>
-        </p:txBody>
-      </p:sp>
-      <p:sp>
-        <p:nvSpPr>
-          <p:cNvPr id="11" name="Text 9"/>
-          <p:cNvSpPr txBox="1"/>
-          <p:nvPr/>
-        </p:nvSpPr>
-        <p:spPr>
-          <a:xfrm>
-            <a:off x="8074152" y="2926080"/>
-            <a:ext cx="3108960" cy="420624"/>
-          </a:xfrm>
-          <a:prstGeom prst="rect">
-            <a:avLst/>
-          </a:prstGeom>
-          <a:noFill/>
-          <a:ln/>
-        </p:spPr>
-        <p:txBody>
-          <a:bodyPr wrap="square" lIns="0" tIns="0" rIns="0" bIns="0" rtlCol="0" anchor="ctr"/>
-          <a:lstStyle/>
-          <a:p>
-            <a:pPr indent="0" marL="0">
-              <a:buNone/>
-            </a:pPr>
-            <a:r>
-              <a:rPr lang="en-US" sz="1200" dirty="0">
-                <a:solidFill>
-                  <a:srgbClr val="141414"/>
-                </a:solidFill>
-                <a:latin typeface="Pretendard" pitchFamily="34" charset="0"/>
-                <a:ea typeface="Pretendard" pitchFamily="34" charset="-122"/>
-                <a:cs typeface="Pretendard" pitchFamily="34" charset="-120"/>
-              </a:rPr>
-              <a:t>Window → Layouts → Default</a:t>
-            </a:r>
-            <a:endParaRPr lang="en-US" sz="1200" dirty="0"/>
-          </a:p>
-        </p:txBody>
-      </p:sp>
-      <p:sp>
-        <p:nvSpPr>
-          <p:cNvPr id="12" name="Shape 10"/>
-          <p:cNvSpPr/>
-          <p:nvPr/>
-        </p:nvSpPr>
-        <p:spPr>
-          <a:xfrm>
-            <a:off x="758952" y="3493008"/>
-            <a:ext cx="10673791" cy="0"/>
-          </a:xfrm>
-          <a:prstGeom prst="line">
-            <a:avLst/>
-          </a:prstGeom>
-          <a:noFill/>
-          <a:ln w="12700">
-            <a:solidFill>
-              <a:srgbClr val="F0F0F0"/>
-            </a:solidFill>
-            <a:prstDash val="solid"/>
-          </a:ln>
-        </p:spPr>
-      </p:sp>
-      <p:sp>
-        <p:nvSpPr>
-          <p:cNvPr id="13" name="Text 11"/>
-          <p:cNvSpPr txBox="1"/>
-          <p:nvPr/>
-        </p:nvSpPr>
-        <p:spPr>
-          <a:xfrm>
-            <a:off x="758952" y="3657600"/>
-            <a:ext cx="3749040" cy="420624"/>
-          </a:xfrm>
-          <a:prstGeom prst="rect">
-            <a:avLst/>
-          </a:prstGeom>
-          <a:noFill/>
-          <a:ln/>
-        </p:spPr>
-        <p:txBody>
-          <a:bodyPr wrap="square" lIns="0" tIns="0" rIns="0" bIns="0" rtlCol="0" anchor="ctr"/>
-          <a:lstStyle/>
-          <a:p>
-            <a:pPr indent="0" marL="0">
-              <a:buNone/>
-            </a:pPr>
-            <a:r>
-              <a:rPr lang="en-US" sz="1550" dirty="0">
-                <a:solidFill>
-                  <a:srgbClr val="141414"/>
-                </a:solidFill>
-                <a:latin typeface="Pretendard SemiBold" pitchFamily="34" charset="0"/>
-                <a:ea typeface="Pretendard SemiBold" pitchFamily="34" charset="-122"/>
-                <a:cs typeface="Pretendard SemiBold" pitchFamily="34" charset="-120"/>
-              </a:rPr>
-              <a:t>3D Rigidbody를 넣음</a:t>
-            </a:r>
-            <a:endParaRPr lang="en-US" sz="1550" dirty="0"/>
-          </a:p>
-        </p:txBody>
-      </p:sp>
-      <p:sp>
-        <p:nvSpPr>
-          <p:cNvPr id="14" name="Text 12"/>
-          <p:cNvSpPr txBox="1"/>
-          <p:nvPr/>
-        </p:nvSpPr>
-        <p:spPr>
-          <a:xfrm>
-            <a:off x="4690872" y="3657600"/>
-            <a:ext cx="3200400" cy="420624"/>
-          </a:xfrm>
-          <a:prstGeom prst="rect">
-            <a:avLst/>
-          </a:prstGeom>
-          <a:noFill/>
-          <a:ln/>
-        </p:spPr>
-        <p:txBody>
-          <a:bodyPr wrap="square" lIns="0" tIns="0" rIns="0" bIns="0" rtlCol="0" anchor="ctr"/>
-          <a:lstStyle/>
-          <a:p>
-            <a:pPr indent="0" marL="0">
-              <a:buNone/>
-            </a:pPr>
-            <a:r>
-              <a:rPr lang="en-US" sz="1200" dirty="0">
-                <a:solidFill>
-                  <a:srgbClr val="ADADAD"/>
-                </a:solidFill>
-                <a:latin typeface="Pretendard" pitchFamily="34" charset="0"/>
-                <a:ea typeface="Pretendard" pitchFamily="34" charset="-122"/>
-                <a:cs typeface="Pretendard" pitchFamily="34" charset="-120"/>
-              </a:rPr>
-              <a:t>검색 결과 첫 줄을 고름</a:t>
-            </a:r>
-            <a:endParaRPr lang="en-US" sz="1200" dirty="0"/>
-          </a:p>
-        </p:txBody>
-      </p:sp>
-      <p:sp>
-        <p:nvSpPr>
-          <p:cNvPr id="15" name="Text 13"/>
-          <p:cNvSpPr txBox="1"/>
-          <p:nvPr/>
-        </p:nvSpPr>
-        <p:spPr>
-          <a:xfrm>
-            <a:off x="8074152" y="3657600"/>
-            <a:ext cx="3108960" cy="420624"/>
-          </a:xfrm>
-          <a:prstGeom prst="rect">
-            <a:avLst/>
-          </a:prstGeom>
-          <a:noFill/>
-          <a:ln/>
-        </p:spPr>
-        <p:txBody>
-          <a:bodyPr wrap="square" lIns="0" tIns="0" rIns="0" bIns="0" rtlCol="0" anchor="ctr"/>
-          <a:lstStyle/>
-          <a:p>
-            <a:pPr indent="0" marL="0">
-              <a:buNone/>
-            </a:pPr>
-            <a:r>
-              <a:rPr lang="en-US" sz="1200" dirty="0">
-                <a:solidFill>
-                  <a:srgbClr val="141414"/>
-                </a:solidFill>
-                <a:latin typeface="Pretendard" pitchFamily="34" charset="0"/>
-                <a:ea typeface="Pretendard" pitchFamily="34" charset="-122"/>
-                <a:cs typeface="Pretendard" pitchFamily="34" charset="-120"/>
-              </a:rPr>
-              <a:t>2D가 붙은 것을 고른다</a:t>
-            </a:r>
-            <a:endParaRPr lang="en-US" sz="1200" dirty="0"/>
-          </a:p>
-        </p:txBody>
-      </p:sp>
-      <p:sp>
-        <p:nvSpPr>
-          <p:cNvPr id="16" name="Shape 14"/>
-          <p:cNvSpPr/>
-          <p:nvPr/>
-        </p:nvSpPr>
-        <p:spPr>
-          <a:xfrm>
-            <a:off x="758952" y="4224528"/>
-            <a:ext cx="10673791" cy="0"/>
-          </a:xfrm>
-          <a:prstGeom prst="line">
-            <a:avLst/>
-          </a:prstGeom>
-          <a:noFill/>
-          <a:ln w="12700">
-            <a:solidFill>
-              <a:srgbClr val="F0F0F0"/>
-            </a:solidFill>
-            <a:prstDash val="solid"/>
-          </a:ln>
-        </p:spPr>
-      </p:sp>
-      <p:sp>
-        <p:nvSpPr>
-          <p:cNvPr id="17" name="Text 15"/>
-          <p:cNvSpPr txBox="1"/>
-          <p:nvPr/>
-        </p:nvSpPr>
-        <p:spPr>
-          <a:xfrm>
-            <a:off x="758952" y="4389120"/>
-            <a:ext cx="3749040" cy="420624"/>
-          </a:xfrm>
-          <a:prstGeom prst="rect">
-            <a:avLst/>
-          </a:prstGeom>
-          <a:noFill/>
-          <a:ln/>
-        </p:spPr>
-        <p:txBody>
-          <a:bodyPr wrap="square" lIns="0" tIns="0" rIns="0" bIns="0" rtlCol="0" anchor="ctr"/>
-          <a:lstStyle/>
-          <a:p>
-            <a:pPr indent="0" marL="0">
-              <a:buNone/>
-            </a:pPr>
-            <a:r>
-              <a:rPr lang="en-US" sz="1550" dirty="0">
-                <a:solidFill>
-                  <a:srgbClr val="141414"/>
-                </a:solidFill>
-                <a:latin typeface="Pretendard SemiBold" pitchFamily="34" charset="0"/>
-                <a:ea typeface="Pretendard SemiBold" pitchFamily="34" charset="-122"/>
-                <a:cs typeface="Pretendard SemiBold" pitchFamily="34" charset="-120"/>
-              </a:rPr>
-              <a:t>자식으로 넣으니 위치가 튐</a:t>
-            </a:r>
-            <a:endParaRPr lang="en-US" sz="1550" dirty="0"/>
-          </a:p>
-        </p:txBody>
-      </p:sp>
-      <p:sp>
-        <p:nvSpPr>
-          <p:cNvPr id="18" name="Text 16"/>
-          <p:cNvSpPr txBox="1"/>
-          <p:nvPr/>
-        </p:nvSpPr>
-        <p:spPr>
-          <a:xfrm>
-            <a:off x="4690872" y="4389120"/>
-            <a:ext cx="3200400" cy="420624"/>
-          </a:xfrm>
-          <a:prstGeom prst="rect">
-            <a:avLst/>
-          </a:prstGeom>
-          <a:noFill/>
-          <a:ln/>
-        </p:spPr>
-        <p:txBody>
-          <a:bodyPr wrap="square" lIns="0" tIns="0" rIns="0" bIns="0" rtlCol="0" anchor="ctr"/>
-          <a:lstStyle/>
-          <a:p>
-            <a:pPr indent="0" marL="0">
-              <a:buNone/>
-            </a:pPr>
-            <a:r>
-              <a:rPr lang="en-US" sz="1200" dirty="0">
-                <a:solidFill>
-                  <a:srgbClr val="ADADAD"/>
-                </a:solidFill>
-                <a:latin typeface="Pretendard" pitchFamily="34" charset="0"/>
-                <a:ea typeface="Pretendard" pitchFamily="34" charset="-122"/>
-                <a:cs typeface="Pretendard" pitchFamily="34" charset="-120"/>
-              </a:rPr>
-              <a:t>좌표가 부모 기준으로 바뀜</a:t>
-            </a:r>
-            <a:endParaRPr lang="en-US" sz="1200" dirty="0"/>
-          </a:p>
-        </p:txBody>
-      </p:sp>
-      <p:sp>
-        <p:nvSpPr>
-          <p:cNvPr id="19" name="Text 17"/>
-          <p:cNvSpPr txBox="1"/>
-          <p:nvPr/>
-        </p:nvSpPr>
-        <p:spPr>
-          <a:xfrm>
-            <a:off x="8074152" y="4389120"/>
-            <a:ext cx="3108960" cy="420624"/>
-          </a:xfrm>
-          <a:prstGeom prst="rect">
-            <a:avLst/>
-          </a:prstGeom>
-          <a:noFill/>
-          <a:ln/>
-        </p:spPr>
-        <p:txBody>
-          <a:bodyPr wrap="square" lIns="0" tIns="0" rIns="0" bIns="0" rtlCol="0" anchor="ctr"/>
-          <a:lstStyle/>
-          <a:p>
-            <a:pPr indent="0" marL="0">
-              <a:buNone/>
-            </a:pPr>
-            <a:r>
-              <a:rPr lang="en-US" sz="1200" dirty="0">
-                <a:solidFill>
-                  <a:srgbClr val="141414"/>
-                </a:solidFill>
-                <a:latin typeface="Pretendard" pitchFamily="34" charset="0"/>
-                <a:ea typeface="Pretendard" pitchFamily="34" charset="-122"/>
-                <a:cs typeface="Pretendard" pitchFamily="34" charset="-120"/>
-              </a:rPr>
-              <a:t>부모에서부터 센다</a:t>
-            </a:r>
-            <a:endParaRPr lang="en-US" sz="1200" dirty="0"/>
-          </a:p>
-        </p:txBody>
-      </p:sp>
-      <p:sp>
-        <p:nvSpPr>
-          <p:cNvPr id="20" name="Shape 18"/>
-          <p:cNvSpPr/>
-          <p:nvPr/>
-        </p:nvSpPr>
-        <p:spPr>
-          <a:xfrm>
-            <a:off x="758952" y="4956048"/>
-            <a:ext cx="10673791" cy="0"/>
-          </a:xfrm>
-          <a:prstGeom prst="line">
-            <a:avLst/>
-          </a:prstGeom>
-          <a:noFill/>
-          <a:ln w="12700">
-            <a:solidFill>
-              <a:srgbClr val="F0F0F0"/>
-            </a:solidFill>
-            <a:prstDash val="solid"/>
-          </a:ln>
-        </p:spPr>
-      </p:sp>
-      <p:sp>
-        <p:nvSpPr>
-          <p:cNvPr id="21" name="Shape 19"/>
-          <p:cNvSpPr/>
-          <p:nvPr/>
-        </p:nvSpPr>
-        <p:spPr>
-          <a:xfrm>
-            <a:off x="502920" y="5029200"/>
-            <a:ext cx="11185855" cy="640080"/>
+            <a:off x="758952" y="548640"/>
+            <a:ext cx="585216" cy="274320"/>
           </a:xfrm>
           <a:prstGeom prst="roundRect">
             <a:avLst>
-              <a:gd name="adj" fmla="val 23857"/>
+              <a:gd name="adj" fmla="val 50000"/>
             </a:avLst>
           </a:prstGeom>
           <a:solidFill>
@@ -5486,30 +5156,30 @@
       </p:sp>
       <p:sp>
         <p:nvSpPr>
-          <p:cNvPr id="22" name="Text 20"/>
-          <p:cNvSpPr txBox="1"/>
-          <p:nvPr/>
-        </p:nvSpPr>
-        <p:spPr>
-          <a:xfrm>
-            <a:off x="758952" y="5120640"/>
-            <a:ext cx="3749040" cy="420624"/>
-          </a:xfrm>
-          <a:prstGeom prst="rect">
-            <a:avLst/>
-          </a:prstGeom>
-          <a:noFill/>
-          <a:ln/>
-        </p:spPr>
-        <p:txBody>
-          <a:bodyPr wrap="square" lIns="0" tIns="0" rIns="0" bIns="0" rtlCol="0" anchor="ctr"/>
-          <a:lstStyle/>
-          <a:p>
-            <a:pPr indent="0" marL="0">
-              <a:buNone/>
-            </a:pPr>
-            <a:r>
-              <a:rPr lang="en-US" sz="1550" dirty="0">
+          <p:cNvPr id="3" name="Text 1"/>
+          <p:cNvSpPr txBox="1"/>
+          <p:nvPr/>
+        </p:nvSpPr>
+        <p:spPr>
+          <a:xfrm>
+            <a:off x="758952" y="548640"/>
+            <a:ext cx="585216" cy="274320"/>
+          </a:xfrm>
+          <a:prstGeom prst="rect">
+            <a:avLst/>
+          </a:prstGeom>
+          <a:noFill/>
+          <a:ln/>
+        </p:spPr>
+        <p:txBody>
+          <a:bodyPr wrap="square" lIns="0" tIns="0" rIns="0" bIns="0" rtlCol="0" anchor="ctr"/>
+          <a:lstStyle/>
+          <a:p>
+            <a:pPr algn="ctr" indent="0" marL="0">
+              <a:buNone/>
+            </a:pPr>
+            <a:r>
+              <a:rPr lang="en-US" sz="950" dirty="0">
                 <a:solidFill>
                   <a:srgbClr val="141414"/>
                 </a:solidFill>
@@ -5517,108 +5187,108 @@
                 <a:ea typeface="Pretendard SemiBold" pitchFamily="34" charset="-122"/>
                 <a:cs typeface="Pretendard SemiBold" pitchFamily="34" charset="-120"/>
               </a:rPr>
-              <a:t>프로젝트 경로가 한글</a:t>
-            </a:r>
-            <a:endParaRPr lang="en-US" sz="1550" dirty="0"/>
-          </a:p>
-        </p:txBody>
-      </p:sp>
-      <p:sp>
-        <p:nvSpPr>
-          <p:cNvPr id="23" name="Text 21"/>
-          <p:cNvSpPr txBox="1"/>
-          <p:nvPr/>
-        </p:nvSpPr>
-        <p:spPr>
-          <a:xfrm>
-            <a:off x="4690872" y="5120640"/>
-            <a:ext cx="3200400" cy="420624"/>
-          </a:xfrm>
-          <a:prstGeom prst="rect">
-            <a:avLst/>
-          </a:prstGeom>
-          <a:noFill/>
-          <a:ln/>
-        </p:spPr>
-        <p:txBody>
-          <a:bodyPr wrap="square" lIns="0" tIns="0" rIns="0" bIns="0" rtlCol="0" anchor="ctr"/>
-          <a:lstStyle/>
-          <a:p>
-            <a:pPr indent="0" marL="0">
-              <a:buNone/>
-            </a:pPr>
-            <a:r>
-              <a:rPr lang="en-US" sz="1200" dirty="0">
-                <a:solidFill>
-                  <a:srgbClr val="ADADAD"/>
-                </a:solidFill>
-                <a:latin typeface="Pretendard" pitchFamily="34" charset="0"/>
-                <a:ea typeface="Pretendard" pitchFamily="34" charset="-122"/>
-                <a:cs typeface="Pretendard" pitchFamily="34" charset="-120"/>
-              </a:rPr>
-              <a:t>사용자 이름이 한글</a:t>
-            </a:r>
-            <a:endParaRPr lang="en-US" sz="1200" dirty="0"/>
-          </a:p>
-        </p:txBody>
-      </p:sp>
-      <p:sp>
-        <p:nvSpPr>
-          <p:cNvPr id="24" name="Text 22"/>
-          <p:cNvSpPr txBox="1"/>
-          <p:nvPr/>
-        </p:nvSpPr>
-        <p:spPr>
-          <a:xfrm>
-            <a:off x="8074152" y="5120640"/>
-            <a:ext cx="3108960" cy="420624"/>
-          </a:xfrm>
-          <a:prstGeom prst="rect">
-            <a:avLst/>
-          </a:prstGeom>
-          <a:noFill/>
-          <a:ln/>
-        </p:spPr>
-        <p:txBody>
-          <a:bodyPr wrap="square" lIns="0" tIns="0" rIns="0" bIns="0" rtlCol="0" anchor="ctr"/>
-          <a:lstStyle/>
-          <a:p>
-            <a:pPr indent="0" marL="0">
-              <a:buNone/>
-            </a:pPr>
-            <a:r>
-              <a:rPr lang="en-US" sz="1200" dirty="0">
+              <a:t>035</a:t>
+            </a:r>
+            <a:endParaRPr lang="en-US" sz="950" dirty="0"/>
+          </a:p>
+        </p:txBody>
+      </p:sp>
+      <p:sp>
+        <p:nvSpPr>
+          <p:cNvPr id="4" name="Text 2"/>
+          <p:cNvSpPr txBox="1"/>
+          <p:nvPr/>
+        </p:nvSpPr>
+        <p:spPr>
+          <a:xfrm>
+            <a:off x="758952" y="914400"/>
+            <a:ext cx="10673791" cy="457200"/>
+          </a:xfrm>
+          <a:prstGeom prst="rect">
+            <a:avLst/>
+          </a:prstGeom>
+          <a:noFill/>
+          <a:ln/>
+        </p:spPr>
+        <p:txBody>
+          <a:bodyPr wrap="square" lIns="0" tIns="0" rIns="0" bIns="0" rtlCol="0" anchor="ctr"/>
+          <a:lstStyle/>
+          <a:p>
+            <a:pPr indent="0" marL="0">
+              <a:buNone/>
+            </a:pPr>
+            <a:r>
+              <a:rPr lang="en-US" sz="2600" dirty="0">
                 <a:solidFill>
                   <a:srgbClr val="141414"/>
                 </a:solidFill>
-                <a:latin typeface="Pretendard" pitchFamily="34" charset="0"/>
-                <a:ea typeface="Pretendard" pitchFamily="34" charset="-122"/>
-                <a:cs typeface="Pretendard" pitchFamily="34" charset="-120"/>
-              </a:rPr>
-              <a:t>지금 다시 만든다</a:t>
-            </a:r>
-            <a:endParaRPr lang="en-US" sz="1200" dirty="0"/>
-          </a:p>
-        </p:txBody>
-      </p:sp>
-      <p:sp>
-        <p:nvSpPr>
-          <p:cNvPr id="25" name="Shape 23"/>
+                <a:latin typeface="Pretendard SemiBold" pitchFamily="34" charset="0"/>
+                <a:ea typeface="Pretendard SemiBold" pitchFamily="34" charset="-122"/>
+                <a:cs typeface="Pretendard SemiBold" pitchFamily="34" charset="-120"/>
+              </a:rPr>
+              <a:t>실습 — 내 놀이터 만들기.</a:t>
+            </a:r>
+            <a:endParaRPr lang="en-US" sz="2600" dirty="0"/>
+          </a:p>
+        </p:txBody>
+      </p:sp>
+      <p:sp>
+        <p:nvSpPr>
+          <p:cNvPr id="5" name="Text 3"/>
+          <p:cNvSpPr txBox="1"/>
+          <p:nvPr/>
+        </p:nvSpPr>
+        <p:spPr>
+          <a:xfrm>
+            <a:off x="758952" y="1408176"/>
+            <a:ext cx="10673791" cy="329184"/>
+          </a:xfrm>
+          <a:prstGeom prst="rect">
+            <a:avLst/>
+          </a:prstGeom>
+          <a:noFill/>
+          <a:ln/>
+        </p:spPr>
+        <p:txBody>
+          <a:bodyPr wrap="square" lIns="0" tIns="0" rIns="0" bIns="0" rtlCol="0" anchor="ctr"/>
+          <a:lstStyle/>
+          <a:p>
+            <a:pPr indent="0" marL="0">
+              <a:buNone/>
+            </a:pPr>
+            <a:r>
+              <a:rPr lang="en-US" sz="1500" dirty="0">
+                <a:solidFill>
+                  <a:srgbClr val="707070"/>
+                </a:solidFill>
+                <a:latin typeface="Pretendard Light" pitchFamily="34" charset="0"/>
+                <a:ea typeface="Pretendard Light" pitchFamily="34" charset="-122"/>
+                <a:cs typeface="Pretendard Light" pitchFamily="34" charset="-120"/>
+              </a:rPr>
+              <a:t>7주차에 배운 것만으로 장면을 구성한다.</a:t>
+            </a:r>
+            <a:endParaRPr lang="en-US" sz="1500" dirty="0"/>
+          </a:p>
+        </p:txBody>
+      </p:sp>
+      <p:sp>
+        <p:nvSpPr>
+          <p:cNvPr id="6" name="Shape 4"/>
           <p:cNvSpPr/>
           <p:nvPr/>
         </p:nvSpPr>
         <p:spPr>
           <a:xfrm>
-            <a:off x="758952" y="6053328"/>
-            <a:ext cx="4160520" cy="329184"/>
+            <a:off x="758952" y="1965960"/>
+            <a:ext cx="6629400" cy="4224528"/>
           </a:xfrm>
           <a:prstGeom prst="roundRect">
             <a:avLst>
-              <a:gd name="adj" fmla="val 50000"/>
+              <a:gd name="adj" fmla="val 5411"/>
             </a:avLst>
           </a:prstGeom>
           <a:solidFill>
-            <a:srgbClr val="0066FF"/>
+            <a:srgbClr val="F3F3F3"/>
           </a:solidFill>
           <a:ln w="12700">
             <a:solidFill>
@@ -5628,16 +5298,40 @@
           </a:ln>
         </p:spPr>
       </p:sp>
-      <p:sp>
-        <p:nvSpPr>
-          <p:cNvPr id="26" name="Text 24"/>
-          <p:cNvSpPr txBox="1"/>
-          <p:nvPr/>
-        </p:nvSpPr>
-        <p:spPr>
-          <a:xfrm>
-            <a:off x="758952" y="6053328"/>
-            <a:ext cx="4160520" cy="329184"/>
+      <p:pic>
+        <p:nvPicPr>
+          <p:cNvPr id="7" name="Image 0" descr="C:\Users\user\AppData\Local\Temp\claude\C--Users-user-Github-WaveBreaker\fd97bec6-cef8-4bf5-a447-9a0fa572b36e\scratchpad\shots2\final\035_Playground.png">    </p:cNvPr>
+          <p:cNvPicPr>
+            <a:picLocks noChangeAspect="1"/>
+          </p:cNvPicPr>
+          <p:nvPr/>
+        </p:nvPicPr>
+        <p:blipFill>
+          <a:blip r:embed="rId1"/>
+          <a:stretch>
+            <a:fillRect/>
+          </a:stretch>
+        </p:blipFill>
+        <p:spPr>
+          <a:xfrm>
+            <a:off x="960120" y="2167128"/>
+            <a:ext cx="6227064" cy="3346704"/>
+          </a:xfrm>
+          <a:prstGeom prst="rect">
+            <a:avLst/>
+          </a:prstGeom>
+        </p:spPr>
+      </p:pic>
+      <p:sp>
+        <p:nvSpPr>
+          <p:cNvPr id="8" name="Text 5"/>
+          <p:cNvSpPr txBox="1"/>
+          <p:nvPr/>
+        </p:nvSpPr>
+        <p:spPr>
+          <a:xfrm>
+            <a:off x="960120" y="5586984"/>
+            <a:ext cx="6227064" cy="310896"/>
           </a:xfrm>
           <a:prstGeom prst="rect">
             <a:avLst/>
@@ -5655,13 +5349,52 @@
             <a:r>
               <a:rPr lang="en-US" sz="950" dirty="0">
                 <a:solidFill>
-                  <a:srgbClr val="FFFFFF"/>
+                  <a:srgbClr val="ADADAD"/>
+                </a:solidFill>
+                <a:latin typeface="Pretendard" pitchFamily="34" charset="0"/>
+                <a:ea typeface="Pretendard" pitchFamily="34" charset="-122"/>
+                <a:cs typeface="Pretendard" pitchFamily="34" charset="-120"/>
+              </a:rPr>
+              <a:t>완성 예시 — Play 중</a:t>
+            </a:r>
+            <a:endParaRPr lang="en-US" sz="950" dirty="0"/>
+          </a:p>
+        </p:txBody>
+      </p:sp>
+      <p:sp>
+        <p:nvSpPr>
+          <p:cNvPr id="9" name="Text 6"/>
+          <p:cNvSpPr txBox="1"/>
+          <p:nvPr/>
+        </p:nvSpPr>
+        <p:spPr>
+          <a:xfrm>
+            <a:off x="7818120" y="1965960"/>
+            <a:ext cx="3614623" cy="274320"/>
+          </a:xfrm>
+          <a:prstGeom prst="rect">
+            <a:avLst/>
+          </a:prstGeom>
+          <a:noFill/>
+          <a:ln/>
+        </p:spPr>
+        <p:txBody>
+          <a:bodyPr wrap="square" lIns="0" tIns="0" rIns="0" bIns="0" rtlCol="0" anchor="ctr"/>
+          <a:lstStyle/>
+          <a:p>
+            <a:pPr indent="0" marL="0">
+              <a:buNone/>
+            </a:pPr>
+            <a:r>
+              <a:rPr lang="en-US" sz="950" dirty="0">
+                <a:solidFill>
+                  <a:srgbClr val="707070"/>
                 </a:solidFill>
                 <a:latin typeface="Pretendard SemiBold" pitchFamily="34" charset="0"/>
                 <a:ea typeface="Pretendard SemiBold" pitchFamily="34" charset="-122"/>
                 <a:cs typeface="Pretendard SemiBold" pitchFamily="34" charset="-120"/>
               </a:rPr>
-              <a:t>경로 문제는 21주차 빌드에서 터진다</a:t>
+              <a:t>요구 조건</a:t>
             </a:r>
             <a:endParaRPr lang="en-US" sz="950" dirty="0"/>
           </a:p>
@@ -5669,14 +5402,37 @@
       </p:sp>
       <p:sp>
         <p:nvSpPr>
-          <p:cNvPr id="27" name="Text 25"/>
-          <p:cNvSpPr txBox="1"/>
-          <p:nvPr/>
-        </p:nvSpPr>
-        <p:spPr>
-          <a:xfrm>
-            <a:off x="5239512" y="6053328"/>
-            <a:ext cx="5943600" cy="329184"/>
+          <p:cNvPr id="10" name="Shape 7"/>
+          <p:cNvSpPr/>
+          <p:nvPr/>
+        </p:nvSpPr>
+        <p:spPr>
+          <a:xfrm>
+            <a:off x="7818120" y="2377440"/>
+            <a:ext cx="3614623" cy="0"/>
+          </a:xfrm>
+          <a:prstGeom prst="line">
+            <a:avLst/>
+          </a:prstGeom>
+          <a:noFill/>
+          <a:ln w="12700">
+            <a:solidFill>
+              <a:srgbClr val="E0E0E0"/>
+            </a:solidFill>
+            <a:prstDash val="solid"/>
+          </a:ln>
+        </p:spPr>
+      </p:sp>
+      <p:sp>
+        <p:nvSpPr>
+          <p:cNvPr id="11" name="Text 8"/>
+          <p:cNvSpPr txBox="1"/>
+          <p:nvPr/>
+        </p:nvSpPr>
+        <p:spPr>
+          <a:xfrm>
+            <a:off x="7818120" y="2560320"/>
+            <a:ext cx="3614623" cy="365760"/>
           </a:xfrm>
           <a:prstGeom prst="rect">
             <a:avLst/>
@@ -5694,17 +5450,350 @@
             <a:r>
               <a:rPr lang="en-US" sz="1200" dirty="0">
                 <a:solidFill>
-                  <a:srgbClr val="707070"/>
-                </a:solidFill>
-                <a:latin typeface="Pretendard Light" pitchFamily="34" charset="0"/>
-                <a:ea typeface="Pretendard Light" pitchFamily="34" charset="-122"/>
-                <a:cs typeface="Pretendard Light" pitchFamily="34" charset="-120"/>
-              </a:rPr>
-              <a:t>그때 고치면 프로젝트를 다시 만들어야 한다. 031회차에 못을 박는다.</a:t>
+                  <a:srgbClr val="141414"/>
+                </a:solidFill>
+                <a:latin typeface="Pretendard" pitchFamily="34" charset="0"/>
+                <a:ea typeface="Pretendard" pitchFamily="34" charset="-122"/>
+                <a:cs typeface="Pretendard" pitchFamily="34" charset="-120"/>
+              </a:rPr>
+              <a:t>바닥 (Collider 있음, Rigidbody 없음)</a:t>
             </a:r>
             <a:endParaRPr lang="en-US" sz="1200" dirty="0"/>
           </a:p>
         </p:txBody>
+      </p:sp>
+      <p:sp>
+        <p:nvSpPr>
+          <p:cNvPr id="12" name="Shape 9"/>
+          <p:cNvSpPr/>
+          <p:nvPr/>
+        </p:nvSpPr>
+        <p:spPr>
+          <a:xfrm>
+            <a:off x="7818120" y="3035808"/>
+            <a:ext cx="3614623" cy="0"/>
+          </a:xfrm>
+          <a:prstGeom prst="line">
+            <a:avLst/>
+          </a:prstGeom>
+          <a:noFill/>
+          <a:ln w="12700">
+            <a:solidFill>
+              <a:srgbClr val="F0F0F0"/>
+            </a:solidFill>
+            <a:prstDash val="solid"/>
+          </a:ln>
+        </p:spPr>
+      </p:sp>
+      <p:sp>
+        <p:nvSpPr>
+          <p:cNvPr id="13" name="Text 10"/>
+          <p:cNvSpPr txBox="1"/>
+          <p:nvPr/>
+        </p:nvSpPr>
+        <p:spPr>
+          <a:xfrm>
+            <a:off x="7818120" y="3145536"/>
+            <a:ext cx="3614623" cy="365760"/>
+          </a:xfrm>
+          <a:prstGeom prst="rect">
+            <a:avLst/>
+          </a:prstGeom>
+          <a:noFill/>
+          <a:ln/>
+        </p:spPr>
+        <p:txBody>
+          <a:bodyPr wrap="square" lIns="0" tIns="0" rIns="0" bIns="0" rtlCol="0" anchor="ctr"/>
+          <a:lstStyle/>
+          <a:p>
+            <a:pPr indent="0" marL="0">
+              <a:buNone/>
+            </a:pPr>
+            <a:r>
+              <a:rPr lang="en-US" sz="1200" dirty="0">
+                <a:solidFill>
+                  <a:srgbClr val="141414"/>
+                </a:solidFill>
+                <a:latin typeface="Pretendard" pitchFamily="34" charset="0"/>
+                <a:ea typeface="Pretendard" pitchFamily="34" charset="-122"/>
+                <a:cs typeface="Pretendard" pitchFamily="34" charset="-120"/>
+              </a:rPr>
+              <a:t>떨어지는 물체 3개 이상</a:t>
+            </a:r>
+            <a:endParaRPr lang="en-US" sz="1200" dirty="0"/>
+          </a:p>
+        </p:txBody>
+      </p:sp>
+      <p:sp>
+        <p:nvSpPr>
+          <p:cNvPr id="14" name="Shape 11"/>
+          <p:cNvSpPr/>
+          <p:nvPr/>
+        </p:nvSpPr>
+        <p:spPr>
+          <a:xfrm>
+            <a:off x="7818120" y="3621024"/>
+            <a:ext cx="3614623" cy="0"/>
+          </a:xfrm>
+          <a:prstGeom prst="line">
+            <a:avLst/>
+          </a:prstGeom>
+          <a:noFill/>
+          <a:ln w="12700">
+            <a:solidFill>
+              <a:srgbClr val="F0F0F0"/>
+            </a:solidFill>
+            <a:prstDash val="solid"/>
+          </a:ln>
+        </p:spPr>
+      </p:sp>
+      <p:sp>
+        <p:nvSpPr>
+          <p:cNvPr id="15" name="Text 12"/>
+          <p:cNvSpPr txBox="1"/>
+          <p:nvPr/>
+        </p:nvSpPr>
+        <p:spPr>
+          <a:xfrm>
+            <a:off x="7818120" y="3730752"/>
+            <a:ext cx="3614623" cy="365760"/>
+          </a:xfrm>
+          <a:prstGeom prst="rect">
+            <a:avLst/>
+          </a:prstGeom>
+          <a:noFill/>
+          <a:ln/>
+        </p:spPr>
+        <p:txBody>
+          <a:bodyPr wrap="square" lIns="0" tIns="0" rIns="0" bIns="0" rtlCol="0" anchor="ctr"/>
+          <a:lstStyle/>
+          <a:p>
+            <a:pPr indent="0" marL="0">
+              <a:buNone/>
+            </a:pPr>
+            <a:r>
+              <a:rPr lang="en-US" sz="1200" dirty="0">
+                <a:solidFill>
+                  <a:srgbClr val="141414"/>
+                </a:solidFill>
+                <a:latin typeface="Pretendard" pitchFamily="34" charset="0"/>
+                <a:ea typeface="Pretendard" pitchFamily="34" charset="-122"/>
+                <a:cs typeface="Pretendard" pitchFamily="34" charset="-120"/>
+              </a:rPr>
+              <a:t>부모자식 구조 최소 한 곳</a:t>
+            </a:r>
+            <a:endParaRPr lang="en-US" sz="1200" dirty="0"/>
+          </a:p>
+        </p:txBody>
+      </p:sp>
+      <p:sp>
+        <p:nvSpPr>
+          <p:cNvPr id="16" name="Shape 13"/>
+          <p:cNvSpPr/>
+          <p:nvPr/>
+        </p:nvSpPr>
+        <p:spPr>
+          <a:xfrm>
+            <a:off x="7818120" y="4206240"/>
+            <a:ext cx="3614623" cy="0"/>
+          </a:xfrm>
+          <a:prstGeom prst="line">
+            <a:avLst/>
+          </a:prstGeom>
+          <a:noFill/>
+          <a:ln w="12700">
+            <a:solidFill>
+              <a:srgbClr val="F0F0F0"/>
+            </a:solidFill>
+            <a:prstDash val="solid"/>
+          </a:ln>
+        </p:spPr>
+      </p:sp>
+      <p:sp>
+        <p:nvSpPr>
+          <p:cNvPr id="17" name="Text 14"/>
+          <p:cNvSpPr txBox="1"/>
+          <p:nvPr/>
+        </p:nvSpPr>
+        <p:spPr>
+          <a:xfrm>
+            <a:off x="7818120" y="4315968"/>
+            <a:ext cx="3614623" cy="365760"/>
+          </a:xfrm>
+          <a:prstGeom prst="rect">
+            <a:avLst/>
+          </a:prstGeom>
+          <a:noFill/>
+          <a:ln/>
+        </p:spPr>
+        <p:txBody>
+          <a:bodyPr wrap="square" lIns="0" tIns="0" rIns="0" bIns="0" rtlCol="0" anchor="ctr"/>
+          <a:lstStyle/>
+          <a:p>
+            <a:pPr indent="0" marL="0">
+              <a:buNone/>
+            </a:pPr>
+            <a:r>
+              <a:rPr lang="en-US" sz="1200" dirty="0">
+                <a:solidFill>
+                  <a:srgbClr val="141414"/>
+                </a:solidFill>
+                <a:latin typeface="Pretendard" pitchFamily="34" charset="0"/>
+                <a:ea typeface="Pretendard" pitchFamily="34" charset="-122"/>
+                <a:cs typeface="Pretendard" pitchFamily="34" charset="-120"/>
+              </a:rPr>
+              <a:t>회전된 물체 하나</a:t>
+            </a:r>
+            <a:endParaRPr lang="en-US" sz="1200" dirty="0"/>
+          </a:p>
+        </p:txBody>
+      </p:sp>
+      <p:sp>
+        <p:nvSpPr>
+          <p:cNvPr id="18" name="Shape 15"/>
+          <p:cNvSpPr/>
+          <p:nvPr/>
+        </p:nvSpPr>
+        <p:spPr>
+          <a:xfrm>
+            <a:off x="7818120" y="4791456"/>
+            <a:ext cx="3614623" cy="0"/>
+          </a:xfrm>
+          <a:prstGeom prst="line">
+            <a:avLst/>
+          </a:prstGeom>
+          <a:noFill/>
+          <a:ln w="12700">
+            <a:solidFill>
+              <a:srgbClr val="F0F0F0"/>
+            </a:solidFill>
+            <a:prstDash val="solid"/>
+          </a:ln>
+        </p:spPr>
+      </p:sp>
+      <p:sp>
+        <p:nvSpPr>
+          <p:cNvPr id="19" name="Text 16"/>
+          <p:cNvSpPr txBox="1"/>
+          <p:nvPr/>
+        </p:nvSpPr>
+        <p:spPr>
+          <a:xfrm>
+            <a:off x="7818120" y="4901184"/>
+            <a:ext cx="3614623" cy="365760"/>
+          </a:xfrm>
+          <a:prstGeom prst="rect">
+            <a:avLst/>
+          </a:prstGeom>
+          <a:noFill/>
+          <a:ln/>
+        </p:spPr>
+        <p:txBody>
+          <a:bodyPr wrap="square" lIns="0" tIns="0" rIns="0" bIns="0" rtlCol="0" anchor="ctr"/>
+          <a:lstStyle/>
+          <a:p>
+            <a:pPr indent="0" marL="0">
+              <a:buNone/>
+            </a:pPr>
+            <a:r>
+              <a:rPr lang="en-US" sz="1200" dirty="0">
+                <a:solidFill>
+                  <a:srgbClr val="141414"/>
+                </a:solidFill>
+                <a:latin typeface="Pretendard" pitchFamily="34" charset="0"/>
+                <a:ea typeface="Pretendard" pitchFamily="34" charset="-122"/>
+                <a:cs typeface="Pretendard" pitchFamily="34" charset="-120"/>
+              </a:rPr>
+              <a:t>뒤집힌 물체 하나</a:t>
+            </a:r>
+            <a:endParaRPr lang="en-US" sz="1200" dirty="0"/>
+          </a:p>
+        </p:txBody>
+      </p:sp>
+      <p:sp>
+        <p:nvSpPr>
+          <p:cNvPr id="20" name="Shape 17"/>
+          <p:cNvSpPr/>
+          <p:nvPr/>
+        </p:nvSpPr>
+        <p:spPr>
+          <a:xfrm>
+            <a:off x="7818120" y="5376672"/>
+            <a:ext cx="3614623" cy="0"/>
+          </a:xfrm>
+          <a:prstGeom prst="line">
+            <a:avLst/>
+          </a:prstGeom>
+          <a:noFill/>
+          <a:ln w="12700">
+            <a:solidFill>
+              <a:srgbClr val="F0F0F0"/>
+            </a:solidFill>
+            <a:prstDash val="solid"/>
+          </a:ln>
+        </p:spPr>
+      </p:sp>
+      <p:sp>
+        <p:nvSpPr>
+          <p:cNvPr id="21" name="Text 18"/>
+          <p:cNvSpPr txBox="1"/>
+          <p:nvPr/>
+        </p:nvSpPr>
+        <p:spPr>
+          <a:xfrm>
+            <a:off x="7818120" y="5486400"/>
+            <a:ext cx="3614623" cy="365760"/>
+          </a:xfrm>
+          <a:prstGeom prst="rect">
+            <a:avLst/>
+          </a:prstGeom>
+          <a:noFill/>
+          <a:ln/>
+        </p:spPr>
+        <p:txBody>
+          <a:bodyPr wrap="square" lIns="0" tIns="0" rIns="0" bIns="0" rtlCol="0" anchor="ctr"/>
+          <a:lstStyle/>
+          <a:p>
+            <a:pPr indent="0" marL="0">
+              <a:buNone/>
+            </a:pPr>
+            <a:r>
+              <a:rPr lang="en-US" sz="1200" dirty="0">
+                <a:solidFill>
+                  <a:srgbClr val="141414"/>
+                </a:solidFill>
+                <a:latin typeface="Pretendard" pitchFamily="34" charset="0"/>
+                <a:ea typeface="Pretendard" pitchFamily="34" charset="-122"/>
+                <a:cs typeface="Pretendard" pitchFamily="34" charset="-120"/>
+              </a:rPr>
+              <a:t>이름 정리, 좌표는 정수로</a:t>
+            </a:r>
+            <a:endParaRPr lang="en-US" sz="1200" dirty="0"/>
+          </a:p>
+        </p:txBody>
+      </p:sp>
+      <p:sp>
+        <p:nvSpPr>
+          <p:cNvPr id="22" name="Shape 19"/>
+          <p:cNvSpPr/>
+          <p:nvPr/>
+        </p:nvSpPr>
+        <p:spPr>
+          <a:xfrm>
+            <a:off x="7818120" y="5961888"/>
+            <a:ext cx="3614623" cy="0"/>
+          </a:xfrm>
+          <a:prstGeom prst="line">
+            <a:avLst/>
+          </a:prstGeom>
+          <a:noFill/>
+          <a:ln w="12700">
+            <a:solidFill>
+              <a:srgbClr val="F0F0F0"/>
+            </a:solidFill>
+            <a:prstDash val="solid"/>
+          </a:ln>
+        </p:spPr>
       </p:sp>
     </p:spTree>
   </p:cSld>
@@ -5771,6 +5860,948 @@
                 <a:ea typeface="Pretendard SemiBold" pitchFamily="34" charset="-122"/>
                 <a:cs typeface="Pretendard SemiBold" pitchFamily="34" charset="-120"/>
               </a:rPr>
+              <a:t>이번 주 흔한 사고.</a:t>
+            </a:r>
+            <a:endParaRPr lang="en-US" sz="2600" dirty="0"/>
+          </a:p>
+        </p:txBody>
+      </p:sp>
+      <p:sp>
+        <p:nvSpPr>
+          <p:cNvPr id="3" name="Text 1"/>
+          <p:cNvSpPr txBox="1"/>
+          <p:nvPr/>
+        </p:nvSpPr>
+        <p:spPr>
+          <a:xfrm>
+            <a:off x="758952" y="1060704"/>
+            <a:ext cx="10673791" cy="329184"/>
+          </a:xfrm>
+          <a:prstGeom prst="rect">
+            <a:avLst/>
+          </a:prstGeom>
+          <a:noFill/>
+          <a:ln/>
+        </p:spPr>
+        <p:txBody>
+          <a:bodyPr wrap="square" lIns="0" tIns="0" rIns="0" bIns="0" rtlCol="0" anchor="ctr"/>
+          <a:lstStyle/>
+          <a:p>
+            <a:pPr indent="0" marL="0">
+              <a:buNone/>
+            </a:pPr>
+            <a:r>
+              <a:rPr lang="en-US" sz="1500" dirty="0">
+                <a:solidFill>
+                  <a:srgbClr val="707070"/>
+                </a:solidFill>
+                <a:latin typeface="Pretendard Light" pitchFamily="34" charset="0"/>
+                <a:ea typeface="Pretendard Light" pitchFamily="34" charset="-122"/>
+                <a:cs typeface="Pretendard Light" pitchFamily="34" charset="-120"/>
+              </a:rPr>
+              <a:t>미리 알고 있으면 대응이 빨라진다. 강사용.</a:t>
+            </a:r>
+            <a:endParaRPr lang="en-US" sz="1500" dirty="0"/>
+          </a:p>
+        </p:txBody>
+      </p:sp>
+      <p:sp>
+        <p:nvSpPr>
+          <p:cNvPr id="4" name="Shape 2"/>
+          <p:cNvSpPr/>
+          <p:nvPr/>
+        </p:nvSpPr>
+        <p:spPr>
+          <a:xfrm>
+            <a:off x="758952" y="2011680"/>
+            <a:ext cx="10673791" cy="0"/>
+          </a:xfrm>
+          <a:prstGeom prst="line">
+            <a:avLst/>
+          </a:prstGeom>
+          <a:noFill/>
+          <a:ln w="12700">
+            <a:solidFill>
+              <a:srgbClr val="E0E0E0"/>
+            </a:solidFill>
+            <a:prstDash val="solid"/>
+          </a:ln>
+        </p:spPr>
+      </p:sp>
+      <p:sp>
+        <p:nvSpPr>
+          <p:cNvPr id="5" name="Text 3"/>
+          <p:cNvSpPr txBox="1"/>
+          <p:nvPr/>
+        </p:nvSpPr>
+        <p:spPr>
+          <a:xfrm>
+            <a:off x="758952" y="2194560"/>
+            <a:ext cx="3749040" cy="420624"/>
+          </a:xfrm>
+          <a:prstGeom prst="rect">
+            <a:avLst/>
+          </a:prstGeom>
+          <a:noFill/>
+          <a:ln/>
+        </p:spPr>
+        <p:txBody>
+          <a:bodyPr wrap="square" lIns="0" tIns="0" rIns="0" bIns="0" rtlCol="0" anchor="ctr"/>
+          <a:lstStyle/>
+          <a:p>
+            <a:pPr indent="0" marL="0">
+              <a:buNone/>
+            </a:pPr>
+            <a:r>
+              <a:rPr lang="en-US" sz="1550" dirty="0">
+                <a:solidFill>
+                  <a:srgbClr val="141414"/>
+                </a:solidFill>
+                <a:latin typeface="Pretendard SemiBold" pitchFamily="34" charset="0"/>
+                <a:ea typeface="Pretendard SemiBold" pitchFamily="34" charset="-122"/>
+                <a:cs typeface="Pretendard SemiBold" pitchFamily="34" charset="-120"/>
+              </a:rPr>
+              <a:t>물체가 안 보여요</a:t>
+            </a:r>
+            <a:endParaRPr lang="en-US" sz="1550" dirty="0"/>
+          </a:p>
+        </p:txBody>
+      </p:sp>
+      <p:sp>
+        <p:nvSpPr>
+          <p:cNvPr id="6" name="Text 4"/>
+          <p:cNvSpPr txBox="1"/>
+          <p:nvPr/>
+        </p:nvSpPr>
+        <p:spPr>
+          <a:xfrm>
+            <a:off x="4690872" y="2194560"/>
+            <a:ext cx="3200400" cy="420624"/>
+          </a:xfrm>
+          <a:prstGeom prst="rect">
+            <a:avLst/>
+          </a:prstGeom>
+          <a:noFill/>
+          <a:ln/>
+        </p:spPr>
+        <p:txBody>
+          <a:bodyPr wrap="square" lIns="0" tIns="0" rIns="0" bIns="0" rtlCol="0" anchor="ctr"/>
+          <a:lstStyle/>
+          <a:p>
+            <a:pPr indent="0" marL="0">
+              <a:buNone/>
+            </a:pPr>
+            <a:r>
+              <a:rPr lang="en-US" sz="1200" dirty="0">
+                <a:solidFill>
+                  <a:srgbClr val="ADADAD"/>
+                </a:solidFill>
+                <a:latin typeface="Pretendard" pitchFamily="34" charset="0"/>
+                <a:ea typeface="Pretendard" pitchFamily="34" charset="-122"/>
+                <a:cs typeface="Pretendard" pitchFamily="34" charset="-120"/>
+              </a:rPr>
+              <a:t>화면 밖 또는 카메라 밖</a:t>
+            </a:r>
+            <a:endParaRPr lang="en-US" sz="1200" dirty="0"/>
+          </a:p>
+        </p:txBody>
+      </p:sp>
+      <p:sp>
+        <p:nvSpPr>
+          <p:cNvPr id="7" name="Text 5"/>
+          <p:cNvSpPr txBox="1"/>
+          <p:nvPr/>
+        </p:nvSpPr>
+        <p:spPr>
+          <a:xfrm>
+            <a:off x="8074152" y="2194560"/>
+            <a:ext cx="3108960" cy="420624"/>
+          </a:xfrm>
+          <a:prstGeom prst="rect">
+            <a:avLst/>
+          </a:prstGeom>
+          <a:noFill/>
+          <a:ln/>
+        </p:spPr>
+        <p:txBody>
+          <a:bodyPr wrap="square" lIns="0" tIns="0" rIns="0" bIns="0" rtlCol="0" anchor="ctr"/>
+          <a:lstStyle/>
+          <a:p>
+            <a:pPr indent="0" marL="0">
+              <a:buNone/>
+            </a:pPr>
+            <a:r>
+              <a:rPr lang="en-US" sz="1200" dirty="0">
+                <a:solidFill>
+                  <a:srgbClr val="141414"/>
+                </a:solidFill>
+                <a:latin typeface="Pretendard" pitchFamily="34" charset="0"/>
+                <a:ea typeface="Pretendard" pitchFamily="34" charset="-122"/>
+                <a:cs typeface="Pretendard" pitchFamily="34" charset="-120"/>
+              </a:rPr>
+              <a:t>클릭하고 F</a:t>
+            </a:r>
+            <a:endParaRPr lang="en-US" sz="1200" dirty="0"/>
+          </a:p>
+        </p:txBody>
+      </p:sp>
+      <p:sp>
+        <p:nvSpPr>
+          <p:cNvPr id="8" name="Shape 6"/>
+          <p:cNvSpPr/>
+          <p:nvPr/>
+        </p:nvSpPr>
+        <p:spPr>
+          <a:xfrm>
+            <a:off x="758952" y="2761488"/>
+            <a:ext cx="10673791" cy="0"/>
+          </a:xfrm>
+          <a:prstGeom prst="line">
+            <a:avLst/>
+          </a:prstGeom>
+          <a:noFill/>
+          <a:ln w="12700">
+            <a:solidFill>
+              <a:srgbClr val="F0F0F0"/>
+            </a:solidFill>
+            <a:prstDash val="solid"/>
+          </a:ln>
+        </p:spPr>
+      </p:sp>
+      <p:sp>
+        <p:nvSpPr>
+          <p:cNvPr id="9" name="Text 7"/>
+          <p:cNvSpPr txBox="1"/>
+          <p:nvPr/>
+        </p:nvSpPr>
+        <p:spPr>
+          <a:xfrm>
+            <a:off x="758952" y="2926080"/>
+            <a:ext cx="3749040" cy="420624"/>
+          </a:xfrm>
+          <a:prstGeom prst="rect">
+            <a:avLst/>
+          </a:prstGeom>
+          <a:noFill/>
+          <a:ln/>
+        </p:spPr>
+        <p:txBody>
+          <a:bodyPr wrap="square" lIns="0" tIns="0" rIns="0" bIns="0" rtlCol="0" anchor="ctr"/>
+          <a:lstStyle/>
+          <a:p>
+            <a:pPr indent="0" marL="0">
+              <a:buNone/>
+            </a:pPr>
+            <a:r>
+              <a:rPr lang="en-US" sz="1550" dirty="0">
+                <a:solidFill>
+                  <a:srgbClr val="141414"/>
+                </a:solidFill>
+                <a:latin typeface="Pretendard SemiBold" pitchFamily="34" charset="0"/>
+                <a:ea typeface="Pretendard SemiBold" pitchFamily="34" charset="-122"/>
+                <a:cs typeface="Pretendard SemiBold" pitchFamily="34" charset="-120"/>
+              </a:rPr>
+              <a:t>창을 닫아버림</a:t>
+            </a:r>
+            <a:endParaRPr lang="en-US" sz="1550" dirty="0"/>
+          </a:p>
+        </p:txBody>
+      </p:sp>
+      <p:sp>
+        <p:nvSpPr>
+          <p:cNvPr id="10" name="Text 8"/>
+          <p:cNvSpPr txBox="1"/>
+          <p:nvPr/>
+        </p:nvSpPr>
+        <p:spPr>
+          <a:xfrm>
+            <a:off x="4690872" y="2926080"/>
+            <a:ext cx="3200400" cy="420624"/>
+          </a:xfrm>
+          <a:prstGeom prst="rect">
+            <a:avLst/>
+          </a:prstGeom>
+          <a:noFill/>
+          <a:ln/>
+        </p:spPr>
+        <p:txBody>
+          <a:bodyPr wrap="square" lIns="0" tIns="0" rIns="0" bIns="0" rtlCol="0" anchor="ctr"/>
+          <a:lstStyle/>
+          <a:p>
+            <a:pPr indent="0" marL="0">
+              <a:buNone/>
+            </a:pPr>
+            <a:r>
+              <a:rPr lang="en-US" sz="1200" dirty="0">
+                <a:solidFill>
+                  <a:srgbClr val="ADADAD"/>
+                </a:solidFill>
+                <a:latin typeface="Pretendard" pitchFamily="34" charset="0"/>
+                <a:ea typeface="Pretendard" pitchFamily="34" charset="-122"/>
+                <a:cs typeface="Pretendard" pitchFamily="34" charset="-120"/>
+              </a:rPr>
+              <a:t>탭을 실수로 드래그</a:t>
+            </a:r>
+            <a:endParaRPr lang="en-US" sz="1200" dirty="0"/>
+          </a:p>
+        </p:txBody>
+      </p:sp>
+      <p:sp>
+        <p:nvSpPr>
+          <p:cNvPr id="11" name="Text 9"/>
+          <p:cNvSpPr txBox="1"/>
+          <p:nvPr/>
+        </p:nvSpPr>
+        <p:spPr>
+          <a:xfrm>
+            <a:off x="8074152" y="2926080"/>
+            <a:ext cx="3108960" cy="420624"/>
+          </a:xfrm>
+          <a:prstGeom prst="rect">
+            <a:avLst/>
+          </a:prstGeom>
+          <a:noFill/>
+          <a:ln/>
+        </p:spPr>
+        <p:txBody>
+          <a:bodyPr wrap="square" lIns="0" tIns="0" rIns="0" bIns="0" rtlCol="0" anchor="ctr"/>
+          <a:lstStyle/>
+          <a:p>
+            <a:pPr indent="0" marL="0">
+              <a:buNone/>
+            </a:pPr>
+            <a:r>
+              <a:rPr lang="en-US" sz="1200" dirty="0">
+                <a:solidFill>
+                  <a:srgbClr val="141414"/>
+                </a:solidFill>
+                <a:latin typeface="Pretendard" pitchFamily="34" charset="0"/>
+                <a:ea typeface="Pretendard" pitchFamily="34" charset="-122"/>
+                <a:cs typeface="Pretendard" pitchFamily="34" charset="-120"/>
+              </a:rPr>
+              <a:t>Window → Layouts → Default</a:t>
+            </a:r>
+            <a:endParaRPr lang="en-US" sz="1200" dirty="0"/>
+          </a:p>
+        </p:txBody>
+      </p:sp>
+      <p:sp>
+        <p:nvSpPr>
+          <p:cNvPr id="12" name="Shape 10"/>
+          <p:cNvSpPr/>
+          <p:nvPr/>
+        </p:nvSpPr>
+        <p:spPr>
+          <a:xfrm>
+            <a:off x="758952" y="3493008"/>
+            <a:ext cx="10673791" cy="0"/>
+          </a:xfrm>
+          <a:prstGeom prst="line">
+            <a:avLst/>
+          </a:prstGeom>
+          <a:noFill/>
+          <a:ln w="12700">
+            <a:solidFill>
+              <a:srgbClr val="F0F0F0"/>
+            </a:solidFill>
+            <a:prstDash val="solid"/>
+          </a:ln>
+        </p:spPr>
+      </p:sp>
+      <p:sp>
+        <p:nvSpPr>
+          <p:cNvPr id="13" name="Text 11"/>
+          <p:cNvSpPr txBox="1"/>
+          <p:nvPr/>
+        </p:nvSpPr>
+        <p:spPr>
+          <a:xfrm>
+            <a:off x="758952" y="3657600"/>
+            <a:ext cx="3749040" cy="420624"/>
+          </a:xfrm>
+          <a:prstGeom prst="rect">
+            <a:avLst/>
+          </a:prstGeom>
+          <a:noFill/>
+          <a:ln/>
+        </p:spPr>
+        <p:txBody>
+          <a:bodyPr wrap="square" lIns="0" tIns="0" rIns="0" bIns="0" rtlCol="0" anchor="ctr"/>
+          <a:lstStyle/>
+          <a:p>
+            <a:pPr indent="0" marL="0">
+              <a:buNone/>
+            </a:pPr>
+            <a:r>
+              <a:rPr lang="en-US" sz="1550" dirty="0">
+                <a:solidFill>
+                  <a:srgbClr val="141414"/>
+                </a:solidFill>
+                <a:latin typeface="Pretendard SemiBold" pitchFamily="34" charset="0"/>
+                <a:ea typeface="Pretendard SemiBold" pitchFamily="34" charset="-122"/>
+                <a:cs typeface="Pretendard SemiBold" pitchFamily="34" charset="-120"/>
+              </a:rPr>
+              <a:t>3D Rigidbody를 넣음</a:t>
+            </a:r>
+            <a:endParaRPr lang="en-US" sz="1550" dirty="0"/>
+          </a:p>
+        </p:txBody>
+      </p:sp>
+      <p:sp>
+        <p:nvSpPr>
+          <p:cNvPr id="14" name="Text 12"/>
+          <p:cNvSpPr txBox="1"/>
+          <p:nvPr/>
+        </p:nvSpPr>
+        <p:spPr>
+          <a:xfrm>
+            <a:off x="4690872" y="3657600"/>
+            <a:ext cx="3200400" cy="420624"/>
+          </a:xfrm>
+          <a:prstGeom prst="rect">
+            <a:avLst/>
+          </a:prstGeom>
+          <a:noFill/>
+          <a:ln/>
+        </p:spPr>
+        <p:txBody>
+          <a:bodyPr wrap="square" lIns="0" tIns="0" rIns="0" bIns="0" rtlCol="0" anchor="ctr"/>
+          <a:lstStyle/>
+          <a:p>
+            <a:pPr indent="0" marL="0">
+              <a:buNone/>
+            </a:pPr>
+            <a:r>
+              <a:rPr lang="en-US" sz="1200" dirty="0">
+                <a:solidFill>
+                  <a:srgbClr val="ADADAD"/>
+                </a:solidFill>
+                <a:latin typeface="Pretendard" pitchFamily="34" charset="0"/>
+                <a:ea typeface="Pretendard" pitchFamily="34" charset="-122"/>
+                <a:cs typeface="Pretendard" pitchFamily="34" charset="-120"/>
+              </a:rPr>
+              <a:t>검색 결과 첫 줄을 고름</a:t>
+            </a:r>
+            <a:endParaRPr lang="en-US" sz="1200" dirty="0"/>
+          </a:p>
+        </p:txBody>
+      </p:sp>
+      <p:sp>
+        <p:nvSpPr>
+          <p:cNvPr id="15" name="Text 13"/>
+          <p:cNvSpPr txBox="1"/>
+          <p:nvPr/>
+        </p:nvSpPr>
+        <p:spPr>
+          <a:xfrm>
+            <a:off x="8074152" y="3657600"/>
+            <a:ext cx="3108960" cy="420624"/>
+          </a:xfrm>
+          <a:prstGeom prst="rect">
+            <a:avLst/>
+          </a:prstGeom>
+          <a:noFill/>
+          <a:ln/>
+        </p:spPr>
+        <p:txBody>
+          <a:bodyPr wrap="square" lIns="0" tIns="0" rIns="0" bIns="0" rtlCol="0" anchor="ctr"/>
+          <a:lstStyle/>
+          <a:p>
+            <a:pPr indent="0" marL="0">
+              <a:buNone/>
+            </a:pPr>
+            <a:r>
+              <a:rPr lang="en-US" sz="1200" dirty="0">
+                <a:solidFill>
+                  <a:srgbClr val="141414"/>
+                </a:solidFill>
+                <a:latin typeface="Pretendard" pitchFamily="34" charset="0"/>
+                <a:ea typeface="Pretendard" pitchFamily="34" charset="-122"/>
+                <a:cs typeface="Pretendard" pitchFamily="34" charset="-120"/>
+              </a:rPr>
+              <a:t>2D가 붙은 것을 고른다</a:t>
+            </a:r>
+            <a:endParaRPr lang="en-US" sz="1200" dirty="0"/>
+          </a:p>
+        </p:txBody>
+      </p:sp>
+      <p:sp>
+        <p:nvSpPr>
+          <p:cNvPr id="16" name="Shape 14"/>
+          <p:cNvSpPr/>
+          <p:nvPr/>
+        </p:nvSpPr>
+        <p:spPr>
+          <a:xfrm>
+            <a:off x="758952" y="4224528"/>
+            <a:ext cx="10673791" cy="0"/>
+          </a:xfrm>
+          <a:prstGeom prst="line">
+            <a:avLst/>
+          </a:prstGeom>
+          <a:noFill/>
+          <a:ln w="12700">
+            <a:solidFill>
+              <a:srgbClr val="F0F0F0"/>
+            </a:solidFill>
+            <a:prstDash val="solid"/>
+          </a:ln>
+        </p:spPr>
+      </p:sp>
+      <p:sp>
+        <p:nvSpPr>
+          <p:cNvPr id="17" name="Text 15"/>
+          <p:cNvSpPr txBox="1"/>
+          <p:nvPr/>
+        </p:nvSpPr>
+        <p:spPr>
+          <a:xfrm>
+            <a:off x="758952" y="4389120"/>
+            <a:ext cx="3749040" cy="420624"/>
+          </a:xfrm>
+          <a:prstGeom prst="rect">
+            <a:avLst/>
+          </a:prstGeom>
+          <a:noFill/>
+          <a:ln/>
+        </p:spPr>
+        <p:txBody>
+          <a:bodyPr wrap="square" lIns="0" tIns="0" rIns="0" bIns="0" rtlCol="0" anchor="ctr"/>
+          <a:lstStyle/>
+          <a:p>
+            <a:pPr indent="0" marL="0">
+              <a:buNone/>
+            </a:pPr>
+            <a:r>
+              <a:rPr lang="en-US" sz="1550" dirty="0">
+                <a:solidFill>
+                  <a:srgbClr val="141414"/>
+                </a:solidFill>
+                <a:latin typeface="Pretendard SemiBold" pitchFamily="34" charset="0"/>
+                <a:ea typeface="Pretendard SemiBold" pitchFamily="34" charset="-122"/>
+                <a:cs typeface="Pretendard SemiBold" pitchFamily="34" charset="-120"/>
+              </a:rPr>
+              <a:t>자식으로 넣으니 위치가 튐</a:t>
+            </a:r>
+            <a:endParaRPr lang="en-US" sz="1550" dirty="0"/>
+          </a:p>
+        </p:txBody>
+      </p:sp>
+      <p:sp>
+        <p:nvSpPr>
+          <p:cNvPr id="18" name="Text 16"/>
+          <p:cNvSpPr txBox="1"/>
+          <p:nvPr/>
+        </p:nvSpPr>
+        <p:spPr>
+          <a:xfrm>
+            <a:off x="4690872" y="4389120"/>
+            <a:ext cx="3200400" cy="420624"/>
+          </a:xfrm>
+          <a:prstGeom prst="rect">
+            <a:avLst/>
+          </a:prstGeom>
+          <a:noFill/>
+          <a:ln/>
+        </p:spPr>
+        <p:txBody>
+          <a:bodyPr wrap="square" lIns="0" tIns="0" rIns="0" bIns="0" rtlCol="0" anchor="ctr"/>
+          <a:lstStyle/>
+          <a:p>
+            <a:pPr indent="0" marL="0">
+              <a:buNone/>
+            </a:pPr>
+            <a:r>
+              <a:rPr lang="en-US" sz="1200" dirty="0">
+                <a:solidFill>
+                  <a:srgbClr val="ADADAD"/>
+                </a:solidFill>
+                <a:latin typeface="Pretendard" pitchFamily="34" charset="0"/>
+                <a:ea typeface="Pretendard" pitchFamily="34" charset="-122"/>
+                <a:cs typeface="Pretendard" pitchFamily="34" charset="-120"/>
+              </a:rPr>
+              <a:t>좌표가 부모 기준으로 바뀜</a:t>
+            </a:r>
+            <a:endParaRPr lang="en-US" sz="1200" dirty="0"/>
+          </a:p>
+        </p:txBody>
+      </p:sp>
+      <p:sp>
+        <p:nvSpPr>
+          <p:cNvPr id="19" name="Text 17"/>
+          <p:cNvSpPr txBox="1"/>
+          <p:nvPr/>
+        </p:nvSpPr>
+        <p:spPr>
+          <a:xfrm>
+            <a:off x="8074152" y="4389120"/>
+            <a:ext cx="3108960" cy="420624"/>
+          </a:xfrm>
+          <a:prstGeom prst="rect">
+            <a:avLst/>
+          </a:prstGeom>
+          <a:noFill/>
+          <a:ln/>
+        </p:spPr>
+        <p:txBody>
+          <a:bodyPr wrap="square" lIns="0" tIns="0" rIns="0" bIns="0" rtlCol="0" anchor="ctr"/>
+          <a:lstStyle/>
+          <a:p>
+            <a:pPr indent="0" marL="0">
+              <a:buNone/>
+            </a:pPr>
+            <a:r>
+              <a:rPr lang="en-US" sz="1200" dirty="0">
+                <a:solidFill>
+                  <a:srgbClr val="141414"/>
+                </a:solidFill>
+                <a:latin typeface="Pretendard" pitchFamily="34" charset="0"/>
+                <a:ea typeface="Pretendard" pitchFamily="34" charset="-122"/>
+                <a:cs typeface="Pretendard" pitchFamily="34" charset="-120"/>
+              </a:rPr>
+              <a:t>부모에서부터 센다</a:t>
+            </a:r>
+            <a:endParaRPr lang="en-US" sz="1200" dirty="0"/>
+          </a:p>
+        </p:txBody>
+      </p:sp>
+      <p:sp>
+        <p:nvSpPr>
+          <p:cNvPr id="20" name="Shape 18"/>
+          <p:cNvSpPr/>
+          <p:nvPr/>
+        </p:nvSpPr>
+        <p:spPr>
+          <a:xfrm>
+            <a:off x="758952" y="4956048"/>
+            <a:ext cx="10673791" cy="0"/>
+          </a:xfrm>
+          <a:prstGeom prst="line">
+            <a:avLst/>
+          </a:prstGeom>
+          <a:noFill/>
+          <a:ln w="12700">
+            <a:solidFill>
+              <a:srgbClr val="F0F0F0"/>
+            </a:solidFill>
+            <a:prstDash val="solid"/>
+          </a:ln>
+        </p:spPr>
+      </p:sp>
+      <p:sp>
+        <p:nvSpPr>
+          <p:cNvPr id="21" name="Shape 19"/>
+          <p:cNvSpPr/>
+          <p:nvPr/>
+        </p:nvSpPr>
+        <p:spPr>
+          <a:xfrm>
+            <a:off x="502920" y="5029200"/>
+            <a:ext cx="11185855" cy="640080"/>
+          </a:xfrm>
+          <a:prstGeom prst="roundRect">
+            <a:avLst>
+              <a:gd name="adj" fmla="val 23857"/>
+            </a:avLst>
+          </a:prstGeom>
+          <a:solidFill>
+            <a:srgbClr val="F3F3F3"/>
+          </a:solidFill>
+          <a:ln w="12700">
+            <a:solidFill>
+              <a:srgbClr val="333333"/>
+            </a:solidFill>
+            <a:prstDash val="solid"/>
+          </a:ln>
+        </p:spPr>
+      </p:sp>
+      <p:sp>
+        <p:nvSpPr>
+          <p:cNvPr id="22" name="Text 20"/>
+          <p:cNvSpPr txBox="1"/>
+          <p:nvPr/>
+        </p:nvSpPr>
+        <p:spPr>
+          <a:xfrm>
+            <a:off x="758952" y="5120640"/>
+            <a:ext cx="3749040" cy="420624"/>
+          </a:xfrm>
+          <a:prstGeom prst="rect">
+            <a:avLst/>
+          </a:prstGeom>
+          <a:noFill/>
+          <a:ln/>
+        </p:spPr>
+        <p:txBody>
+          <a:bodyPr wrap="square" lIns="0" tIns="0" rIns="0" bIns="0" rtlCol="0" anchor="ctr"/>
+          <a:lstStyle/>
+          <a:p>
+            <a:pPr indent="0" marL="0">
+              <a:buNone/>
+            </a:pPr>
+            <a:r>
+              <a:rPr lang="en-US" sz="1550" dirty="0">
+                <a:solidFill>
+                  <a:srgbClr val="141414"/>
+                </a:solidFill>
+                <a:latin typeface="Pretendard SemiBold" pitchFamily="34" charset="0"/>
+                <a:ea typeface="Pretendard SemiBold" pitchFamily="34" charset="-122"/>
+                <a:cs typeface="Pretendard SemiBold" pitchFamily="34" charset="-120"/>
+              </a:rPr>
+              <a:t>프로젝트 경로가 한글</a:t>
+            </a:r>
+            <a:endParaRPr lang="en-US" sz="1550" dirty="0"/>
+          </a:p>
+        </p:txBody>
+      </p:sp>
+      <p:sp>
+        <p:nvSpPr>
+          <p:cNvPr id="23" name="Text 21"/>
+          <p:cNvSpPr txBox="1"/>
+          <p:nvPr/>
+        </p:nvSpPr>
+        <p:spPr>
+          <a:xfrm>
+            <a:off x="4690872" y="5120640"/>
+            <a:ext cx="3200400" cy="420624"/>
+          </a:xfrm>
+          <a:prstGeom prst="rect">
+            <a:avLst/>
+          </a:prstGeom>
+          <a:noFill/>
+          <a:ln/>
+        </p:spPr>
+        <p:txBody>
+          <a:bodyPr wrap="square" lIns="0" tIns="0" rIns="0" bIns="0" rtlCol="0" anchor="ctr"/>
+          <a:lstStyle/>
+          <a:p>
+            <a:pPr indent="0" marL="0">
+              <a:buNone/>
+            </a:pPr>
+            <a:r>
+              <a:rPr lang="en-US" sz="1200" dirty="0">
+                <a:solidFill>
+                  <a:srgbClr val="ADADAD"/>
+                </a:solidFill>
+                <a:latin typeface="Pretendard" pitchFamily="34" charset="0"/>
+                <a:ea typeface="Pretendard" pitchFamily="34" charset="-122"/>
+                <a:cs typeface="Pretendard" pitchFamily="34" charset="-120"/>
+              </a:rPr>
+              <a:t>사용자 이름이 한글</a:t>
+            </a:r>
+            <a:endParaRPr lang="en-US" sz="1200" dirty="0"/>
+          </a:p>
+        </p:txBody>
+      </p:sp>
+      <p:sp>
+        <p:nvSpPr>
+          <p:cNvPr id="24" name="Text 22"/>
+          <p:cNvSpPr txBox="1"/>
+          <p:nvPr/>
+        </p:nvSpPr>
+        <p:spPr>
+          <a:xfrm>
+            <a:off x="8074152" y="5120640"/>
+            <a:ext cx="3108960" cy="420624"/>
+          </a:xfrm>
+          <a:prstGeom prst="rect">
+            <a:avLst/>
+          </a:prstGeom>
+          <a:noFill/>
+          <a:ln/>
+        </p:spPr>
+        <p:txBody>
+          <a:bodyPr wrap="square" lIns="0" tIns="0" rIns="0" bIns="0" rtlCol="0" anchor="ctr"/>
+          <a:lstStyle/>
+          <a:p>
+            <a:pPr indent="0" marL="0">
+              <a:buNone/>
+            </a:pPr>
+            <a:r>
+              <a:rPr lang="en-US" sz="1200" dirty="0">
+                <a:solidFill>
+                  <a:srgbClr val="141414"/>
+                </a:solidFill>
+                <a:latin typeface="Pretendard" pitchFamily="34" charset="0"/>
+                <a:ea typeface="Pretendard" pitchFamily="34" charset="-122"/>
+                <a:cs typeface="Pretendard" pitchFamily="34" charset="-120"/>
+              </a:rPr>
+              <a:t>지금 다시 만든다</a:t>
+            </a:r>
+            <a:endParaRPr lang="en-US" sz="1200" dirty="0"/>
+          </a:p>
+        </p:txBody>
+      </p:sp>
+      <p:sp>
+        <p:nvSpPr>
+          <p:cNvPr id="25" name="Shape 23"/>
+          <p:cNvSpPr/>
+          <p:nvPr/>
+        </p:nvSpPr>
+        <p:spPr>
+          <a:xfrm>
+            <a:off x="758952" y="6053328"/>
+            <a:ext cx="4160520" cy="329184"/>
+          </a:xfrm>
+          <a:prstGeom prst="roundRect">
+            <a:avLst>
+              <a:gd name="adj" fmla="val 50000"/>
+            </a:avLst>
+          </a:prstGeom>
+          <a:solidFill>
+            <a:srgbClr val="0066FF"/>
+          </a:solidFill>
+          <a:ln w="12700">
+            <a:solidFill>
+              <a:srgbClr val="333333"/>
+            </a:solidFill>
+            <a:prstDash val="solid"/>
+          </a:ln>
+        </p:spPr>
+      </p:sp>
+      <p:sp>
+        <p:nvSpPr>
+          <p:cNvPr id="26" name="Text 24"/>
+          <p:cNvSpPr txBox="1"/>
+          <p:nvPr/>
+        </p:nvSpPr>
+        <p:spPr>
+          <a:xfrm>
+            <a:off x="758952" y="6053328"/>
+            <a:ext cx="4160520" cy="329184"/>
+          </a:xfrm>
+          <a:prstGeom prst="rect">
+            <a:avLst/>
+          </a:prstGeom>
+          <a:noFill/>
+          <a:ln/>
+        </p:spPr>
+        <p:txBody>
+          <a:bodyPr wrap="square" lIns="0" tIns="0" rIns="0" bIns="0" rtlCol="0" anchor="ctr"/>
+          <a:lstStyle/>
+          <a:p>
+            <a:pPr algn="ctr" indent="0" marL="0">
+              <a:buNone/>
+            </a:pPr>
+            <a:r>
+              <a:rPr lang="en-US" sz="950" dirty="0">
+                <a:solidFill>
+                  <a:srgbClr val="FFFFFF"/>
+                </a:solidFill>
+                <a:latin typeface="Pretendard SemiBold" pitchFamily="34" charset="0"/>
+                <a:ea typeface="Pretendard SemiBold" pitchFamily="34" charset="-122"/>
+                <a:cs typeface="Pretendard SemiBold" pitchFamily="34" charset="-120"/>
+              </a:rPr>
+              <a:t>경로 문제는 21주차 빌드에서 터진다</a:t>
+            </a:r>
+            <a:endParaRPr lang="en-US" sz="950" dirty="0"/>
+          </a:p>
+        </p:txBody>
+      </p:sp>
+      <p:sp>
+        <p:nvSpPr>
+          <p:cNvPr id="27" name="Text 25"/>
+          <p:cNvSpPr txBox="1"/>
+          <p:nvPr/>
+        </p:nvSpPr>
+        <p:spPr>
+          <a:xfrm>
+            <a:off x="5239512" y="6053328"/>
+            <a:ext cx="5943600" cy="329184"/>
+          </a:xfrm>
+          <a:prstGeom prst="rect">
+            <a:avLst/>
+          </a:prstGeom>
+          <a:noFill/>
+          <a:ln/>
+        </p:spPr>
+        <p:txBody>
+          <a:bodyPr wrap="square" lIns="0" tIns="0" rIns="0" bIns="0" rtlCol="0" anchor="ctr"/>
+          <a:lstStyle/>
+          <a:p>
+            <a:pPr indent="0" marL="0">
+              <a:buNone/>
+            </a:pPr>
+            <a:r>
+              <a:rPr lang="en-US" sz="1200" dirty="0">
+                <a:solidFill>
+                  <a:srgbClr val="707070"/>
+                </a:solidFill>
+                <a:latin typeface="Pretendard Light" pitchFamily="34" charset="0"/>
+                <a:ea typeface="Pretendard Light" pitchFamily="34" charset="-122"/>
+                <a:cs typeface="Pretendard Light" pitchFamily="34" charset="-120"/>
+              </a:rPr>
+              <a:t>그때 고치면 프로젝트를 다시 만들어야 한다. 031회차에 못을 박는다.</a:t>
+            </a:r>
+            <a:endParaRPr lang="en-US" sz="1200" dirty="0"/>
+          </a:p>
+        </p:txBody>
+      </p:sp>
+    </p:spTree>
+  </p:cSld>
+  <p:clrMapOvr>
+    <a:masterClrMapping/>
+  </p:clrMapOvr>
+</p:sld>
+</file>
+
+<file path=ppt/slides/slide15.xml><?xml version="1.0" encoding="utf-8"?>
+<p:sld xmlns:a="http://schemas.openxmlformats.org/drawingml/2006/main" xmlns:r="http://schemas.openxmlformats.org/officeDocument/2006/relationships" xmlns:p="http://schemas.openxmlformats.org/presentationml/2006/main">
+  <p:cSld name="Slide 15">
+    <p:bg>
+      <p:bgPr>
+        <a:solidFill>
+          <a:srgbClr val="FFFFFF"/>
+        </a:solidFill>
+      </p:bgPr>
+    </p:bg>
+    <p:spTree>
+      <p:nvGrpSpPr>
+        <p:cNvPr id="1" name=""/>
+        <p:cNvGrpSpPr/>
+        <p:nvPr/>
+      </p:nvGrpSpPr>
+      <p:grpSpPr>
+        <a:xfrm>
+          <a:off x="0" y="0"/>
+          <a:ext cx="0" cy="0"/>
+          <a:chOff x="0" y="0"/>
+          <a:chExt cx="0" cy="0"/>
+        </a:xfrm>
+      </p:grpSpPr>
+      <p:sp>
+        <p:nvSpPr>
+          <p:cNvPr id="2" name="Text 0"/>
+          <p:cNvSpPr txBox="1"/>
+          <p:nvPr/>
+        </p:nvSpPr>
+        <p:spPr>
+          <a:xfrm>
+            <a:off x="758952" y="566928"/>
+            <a:ext cx="10673791" cy="457200"/>
+          </a:xfrm>
+          <a:prstGeom prst="rect">
+            <a:avLst/>
+          </a:prstGeom>
+          <a:noFill/>
+          <a:ln/>
+        </p:spPr>
+        <p:txBody>
+          <a:bodyPr wrap="square" lIns="0" tIns="0" rIns="0" bIns="0" rtlCol="0" anchor="ctr"/>
+          <a:lstStyle/>
+          <a:p>
+            <a:pPr indent="0" marL="0">
+              <a:buNone/>
+            </a:pPr>
+            <a:r>
+              <a:rPr lang="en-US" sz="2600" dirty="0">
+                <a:solidFill>
+                  <a:srgbClr val="141414"/>
+                </a:solidFill>
+                <a:latin typeface="Pretendard SemiBold" pitchFamily="34" charset="0"/>
+                <a:ea typeface="Pretendard SemiBold" pitchFamily="34" charset="-122"/>
+                <a:cs typeface="Pretendard SemiBold" pitchFamily="34" charset="-120"/>
+              </a:rPr>
               <a:t>7주차 체크리스트.</a:t>
             </a:r>
             <a:endParaRPr lang="en-US" sz="2600" dirty="0"/>
@@ -6272,7 +7303,7 @@
                 <a:ea typeface="Pretendard" pitchFamily="34" charset="-122"/>
                 <a:cs typeface="Pretendard" pitchFamily="34" charset="-120"/>
               </a:rPr>
-              <a:t>자식 좌표는 부모 기준이다</a:t>
+              <a:t>월드 좌표와 로컬 좌표를 구분한다</a:t>
             </a:r>
             <a:endParaRPr lang="en-US" sz="1200" dirty="0"/>
           </a:p>
@@ -11195,7 +12226,7 @@
                 <a:ea typeface="Pretendard SemiBold" pitchFamily="34" charset="-122"/>
                 <a:cs typeface="Pretendard SemiBold" pitchFamily="34" charset="-120"/>
               </a:rPr>
-              <a:t>Transform ② Rotation과 Scale.</a:t>
+              <a:t>월드 좌표와 로컬 좌표.</a:t>
             </a:r>
             <a:endParaRPr lang="en-US" sz="2600" dirty="0"/>
           </a:p>
@@ -11234,7 +12265,7 @@
                 <a:ea typeface="Pretendard Light" pitchFamily="34" charset="-122"/>
                 <a:cs typeface="Pretendard Light" pitchFamily="34" charset="-120"/>
               </a:rPr>
-              <a:t>2D는 Z만 돈다. Scale 음수는 뒤집기다.</a:t>
+              <a:t>같은 자리에 있는데 Inspector 숫자가 다르다.</a:t>
             </a:r>
             <a:endParaRPr lang="en-US" sz="1500" dirty="0"/>
           </a:p>
@@ -11249,11 +12280,11 @@
         <p:spPr>
           <a:xfrm>
             <a:off x="758952" y="1965960"/>
-            <a:ext cx="5394960" cy="1965960"/>
+            <a:ext cx="5806440" cy="3721608"/>
           </a:xfrm>
           <a:prstGeom prst="roundRect">
             <a:avLst>
-              <a:gd name="adj" fmla="val 11628"/>
+              <a:gd name="adj" fmla="val 6143"/>
             </a:avLst>
           </a:prstGeom>
           <a:solidFill>
@@ -11267,40 +12298,243 @@
           </a:ln>
         </p:spPr>
       </p:sp>
-      <p:sp>
-        <p:nvSpPr>
-          <p:cNvPr id="7" name="Text 5"/>
-          <p:cNvSpPr txBox="1"/>
-          <p:nvPr/>
-        </p:nvSpPr>
-        <p:spPr>
-          <a:xfrm>
-            <a:off x="1124712" y="2240280"/>
-            <a:ext cx="2743200" cy="310896"/>
-          </a:xfrm>
-          <a:prstGeom prst="rect">
-            <a:avLst/>
-          </a:prstGeom>
-          <a:noFill/>
-          <a:ln/>
-        </p:spPr>
-        <p:txBody>
-          <a:bodyPr wrap="square" lIns="0" tIns="0" rIns="0" bIns="0" rtlCol="0" anchor="ctr"/>
-          <a:lstStyle/>
-          <a:p>
-            <a:pPr indent="0" marL="0">
-              <a:buNone/>
-            </a:pPr>
-            <a:r>
-              <a:rPr lang="en-US" sz="1550" dirty="0">
-                <a:solidFill>
-                  <a:srgbClr val="141414"/>
+      <p:pic>
+        <p:nvPicPr>
+          <p:cNvPr id="7" name="Image 0" descr="C:\Users\user\AppData\Local\Temp\claude\C--Users-user-Github-WaveBreaker\fd97bec6-cef8-4bf5-a447-9a0fa572b36e\scratchpad\shots2\final\032_WorldLocal.png">    </p:cNvPr>
+          <p:cNvPicPr>
+            <a:picLocks noChangeAspect="1"/>
+          </p:cNvPicPr>
+          <p:nvPr/>
+        </p:nvPicPr>
+        <p:blipFill>
+          <a:blip r:embed="rId1"/>
+          <a:stretch>
+            <a:fillRect/>
+          </a:stretch>
+        </p:blipFill>
+        <p:spPr>
+          <a:xfrm>
+            <a:off x="960120" y="2167128"/>
+            <a:ext cx="5404104" cy="2843784"/>
+          </a:xfrm>
+          <a:prstGeom prst="rect">
+            <a:avLst/>
+          </a:prstGeom>
+        </p:spPr>
+      </p:pic>
+      <p:sp>
+        <p:nvSpPr>
+          <p:cNvPr id="8" name="Text 5"/>
+          <p:cNvSpPr txBox="1"/>
+          <p:nvPr/>
+        </p:nvSpPr>
+        <p:spPr>
+          <a:xfrm>
+            <a:off x="960120" y="5084064"/>
+            <a:ext cx="5404104" cy="310896"/>
+          </a:xfrm>
+          <a:prstGeom prst="rect">
+            <a:avLst/>
+          </a:prstGeom>
+          <a:noFill/>
+          <a:ln/>
+        </p:spPr>
+        <p:txBody>
+          <a:bodyPr wrap="square" lIns="0" tIns="0" rIns="0" bIns="0" rtlCol="0" anchor="ctr"/>
+          <a:lstStyle/>
+          <a:p>
+            <a:pPr algn="ctr" indent="0" marL="0">
+              <a:buNone/>
+            </a:pPr>
+            <a:r>
+              <a:rPr lang="en-US" sz="950" dirty="0">
+                <a:solidFill>
+                  <a:srgbClr val="ADADAD"/>
+                </a:solidFill>
+                <a:latin typeface="Pretendard" pitchFamily="34" charset="0"/>
+                <a:ea typeface="Pretendard" pitchFamily="34" charset="-122"/>
+                <a:cs typeface="Pretendard" pitchFamily="34" charset="-120"/>
+              </a:rPr>
+              <a:t>032_WorldLocal_Demo — 설명 없이 이 씬부터 연다</a:t>
+            </a:r>
+            <a:endParaRPr lang="en-US" sz="950" dirty="0"/>
+          </a:p>
+        </p:txBody>
+      </p:sp>
+      <p:sp>
+        <p:nvSpPr>
+          <p:cNvPr id="9" name="Text 6"/>
+          <p:cNvSpPr txBox="1"/>
+          <p:nvPr/>
+        </p:nvSpPr>
+        <p:spPr>
+          <a:xfrm>
+            <a:off x="6995160" y="1965960"/>
+            <a:ext cx="4437583" cy="274320"/>
+          </a:xfrm>
+          <a:prstGeom prst="rect">
+            <a:avLst/>
+          </a:prstGeom>
+          <a:noFill/>
+          <a:ln/>
+        </p:spPr>
+        <p:txBody>
+          <a:bodyPr wrap="square" lIns="0" tIns="0" rIns="0" bIns="0" rtlCol="0" anchor="ctr"/>
+          <a:lstStyle/>
+          <a:p>
+            <a:pPr indent="0" marL="0">
+              <a:buNone/>
+            </a:pPr>
+            <a:r>
+              <a:rPr lang="en-US" sz="950" dirty="0">
+                <a:solidFill>
+                  <a:srgbClr val="707070"/>
                 </a:solidFill>
                 <a:latin typeface="Pretendard SemiBold" pitchFamily="34" charset="0"/>
                 <a:ea typeface="Pretendard SemiBold" pitchFamily="34" charset="-122"/>
                 <a:cs typeface="Pretendard SemiBold" pitchFamily="34" charset="-120"/>
               </a:rPr>
-              <a:t>Rotation</a:t>
+              <a:t>Inspector Position</a:t>
+            </a:r>
+            <a:endParaRPr lang="en-US" sz="950" dirty="0"/>
+          </a:p>
+        </p:txBody>
+      </p:sp>
+      <p:sp>
+        <p:nvSpPr>
+          <p:cNvPr id="10" name="Shape 7"/>
+          <p:cNvSpPr/>
+          <p:nvPr/>
+        </p:nvSpPr>
+        <p:spPr>
+          <a:xfrm>
+            <a:off x="6995160" y="2377440"/>
+            <a:ext cx="4437583" cy="0"/>
+          </a:xfrm>
+          <a:prstGeom prst="line">
+            <a:avLst/>
+          </a:prstGeom>
+          <a:noFill/>
+          <a:ln w="12700">
+            <a:solidFill>
+              <a:srgbClr val="E0E0E0"/>
+            </a:solidFill>
+            <a:prstDash val="solid"/>
+          </a:ln>
+        </p:spPr>
+      </p:sp>
+      <p:sp>
+        <p:nvSpPr>
+          <p:cNvPr id="11" name="Text 8"/>
+          <p:cNvSpPr txBox="1"/>
+          <p:nvPr/>
+        </p:nvSpPr>
+        <p:spPr>
+          <a:xfrm>
+            <a:off x="6995160" y="2560320"/>
+            <a:ext cx="1920240" cy="384048"/>
+          </a:xfrm>
+          <a:prstGeom prst="rect">
+            <a:avLst/>
+          </a:prstGeom>
+          <a:noFill/>
+          <a:ln/>
+        </p:spPr>
+        <p:txBody>
+          <a:bodyPr wrap="square" lIns="0" tIns="0" rIns="0" bIns="0" rtlCol="0" anchor="ctr"/>
+          <a:lstStyle/>
+          <a:p>
+            <a:pPr indent="0" marL="0">
+              <a:buNone/>
+            </a:pPr>
+            <a:r>
+              <a:rPr lang="en-US" sz="1200" dirty="0">
+                <a:solidFill>
+                  <a:srgbClr val="141414"/>
+                </a:solidFill>
+                <a:latin typeface="Pretendard Medium" pitchFamily="34" charset="0"/>
+                <a:ea typeface="Pretendard Medium" pitchFamily="34" charset="-122"/>
+                <a:cs typeface="Pretendard Medium" pitchFamily="34" charset="-120"/>
+              </a:rPr>
+              <a:t>A_NoParent</a:t>
+            </a:r>
+            <a:endParaRPr lang="en-US" sz="1200" dirty="0"/>
+          </a:p>
+        </p:txBody>
+      </p:sp>
+      <p:sp>
+        <p:nvSpPr>
+          <p:cNvPr id="12" name="Text 9"/>
+          <p:cNvSpPr txBox="1"/>
+          <p:nvPr/>
+        </p:nvSpPr>
+        <p:spPr>
+          <a:xfrm>
+            <a:off x="8915400" y="2560320"/>
+            <a:ext cx="1371600" cy="384048"/>
+          </a:xfrm>
+          <a:prstGeom prst="rect">
+            <a:avLst/>
+          </a:prstGeom>
+          <a:noFill/>
+          <a:ln/>
+        </p:spPr>
+        <p:txBody>
+          <a:bodyPr wrap="square" lIns="0" tIns="0" rIns="0" bIns="0" rtlCol="0" anchor="ctr"/>
+          <a:lstStyle/>
+          <a:p>
+            <a:pPr indent="0" marL="0">
+              <a:buNone/>
+            </a:pPr>
+            <a:r>
+              <a:rPr lang="en-US" sz="1100" dirty="0">
+                <a:solidFill>
+                  <a:srgbClr val="ADADAD"/>
+                </a:solidFill>
+                <a:latin typeface="Pretendard" pitchFamily="34" charset="0"/>
+                <a:ea typeface="Pretendard" pitchFamily="34" charset="-122"/>
+                <a:cs typeface="Pretendard" pitchFamily="34" charset="-120"/>
+              </a:rPr>
+              <a:t>부모 없음</a:t>
+            </a:r>
+            <a:endParaRPr lang="en-US" sz="1100" dirty="0"/>
+          </a:p>
+        </p:txBody>
+      </p:sp>
+      <p:sp>
+        <p:nvSpPr>
+          <p:cNvPr id="13" name="Text 10"/>
+          <p:cNvSpPr txBox="1"/>
+          <p:nvPr/>
+        </p:nvSpPr>
+        <p:spPr>
+          <a:xfrm>
+            <a:off x="10378440" y="2560320"/>
+            <a:ext cx="1097280" cy="384048"/>
+          </a:xfrm>
+          <a:prstGeom prst="rect">
+            <a:avLst/>
+          </a:prstGeom>
+          <a:noFill/>
+          <a:ln/>
+        </p:spPr>
+        <p:txBody>
+          <a:bodyPr wrap="square" lIns="0" tIns="0" rIns="0" bIns="0" rtlCol="0" anchor="ctr"/>
+          <a:lstStyle/>
+          <a:p>
+            <a:pPr indent="0" marL="0">
+              <a:buNone/>
+            </a:pPr>
+            <a:r>
+              <a:rPr lang="en-US" sz="1550" dirty="0">
+                <a:solidFill>
+                  <a:srgbClr val="141414"/>
+                </a:solidFill>
+                <a:latin typeface="Pretendard SemiBold" pitchFamily="34" charset="0"/>
+                <a:ea typeface="Pretendard SemiBold" pitchFamily="34" charset="-122"/>
+                <a:cs typeface="Pretendard SemiBold" pitchFamily="34" charset="-120"/>
+              </a:rPr>
+              <a:t>3, 2</a:t>
             </a:r>
             <a:endParaRPr lang="en-US" sz="1550" dirty="0"/>
           </a:p>
@@ -11308,29 +12542,189 @@
       </p:sp>
       <p:sp>
         <p:nvSpPr>
-          <p:cNvPr id="8" name="Text 6"/>
-          <p:cNvSpPr txBox="1"/>
-          <p:nvPr/>
-        </p:nvSpPr>
-        <p:spPr>
-          <a:xfrm>
-            <a:off x="1124712" y="2670048"/>
-            <a:ext cx="4663440" cy="1143000"/>
-          </a:xfrm>
-          <a:prstGeom prst="rect">
-            <a:avLst/>
-          </a:prstGeom>
-          <a:noFill/>
-          <a:ln/>
-        </p:spPr>
-        <p:txBody>
-          <a:bodyPr wrap="square" lIns="0" tIns="0" rIns="0" bIns="0" rtlCol="0" anchor="ctr"/>
-          <a:lstStyle/>
-          <a:p>
-            <a:pPr indent="0" marL="0">
-              <a:lnSpc>
-                <a:spcPct val="150000"/>
-              </a:lnSpc>
+          <p:cNvPr id="14" name="Shape 11"/>
+          <p:cNvSpPr/>
+          <p:nvPr/>
+        </p:nvSpPr>
+        <p:spPr>
+          <a:xfrm>
+            <a:off x="6995160" y="3072384"/>
+            <a:ext cx="4437583" cy="0"/>
+          </a:xfrm>
+          <a:prstGeom prst="line">
+            <a:avLst/>
+          </a:prstGeom>
+          <a:noFill/>
+          <a:ln w="12700">
+            <a:solidFill>
+              <a:srgbClr val="F0F0F0"/>
+            </a:solidFill>
+            <a:prstDash val="solid"/>
+          </a:ln>
+        </p:spPr>
+      </p:sp>
+      <p:sp>
+        <p:nvSpPr>
+          <p:cNvPr id="15" name="Text 12"/>
+          <p:cNvSpPr txBox="1"/>
+          <p:nvPr/>
+        </p:nvSpPr>
+        <p:spPr>
+          <a:xfrm>
+            <a:off x="6995160" y="3200400"/>
+            <a:ext cx="1920240" cy="384048"/>
+          </a:xfrm>
+          <a:prstGeom prst="rect">
+            <a:avLst/>
+          </a:prstGeom>
+          <a:noFill/>
+          <a:ln/>
+        </p:spPr>
+        <p:txBody>
+          <a:bodyPr wrap="square" lIns="0" tIns="0" rIns="0" bIns="0" rtlCol="0" anchor="ctr"/>
+          <a:lstStyle/>
+          <a:p>
+            <a:pPr indent="0" marL="0">
+              <a:buNone/>
+            </a:pPr>
+            <a:r>
+              <a:rPr lang="en-US" sz="1200" dirty="0">
+                <a:solidFill>
+                  <a:srgbClr val="141414"/>
+                </a:solidFill>
+                <a:latin typeface="Pretendard Medium" pitchFamily="34" charset="0"/>
+                <a:ea typeface="Pretendard Medium" pitchFamily="34" charset="-122"/>
+                <a:cs typeface="Pretendard Medium" pitchFamily="34" charset="-120"/>
+              </a:rPr>
+              <a:t>B_Child</a:t>
+            </a:r>
+            <a:endParaRPr lang="en-US" sz="1200" dirty="0"/>
+          </a:p>
+        </p:txBody>
+      </p:sp>
+      <p:sp>
+        <p:nvSpPr>
+          <p:cNvPr id="16" name="Text 13"/>
+          <p:cNvSpPr txBox="1"/>
+          <p:nvPr/>
+        </p:nvSpPr>
+        <p:spPr>
+          <a:xfrm>
+            <a:off x="8915400" y="3200400"/>
+            <a:ext cx="1371600" cy="384048"/>
+          </a:xfrm>
+          <a:prstGeom prst="rect">
+            <a:avLst/>
+          </a:prstGeom>
+          <a:noFill/>
+          <a:ln/>
+        </p:spPr>
+        <p:txBody>
+          <a:bodyPr wrap="square" lIns="0" tIns="0" rIns="0" bIns="0" rtlCol="0" anchor="ctr"/>
+          <a:lstStyle/>
+          <a:p>
+            <a:pPr indent="0" marL="0">
+              <a:buNone/>
+            </a:pPr>
+            <a:r>
+              <a:rPr lang="en-US" sz="1100" dirty="0">
+                <a:solidFill>
+                  <a:srgbClr val="ADADAD"/>
+                </a:solidFill>
+                <a:latin typeface="Pretendard" pitchFamily="34" charset="0"/>
+                <a:ea typeface="Pretendard" pitchFamily="34" charset="-122"/>
+                <a:cs typeface="Pretendard" pitchFamily="34" charset="-120"/>
+              </a:rPr>
+              <a:t>부모 있음</a:t>
+            </a:r>
+            <a:endParaRPr lang="en-US" sz="1100" dirty="0"/>
+          </a:p>
+        </p:txBody>
+      </p:sp>
+      <p:sp>
+        <p:nvSpPr>
+          <p:cNvPr id="17" name="Text 14"/>
+          <p:cNvSpPr txBox="1"/>
+          <p:nvPr/>
+        </p:nvSpPr>
+        <p:spPr>
+          <a:xfrm>
+            <a:off x="10378440" y="3200400"/>
+            <a:ext cx="1097280" cy="384048"/>
+          </a:xfrm>
+          <a:prstGeom prst="rect">
+            <a:avLst/>
+          </a:prstGeom>
+          <a:noFill/>
+          <a:ln/>
+        </p:spPr>
+        <p:txBody>
+          <a:bodyPr wrap="square" lIns="0" tIns="0" rIns="0" bIns="0" rtlCol="0" anchor="ctr"/>
+          <a:lstStyle/>
+          <a:p>
+            <a:pPr indent="0" marL="0">
+              <a:buNone/>
+            </a:pPr>
+            <a:r>
+              <a:rPr lang="en-US" sz="1550" dirty="0">
+                <a:solidFill>
+                  <a:srgbClr val="141414"/>
+                </a:solidFill>
+                <a:latin typeface="Pretendard SemiBold" pitchFamily="34" charset="0"/>
+                <a:ea typeface="Pretendard SemiBold" pitchFamily="34" charset="-122"/>
+                <a:cs typeface="Pretendard SemiBold" pitchFamily="34" charset="-120"/>
+              </a:rPr>
+              <a:t>0, 0</a:t>
+            </a:r>
+            <a:endParaRPr lang="en-US" sz="1550" dirty="0"/>
+          </a:p>
+        </p:txBody>
+      </p:sp>
+      <p:sp>
+        <p:nvSpPr>
+          <p:cNvPr id="18" name="Shape 15"/>
+          <p:cNvSpPr/>
+          <p:nvPr/>
+        </p:nvSpPr>
+        <p:spPr>
+          <a:xfrm>
+            <a:off x="6995160" y="3712464"/>
+            <a:ext cx="4437583" cy="0"/>
+          </a:xfrm>
+          <a:prstGeom prst="line">
+            <a:avLst/>
+          </a:prstGeom>
+          <a:noFill/>
+          <a:ln w="12700">
+            <a:solidFill>
+              <a:srgbClr val="F0F0F0"/>
+            </a:solidFill>
+            <a:prstDash val="solid"/>
+          </a:ln>
+        </p:spPr>
+      </p:sp>
+      <p:sp>
+        <p:nvSpPr>
+          <p:cNvPr id="19" name="Text 16"/>
+          <p:cNvSpPr txBox="1"/>
+          <p:nvPr/>
+        </p:nvSpPr>
+        <p:spPr>
+          <a:xfrm>
+            <a:off x="6995160" y="3977640"/>
+            <a:ext cx="4437583" cy="329184"/>
+          </a:xfrm>
+          <a:prstGeom prst="rect">
+            <a:avLst/>
+          </a:prstGeom>
+          <a:noFill/>
+          <a:ln/>
+        </p:spPr>
+        <p:txBody>
+          <a:bodyPr wrap="square" lIns="0" tIns="0" rIns="0" bIns="0" rtlCol="0" anchor="ctr"/>
+          <a:lstStyle/>
+          <a:p>
+            <a:pPr indent="0" marL="0">
               <a:buNone/>
             </a:pPr>
             <a:r>
@@ -11342,214 +12736,26 @@
                 <a:ea typeface="Pretendard Light" pitchFamily="34" charset="-122"/>
                 <a:cs typeface="Pretendard Light" pitchFamily="34" charset="-120"/>
               </a:rPr>
-              <a:t>Z = 45 → 기울어진다. 우리가 쓸 것.</a:t>
+              <a:t>두 사각형은 화면상 같은 자리에 있다.</a:t>
             </a:r>
             <a:endParaRPr lang="en-US" sz="1200" dirty="0"/>
           </a:p>
-          <a:p>
-            <a:pPr indent="0" marL="0">
-              <a:lnSpc>
-                <a:spcPct val="150000"/>
-              </a:lnSpc>
-              <a:buNone/>
-            </a:pPr>
-            <a:r>
-              <a:rPr lang="en-US" sz="1200" dirty="0">
-                <a:solidFill>
-                  <a:srgbClr val="707070"/>
-                </a:solidFill>
-                <a:latin typeface="Pretendard Light" pitchFamily="34" charset="0"/>
-                <a:ea typeface="Pretendard Light" pitchFamily="34" charset="-122"/>
-                <a:cs typeface="Pretendard Light" pitchFamily="34" charset="-120"/>
-              </a:rPr>
-              <a:t>X 또는 Y → 납작해진다. 2D에선 쓸 일 없다.</a:t>
-            </a:r>
-            <a:endParaRPr lang="en-US" sz="1200" dirty="0"/>
-          </a:p>
-          <a:p>
-            <a:pPr indent="0" marL="0">
-              <a:lnSpc>
-                <a:spcPct val="150000"/>
-              </a:lnSpc>
-              <a:buNone/>
-            </a:pPr>
-            <a:r>
-              <a:rPr lang="en-US" sz="1200" dirty="0">
-                <a:solidFill>
-                  <a:srgbClr val="707070"/>
-                </a:solidFill>
-                <a:latin typeface="Pretendard Light" pitchFamily="34" charset="0"/>
-                <a:ea typeface="Pretendard Light" pitchFamily="34" charset="-122"/>
-                <a:cs typeface="Pretendard Light" pitchFamily="34" charset="-120"/>
-              </a:rPr>
-              <a:t>되돌리기는 Transform ⋮ → Reset.</a:t>
-            </a:r>
-            <a:endParaRPr lang="en-US" sz="1200" dirty="0"/>
-          </a:p>
-        </p:txBody>
-      </p:sp>
-      <p:sp>
-        <p:nvSpPr>
-          <p:cNvPr id="9" name="Shape 7"/>
+        </p:txBody>
+      </p:sp>
+      <p:sp>
+        <p:nvSpPr>
+          <p:cNvPr id="20" name="Shape 17"/>
           <p:cNvSpPr/>
           <p:nvPr/>
         </p:nvSpPr>
         <p:spPr>
           <a:xfrm>
-            <a:off x="758952" y="4114800"/>
-            <a:ext cx="5394960" cy="1965960"/>
+            <a:off x="6995160" y="4526280"/>
+            <a:ext cx="4437583" cy="1572768"/>
           </a:xfrm>
           <a:prstGeom prst="roundRect">
             <a:avLst>
-              <a:gd name="adj" fmla="val 11628"/>
-            </a:avLst>
-          </a:prstGeom>
-          <a:solidFill>
-            <a:srgbClr val="F3F3F3"/>
-          </a:solidFill>
-          <a:ln w="12700">
-            <a:solidFill>
-              <a:srgbClr val="333333"/>
-            </a:solidFill>
-            <a:prstDash val="solid"/>
-          </a:ln>
-        </p:spPr>
-      </p:sp>
-      <p:sp>
-        <p:nvSpPr>
-          <p:cNvPr id="10" name="Text 8"/>
-          <p:cNvSpPr txBox="1"/>
-          <p:nvPr/>
-        </p:nvSpPr>
-        <p:spPr>
-          <a:xfrm>
-            <a:off x="1124712" y="4389120"/>
-            <a:ext cx="2743200" cy="310896"/>
-          </a:xfrm>
-          <a:prstGeom prst="rect">
-            <a:avLst/>
-          </a:prstGeom>
-          <a:noFill/>
-          <a:ln/>
-        </p:spPr>
-        <p:txBody>
-          <a:bodyPr wrap="square" lIns="0" tIns="0" rIns="0" bIns="0" rtlCol="0" anchor="ctr"/>
-          <a:lstStyle/>
-          <a:p>
-            <a:pPr indent="0" marL="0">
-              <a:buNone/>
-            </a:pPr>
-            <a:r>
-              <a:rPr lang="en-US" sz="1550" dirty="0">
-                <a:solidFill>
-                  <a:srgbClr val="141414"/>
-                </a:solidFill>
-                <a:latin typeface="Pretendard SemiBold" pitchFamily="34" charset="0"/>
-                <a:ea typeface="Pretendard SemiBold" pitchFamily="34" charset="-122"/>
-                <a:cs typeface="Pretendard SemiBold" pitchFamily="34" charset="-120"/>
-              </a:rPr>
-              <a:t>Scale</a:t>
-            </a:r>
-            <a:endParaRPr lang="en-US" sz="1550" dirty="0"/>
-          </a:p>
-        </p:txBody>
-      </p:sp>
-      <p:sp>
-        <p:nvSpPr>
-          <p:cNvPr id="11" name="Text 9"/>
-          <p:cNvSpPr txBox="1"/>
-          <p:nvPr/>
-        </p:nvSpPr>
-        <p:spPr>
-          <a:xfrm>
-            <a:off x="1124712" y="4818888"/>
-            <a:ext cx="4663440" cy="1143000"/>
-          </a:xfrm>
-          <a:prstGeom prst="rect">
-            <a:avLst/>
-          </a:prstGeom>
-          <a:noFill/>
-          <a:ln/>
-        </p:spPr>
-        <p:txBody>
-          <a:bodyPr wrap="square" lIns="0" tIns="0" rIns="0" bIns="0" rtlCol="0" anchor="ctr"/>
-          <a:lstStyle/>
-          <a:p>
-            <a:pPr indent="0" marL="0">
-              <a:lnSpc>
-                <a:spcPct val="150000"/>
-              </a:lnSpc>
-              <a:buNone/>
-            </a:pPr>
-            <a:r>
-              <a:rPr lang="en-US" sz="1200" dirty="0">
-                <a:solidFill>
-                  <a:srgbClr val="707070"/>
-                </a:solidFill>
-                <a:latin typeface="Pretendard Light" pitchFamily="34" charset="0"/>
-                <a:ea typeface="Pretendard Light" pitchFamily="34" charset="-122"/>
-                <a:cs typeface="Pretendard Light" pitchFamily="34" charset="-120"/>
-              </a:rPr>
-              <a:t>1이 기본, 2면 두 배, 0.5면 절반.</a:t>
-            </a:r>
-            <a:endParaRPr lang="en-US" sz="1200" dirty="0"/>
-          </a:p>
-          <a:p>
-            <a:pPr indent="0" marL="0">
-              <a:lnSpc>
-                <a:spcPct val="150000"/>
-              </a:lnSpc>
-              <a:buNone/>
-            </a:pPr>
-            <a:r>
-              <a:rPr lang="en-US" sz="1200" dirty="0">
-                <a:solidFill>
-                  <a:srgbClr val="707070"/>
-                </a:solidFill>
-                <a:latin typeface="Pretendard Light" pitchFamily="34" charset="0"/>
-                <a:ea typeface="Pretendard Light" pitchFamily="34" charset="-122"/>
-                <a:cs typeface="Pretendard Light" pitchFamily="34" charset="-120"/>
-              </a:rPr>
-              <a:t>X에 −1을 넣으면 거울처럼 뒤집힌다.</a:t>
-            </a:r>
-            <a:endParaRPr lang="en-US" sz="1200" dirty="0"/>
-          </a:p>
-          <a:p>
-            <a:pPr indent="0" marL="0">
-              <a:lnSpc>
-                <a:spcPct val="150000"/>
-              </a:lnSpc>
-              <a:buNone/>
-            </a:pPr>
-            <a:r>
-              <a:rPr lang="en-US" sz="1200" dirty="0">
-                <a:solidFill>
-                  <a:srgbClr val="707070"/>
-                </a:solidFill>
-                <a:latin typeface="Pretendard Light" pitchFamily="34" charset="0"/>
-                <a:ea typeface="Pretendard Light" pitchFamily="34" charset="-122"/>
-                <a:cs typeface="Pretendard Light" pitchFamily="34" charset="-120"/>
-              </a:rPr>
-              <a:t>0을 넣으면 사라진다.</a:t>
-            </a:r>
-            <a:endParaRPr lang="en-US" sz="1200" dirty="0"/>
-          </a:p>
-        </p:txBody>
-      </p:sp>
-      <p:sp>
-        <p:nvSpPr>
-          <p:cNvPr id="12" name="Shape 10"/>
-          <p:cNvSpPr/>
-          <p:nvPr/>
-        </p:nvSpPr>
-        <p:spPr>
-          <a:xfrm>
-            <a:off x="6446520" y="1965960"/>
-            <a:ext cx="4986223" cy="4114800"/>
-          </a:xfrm>
-          <a:prstGeom prst="roundRect">
-            <a:avLst>
-              <a:gd name="adj" fmla="val 5556"/>
+              <a:gd name="adj" fmla="val 14535"/>
             </a:avLst>
           </a:prstGeom>
           <a:solidFill>
@@ -11565,67 +12771,48 @@
       </p:sp>
       <p:sp>
         <p:nvSpPr>
-          <p:cNvPr id="13" name="Text 11"/>
-          <p:cNvSpPr txBox="1"/>
-          <p:nvPr/>
-        </p:nvSpPr>
-        <p:spPr>
-          <a:xfrm>
-            <a:off x="6812280" y="2286000"/>
-            <a:ext cx="4254703" cy="292608"/>
-          </a:xfrm>
-          <a:prstGeom prst="rect">
-            <a:avLst/>
-          </a:prstGeom>
-          <a:noFill/>
-          <a:ln/>
-        </p:spPr>
-        <p:txBody>
-          <a:bodyPr wrap="square" lIns="0" tIns="0" rIns="0" bIns="0" rtlCol="0" anchor="ctr"/>
-          <a:lstStyle/>
-          <a:p>
-            <a:pPr indent="0" marL="0">
-              <a:buNone/>
-            </a:pPr>
-            <a:r>
-              <a:rPr lang="en-US" sz="950" dirty="0">
-                <a:solidFill>
-                  <a:srgbClr val="ADADAD"/>
+          <p:cNvPr id="21" name="Text 18"/>
+          <p:cNvSpPr txBox="1"/>
+          <p:nvPr/>
+        </p:nvSpPr>
+        <p:spPr>
+          <a:xfrm>
+            <a:off x="7360920" y="4828032"/>
+            <a:ext cx="3706063" cy="960120"/>
+          </a:xfrm>
+          <a:prstGeom prst="rect">
+            <a:avLst/>
+          </a:prstGeom>
+          <a:noFill/>
+          <a:ln/>
+        </p:spPr>
+        <p:txBody>
+          <a:bodyPr wrap="square" lIns="0" tIns="0" rIns="0" bIns="0" rtlCol="0" anchor="ctr"/>
+          <a:lstStyle/>
+          <a:p>
+            <a:pPr indent="0" marL="0">
+              <a:lnSpc>
+                <a:spcPct val="130000"/>
+              </a:lnSpc>
+              <a:buNone/>
+            </a:pPr>
+            <a:r>
+              <a:rPr lang="en-US" sz="1900" dirty="0">
+                <a:solidFill>
+                  <a:srgbClr val="FFFFFF"/>
                 </a:solidFill>
                 <a:latin typeface="Pretendard SemiBold" pitchFamily="34" charset="0"/>
                 <a:ea typeface="Pretendard SemiBold" pitchFamily="34" charset="-122"/>
                 <a:cs typeface="Pretendard SemiBold" pitchFamily="34" charset="-120"/>
               </a:rPr>
-              <a:t>부모자식</a:t>
-            </a:r>
-            <a:endParaRPr lang="en-US" sz="950" dirty="0"/>
-          </a:p>
-        </p:txBody>
-      </p:sp>
-      <p:sp>
-        <p:nvSpPr>
-          <p:cNvPr id="14" name="Text 12"/>
-          <p:cNvSpPr txBox="1"/>
-          <p:nvPr/>
-        </p:nvSpPr>
-        <p:spPr>
-          <a:xfrm>
-            <a:off x="6812280" y="2697480"/>
-            <a:ext cx="4254703" cy="868680"/>
-          </a:xfrm>
-          <a:prstGeom prst="rect">
-            <a:avLst/>
-          </a:prstGeom>
-          <a:noFill/>
-          <a:ln/>
-        </p:spPr>
-        <p:txBody>
-          <a:bodyPr wrap="square" lIns="0" tIns="0" rIns="0" bIns="0" rtlCol="0" anchor="ctr"/>
-          <a:lstStyle/>
+              <a:t>Position은 부모가 있으면 부모 기준,</a:t>
+            </a:r>
+            <a:endParaRPr lang="en-US" sz="1900" dirty="0"/>
+          </a:p>
           <a:p>
             <a:pPr indent="0" marL="0">
               <a:lnSpc>
-                <a:spcPct val="125000"/>
+                <a:spcPct val="130000"/>
               </a:lnSpc>
               <a:buNone/>
             </a:pPr>
@@ -11638,7 +12825,7 @@
                 <a:ea typeface="Pretendard SemiBold" pitchFamily="34" charset="-122"/>
                 <a:cs typeface="Pretendard SemiBold" pitchFamily="34" charset="-120"/>
               </a:rPr>
-              <a:t>자식이 되면 좌표를 부모 기준으로 센다.</a:t>
+              <a:t>없으면 월드 기준이다.</a:t>
             </a:r>
             <a:endParaRPr lang="en-US" sz="1900" dirty="0"/>
           </a:p>
@@ -11646,105 +12833,40 @@
       </p:sp>
       <p:sp>
         <p:nvSpPr>
-          <p:cNvPr id="15" name="Text 13"/>
-          <p:cNvSpPr txBox="1"/>
-          <p:nvPr/>
-        </p:nvSpPr>
-        <p:spPr>
-          <a:xfrm>
-            <a:off x="6812280" y="3639312"/>
-            <a:ext cx="4254703" cy="365760"/>
-          </a:xfrm>
-          <a:prstGeom prst="rect">
-            <a:avLst/>
-          </a:prstGeom>
-          <a:noFill/>
-          <a:ln/>
-        </p:spPr>
-        <p:txBody>
-          <a:bodyPr wrap="square" lIns="0" tIns="0" rIns="0" bIns="0" rtlCol="0" anchor="ctr"/>
-          <a:lstStyle/>
-          <a:p>
-            <a:pPr indent="0" marL="0">
-              <a:buNone/>
-            </a:pPr>
-            <a:r>
-              <a:rPr lang="en-US" sz="1200" dirty="0">
-                <a:solidFill>
-                  <a:srgbClr val="FFFFFF"/>
-                </a:solidFill>
-                <a:latin typeface="Pretendard" pitchFamily="34" charset="0"/>
-                <a:ea typeface="Pretendard" pitchFamily="34" charset="-122"/>
-                <a:cs typeface="Pretendard" pitchFamily="34" charset="-120"/>
-              </a:rPr>
-              <a:t>(0, 0)은 원점이 아니라 부모가 있는 자리다.</a:t>
-            </a:r>
-            <a:endParaRPr lang="en-US" sz="1200" dirty="0"/>
-          </a:p>
-        </p:txBody>
-      </p:sp>
-      <p:sp>
-        <p:nvSpPr>
-          <p:cNvPr id="16" name="Shape 14"/>
-          <p:cNvSpPr/>
-          <p:nvPr/>
-        </p:nvSpPr>
-        <p:spPr>
-          <a:xfrm>
-            <a:off x="6812280" y="4279392"/>
-            <a:ext cx="4254703" cy="0"/>
-          </a:xfrm>
-          <a:prstGeom prst="line">
-            <a:avLst/>
-          </a:prstGeom>
-          <a:noFill/>
-          <a:ln w="12700">
-            <a:solidFill>
-              <a:srgbClr val="262626"/>
-            </a:solidFill>
-            <a:prstDash val="solid"/>
-          </a:ln>
-        </p:spPr>
-      </p:sp>
-      <p:sp>
-        <p:nvSpPr>
-          <p:cNvPr id="17" name="Text 15"/>
-          <p:cNvSpPr txBox="1"/>
-          <p:nvPr/>
-        </p:nvSpPr>
-        <p:spPr>
-          <a:xfrm>
-            <a:off x="6812280" y="4480560"/>
-            <a:ext cx="4254703" cy="1371600"/>
-          </a:xfrm>
-          <a:prstGeom prst="rect">
-            <a:avLst/>
-          </a:prstGeom>
-          <a:noFill/>
-          <a:ln/>
-        </p:spPr>
-        <p:txBody>
-          <a:bodyPr wrap="square" lIns="0" tIns="0" rIns="0" bIns="0" rtlCol="0" anchor="ctr"/>
-          <a:lstStyle/>
-          <a:p>
-            <a:pPr indent="0" marL="0">
-              <a:lnSpc>
-                <a:spcPct val="145000"/>
-              </a:lnSpc>
-              <a:buNone/>
-            </a:pPr>
-            <a:r>
-              <a:rPr lang="en-US" sz="1200" dirty="0">
-                <a:solidFill>
-                  <a:srgbClr val="ADADAD"/>
-                </a:solidFill>
-                <a:latin typeface="Pretendard Light" pitchFamily="34" charset="0"/>
-                <a:ea typeface="Pretendard Light" pitchFamily="34" charset="-122"/>
-                <a:cs typeface="Pretendard Light" pitchFamily="34" charset="-120"/>
-              </a:rPr>
-              <a:t>Hierarchy에서 오브젝트를 다른 오브젝트 위로 끌어다 놓으면 자식이 된다. 부모를 움직이면 자식이 따라온다. 캐릭터가 움직이면 체력바도 따라와야 한다 — 그때 이걸 쓴다.</a:t>
-            </a:r>
-            <a:endParaRPr lang="en-US" sz="1200" dirty="0"/>
+          <p:cNvPr id="22" name="Text 19"/>
+          <p:cNvSpPr txBox="1"/>
+          <p:nvPr/>
+        </p:nvSpPr>
+        <p:spPr>
+          <a:xfrm>
+            <a:off x="758952" y="5806440"/>
+            <a:ext cx="5806440" cy="365760"/>
+          </a:xfrm>
+          <a:prstGeom prst="rect">
+            <a:avLst/>
+          </a:prstGeom>
+          <a:noFill/>
+          <a:ln/>
+        </p:spPr>
+        <p:txBody>
+          <a:bodyPr wrap="square" lIns="0" tIns="0" rIns="0" bIns="0" rtlCol="0" anchor="ctr"/>
+          <a:lstStyle/>
+          <a:p>
+            <a:pPr indent="0" marL="0">
+              <a:buNone/>
+            </a:pPr>
+            <a:r>
+              <a:rPr lang="en-US" sz="1900" dirty="0">
+                <a:solidFill>
+                  <a:srgbClr val="141414"/>
+                </a:solidFill>
+                <a:latin typeface="Pretendard SemiBold" pitchFamily="34" charset="0"/>
+                <a:ea typeface="Pretendard SemiBold" pitchFamily="34" charset="-122"/>
+                <a:cs typeface="Pretendard SemiBold" pitchFamily="34" charset="-120"/>
+              </a:rPr>
+              <a:t>부모 자리 + 로컬 좌표 = 실제 자리</a:t>
+            </a:r>
+            <a:endParaRPr lang="en-US" sz="1900" dirty="0"/>
           </a:p>
         </p:txBody>
       </p:sp>
@@ -11879,7 +13001,7 @@
                 <a:ea typeface="Pretendard SemiBold" pitchFamily="34" charset="-122"/>
                 <a:cs typeface="Pretendard SemiBold" pitchFamily="34" charset="-120"/>
               </a:rPr>
-              <a:t>실습 — 로봇팔 만들기.</a:t>
+              <a:t>Transform ② Rotation과 Scale.</a:t>
             </a:r>
             <a:endParaRPr lang="en-US" sz="2600" dirty="0"/>
           </a:p>
@@ -11918,7 +13040,7 @@
                 <a:ea typeface="Pretendard Light" pitchFamily="34" charset="-122"/>
                 <a:cs typeface="Pretendard Light" pitchFamily="34" charset="-120"/>
               </a:rPr>
-              <a:t>어깨를 돌리면 팔 전체가 돌아야 한다.</a:t>
+              <a:t>2D는 Z만 돈다. Scale 음수는 뒤집기다.</a:t>
             </a:r>
             <a:endParaRPr lang="en-US" sz="1500" dirty="0"/>
           </a:p>
@@ -11926,565 +13048,18 @@
       </p:sp>
       <p:sp>
         <p:nvSpPr>
-          <p:cNvPr id="6" name="Text 4"/>
-          <p:cNvSpPr txBox="1"/>
+          <p:cNvPr id="6" name="Shape 4"/>
+          <p:cNvSpPr/>
           <p:nvPr/>
         </p:nvSpPr>
         <p:spPr>
           <a:xfrm>
             <a:off x="758952" y="1965960"/>
-            <a:ext cx="3657600" cy="274320"/>
-          </a:xfrm>
-          <a:prstGeom prst="rect">
-            <a:avLst/>
-          </a:prstGeom>
-          <a:noFill/>
-          <a:ln/>
-        </p:spPr>
-        <p:txBody>
-          <a:bodyPr wrap="square" lIns="0" tIns="0" rIns="0" bIns="0" rtlCol="0" anchor="ctr"/>
-          <a:lstStyle/>
-          <a:p>
-            <a:pPr indent="0" marL="0">
-              <a:buNone/>
-            </a:pPr>
-            <a:r>
-              <a:rPr lang="en-US" sz="950" dirty="0">
-                <a:solidFill>
-                  <a:srgbClr val="707070"/>
-                </a:solidFill>
-                <a:latin typeface="Pretendard SemiBold" pitchFamily="34" charset="0"/>
-                <a:ea typeface="Pretendard SemiBold" pitchFamily="34" charset="-122"/>
-                <a:cs typeface="Pretendard SemiBold" pitchFamily="34" charset="-120"/>
-              </a:rPr>
-              <a:t>계층 구조</a:t>
-            </a:r>
-            <a:endParaRPr lang="en-US" sz="950" dirty="0"/>
-          </a:p>
-        </p:txBody>
-      </p:sp>
-      <p:sp>
-        <p:nvSpPr>
-          <p:cNvPr id="7" name="Shape 5"/>
-          <p:cNvSpPr/>
-          <p:nvPr/>
-        </p:nvSpPr>
-        <p:spPr>
-          <a:xfrm>
-            <a:off x="758952" y="2377440"/>
-            <a:ext cx="4937760" cy="0"/>
-          </a:xfrm>
-          <a:prstGeom prst="line">
-            <a:avLst/>
-          </a:prstGeom>
-          <a:noFill/>
-          <a:ln w="12700">
-            <a:solidFill>
-              <a:srgbClr val="E0E0E0"/>
-            </a:solidFill>
-            <a:prstDash val="solid"/>
-          </a:ln>
-        </p:spPr>
-      </p:sp>
-      <p:sp>
-        <p:nvSpPr>
-          <p:cNvPr id="8" name="Text 6"/>
-          <p:cNvSpPr txBox="1"/>
-          <p:nvPr/>
-        </p:nvSpPr>
-        <p:spPr>
-          <a:xfrm>
-            <a:off x="758952" y="2560320"/>
-            <a:ext cx="2560320" cy="329184"/>
-          </a:xfrm>
-          <a:prstGeom prst="rect">
-            <a:avLst/>
-          </a:prstGeom>
-          <a:noFill/>
-          <a:ln/>
-        </p:spPr>
-        <p:txBody>
-          <a:bodyPr wrap="square" lIns="0" tIns="0" rIns="0" bIns="0" rtlCol="0" anchor="ctr"/>
-          <a:lstStyle/>
-          <a:p>
-            <a:pPr indent="0" marL="0">
-              <a:buNone/>
-            </a:pPr>
-            <a:r>
-              <a:rPr lang="en-US" sz="1200" dirty="0">
-                <a:solidFill>
-                  <a:srgbClr val="141414"/>
-                </a:solidFill>
-                <a:latin typeface="Pretendard Medium" pitchFamily="34" charset="0"/>
-                <a:ea typeface="Pretendard Medium" pitchFamily="34" charset="-122"/>
-                <a:cs typeface="Pretendard Medium" pitchFamily="34" charset="-120"/>
-              </a:rPr>
-              <a:t>Shoulder</a:t>
-            </a:r>
-            <a:endParaRPr lang="en-US" sz="1200" dirty="0"/>
-          </a:p>
-        </p:txBody>
-      </p:sp>
-      <p:sp>
-        <p:nvSpPr>
-          <p:cNvPr id="9" name="Text 7"/>
-          <p:cNvSpPr txBox="1"/>
-          <p:nvPr/>
-        </p:nvSpPr>
-        <p:spPr>
-          <a:xfrm>
-            <a:off x="3959352" y="2560320"/>
-            <a:ext cx="1737360" cy="329184"/>
-          </a:xfrm>
-          <a:prstGeom prst="rect">
-            <a:avLst/>
-          </a:prstGeom>
-          <a:noFill/>
-          <a:ln/>
-        </p:spPr>
-        <p:txBody>
-          <a:bodyPr wrap="square" lIns="0" tIns="0" rIns="0" bIns="0" rtlCol="0" anchor="ctr"/>
-          <a:lstStyle/>
-          <a:p>
-            <a:pPr indent="0" marL="0">
-              <a:buNone/>
-            </a:pPr>
-            <a:r>
-              <a:rPr lang="en-US" sz="1100" dirty="0">
-                <a:solidFill>
-                  <a:srgbClr val="ADADAD"/>
-                </a:solidFill>
-                <a:latin typeface="Pretendard" pitchFamily="34" charset="0"/>
-                <a:ea typeface="Pretendard" pitchFamily="34" charset="-122"/>
-                <a:cs typeface="Pretendard" pitchFamily="34" charset="-120"/>
-              </a:rPr>
-              <a:t>어깨 — 부모</a:t>
-            </a:r>
-            <a:endParaRPr lang="en-US" sz="1100" dirty="0"/>
-          </a:p>
-        </p:txBody>
-      </p:sp>
-      <p:sp>
-        <p:nvSpPr>
-          <p:cNvPr id="10" name="Shape 8"/>
-          <p:cNvSpPr/>
-          <p:nvPr/>
-        </p:nvSpPr>
-        <p:spPr>
-          <a:xfrm>
-            <a:off x="758952" y="3017520"/>
-            <a:ext cx="4937760" cy="0"/>
-          </a:xfrm>
-          <a:prstGeom prst="line">
-            <a:avLst/>
-          </a:prstGeom>
-          <a:noFill/>
-          <a:ln w="12700">
-            <a:solidFill>
-              <a:srgbClr val="F0F0F0"/>
-            </a:solidFill>
-            <a:prstDash val="solid"/>
-          </a:ln>
-        </p:spPr>
-      </p:sp>
-      <p:sp>
-        <p:nvSpPr>
-          <p:cNvPr id="11" name="Text 9"/>
-          <p:cNvSpPr txBox="1"/>
-          <p:nvPr/>
-        </p:nvSpPr>
-        <p:spPr>
-          <a:xfrm>
-            <a:off x="1143000" y="3127248"/>
-            <a:ext cx="2560320" cy="329184"/>
-          </a:xfrm>
-          <a:prstGeom prst="rect">
-            <a:avLst/>
-          </a:prstGeom>
-          <a:noFill/>
-          <a:ln/>
-        </p:spPr>
-        <p:txBody>
-          <a:bodyPr wrap="square" lIns="0" tIns="0" rIns="0" bIns="0" rtlCol="0" anchor="ctr"/>
-          <a:lstStyle/>
-          <a:p>
-            <a:pPr indent="0" marL="0">
-              <a:buNone/>
-            </a:pPr>
-            <a:r>
-              <a:rPr lang="en-US" sz="1200" dirty="0">
-                <a:solidFill>
-                  <a:srgbClr val="141414"/>
-                </a:solidFill>
-                <a:latin typeface="Pretendard Medium" pitchFamily="34" charset="0"/>
-                <a:ea typeface="Pretendard Medium" pitchFamily="34" charset="-122"/>
-                <a:cs typeface="Pretendard Medium" pitchFamily="34" charset="-120"/>
-              </a:rPr>
-              <a:t>UpperArm</a:t>
-            </a:r>
-            <a:endParaRPr lang="en-US" sz="1200" dirty="0"/>
-          </a:p>
-        </p:txBody>
-      </p:sp>
-      <p:sp>
-        <p:nvSpPr>
-          <p:cNvPr id="12" name="Text 10"/>
-          <p:cNvSpPr txBox="1"/>
-          <p:nvPr/>
-        </p:nvSpPr>
-        <p:spPr>
-          <a:xfrm>
-            <a:off x="3959352" y="3127248"/>
-            <a:ext cx="1737360" cy="329184"/>
-          </a:xfrm>
-          <a:prstGeom prst="rect">
-            <a:avLst/>
-          </a:prstGeom>
-          <a:noFill/>
-          <a:ln/>
-        </p:spPr>
-        <p:txBody>
-          <a:bodyPr wrap="square" lIns="0" tIns="0" rIns="0" bIns="0" rtlCol="0" anchor="ctr"/>
-          <a:lstStyle/>
-          <a:p>
-            <a:pPr indent="0" marL="0">
-              <a:buNone/>
-            </a:pPr>
-            <a:r>
-              <a:rPr lang="en-US" sz="1100" dirty="0">
-                <a:solidFill>
-                  <a:srgbClr val="ADADAD"/>
-                </a:solidFill>
-                <a:latin typeface="Pretendard" pitchFamily="34" charset="0"/>
-                <a:ea typeface="Pretendard" pitchFamily="34" charset="-122"/>
-                <a:cs typeface="Pretendard" pitchFamily="34" charset="-120"/>
-              </a:rPr>
-              <a:t>윗팔</a:t>
-            </a:r>
-            <a:endParaRPr lang="en-US" sz="1100" dirty="0"/>
-          </a:p>
-        </p:txBody>
-      </p:sp>
-      <p:sp>
-        <p:nvSpPr>
-          <p:cNvPr id="13" name="Shape 11"/>
-          <p:cNvSpPr/>
-          <p:nvPr/>
-        </p:nvSpPr>
-        <p:spPr>
-          <a:xfrm>
-            <a:off x="758952" y="3584448"/>
-            <a:ext cx="4937760" cy="0"/>
-          </a:xfrm>
-          <a:prstGeom prst="line">
-            <a:avLst/>
-          </a:prstGeom>
-          <a:noFill/>
-          <a:ln w="12700">
-            <a:solidFill>
-              <a:srgbClr val="F0F0F0"/>
-            </a:solidFill>
-            <a:prstDash val="solid"/>
-          </a:ln>
-        </p:spPr>
-      </p:sp>
-      <p:sp>
-        <p:nvSpPr>
-          <p:cNvPr id="14" name="Text 12"/>
-          <p:cNvSpPr txBox="1"/>
-          <p:nvPr/>
-        </p:nvSpPr>
-        <p:spPr>
-          <a:xfrm>
-            <a:off x="1527048" y="3694176"/>
-            <a:ext cx="2560320" cy="329184"/>
-          </a:xfrm>
-          <a:prstGeom prst="rect">
-            <a:avLst/>
-          </a:prstGeom>
-          <a:noFill/>
-          <a:ln/>
-        </p:spPr>
-        <p:txBody>
-          <a:bodyPr wrap="square" lIns="0" tIns="0" rIns="0" bIns="0" rtlCol="0" anchor="ctr"/>
-          <a:lstStyle/>
-          <a:p>
-            <a:pPr indent="0" marL="0">
-              <a:buNone/>
-            </a:pPr>
-            <a:r>
-              <a:rPr lang="en-US" sz="1200" dirty="0">
-                <a:solidFill>
-                  <a:srgbClr val="141414"/>
-                </a:solidFill>
-                <a:latin typeface="Pretendard Medium" pitchFamily="34" charset="0"/>
-                <a:ea typeface="Pretendard Medium" pitchFamily="34" charset="-122"/>
-                <a:cs typeface="Pretendard Medium" pitchFamily="34" charset="-120"/>
-              </a:rPr>
-              <a:t>LowerArm</a:t>
-            </a:r>
-            <a:endParaRPr lang="en-US" sz="1200" dirty="0"/>
-          </a:p>
-        </p:txBody>
-      </p:sp>
-      <p:sp>
-        <p:nvSpPr>
-          <p:cNvPr id="15" name="Text 13"/>
-          <p:cNvSpPr txBox="1"/>
-          <p:nvPr/>
-        </p:nvSpPr>
-        <p:spPr>
-          <a:xfrm>
-            <a:off x="3959352" y="3694176"/>
-            <a:ext cx="1737360" cy="329184"/>
-          </a:xfrm>
-          <a:prstGeom prst="rect">
-            <a:avLst/>
-          </a:prstGeom>
-          <a:noFill/>
-          <a:ln/>
-        </p:spPr>
-        <p:txBody>
-          <a:bodyPr wrap="square" lIns="0" tIns="0" rIns="0" bIns="0" rtlCol="0" anchor="ctr"/>
-          <a:lstStyle/>
-          <a:p>
-            <a:pPr indent="0" marL="0">
-              <a:buNone/>
-            </a:pPr>
-            <a:r>
-              <a:rPr lang="en-US" sz="1100" dirty="0">
-                <a:solidFill>
-                  <a:srgbClr val="ADADAD"/>
-                </a:solidFill>
-                <a:latin typeface="Pretendard" pitchFamily="34" charset="0"/>
-                <a:ea typeface="Pretendard" pitchFamily="34" charset="-122"/>
-                <a:cs typeface="Pretendard" pitchFamily="34" charset="-120"/>
-              </a:rPr>
-              <a:t>아랫팔</a:t>
-            </a:r>
-            <a:endParaRPr lang="en-US" sz="1100" dirty="0"/>
-          </a:p>
-        </p:txBody>
-      </p:sp>
-      <p:sp>
-        <p:nvSpPr>
-          <p:cNvPr id="16" name="Shape 14"/>
-          <p:cNvSpPr/>
-          <p:nvPr/>
-        </p:nvSpPr>
-        <p:spPr>
-          <a:xfrm>
-            <a:off x="758952" y="4151376"/>
-            <a:ext cx="4937760" cy="0"/>
-          </a:xfrm>
-          <a:prstGeom prst="line">
-            <a:avLst/>
-          </a:prstGeom>
-          <a:noFill/>
-          <a:ln w="12700">
-            <a:solidFill>
-              <a:srgbClr val="F0F0F0"/>
-            </a:solidFill>
-            <a:prstDash val="solid"/>
-          </a:ln>
-        </p:spPr>
-      </p:sp>
-      <p:sp>
-        <p:nvSpPr>
-          <p:cNvPr id="17" name="Text 15"/>
-          <p:cNvSpPr txBox="1"/>
-          <p:nvPr/>
-        </p:nvSpPr>
-        <p:spPr>
-          <a:xfrm>
-            <a:off x="1911096" y="4261104"/>
-            <a:ext cx="2560320" cy="329184"/>
-          </a:xfrm>
-          <a:prstGeom prst="rect">
-            <a:avLst/>
-          </a:prstGeom>
-          <a:noFill/>
-          <a:ln/>
-        </p:spPr>
-        <p:txBody>
-          <a:bodyPr wrap="square" lIns="0" tIns="0" rIns="0" bIns="0" rtlCol="0" anchor="ctr"/>
-          <a:lstStyle/>
-          <a:p>
-            <a:pPr indent="0" marL="0">
-              <a:buNone/>
-            </a:pPr>
-            <a:r>
-              <a:rPr lang="en-US" sz="1200" dirty="0">
-                <a:solidFill>
-                  <a:srgbClr val="141414"/>
-                </a:solidFill>
-                <a:latin typeface="Pretendard Medium" pitchFamily="34" charset="0"/>
-                <a:ea typeface="Pretendard Medium" pitchFamily="34" charset="-122"/>
-                <a:cs typeface="Pretendard Medium" pitchFamily="34" charset="-120"/>
-              </a:rPr>
-              <a:t>Hand</a:t>
-            </a:r>
-            <a:endParaRPr lang="en-US" sz="1200" dirty="0"/>
-          </a:p>
-        </p:txBody>
-      </p:sp>
-      <p:sp>
-        <p:nvSpPr>
-          <p:cNvPr id="18" name="Text 16"/>
-          <p:cNvSpPr txBox="1"/>
-          <p:nvPr/>
-        </p:nvSpPr>
-        <p:spPr>
-          <a:xfrm>
-            <a:off x="3959352" y="4261104"/>
-            <a:ext cx="1737360" cy="329184"/>
-          </a:xfrm>
-          <a:prstGeom prst="rect">
-            <a:avLst/>
-          </a:prstGeom>
-          <a:noFill/>
-          <a:ln/>
-        </p:spPr>
-        <p:txBody>
-          <a:bodyPr wrap="square" lIns="0" tIns="0" rIns="0" bIns="0" rtlCol="0" anchor="ctr"/>
-          <a:lstStyle/>
-          <a:p>
-            <a:pPr indent="0" marL="0">
-              <a:buNone/>
-            </a:pPr>
-            <a:r>
-              <a:rPr lang="en-US" sz="1100" dirty="0">
-                <a:solidFill>
-                  <a:srgbClr val="ADADAD"/>
-                </a:solidFill>
-                <a:latin typeface="Pretendard" pitchFamily="34" charset="0"/>
-                <a:ea typeface="Pretendard" pitchFamily="34" charset="-122"/>
-                <a:cs typeface="Pretendard" pitchFamily="34" charset="-120"/>
-              </a:rPr>
-              <a:t>손</a:t>
-            </a:r>
-            <a:endParaRPr lang="en-US" sz="1100" dirty="0"/>
-          </a:p>
-        </p:txBody>
-      </p:sp>
-      <p:sp>
-        <p:nvSpPr>
-          <p:cNvPr id="19" name="Shape 17"/>
-          <p:cNvSpPr/>
-          <p:nvPr/>
-        </p:nvSpPr>
-        <p:spPr>
-          <a:xfrm>
-            <a:off x="758952" y="4718304"/>
-            <a:ext cx="4937760" cy="0"/>
-          </a:xfrm>
-          <a:prstGeom prst="line">
-            <a:avLst/>
-          </a:prstGeom>
-          <a:noFill/>
-          <a:ln w="12700">
-            <a:solidFill>
-              <a:srgbClr val="F0F0F0"/>
-            </a:solidFill>
-            <a:prstDash val="solid"/>
-          </a:ln>
-        </p:spPr>
-      </p:sp>
-      <p:sp>
-        <p:nvSpPr>
-          <p:cNvPr id="20" name="Text 18"/>
-          <p:cNvSpPr txBox="1"/>
-          <p:nvPr/>
-        </p:nvSpPr>
-        <p:spPr>
-          <a:xfrm>
-            <a:off x="758952" y="5029200"/>
-            <a:ext cx="4937760" cy="640080"/>
-          </a:xfrm>
-          <a:prstGeom prst="rect">
-            <a:avLst/>
-          </a:prstGeom>
-          <a:noFill/>
-          <a:ln/>
-        </p:spPr>
-        <p:txBody>
-          <a:bodyPr wrap="square" lIns="0" tIns="0" rIns="0" bIns="0" rtlCol="0" anchor="ctr"/>
-          <a:lstStyle/>
-          <a:p>
-            <a:pPr indent="0" marL="0">
-              <a:lnSpc>
-                <a:spcPct val="138000"/>
-              </a:lnSpc>
-              <a:buNone/>
-            </a:pPr>
-            <a:r>
-              <a:rPr lang="en-US" sz="1200" dirty="0">
-                <a:solidFill>
-                  <a:srgbClr val="707070"/>
-                </a:solidFill>
-                <a:latin typeface="Pretendard Light" pitchFamily="34" charset="0"/>
-                <a:ea typeface="Pretendard Light" pitchFamily="34" charset="-122"/>
-                <a:cs typeface="Pretendard Light" pitchFamily="34" charset="-120"/>
-              </a:rPr>
-              <a:t>4개를 먼저 만들어 계층부터 잡고, 그다음 좌표를 넣는다. 반대로 하면 위치가 튄다.</a:t>
-            </a:r>
-            <a:endParaRPr lang="en-US" sz="1200" dirty="0"/>
-          </a:p>
-        </p:txBody>
-      </p:sp>
-      <p:sp>
-        <p:nvSpPr>
-          <p:cNvPr id="21" name="Text 19"/>
-          <p:cNvSpPr txBox="1"/>
-          <p:nvPr/>
-        </p:nvSpPr>
-        <p:spPr>
-          <a:xfrm>
-            <a:off x="758952" y="5760720"/>
-            <a:ext cx="5212080" cy="347472"/>
-          </a:xfrm>
-          <a:prstGeom prst="rect">
-            <a:avLst/>
-          </a:prstGeom>
-          <a:noFill/>
-          <a:ln/>
-        </p:spPr>
-        <p:txBody>
-          <a:bodyPr wrap="square" lIns="0" tIns="0" rIns="0" bIns="0" rtlCol="0" anchor="ctr"/>
-          <a:lstStyle/>
-          <a:p>
-            <a:pPr indent="0" marL="0">
-              <a:buNone/>
-            </a:pPr>
-            <a:r>
-              <a:rPr lang="en-US" sz="1400" dirty="0">
-                <a:solidFill>
-                  <a:srgbClr val="141414"/>
-                </a:solidFill>
-                <a:latin typeface="Pretendard SemiBold" pitchFamily="34" charset="0"/>
-                <a:ea typeface="Pretendard SemiBold" pitchFamily="34" charset="-122"/>
-                <a:cs typeface="Pretendard SemiBold" pitchFamily="34" charset="-120"/>
-              </a:rPr>
-              <a:t>Shoulder만 돌렸는데 손까지 따라 움직이면 통과.</a:t>
-            </a:r>
-            <a:endParaRPr lang="en-US" sz="1400" dirty="0"/>
-          </a:p>
-        </p:txBody>
-      </p:sp>
-      <p:sp>
-        <p:nvSpPr>
-          <p:cNvPr id="22" name="Shape 20"/>
-          <p:cNvSpPr/>
-          <p:nvPr/>
-        </p:nvSpPr>
-        <p:spPr>
-          <a:xfrm>
-            <a:off x="6263640" y="1965960"/>
-            <a:ext cx="5166360" cy="3858768"/>
+            <a:ext cx="5394960" cy="1965960"/>
           </a:xfrm>
           <a:prstGeom prst="roundRect">
             <a:avLst>
-              <a:gd name="adj" fmla="val 5924"/>
+              <a:gd name="adj" fmla="val 11628"/>
             </a:avLst>
           </a:prstGeom>
           <a:solidFill>
@@ -12498,66 +13073,484 @@
           </a:ln>
         </p:spPr>
       </p:sp>
-      <p:pic>
-        <p:nvPicPr>
-          <p:cNvPr id="23" name="Image 0" descr="C:\Users\user\AppData\Local\Temp\claude\C--Users-user-Github-WaveBreaker\fd97bec6-cef8-4bf5-a447-9a0fa572b36e\scratchpad\shots2\final\033_Transform.png">    </p:cNvPr>
-          <p:cNvPicPr>
-            <a:picLocks noChangeAspect="1"/>
-          </p:cNvPicPr>
-          <p:nvPr/>
-        </p:nvPicPr>
-        <p:blipFill>
-          <a:blip r:embed="rId1"/>
-          <a:stretch>
-            <a:fillRect/>
-          </a:stretch>
-        </p:blipFill>
-        <p:spPr>
-          <a:xfrm>
-            <a:off x="6464808" y="2167128"/>
-            <a:ext cx="4764024" cy="2980944"/>
-          </a:xfrm>
-          <a:prstGeom prst="rect">
-            <a:avLst/>
-          </a:prstGeom>
-        </p:spPr>
-      </p:pic>
-      <p:sp>
-        <p:nvSpPr>
-          <p:cNvPr id="24" name="Text 21"/>
-          <p:cNvSpPr txBox="1"/>
-          <p:nvPr/>
-        </p:nvSpPr>
-        <p:spPr>
-          <a:xfrm>
-            <a:off x="6464808" y="5221224"/>
-            <a:ext cx="4764024" cy="310896"/>
-          </a:xfrm>
-          <a:prstGeom prst="rect">
-            <a:avLst/>
-          </a:prstGeom>
-          <a:noFill/>
-          <a:ln/>
-        </p:spPr>
-        <p:txBody>
-          <a:bodyPr wrap="square" lIns="0" tIns="0" rIns="0" bIns="0" rtlCol="0" anchor="ctr"/>
-          <a:lstStyle/>
-          <a:p>
-            <a:pPr algn="ctr" indent="0" marL="0">
+      <p:sp>
+        <p:nvSpPr>
+          <p:cNvPr id="7" name="Text 5"/>
+          <p:cNvSpPr txBox="1"/>
+          <p:nvPr/>
+        </p:nvSpPr>
+        <p:spPr>
+          <a:xfrm>
+            <a:off x="1124712" y="2240280"/>
+            <a:ext cx="2743200" cy="310896"/>
+          </a:xfrm>
+          <a:prstGeom prst="rect">
+            <a:avLst/>
+          </a:prstGeom>
+          <a:noFill/>
+          <a:ln/>
+        </p:spPr>
+        <p:txBody>
+          <a:bodyPr wrap="square" lIns="0" tIns="0" rIns="0" bIns="0" rtlCol="0" anchor="ctr"/>
+          <a:lstStyle/>
+          <a:p>
+            <a:pPr indent="0" marL="0">
+              <a:buNone/>
+            </a:pPr>
+            <a:r>
+              <a:rPr lang="en-US" sz="1550" dirty="0">
+                <a:solidFill>
+                  <a:srgbClr val="141414"/>
+                </a:solidFill>
+                <a:latin typeface="Pretendard SemiBold" pitchFamily="34" charset="0"/>
+                <a:ea typeface="Pretendard SemiBold" pitchFamily="34" charset="-122"/>
+                <a:cs typeface="Pretendard SemiBold" pitchFamily="34" charset="-120"/>
+              </a:rPr>
+              <a:t>Rotation</a:t>
+            </a:r>
+            <a:endParaRPr lang="en-US" sz="1550" dirty="0"/>
+          </a:p>
+        </p:txBody>
+      </p:sp>
+      <p:sp>
+        <p:nvSpPr>
+          <p:cNvPr id="8" name="Text 6"/>
+          <p:cNvSpPr txBox="1"/>
+          <p:nvPr/>
+        </p:nvSpPr>
+        <p:spPr>
+          <a:xfrm>
+            <a:off x="1124712" y="2670048"/>
+            <a:ext cx="4663440" cy="1143000"/>
+          </a:xfrm>
+          <a:prstGeom prst="rect">
+            <a:avLst/>
+          </a:prstGeom>
+          <a:noFill/>
+          <a:ln/>
+        </p:spPr>
+        <p:txBody>
+          <a:bodyPr wrap="square" lIns="0" tIns="0" rIns="0" bIns="0" rtlCol="0" anchor="ctr"/>
+          <a:lstStyle/>
+          <a:p>
+            <a:pPr indent="0" marL="0">
+              <a:lnSpc>
+                <a:spcPct val="150000"/>
+              </a:lnSpc>
+              <a:buNone/>
+            </a:pPr>
+            <a:r>
+              <a:rPr lang="en-US" sz="1200" dirty="0">
+                <a:solidFill>
+                  <a:srgbClr val="707070"/>
+                </a:solidFill>
+                <a:latin typeface="Pretendard Light" pitchFamily="34" charset="0"/>
+                <a:ea typeface="Pretendard Light" pitchFamily="34" charset="-122"/>
+                <a:cs typeface="Pretendard Light" pitchFamily="34" charset="-120"/>
+              </a:rPr>
+              <a:t>Z = 45 → 기울어진다. 우리가 쓸 것.</a:t>
+            </a:r>
+            <a:endParaRPr lang="en-US" sz="1200" dirty="0"/>
+          </a:p>
+          <a:p>
+            <a:pPr indent="0" marL="0">
+              <a:lnSpc>
+                <a:spcPct val="150000"/>
+              </a:lnSpc>
+              <a:buNone/>
+            </a:pPr>
+            <a:r>
+              <a:rPr lang="en-US" sz="1200" dirty="0">
+                <a:solidFill>
+                  <a:srgbClr val="707070"/>
+                </a:solidFill>
+                <a:latin typeface="Pretendard Light" pitchFamily="34" charset="0"/>
+                <a:ea typeface="Pretendard Light" pitchFamily="34" charset="-122"/>
+                <a:cs typeface="Pretendard Light" pitchFamily="34" charset="-120"/>
+              </a:rPr>
+              <a:t>X 또는 Y → 납작해진다. 2D에선 쓸 일 없다.</a:t>
+            </a:r>
+            <a:endParaRPr lang="en-US" sz="1200" dirty="0"/>
+          </a:p>
+          <a:p>
+            <a:pPr indent="0" marL="0">
+              <a:lnSpc>
+                <a:spcPct val="150000"/>
+              </a:lnSpc>
+              <a:buNone/>
+            </a:pPr>
+            <a:r>
+              <a:rPr lang="en-US" sz="1200" dirty="0">
+                <a:solidFill>
+                  <a:srgbClr val="707070"/>
+                </a:solidFill>
+                <a:latin typeface="Pretendard Light" pitchFamily="34" charset="0"/>
+                <a:ea typeface="Pretendard Light" pitchFamily="34" charset="-122"/>
+                <a:cs typeface="Pretendard Light" pitchFamily="34" charset="-120"/>
+              </a:rPr>
+              <a:t>되돌리기는 Transform ⋮ → Reset.</a:t>
+            </a:r>
+            <a:endParaRPr lang="en-US" sz="1200" dirty="0"/>
+          </a:p>
+        </p:txBody>
+      </p:sp>
+      <p:sp>
+        <p:nvSpPr>
+          <p:cNvPr id="9" name="Shape 7"/>
+          <p:cNvSpPr/>
+          <p:nvPr/>
+        </p:nvSpPr>
+        <p:spPr>
+          <a:xfrm>
+            <a:off x="758952" y="4114800"/>
+            <a:ext cx="5394960" cy="1965960"/>
+          </a:xfrm>
+          <a:prstGeom prst="roundRect">
+            <a:avLst>
+              <a:gd name="adj" fmla="val 11628"/>
+            </a:avLst>
+          </a:prstGeom>
+          <a:solidFill>
+            <a:srgbClr val="F3F3F3"/>
+          </a:solidFill>
+          <a:ln w="12700">
+            <a:solidFill>
+              <a:srgbClr val="333333"/>
+            </a:solidFill>
+            <a:prstDash val="solid"/>
+          </a:ln>
+        </p:spPr>
+      </p:sp>
+      <p:sp>
+        <p:nvSpPr>
+          <p:cNvPr id="10" name="Text 8"/>
+          <p:cNvSpPr txBox="1"/>
+          <p:nvPr/>
+        </p:nvSpPr>
+        <p:spPr>
+          <a:xfrm>
+            <a:off x="1124712" y="4389120"/>
+            <a:ext cx="2743200" cy="310896"/>
+          </a:xfrm>
+          <a:prstGeom prst="rect">
+            <a:avLst/>
+          </a:prstGeom>
+          <a:noFill/>
+          <a:ln/>
+        </p:spPr>
+        <p:txBody>
+          <a:bodyPr wrap="square" lIns="0" tIns="0" rIns="0" bIns="0" rtlCol="0" anchor="ctr"/>
+          <a:lstStyle/>
+          <a:p>
+            <a:pPr indent="0" marL="0">
+              <a:buNone/>
+            </a:pPr>
+            <a:r>
+              <a:rPr lang="en-US" sz="1550" dirty="0">
+                <a:solidFill>
+                  <a:srgbClr val="141414"/>
+                </a:solidFill>
+                <a:latin typeface="Pretendard SemiBold" pitchFamily="34" charset="0"/>
+                <a:ea typeface="Pretendard SemiBold" pitchFamily="34" charset="-122"/>
+                <a:cs typeface="Pretendard SemiBold" pitchFamily="34" charset="-120"/>
+              </a:rPr>
+              <a:t>Scale</a:t>
+            </a:r>
+            <a:endParaRPr lang="en-US" sz="1550" dirty="0"/>
+          </a:p>
+        </p:txBody>
+      </p:sp>
+      <p:sp>
+        <p:nvSpPr>
+          <p:cNvPr id="11" name="Text 9"/>
+          <p:cNvSpPr txBox="1"/>
+          <p:nvPr/>
+        </p:nvSpPr>
+        <p:spPr>
+          <a:xfrm>
+            <a:off x="1124712" y="4818888"/>
+            <a:ext cx="4663440" cy="1143000"/>
+          </a:xfrm>
+          <a:prstGeom prst="rect">
+            <a:avLst/>
+          </a:prstGeom>
+          <a:noFill/>
+          <a:ln/>
+        </p:spPr>
+        <p:txBody>
+          <a:bodyPr wrap="square" lIns="0" tIns="0" rIns="0" bIns="0" rtlCol="0" anchor="ctr"/>
+          <a:lstStyle/>
+          <a:p>
+            <a:pPr indent="0" marL="0">
+              <a:lnSpc>
+                <a:spcPct val="150000"/>
+              </a:lnSpc>
+              <a:buNone/>
+            </a:pPr>
+            <a:r>
+              <a:rPr lang="en-US" sz="1200" dirty="0">
+                <a:solidFill>
+                  <a:srgbClr val="707070"/>
+                </a:solidFill>
+                <a:latin typeface="Pretendard Light" pitchFamily="34" charset="0"/>
+                <a:ea typeface="Pretendard Light" pitchFamily="34" charset="-122"/>
+                <a:cs typeface="Pretendard Light" pitchFamily="34" charset="-120"/>
+              </a:rPr>
+              <a:t>1이 기본, 2면 두 배, 0.5면 절반.</a:t>
+            </a:r>
+            <a:endParaRPr lang="en-US" sz="1200" dirty="0"/>
+          </a:p>
+          <a:p>
+            <a:pPr indent="0" marL="0">
+              <a:lnSpc>
+                <a:spcPct val="150000"/>
+              </a:lnSpc>
+              <a:buNone/>
+            </a:pPr>
+            <a:r>
+              <a:rPr lang="en-US" sz="1200" dirty="0">
+                <a:solidFill>
+                  <a:srgbClr val="707070"/>
+                </a:solidFill>
+                <a:latin typeface="Pretendard Light" pitchFamily="34" charset="0"/>
+                <a:ea typeface="Pretendard Light" pitchFamily="34" charset="-122"/>
+                <a:cs typeface="Pretendard Light" pitchFamily="34" charset="-120"/>
+              </a:rPr>
+              <a:t>X에 −1을 넣으면 거울처럼 뒤집힌다.</a:t>
+            </a:r>
+            <a:endParaRPr lang="en-US" sz="1200" dirty="0"/>
+          </a:p>
+          <a:p>
+            <a:pPr indent="0" marL="0">
+              <a:lnSpc>
+                <a:spcPct val="150000"/>
+              </a:lnSpc>
+              <a:buNone/>
+            </a:pPr>
+            <a:r>
+              <a:rPr lang="en-US" sz="1200" dirty="0">
+                <a:solidFill>
+                  <a:srgbClr val="707070"/>
+                </a:solidFill>
+                <a:latin typeface="Pretendard Light" pitchFamily="34" charset="0"/>
+                <a:ea typeface="Pretendard Light" pitchFamily="34" charset="-122"/>
+                <a:cs typeface="Pretendard Light" pitchFamily="34" charset="-120"/>
+              </a:rPr>
+              <a:t>0을 넣으면 사라진다.</a:t>
+            </a:r>
+            <a:endParaRPr lang="en-US" sz="1200" dirty="0"/>
+          </a:p>
+        </p:txBody>
+      </p:sp>
+      <p:sp>
+        <p:nvSpPr>
+          <p:cNvPr id="12" name="Shape 10"/>
+          <p:cNvSpPr/>
+          <p:nvPr/>
+        </p:nvSpPr>
+        <p:spPr>
+          <a:xfrm>
+            <a:off x="6446520" y="1965960"/>
+            <a:ext cx="4986223" cy="4114800"/>
+          </a:xfrm>
+          <a:prstGeom prst="roundRect">
+            <a:avLst>
+              <a:gd name="adj" fmla="val 5556"/>
+            </a:avLst>
+          </a:prstGeom>
+          <a:solidFill>
+            <a:srgbClr val="141414"/>
+          </a:solidFill>
+          <a:ln w="12700">
+            <a:solidFill>
+              <a:srgbClr val="333333"/>
+            </a:solidFill>
+            <a:prstDash val="solid"/>
+          </a:ln>
+        </p:spPr>
+      </p:sp>
+      <p:sp>
+        <p:nvSpPr>
+          <p:cNvPr id="13" name="Text 11"/>
+          <p:cNvSpPr txBox="1"/>
+          <p:nvPr/>
+        </p:nvSpPr>
+        <p:spPr>
+          <a:xfrm>
+            <a:off x="6812280" y="2286000"/>
+            <a:ext cx="4254703" cy="292608"/>
+          </a:xfrm>
+          <a:prstGeom prst="rect">
+            <a:avLst/>
+          </a:prstGeom>
+          <a:noFill/>
+          <a:ln/>
+        </p:spPr>
+        <p:txBody>
+          <a:bodyPr wrap="square" lIns="0" tIns="0" rIns="0" bIns="0" rtlCol="0" anchor="ctr"/>
+          <a:lstStyle/>
+          <a:p>
+            <a:pPr indent="0" marL="0">
               <a:buNone/>
             </a:pPr>
             <a:r>
               <a:rPr lang="en-US" sz="950" dirty="0">
                 <a:solidFill>
                   <a:srgbClr val="ADADAD"/>
+                </a:solidFill>
+                <a:latin typeface="Pretendard SemiBold" pitchFamily="34" charset="0"/>
+                <a:ea typeface="Pretendard SemiBold" pitchFamily="34" charset="-122"/>
+                <a:cs typeface="Pretendard SemiBold" pitchFamily="34" charset="-120"/>
+              </a:rPr>
+              <a:t>부모자식</a:t>
+            </a:r>
+            <a:endParaRPr lang="en-US" sz="950" dirty="0"/>
+          </a:p>
+        </p:txBody>
+      </p:sp>
+      <p:sp>
+        <p:nvSpPr>
+          <p:cNvPr id="14" name="Text 12"/>
+          <p:cNvSpPr txBox="1"/>
+          <p:nvPr/>
+        </p:nvSpPr>
+        <p:spPr>
+          <a:xfrm>
+            <a:off x="6812280" y="2697480"/>
+            <a:ext cx="4254703" cy="868680"/>
+          </a:xfrm>
+          <a:prstGeom prst="rect">
+            <a:avLst/>
+          </a:prstGeom>
+          <a:noFill/>
+          <a:ln/>
+        </p:spPr>
+        <p:txBody>
+          <a:bodyPr wrap="square" lIns="0" tIns="0" rIns="0" bIns="0" rtlCol="0" anchor="ctr"/>
+          <a:lstStyle/>
+          <a:p>
+            <a:pPr indent="0" marL="0">
+              <a:lnSpc>
+                <a:spcPct val="125000"/>
+              </a:lnSpc>
+              <a:buNone/>
+            </a:pPr>
+            <a:r>
+              <a:rPr lang="en-US" sz="1900" dirty="0">
+                <a:solidFill>
+                  <a:srgbClr val="FFFFFF"/>
+                </a:solidFill>
+                <a:latin typeface="Pretendard SemiBold" pitchFamily="34" charset="0"/>
+                <a:ea typeface="Pretendard SemiBold" pitchFamily="34" charset="-122"/>
+                <a:cs typeface="Pretendard SemiBold" pitchFamily="34" charset="-120"/>
+              </a:rPr>
+              <a:t>부모를 움직이면 위치·회전·크기가 다 따라온다.</a:t>
+            </a:r>
+            <a:endParaRPr lang="en-US" sz="1900" dirty="0"/>
+          </a:p>
+        </p:txBody>
+      </p:sp>
+      <p:sp>
+        <p:nvSpPr>
+          <p:cNvPr id="15" name="Text 13"/>
+          <p:cNvSpPr txBox="1"/>
+          <p:nvPr/>
+        </p:nvSpPr>
+        <p:spPr>
+          <a:xfrm>
+            <a:off x="6812280" y="3639312"/>
+            <a:ext cx="4254703" cy="365760"/>
+          </a:xfrm>
+          <a:prstGeom prst="rect">
+            <a:avLst/>
+          </a:prstGeom>
+          <a:noFill/>
+          <a:ln/>
+        </p:spPr>
+        <p:txBody>
+          <a:bodyPr wrap="square" lIns="0" tIns="0" rIns="0" bIns="0" rtlCol="0" anchor="ctr"/>
+          <a:lstStyle/>
+          <a:p>
+            <a:pPr indent="0" marL="0">
+              <a:buNone/>
+            </a:pPr>
+            <a:r>
+              <a:rPr lang="en-US" sz="1200" dirty="0">
+                <a:solidFill>
+                  <a:srgbClr val="FFFFFF"/>
                 </a:solidFill>
                 <a:latin typeface="Pretendard" pitchFamily="34" charset="0"/>
                 <a:ea typeface="Pretendard" pitchFamily="34" charset="-122"/>
                 <a:cs typeface="Pretendard" pitchFamily="34" charset="-120"/>
               </a:rPr>
-              <a:t>완성 상태 — 4단 계층</a:t>
-            </a:r>
-            <a:endParaRPr lang="en-US" sz="950" dirty="0"/>
+              <a:t>자식이 되는 순간 Position이 로컬 좌표로 바뀐다.</a:t>
+            </a:r>
+            <a:endParaRPr lang="en-US" sz="1200" dirty="0"/>
+          </a:p>
+        </p:txBody>
+      </p:sp>
+      <p:sp>
+        <p:nvSpPr>
+          <p:cNvPr id="16" name="Shape 14"/>
+          <p:cNvSpPr/>
+          <p:nvPr/>
+        </p:nvSpPr>
+        <p:spPr>
+          <a:xfrm>
+            <a:off x="6812280" y="4279392"/>
+            <a:ext cx="4254703" cy="0"/>
+          </a:xfrm>
+          <a:prstGeom prst="line">
+            <a:avLst/>
+          </a:prstGeom>
+          <a:noFill/>
+          <a:ln w="12700">
+            <a:solidFill>
+              <a:srgbClr val="262626"/>
+            </a:solidFill>
+            <a:prstDash val="solid"/>
+          </a:ln>
+        </p:spPr>
+      </p:sp>
+      <p:sp>
+        <p:nvSpPr>
+          <p:cNvPr id="17" name="Text 15"/>
+          <p:cNvSpPr txBox="1"/>
+          <p:nvPr/>
+        </p:nvSpPr>
+        <p:spPr>
+          <a:xfrm>
+            <a:off x="6812280" y="4480560"/>
+            <a:ext cx="4254703" cy="1371600"/>
+          </a:xfrm>
+          <a:prstGeom prst="rect">
+            <a:avLst/>
+          </a:prstGeom>
+          <a:noFill/>
+          <a:ln/>
+        </p:spPr>
+        <p:txBody>
+          <a:bodyPr wrap="square" lIns="0" tIns="0" rIns="0" bIns="0" rtlCol="0" anchor="ctr"/>
+          <a:lstStyle/>
+          <a:p>
+            <a:pPr indent="0" marL="0">
+              <a:lnSpc>
+                <a:spcPct val="145000"/>
+              </a:lnSpc>
+              <a:buNone/>
+            </a:pPr>
+            <a:r>
+              <a:rPr lang="en-US" sz="1200" dirty="0">
+                <a:solidFill>
+                  <a:srgbClr val="ADADAD"/>
+                </a:solidFill>
+                <a:latin typeface="Pretendard Light" pitchFamily="34" charset="0"/>
+                <a:ea typeface="Pretendard Light" pitchFamily="34" charset="-122"/>
+                <a:cs typeface="Pretendard Light" pitchFamily="34" charset="-120"/>
+              </a:rPr>
+              <a:t>Hierarchy에서 오브젝트를 다른 오브젝트 위로 끌어다 놓으면 자식이 된다. 부모를 움직이면 자식이 따라온다. 캐릭터가 움직이면 체력바도 따라와야 한다 — 그때 이걸 쓴다.</a:t>
+            </a:r>
+            <a:endParaRPr lang="en-US" sz="1200" dirty="0"/>
           </a:p>
         </p:txBody>
       </p:sp>
@@ -12653,7 +13646,7 @@
                 <a:ea typeface="Pretendard SemiBold" pitchFamily="34" charset="-122"/>
                 <a:cs typeface="Pretendard SemiBold" pitchFamily="34" charset="-120"/>
               </a:rPr>
-              <a:t>034</a:t>
+              <a:t>033</a:t>
             </a:r>
             <a:endParaRPr lang="en-US" sz="950" dirty="0"/>
           </a:p>
@@ -12692,7 +13685,7 @@
                 <a:ea typeface="Pretendard SemiBold" pitchFamily="34" charset="-122"/>
                 <a:cs typeface="Pretendard SemiBold" pitchFamily="34" charset="-120"/>
               </a:rPr>
-              <a:t>GameObject와 Component.</a:t>
+              <a:t>실습 — 로봇팔 만들기.</a:t>
             </a:r>
             <a:endParaRPr lang="en-US" sz="2600" dirty="0"/>
           </a:p>
@@ -12731,7 +13724,7 @@
                 <a:ea typeface="Pretendard Light" pitchFamily="34" charset="-122"/>
                 <a:cs typeface="Pretendard Light" pitchFamily="34" charset="-120"/>
               </a:rPr>
-              <a:t>조립이 아니라 분해로 가르친다.</a:t>
+              <a:t>어깨를 돌리면 팔 전체가 돌아야 한다.</a:t>
             </a:r>
             <a:endParaRPr lang="en-US" sz="1500" dirty="0"/>
           </a:p>
@@ -12746,7 +13739,7 @@
         <p:spPr>
           <a:xfrm>
             <a:off x="758952" y="1965960"/>
-            <a:ext cx="3291840" cy="274320"/>
+            <a:ext cx="3657600" cy="274320"/>
           </a:xfrm>
           <a:prstGeom prst="rect">
             <a:avLst/>
@@ -12770,7 +13763,7 @@
                 <a:ea typeface="Pretendard SemiBold" pitchFamily="34" charset="-122"/>
                 <a:cs typeface="Pretendard SemiBold" pitchFamily="34" charset="-120"/>
               </a:rPr>
-              <a:t>부품</a:t>
+              <a:t>계층 구조</a:t>
             </a:r>
             <a:endParaRPr lang="en-US" sz="950" dirty="0"/>
           </a:p>
@@ -12778,92 +13771,14 @@
       </p:sp>
       <p:sp>
         <p:nvSpPr>
-          <p:cNvPr id="7" name="Text 5"/>
-          <p:cNvSpPr txBox="1"/>
-          <p:nvPr/>
-        </p:nvSpPr>
-        <p:spPr>
-          <a:xfrm>
-            <a:off x="4690872" y="1965960"/>
-            <a:ext cx="2926080" cy="274320"/>
-          </a:xfrm>
-          <a:prstGeom prst="rect">
-            <a:avLst/>
-          </a:prstGeom>
-          <a:noFill/>
-          <a:ln/>
-        </p:spPr>
-        <p:txBody>
-          <a:bodyPr wrap="square" lIns="0" tIns="0" rIns="0" bIns="0" rtlCol="0" anchor="ctr"/>
-          <a:lstStyle/>
-          <a:p>
-            <a:pPr indent="0" marL="0">
-              <a:buNone/>
-            </a:pPr>
-            <a:r>
-              <a:rPr lang="en-US" sz="950" dirty="0">
-                <a:solidFill>
-                  <a:srgbClr val="707070"/>
-                </a:solidFill>
-                <a:latin typeface="Pretendard SemiBold" pitchFamily="34" charset="0"/>
-                <a:ea typeface="Pretendard SemiBold" pitchFamily="34" charset="-122"/>
-                <a:cs typeface="Pretendard SemiBold" pitchFamily="34" charset="-120"/>
-              </a:rPr>
-              <a:t>없으면</a:t>
-            </a:r>
-            <a:endParaRPr lang="en-US" sz="950" dirty="0"/>
-          </a:p>
-        </p:txBody>
-      </p:sp>
-      <p:sp>
-        <p:nvSpPr>
-          <p:cNvPr id="8" name="Text 6"/>
-          <p:cNvSpPr txBox="1"/>
-          <p:nvPr/>
-        </p:nvSpPr>
-        <p:spPr>
-          <a:xfrm>
-            <a:off x="7799832" y="1965960"/>
-            <a:ext cx="2926080" cy="274320"/>
-          </a:xfrm>
-          <a:prstGeom prst="rect">
-            <a:avLst/>
-          </a:prstGeom>
-          <a:noFill/>
-          <a:ln/>
-        </p:spPr>
-        <p:txBody>
-          <a:bodyPr wrap="square" lIns="0" tIns="0" rIns="0" bIns="0" rtlCol="0" anchor="ctr"/>
-          <a:lstStyle/>
-          <a:p>
-            <a:pPr indent="0" marL="0">
-              <a:buNone/>
-            </a:pPr>
-            <a:r>
-              <a:rPr lang="en-US" sz="950" dirty="0">
-                <a:solidFill>
-                  <a:srgbClr val="707070"/>
-                </a:solidFill>
-                <a:latin typeface="Pretendard SemiBold" pitchFamily="34" charset="0"/>
-                <a:ea typeface="Pretendard SemiBold" pitchFamily="34" charset="-122"/>
-                <a:cs typeface="Pretendard SemiBold" pitchFamily="34" charset="-120"/>
-              </a:rPr>
-              <a:t>있으면</a:t>
-            </a:r>
-            <a:endParaRPr lang="en-US" sz="950" dirty="0"/>
-          </a:p>
-        </p:txBody>
-      </p:sp>
-      <p:sp>
-        <p:nvSpPr>
-          <p:cNvPr id="9" name="Shape 7"/>
+          <p:cNvPr id="7" name="Shape 5"/>
           <p:cNvSpPr/>
           <p:nvPr/>
         </p:nvSpPr>
         <p:spPr>
           <a:xfrm>
-            <a:off x="758952" y="2395728"/>
-            <a:ext cx="10673791" cy="0"/>
+            <a:off x="758952" y="2377440"/>
+            <a:ext cx="4937760" cy="0"/>
           </a:xfrm>
           <a:prstGeom prst="line">
             <a:avLst/>
@@ -12879,18 +13794,503 @@
       </p:sp>
       <p:sp>
         <p:nvSpPr>
+          <p:cNvPr id="8" name="Text 6"/>
+          <p:cNvSpPr txBox="1"/>
+          <p:nvPr/>
+        </p:nvSpPr>
+        <p:spPr>
+          <a:xfrm>
+            <a:off x="758952" y="2560320"/>
+            <a:ext cx="2560320" cy="329184"/>
+          </a:xfrm>
+          <a:prstGeom prst="rect">
+            <a:avLst/>
+          </a:prstGeom>
+          <a:noFill/>
+          <a:ln/>
+        </p:spPr>
+        <p:txBody>
+          <a:bodyPr wrap="square" lIns="0" tIns="0" rIns="0" bIns="0" rtlCol="0" anchor="ctr"/>
+          <a:lstStyle/>
+          <a:p>
+            <a:pPr indent="0" marL="0">
+              <a:buNone/>
+            </a:pPr>
+            <a:r>
+              <a:rPr lang="en-US" sz="1200" dirty="0">
+                <a:solidFill>
+                  <a:srgbClr val="141414"/>
+                </a:solidFill>
+                <a:latin typeface="Pretendard Medium" pitchFamily="34" charset="0"/>
+                <a:ea typeface="Pretendard Medium" pitchFamily="34" charset="-122"/>
+                <a:cs typeface="Pretendard Medium" pitchFamily="34" charset="-120"/>
+              </a:rPr>
+              <a:t>Shoulder</a:t>
+            </a:r>
+            <a:endParaRPr lang="en-US" sz="1200" dirty="0"/>
+          </a:p>
+        </p:txBody>
+      </p:sp>
+      <p:sp>
+        <p:nvSpPr>
+          <p:cNvPr id="9" name="Text 7"/>
+          <p:cNvSpPr txBox="1"/>
+          <p:nvPr/>
+        </p:nvSpPr>
+        <p:spPr>
+          <a:xfrm>
+            <a:off x="3959352" y="2560320"/>
+            <a:ext cx="1737360" cy="329184"/>
+          </a:xfrm>
+          <a:prstGeom prst="rect">
+            <a:avLst/>
+          </a:prstGeom>
+          <a:noFill/>
+          <a:ln/>
+        </p:spPr>
+        <p:txBody>
+          <a:bodyPr wrap="square" lIns="0" tIns="0" rIns="0" bIns="0" rtlCol="0" anchor="ctr"/>
+          <a:lstStyle/>
+          <a:p>
+            <a:pPr indent="0" marL="0">
+              <a:buNone/>
+            </a:pPr>
+            <a:r>
+              <a:rPr lang="en-US" sz="1100" dirty="0">
+                <a:solidFill>
+                  <a:srgbClr val="ADADAD"/>
+                </a:solidFill>
+                <a:latin typeface="Pretendard" pitchFamily="34" charset="0"/>
+                <a:ea typeface="Pretendard" pitchFamily="34" charset="-122"/>
+                <a:cs typeface="Pretendard" pitchFamily="34" charset="-120"/>
+              </a:rPr>
+              <a:t>어깨 — 부모</a:t>
+            </a:r>
+            <a:endParaRPr lang="en-US" sz="1100" dirty="0"/>
+          </a:p>
+        </p:txBody>
+      </p:sp>
+      <p:sp>
+        <p:nvSpPr>
           <p:cNvPr id="10" name="Shape 8"/>
           <p:cNvSpPr/>
           <p:nvPr/>
         </p:nvSpPr>
         <p:spPr>
           <a:xfrm>
-            <a:off x="502920" y="2468880"/>
-            <a:ext cx="11185855" cy="676656"/>
+            <a:off x="758952" y="3017520"/>
+            <a:ext cx="4937760" cy="0"/>
+          </a:xfrm>
+          <a:prstGeom prst="line">
+            <a:avLst/>
+          </a:prstGeom>
+          <a:noFill/>
+          <a:ln w="12700">
+            <a:solidFill>
+              <a:srgbClr val="F0F0F0"/>
+            </a:solidFill>
+            <a:prstDash val="solid"/>
+          </a:ln>
+        </p:spPr>
+      </p:sp>
+      <p:sp>
+        <p:nvSpPr>
+          <p:cNvPr id="11" name="Text 9"/>
+          <p:cNvSpPr txBox="1"/>
+          <p:nvPr/>
+        </p:nvSpPr>
+        <p:spPr>
+          <a:xfrm>
+            <a:off x="1143000" y="3127248"/>
+            <a:ext cx="2560320" cy="329184"/>
+          </a:xfrm>
+          <a:prstGeom prst="rect">
+            <a:avLst/>
+          </a:prstGeom>
+          <a:noFill/>
+          <a:ln/>
+        </p:spPr>
+        <p:txBody>
+          <a:bodyPr wrap="square" lIns="0" tIns="0" rIns="0" bIns="0" rtlCol="0" anchor="ctr"/>
+          <a:lstStyle/>
+          <a:p>
+            <a:pPr indent="0" marL="0">
+              <a:buNone/>
+            </a:pPr>
+            <a:r>
+              <a:rPr lang="en-US" sz="1200" dirty="0">
+                <a:solidFill>
+                  <a:srgbClr val="141414"/>
+                </a:solidFill>
+                <a:latin typeface="Pretendard Medium" pitchFamily="34" charset="0"/>
+                <a:ea typeface="Pretendard Medium" pitchFamily="34" charset="-122"/>
+                <a:cs typeface="Pretendard Medium" pitchFamily="34" charset="-120"/>
+              </a:rPr>
+              <a:t>UpperArm</a:t>
+            </a:r>
+            <a:endParaRPr lang="en-US" sz="1200" dirty="0"/>
+          </a:p>
+        </p:txBody>
+      </p:sp>
+      <p:sp>
+        <p:nvSpPr>
+          <p:cNvPr id="12" name="Text 10"/>
+          <p:cNvSpPr txBox="1"/>
+          <p:nvPr/>
+        </p:nvSpPr>
+        <p:spPr>
+          <a:xfrm>
+            <a:off x="3959352" y="3127248"/>
+            <a:ext cx="1737360" cy="329184"/>
+          </a:xfrm>
+          <a:prstGeom prst="rect">
+            <a:avLst/>
+          </a:prstGeom>
+          <a:noFill/>
+          <a:ln/>
+        </p:spPr>
+        <p:txBody>
+          <a:bodyPr wrap="square" lIns="0" tIns="0" rIns="0" bIns="0" rtlCol="0" anchor="ctr"/>
+          <a:lstStyle/>
+          <a:p>
+            <a:pPr indent="0" marL="0">
+              <a:buNone/>
+            </a:pPr>
+            <a:r>
+              <a:rPr lang="en-US" sz="1100" dirty="0">
+                <a:solidFill>
+                  <a:srgbClr val="ADADAD"/>
+                </a:solidFill>
+                <a:latin typeface="Pretendard" pitchFamily="34" charset="0"/>
+                <a:ea typeface="Pretendard" pitchFamily="34" charset="-122"/>
+                <a:cs typeface="Pretendard" pitchFamily="34" charset="-120"/>
+              </a:rPr>
+              <a:t>윗팔</a:t>
+            </a:r>
+            <a:endParaRPr lang="en-US" sz="1100" dirty="0"/>
+          </a:p>
+        </p:txBody>
+      </p:sp>
+      <p:sp>
+        <p:nvSpPr>
+          <p:cNvPr id="13" name="Shape 11"/>
+          <p:cNvSpPr/>
+          <p:nvPr/>
+        </p:nvSpPr>
+        <p:spPr>
+          <a:xfrm>
+            <a:off x="758952" y="3584448"/>
+            <a:ext cx="4937760" cy="0"/>
+          </a:xfrm>
+          <a:prstGeom prst="line">
+            <a:avLst/>
+          </a:prstGeom>
+          <a:noFill/>
+          <a:ln w="12700">
+            <a:solidFill>
+              <a:srgbClr val="F0F0F0"/>
+            </a:solidFill>
+            <a:prstDash val="solid"/>
+          </a:ln>
+        </p:spPr>
+      </p:sp>
+      <p:sp>
+        <p:nvSpPr>
+          <p:cNvPr id="14" name="Text 12"/>
+          <p:cNvSpPr txBox="1"/>
+          <p:nvPr/>
+        </p:nvSpPr>
+        <p:spPr>
+          <a:xfrm>
+            <a:off x="1527048" y="3694176"/>
+            <a:ext cx="2560320" cy="329184"/>
+          </a:xfrm>
+          <a:prstGeom prst="rect">
+            <a:avLst/>
+          </a:prstGeom>
+          <a:noFill/>
+          <a:ln/>
+        </p:spPr>
+        <p:txBody>
+          <a:bodyPr wrap="square" lIns="0" tIns="0" rIns="0" bIns="0" rtlCol="0" anchor="ctr"/>
+          <a:lstStyle/>
+          <a:p>
+            <a:pPr indent="0" marL="0">
+              <a:buNone/>
+            </a:pPr>
+            <a:r>
+              <a:rPr lang="en-US" sz="1200" dirty="0">
+                <a:solidFill>
+                  <a:srgbClr val="141414"/>
+                </a:solidFill>
+                <a:latin typeface="Pretendard Medium" pitchFamily="34" charset="0"/>
+                <a:ea typeface="Pretendard Medium" pitchFamily="34" charset="-122"/>
+                <a:cs typeface="Pretendard Medium" pitchFamily="34" charset="-120"/>
+              </a:rPr>
+              <a:t>LowerArm</a:t>
+            </a:r>
+            <a:endParaRPr lang="en-US" sz="1200" dirty="0"/>
+          </a:p>
+        </p:txBody>
+      </p:sp>
+      <p:sp>
+        <p:nvSpPr>
+          <p:cNvPr id="15" name="Text 13"/>
+          <p:cNvSpPr txBox="1"/>
+          <p:nvPr/>
+        </p:nvSpPr>
+        <p:spPr>
+          <a:xfrm>
+            <a:off x="3959352" y="3694176"/>
+            <a:ext cx="1737360" cy="329184"/>
+          </a:xfrm>
+          <a:prstGeom prst="rect">
+            <a:avLst/>
+          </a:prstGeom>
+          <a:noFill/>
+          <a:ln/>
+        </p:spPr>
+        <p:txBody>
+          <a:bodyPr wrap="square" lIns="0" tIns="0" rIns="0" bIns="0" rtlCol="0" anchor="ctr"/>
+          <a:lstStyle/>
+          <a:p>
+            <a:pPr indent="0" marL="0">
+              <a:buNone/>
+            </a:pPr>
+            <a:r>
+              <a:rPr lang="en-US" sz="1100" dirty="0">
+                <a:solidFill>
+                  <a:srgbClr val="ADADAD"/>
+                </a:solidFill>
+                <a:latin typeface="Pretendard" pitchFamily="34" charset="0"/>
+                <a:ea typeface="Pretendard" pitchFamily="34" charset="-122"/>
+                <a:cs typeface="Pretendard" pitchFamily="34" charset="-120"/>
+              </a:rPr>
+              <a:t>아랫팔</a:t>
+            </a:r>
+            <a:endParaRPr lang="en-US" sz="1100" dirty="0"/>
+          </a:p>
+        </p:txBody>
+      </p:sp>
+      <p:sp>
+        <p:nvSpPr>
+          <p:cNvPr id="16" name="Shape 14"/>
+          <p:cNvSpPr/>
+          <p:nvPr/>
+        </p:nvSpPr>
+        <p:spPr>
+          <a:xfrm>
+            <a:off x="758952" y="4151376"/>
+            <a:ext cx="4937760" cy="0"/>
+          </a:xfrm>
+          <a:prstGeom prst="line">
+            <a:avLst/>
+          </a:prstGeom>
+          <a:noFill/>
+          <a:ln w="12700">
+            <a:solidFill>
+              <a:srgbClr val="F0F0F0"/>
+            </a:solidFill>
+            <a:prstDash val="solid"/>
+          </a:ln>
+        </p:spPr>
+      </p:sp>
+      <p:sp>
+        <p:nvSpPr>
+          <p:cNvPr id="17" name="Text 15"/>
+          <p:cNvSpPr txBox="1"/>
+          <p:nvPr/>
+        </p:nvSpPr>
+        <p:spPr>
+          <a:xfrm>
+            <a:off x="1911096" y="4261104"/>
+            <a:ext cx="2560320" cy="329184"/>
+          </a:xfrm>
+          <a:prstGeom prst="rect">
+            <a:avLst/>
+          </a:prstGeom>
+          <a:noFill/>
+          <a:ln/>
+        </p:spPr>
+        <p:txBody>
+          <a:bodyPr wrap="square" lIns="0" tIns="0" rIns="0" bIns="0" rtlCol="0" anchor="ctr"/>
+          <a:lstStyle/>
+          <a:p>
+            <a:pPr indent="0" marL="0">
+              <a:buNone/>
+            </a:pPr>
+            <a:r>
+              <a:rPr lang="en-US" sz="1200" dirty="0">
+                <a:solidFill>
+                  <a:srgbClr val="141414"/>
+                </a:solidFill>
+                <a:latin typeface="Pretendard Medium" pitchFamily="34" charset="0"/>
+                <a:ea typeface="Pretendard Medium" pitchFamily="34" charset="-122"/>
+                <a:cs typeface="Pretendard Medium" pitchFamily="34" charset="-120"/>
+              </a:rPr>
+              <a:t>Hand</a:t>
+            </a:r>
+            <a:endParaRPr lang="en-US" sz="1200" dirty="0"/>
+          </a:p>
+        </p:txBody>
+      </p:sp>
+      <p:sp>
+        <p:nvSpPr>
+          <p:cNvPr id="18" name="Text 16"/>
+          <p:cNvSpPr txBox="1"/>
+          <p:nvPr/>
+        </p:nvSpPr>
+        <p:spPr>
+          <a:xfrm>
+            <a:off x="3959352" y="4261104"/>
+            <a:ext cx="1737360" cy="329184"/>
+          </a:xfrm>
+          <a:prstGeom prst="rect">
+            <a:avLst/>
+          </a:prstGeom>
+          <a:noFill/>
+          <a:ln/>
+        </p:spPr>
+        <p:txBody>
+          <a:bodyPr wrap="square" lIns="0" tIns="0" rIns="0" bIns="0" rtlCol="0" anchor="ctr"/>
+          <a:lstStyle/>
+          <a:p>
+            <a:pPr indent="0" marL="0">
+              <a:buNone/>
+            </a:pPr>
+            <a:r>
+              <a:rPr lang="en-US" sz="1100" dirty="0">
+                <a:solidFill>
+                  <a:srgbClr val="ADADAD"/>
+                </a:solidFill>
+                <a:latin typeface="Pretendard" pitchFamily="34" charset="0"/>
+                <a:ea typeface="Pretendard" pitchFamily="34" charset="-122"/>
+                <a:cs typeface="Pretendard" pitchFamily="34" charset="-120"/>
+              </a:rPr>
+              <a:t>손</a:t>
+            </a:r>
+            <a:endParaRPr lang="en-US" sz="1100" dirty="0"/>
+          </a:p>
+        </p:txBody>
+      </p:sp>
+      <p:sp>
+        <p:nvSpPr>
+          <p:cNvPr id="19" name="Shape 17"/>
+          <p:cNvSpPr/>
+          <p:nvPr/>
+        </p:nvSpPr>
+        <p:spPr>
+          <a:xfrm>
+            <a:off x="758952" y="4718304"/>
+            <a:ext cx="4937760" cy="0"/>
+          </a:xfrm>
+          <a:prstGeom prst="line">
+            <a:avLst/>
+          </a:prstGeom>
+          <a:noFill/>
+          <a:ln w="12700">
+            <a:solidFill>
+              <a:srgbClr val="F0F0F0"/>
+            </a:solidFill>
+            <a:prstDash val="solid"/>
+          </a:ln>
+        </p:spPr>
+      </p:sp>
+      <p:sp>
+        <p:nvSpPr>
+          <p:cNvPr id="20" name="Text 18"/>
+          <p:cNvSpPr txBox="1"/>
+          <p:nvPr/>
+        </p:nvSpPr>
+        <p:spPr>
+          <a:xfrm>
+            <a:off x="758952" y="5029200"/>
+            <a:ext cx="4937760" cy="640080"/>
+          </a:xfrm>
+          <a:prstGeom prst="rect">
+            <a:avLst/>
+          </a:prstGeom>
+          <a:noFill/>
+          <a:ln/>
+        </p:spPr>
+        <p:txBody>
+          <a:bodyPr wrap="square" lIns="0" tIns="0" rIns="0" bIns="0" rtlCol="0" anchor="ctr"/>
+          <a:lstStyle/>
+          <a:p>
+            <a:pPr indent="0" marL="0">
+              <a:lnSpc>
+                <a:spcPct val="138000"/>
+              </a:lnSpc>
+              <a:buNone/>
+            </a:pPr>
+            <a:r>
+              <a:rPr lang="en-US" sz="1200" dirty="0">
+                <a:solidFill>
+                  <a:srgbClr val="707070"/>
+                </a:solidFill>
+                <a:latin typeface="Pretendard Light" pitchFamily="34" charset="0"/>
+                <a:ea typeface="Pretendard Light" pitchFamily="34" charset="-122"/>
+                <a:cs typeface="Pretendard Light" pitchFamily="34" charset="-120"/>
+              </a:rPr>
+              <a:t>4개를 먼저 만들어 계층부터 잡고, 그다음 좌표를 넣는다. 반대로 하면 위치가 튄다.</a:t>
+            </a:r>
+            <a:endParaRPr lang="en-US" sz="1200" dirty="0"/>
+          </a:p>
+        </p:txBody>
+      </p:sp>
+      <p:sp>
+        <p:nvSpPr>
+          <p:cNvPr id="21" name="Text 19"/>
+          <p:cNvSpPr txBox="1"/>
+          <p:nvPr/>
+        </p:nvSpPr>
+        <p:spPr>
+          <a:xfrm>
+            <a:off x="758952" y="5760720"/>
+            <a:ext cx="5212080" cy="347472"/>
+          </a:xfrm>
+          <a:prstGeom prst="rect">
+            <a:avLst/>
+          </a:prstGeom>
+          <a:noFill/>
+          <a:ln/>
+        </p:spPr>
+        <p:txBody>
+          <a:bodyPr wrap="square" lIns="0" tIns="0" rIns="0" bIns="0" rtlCol="0" anchor="ctr"/>
+          <a:lstStyle/>
+          <a:p>
+            <a:pPr indent="0" marL="0">
+              <a:buNone/>
+            </a:pPr>
+            <a:r>
+              <a:rPr lang="en-US" sz="1400" dirty="0">
+                <a:solidFill>
+                  <a:srgbClr val="141414"/>
+                </a:solidFill>
+                <a:latin typeface="Pretendard SemiBold" pitchFamily="34" charset="0"/>
+                <a:ea typeface="Pretendard SemiBold" pitchFamily="34" charset="-122"/>
+                <a:cs typeface="Pretendard SemiBold" pitchFamily="34" charset="-120"/>
+              </a:rPr>
+              <a:t>Shoulder만 돌렸는데 손까지 따라 움직이면 통과.</a:t>
+            </a:r>
+            <a:endParaRPr lang="en-US" sz="1400" dirty="0"/>
+          </a:p>
+        </p:txBody>
+      </p:sp>
+      <p:sp>
+        <p:nvSpPr>
+          <p:cNvPr id="22" name="Shape 20"/>
+          <p:cNvSpPr/>
+          <p:nvPr/>
+        </p:nvSpPr>
+        <p:spPr>
+          <a:xfrm>
+            <a:off x="6263640" y="1965960"/>
+            <a:ext cx="5166360" cy="3858768"/>
           </a:xfrm>
           <a:prstGeom prst="roundRect">
             <a:avLst>
-              <a:gd name="adj" fmla="val 22568"/>
+              <a:gd name="adj" fmla="val 5924"/>
             </a:avLst>
           </a:prstGeom>
           <a:solidFill>
@@ -12904,71 +14304,56 @@
           </a:ln>
         </p:spPr>
       </p:sp>
-      <p:sp>
-        <p:nvSpPr>
-          <p:cNvPr id="11" name="Text 9"/>
-          <p:cNvSpPr txBox="1"/>
-          <p:nvPr/>
-        </p:nvSpPr>
-        <p:spPr>
-          <a:xfrm>
-            <a:off x="758952" y="2578608"/>
-            <a:ext cx="3749040" cy="420624"/>
-          </a:xfrm>
-          <a:prstGeom prst="rect">
-            <a:avLst/>
-          </a:prstGeom>
-          <a:noFill/>
-          <a:ln/>
-        </p:spPr>
-        <p:txBody>
-          <a:bodyPr wrap="square" lIns="0" tIns="0" rIns="0" bIns="0" rtlCol="0" anchor="ctr"/>
-          <a:lstStyle/>
-          <a:p>
-            <a:pPr indent="0" marL="0">
-              <a:buNone/>
-            </a:pPr>
-            <a:r>
-              <a:rPr lang="en-US" sz="1550" dirty="0">
-                <a:solidFill>
-                  <a:srgbClr val="141414"/>
-                </a:solidFill>
-                <a:latin typeface="Pretendard SemiBold" pitchFamily="34" charset="0"/>
-                <a:ea typeface="Pretendard SemiBold" pitchFamily="34" charset="-122"/>
-                <a:cs typeface="Pretendard SemiBold" pitchFamily="34" charset="-120"/>
-              </a:rPr>
-              <a:t>Transform</a:t>
-            </a:r>
-            <a:endParaRPr lang="en-US" sz="1550" dirty="0"/>
-          </a:p>
-        </p:txBody>
-      </p:sp>
-      <p:sp>
-        <p:nvSpPr>
-          <p:cNvPr id="12" name="Text 10"/>
-          <p:cNvSpPr txBox="1"/>
-          <p:nvPr/>
-        </p:nvSpPr>
-        <p:spPr>
-          <a:xfrm>
-            <a:off x="4690872" y="2578608"/>
-            <a:ext cx="2926080" cy="420624"/>
-          </a:xfrm>
-          <a:prstGeom prst="rect">
-            <a:avLst/>
-          </a:prstGeom>
-          <a:noFill/>
-          <a:ln/>
-        </p:spPr>
-        <p:txBody>
-          <a:bodyPr wrap="square" lIns="0" tIns="0" rIns="0" bIns="0" rtlCol="0" anchor="ctr"/>
-          <a:lstStyle/>
-          <a:p>
-            <a:pPr indent="0" marL="0">
-              <a:buNone/>
-            </a:pPr>
-            <a:r>
-              <a:rPr lang="en-US" sz="1200" dirty="0">
+      <p:pic>
+        <p:nvPicPr>
+          <p:cNvPr id="23" name="Image 0" descr="C:\Users\user\AppData\Local\Temp\claude\C--Users-user-Github-WaveBreaker\fd97bec6-cef8-4bf5-a447-9a0fa572b36e\scratchpad\shots2\final\033_Transform.png">    </p:cNvPr>
+          <p:cNvPicPr>
+            <a:picLocks noChangeAspect="1"/>
+          </p:cNvPicPr>
+          <p:nvPr/>
+        </p:nvPicPr>
+        <p:blipFill>
+          <a:blip r:embed="rId1"/>
+          <a:stretch>
+            <a:fillRect/>
+          </a:stretch>
+        </p:blipFill>
+        <p:spPr>
+          <a:xfrm>
+            <a:off x="6464808" y="2167128"/>
+            <a:ext cx="4764024" cy="2980944"/>
+          </a:xfrm>
+          <a:prstGeom prst="rect">
+            <a:avLst/>
+          </a:prstGeom>
+        </p:spPr>
+      </p:pic>
+      <p:sp>
+        <p:nvSpPr>
+          <p:cNvPr id="24" name="Text 21"/>
+          <p:cNvSpPr txBox="1"/>
+          <p:nvPr/>
+        </p:nvSpPr>
+        <p:spPr>
+          <a:xfrm>
+            <a:off x="6464808" y="5221224"/>
+            <a:ext cx="4764024" cy="310896"/>
+          </a:xfrm>
+          <a:prstGeom prst="rect">
+            <a:avLst/>
+          </a:prstGeom>
+          <a:noFill/>
+          <a:ln/>
+        </p:spPr>
+        <p:txBody>
+          <a:bodyPr wrap="square" lIns="0" tIns="0" rIns="0" bIns="0" rtlCol="0" anchor="ctr"/>
+          <a:lstStyle/>
+          <a:p>
+            <a:pPr algn="ctr" indent="0" marL="0">
+              <a:buNone/>
+            </a:pPr>
+            <a:r>
+              <a:rPr lang="en-US" sz="950" dirty="0">
                 <a:solidFill>
                   <a:srgbClr val="ADADAD"/>
                 </a:solidFill>
@@ -12976,530 +14361,9 @@
                 <a:ea typeface="Pretendard" pitchFamily="34" charset="-122"/>
                 <a:cs typeface="Pretendard" pitchFamily="34" charset="-120"/>
               </a:rPr>
-              <a:t>존재 불가</a:t>
-            </a:r>
-            <a:endParaRPr lang="en-US" sz="1200" dirty="0"/>
-          </a:p>
-        </p:txBody>
-      </p:sp>
-      <p:sp>
-        <p:nvSpPr>
-          <p:cNvPr id="13" name="Text 11"/>
-          <p:cNvSpPr txBox="1"/>
-          <p:nvPr/>
-        </p:nvSpPr>
-        <p:spPr>
-          <a:xfrm>
-            <a:off x="7799832" y="2578608"/>
-            <a:ext cx="3108960" cy="420624"/>
-          </a:xfrm>
-          <a:prstGeom prst="rect">
-            <a:avLst/>
-          </a:prstGeom>
-          <a:noFill/>
-          <a:ln/>
-        </p:spPr>
-        <p:txBody>
-          <a:bodyPr wrap="square" lIns="0" tIns="0" rIns="0" bIns="0" rtlCol="0" anchor="ctr"/>
-          <a:lstStyle/>
-          <a:p>
-            <a:pPr indent="0" marL="0">
-              <a:buNone/>
-            </a:pPr>
-            <a:r>
-              <a:rPr lang="en-US" sz="1200" dirty="0">
-                <a:solidFill>
-                  <a:srgbClr val="141414"/>
-                </a:solidFill>
-                <a:latin typeface="Pretendard" pitchFamily="34" charset="0"/>
-                <a:ea typeface="Pretendard" pitchFamily="34" charset="-122"/>
-                <a:cs typeface="Pretendard" pitchFamily="34" charset="-120"/>
-              </a:rPr>
-              <a:t>위치 · 회전 · 크기</a:t>
-            </a:r>
-            <a:endParaRPr lang="en-US" sz="1200" dirty="0"/>
-          </a:p>
-        </p:txBody>
-      </p:sp>
-      <p:sp>
-        <p:nvSpPr>
-          <p:cNvPr id="14" name="Shape 12"/>
-          <p:cNvSpPr/>
-          <p:nvPr/>
-        </p:nvSpPr>
-        <p:spPr>
-          <a:xfrm>
-            <a:off x="758952" y="3163824"/>
-            <a:ext cx="10673791" cy="0"/>
-          </a:xfrm>
-          <a:prstGeom prst="line">
-            <a:avLst/>
-          </a:prstGeom>
-          <a:noFill/>
-          <a:ln w="12700">
-            <a:solidFill>
-              <a:srgbClr val="F0F0F0"/>
-            </a:solidFill>
-            <a:prstDash val="solid"/>
-          </a:ln>
-        </p:spPr>
-      </p:sp>
-      <p:sp>
-        <p:nvSpPr>
-          <p:cNvPr id="15" name="Text 13"/>
-          <p:cNvSpPr txBox="1"/>
-          <p:nvPr/>
-        </p:nvSpPr>
-        <p:spPr>
-          <a:xfrm>
-            <a:off x="758952" y="3383280"/>
-            <a:ext cx="3749040" cy="420624"/>
-          </a:xfrm>
-          <a:prstGeom prst="rect">
-            <a:avLst/>
-          </a:prstGeom>
-          <a:noFill/>
-          <a:ln/>
-        </p:spPr>
-        <p:txBody>
-          <a:bodyPr wrap="square" lIns="0" tIns="0" rIns="0" bIns="0" rtlCol="0" anchor="ctr"/>
-          <a:lstStyle/>
-          <a:p>
-            <a:pPr indent="0" marL="0">
-              <a:buNone/>
-            </a:pPr>
-            <a:r>
-              <a:rPr lang="en-US" sz="1550" dirty="0">
-                <a:solidFill>
-                  <a:srgbClr val="141414"/>
-                </a:solidFill>
-                <a:latin typeface="Pretendard SemiBold" pitchFamily="34" charset="0"/>
-                <a:ea typeface="Pretendard SemiBold" pitchFamily="34" charset="-122"/>
-                <a:cs typeface="Pretendard SemiBold" pitchFamily="34" charset="-120"/>
-              </a:rPr>
-              <a:t>Sprite Renderer</a:t>
-            </a:r>
-            <a:endParaRPr lang="en-US" sz="1550" dirty="0"/>
-          </a:p>
-        </p:txBody>
-      </p:sp>
-      <p:sp>
-        <p:nvSpPr>
-          <p:cNvPr id="16" name="Text 14"/>
-          <p:cNvSpPr txBox="1"/>
-          <p:nvPr/>
-        </p:nvSpPr>
-        <p:spPr>
-          <a:xfrm>
-            <a:off x="4690872" y="3383280"/>
-            <a:ext cx="2926080" cy="420624"/>
-          </a:xfrm>
-          <a:prstGeom prst="rect">
-            <a:avLst/>
-          </a:prstGeom>
-          <a:noFill/>
-          <a:ln/>
-        </p:spPr>
-        <p:txBody>
-          <a:bodyPr wrap="square" lIns="0" tIns="0" rIns="0" bIns="0" rtlCol="0" anchor="ctr"/>
-          <a:lstStyle/>
-          <a:p>
-            <a:pPr indent="0" marL="0">
-              <a:buNone/>
-            </a:pPr>
-            <a:r>
-              <a:rPr lang="en-US" sz="1200" dirty="0">
-                <a:solidFill>
-                  <a:srgbClr val="ADADAD"/>
-                </a:solidFill>
-                <a:latin typeface="Pretendard" pitchFamily="34" charset="0"/>
-                <a:ea typeface="Pretendard" pitchFamily="34" charset="-122"/>
-                <a:cs typeface="Pretendard" pitchFamily="34" charset="-120"/>
-              </a:rPr>
-              <a:t>안 보인다</a:t>
-            </a:r>
-            <a:endParaRPr lang="en-US" sz="1200" dirty="0"/>
-          </a:p>
-        </p:txBody>
-      </p:sp>
-      <p:sp>
-        <p:nvSpPr>
-          <p:cNvPr id="17" name="Text 15"/>
-          <p:cNvSpPr txBox="1"/>
-          <p:nvPr/>
-        </p:nvSpPr>
-        <p:spPr>
-          <a:xfrm>
-            <a:off x="7799832" y="3383280"/>
-            <a:ext cx="3108960" cy="420624"/>
-          </a:xfrm>
-          <a:prstGeom prst="rect">
-            <a:avLst/>
-          </a:prstGeom>
-          <a:noFill/>
-          <a:ln/>
-        </p:spPr>
-        <p:txBody>
-          <a:bodyPr wrap="square" lIns="0" tIns="0" rIns="0" bIns="0" rtlCol="0" anchor="ctr"/>
-          <a:lstStyle/>
-          <a:p>
-            <a:pPr indent="0" marL="0">
-              <a:buNone/>
-            </a:pPr>
-            <a:r>
-              <a:rPr lang="en-US" sz="1200" dirty="0">
-                <a:solidFill>
-                  <a:srgbClr val="141414"/>
-                </a:solidFill>
-                <a:latin typeface="Pretendard" pitchFamily="34" charset="0"/>
-                <a:ea typeface="Pretendard" pitchFamily="34" charset="-122"/>
-                <a:cs typeface="Pretendard" pitchFamily="34" charset="-120"/>
-              </a:rPr>
-              <a:t>그림이 보인다</a:t>
-            </a:r>
-            <a:endParaRPr lang="en-US" sz="1200" dirty="0"/>
-          </a:p>
-        </p:txBody>
-      </p:sp>
-      <p:sp>
-        <p:nvSpPr>
-          <p:cNvPr id="18" name="Shape 16"/>
-          <p:cNvSpPr/>
-          <p:nvPr/>
-        </p:nvSpPr>
-        <p:spPr>
-          <a:xfrm>
-            <a:off x="758952" y="3968496"/>
-            <a:ext cx="10673791" cy="0"/>
-          </a:xfrm>
-          <a:prstGeom prst="line">
-            <a:avLst/>
-          </a:prstGeom>
-          <a:noFill/>
-          <a:ln w="12700">
-            <a:solidFill>
-              <a:srgbClr val="F0F0F0"/>
-            </a:solidFill>
-            <a:prstDash val="solid"/>
-          </a:ln>
-        </p:spPr>
-      </p:sp>
-      <p:sp>
-        <p:nvSpPr>
-          <p:cNvPr id="19" name="Text 17"/>
-          <p:cNvSpPr txBox="1"/>
-          <p:nvPr/>
-        </p:nvSpPr>
-        <p:spPr>
-          <a:xfrm>
-            <a:off x="758952" y="4187952"/>
-            <a:ext cx="3749040" cy="420624"/>
-          </a:xfrm>
-          <a:prstGeom prst="rect">
-            <a:avLst/>
-          </a:prstGeom>
-          <a:noFill/>
-          <a:ln/>
-        </p:spPr>
-        <p:txBody>
-          <a:bodyPr wrap="square" lIns="0" tIns="0" rIns="0" bIns="0" rtlCol="0" anchor="ctr"/>
-          <a:lstStyle/>
-          <a:p>
-            <a:pPr indent="0" marL="0">
-              <a:buNone/>
-            </a:pPr>
-            <a:r>
-              <a:rPr lang="en-US" sz="1550" dirty="0">
-                <a:solidFill>
-                  <a:srgbClr val="141414"/>
-                </a:solidFill>
-                <a:latin typeface="Pretendard SemiBold" pitchFamily="34" charset="0"/>
-                <a:ea typeface="Pretendard SemiBold" pitchFamily="34" charset="-122"/>
-                <a:cs typeface="Pretendard SemiBold" pitchFamily="34" charset="-120"/>
-              </a:rPr>
-              <a:t>Collider 2D</a:t>
-            </a:r>
-            <a:endParaRPr lang="en-US" sz="1550" dirty="0"/>
-          </a:p>
-        </p:txBody>
-      </p:sp>
-      <p:sp>
-        <p:nvSpPr>
-          <p:cNvPr id="20" name="Text 18"/>
-          <p:cNvSpPr txBox="1"/>
-          <p:nvPr/>
-        </p:nvSpPr>
-        <p:spPr>
-          <a:xfrm>
-            <a:off x="4690872" y="4187952"/>
-            <a:ext cx="2926080" cy="420624"/>
-          </a:xfrm>
-          <a:prstGeom prst="rect">
-            <a:avLst/>
-          </a:prstGeom>
-          <a:noFill/>
-          <a:ln/>
-        </p:spPr>
-        <p:txBody>
-          <a:bodyPr wrap="square" lIns="0" tIns="0" rIns="0" bIns="0" rtlCol="0" anchor="ctr"/>
-          <a:lstStyle/>
-          <a:p>
-            <a:pPr indent="0" marL="0">
-              <a:buNone/>
-            </a:pPr>
-            <a:r>
-              <a:rPr lang="en-US" sz="1200" dirty="0">
-                <a:solidFill>
-                  <a:srgbClr val="ADADAD"/>
-                </a:solidFill>
-                <a:latin typeface="Pretendard" pitchFamily="34" charset="0"/>
-                <a:ea typeface="Pretendard" pitchFamily="34" charset="-122"/>
-                <a:cs typeface="Pretendard" pitchFamily="34" charset="-120"/>
-              </a:rPr>
-              <a:t>통과한다</a:t>
-            </a:r>
-            <a:endParaRPr lang="en-US" sz="1200" dirty="0"/>
-          </a:p>
-        </p:txBody>
-      </p:sp>
-      <p:sp>
-        <p:nvSpPr>
-          <p:cNvPr id="21" name="Text 19"/>
-          <p:cNvSpPr txBox="1"/>
-          <p:nvPr/>
-        </p:nvSpPr>
-        <p:spPr>
-          <a:xfrm>
-            <a:off x="7799832" y="4187952"/>
-            <a:ext cx="3108960" cy="420624"/>
-          </a:xfrm>
-          <a:prstGeom prst="rect">
-            <a:avLst/>
-          </a:prstGeom>
-          <a:noFill/>
-          <a:ln/>
-        </p:spPr>
-        <p:txBody>
-          <a:bodyPr wrap="square" lIns="0" tIns="0" rIns="0" bIns="0" rtlCol="0" anchor="ctr"/>
-          <a:lstStyle/>
-          <a:p>
-            <a:pPr indent="0" marL="0">
-              <a:buNone/>
-            </a:pPr>
-            <a:r>
-              <a:rPr lang="en-US" sz="1200" dirty="0">
-                <a:solidFill>
-                  <a:srgbClr val="141414"/>
-                </a:solidFill>
-                <a:latin typeface="Pretendard" pitchFamily="34" charset="0"/>
-                <a:ea typeface="Pretendard" pitchFamily="34" charset="-122"/>
-                <a:cs typeface="Pretendard" pitchFamily="34" charset="-120"/>
-              </a:rPr>
-              <a:t>부딪힌다</a:t>
-            </a:r>
-            <a:endParaRPr lang="en-US" sz="1200" dirty="0"/>
-          </a:p>
-        </p:txBody>
-      </p:sp>
-      <p:sp>
-        <p:nvSpPr>
-          <p:cNvPr id="22" name="Shape 20"/>
-          <p:cNvSpPr/>
-          <p:nvPr/>
-        </p:nvSpPr>
-        <p:spPr>
-          <a:xfrm>
-            <a:off x="758952" y="4773168"/>
-            <a:ext cx="10673791" cy="0"/>
-          </a:xfrm>
-          <a:prstGeom prst="line">
-            <a:avLst/>
-          </a:prstGeom>
-          <a:noFill/>
-          <a:ln w="12700">
-            <a:solidFill>
-              <a:srgbClr val="F0F0F0"/>
-            </a:solidFill>
-            <a:prstDash val="solid"/>
-          </a:ln>
-        </p:spPr>
-      </p:sp>
-      <p:sp>
-        <p:nvSpPr>
-          <p:cNvPr id="23" name="Text 21"/>
-          <p:cNvSpPr txBox="1"/>
-          <p:nvPr/>
-        </p:nvSpPr>
-        <p:spPr>
-          <a:xfrm>
-            <a:off x="758952" y="4992624"/>
-            <a:ext cx="3749040" cy="420624"/>
-          </a:xfrm>
-          <a:prstGeom prst="rect">
-            <a:avLst/>
-          </a:prstGeom>
-          <a:noFill/>
-          <a:ln/>
-        </p:spPr>
-        <p:txBody>
-          <a:bodyPr wrap="square" lIns="0" tIns="0" rIns="0" bIns="0" rtlCol="0" anchor="ctr"/>
-          <a:lstStyle/>
-          <a:p>
-            <a:pPr indent="0" marL="0">
-              <a:buNone/>
-            </a:pPr>
-            <a:r>
-              <a:rPr lang="en-US" sz="1550" dirty="0">
-                <a:solidFill>
-                  <a:srgbClr val="141414"/>
-                </a:solidFill>
-                <a:latin typeface="Pretendard SemiBold" pitchFamily="34" charset="0"/>
-                <a:ea typeface="Pretendard SemiBold" pitchFamily="34" charset="-122"/>
-                <a:cs typeface="Pretendard SemiBold" pitchFamily="34" charset="-120"/>
-              </a:rPr>
-              <a:t>Rigidbody 2D</a:t>
-            </a:r>
-            <a:endParaRPr lang="en-US" sz="1550" dirty="0"/>
-          </a:p>
-        </p:txBody>
-      </p:sp>
-      <p:sp>
-        <p:nvSpPr>
-          <p:cNvPr id="24" name="Text 22"/>
-          <p:cNvSpPr txBox="1"/>
-          <p:nvPr/>
-        </p:nvSpPr>
-        <p:spPr>
-          <a:xfrm>
-            <a:off x="4690872" y="4992624"/>
-            <a:ext cx="2926080" cy="420624"/>
-          </a:xfrm>
-          <a:prstGeom prst="rect">
-            <a:avLst/>
-          </a:prstGeom>
-          <a:noFill/>
-          <a:ln/>
-        </p:spPr>
-        <p:txBody>
-          <a:bodyPr wrap="square" lIns="0" tIns="0" rIns="0" bIns="0" rtlCol="0" anchor="ctr"/>
-          <a:lstStyle/>
-          <a:p>
-            <a:pPr indent="0" marL="0">
-              <a:buNone/>
-            </a:pPr>
-            <a:r>
-              <a:rPr lang="en-US" sz="1200" dirty="0">
-                <a:solidFill>
-                  <a:srgbClr val="ADADAD"/>
-                </a:solidFill>
-                <a:latin typeface="Pretendard" pitchFamily="34" charset="0"/>
-                <a:ea typeface="Pretendard" pitchFamily="34" charset="-122"/>
-                <a:cs typeface="Pretendard" pitchFamily="34" charset="-120"/>
-              </a:rPr>
-              <a:t>가만히 있는다</a:t>
-            </a:r>
-            <a:endParaRPr lang="en-US" sz="1200" dirty="0"/>
-          </a:p>
-        </p:txBody>
-      </p:sp>
-      <p:sp>
-        <p:nvSpPr>
-          <p:cNvPr id="25" name="Text 23"/>
-          <p:cNvSpPr txBox="1"/>
-          <p:nvPr/>
-        </p:nvSpPr>
-        <p:spPr>
-          <a:xfrm>
-            <a:off x="7799832" y="4992624"/>
-            <a:ext cx="3108960" cy="420624"/>
-          </a:xfrm>
-          <a:prstGeom prst="rect">
-            <a:avLst/>
-          </a:prstGeom>
-          <a:noFill/>
-          <a:ln/>
-        </p:spPr>
-        <p:txBody>
-          <a:bodyPr wrap="square" lIns="0" tIns="0" rIns="0" bIns="0" rtlCol="0" anchor="ctr"/>
-          <a:lstStyle/>
-          <a:p>
-            <a:pPr indent="0" marL="0">
-              <a:buNone/>
-            </a:pPr>
-            <a:r>
-              <a:rPr lang="en-US" sz="1200" dirty="0">
-                <a:solidFill>
-                  <a:srgbClr val="141414"/>
-                </a:solidFill>
-                <a:latin typeface="Pretendard" pitchFamily="34" charset="0"/>
-                <a:ea typeface="Pretendard" pitchFamily="34" charset="-122"/>
-                <a:cs typeface="Pretendard" pitchFamily="34" charset="-120"/>
-              </a:rPr>
-              <a:t>중력을 받는다</a:t>
-            </a:r>
-            <a:endParaRPr lang="en-US" sz="1200" dirty="0"/>
-          </a:p>
-        </p:txBody>
-      </p:sp>
-      <p:sp>
-        <p:nvSpPr>
-          <p:cNvPr id="26" name="Shape 24"/>
-          <p:cNvSpPr/>
-          <p:nvPr/>
-        </p:nvSpPr>
-        <p:spPr>
-          <a:xfrm>
-            <a:off x="758952" y="5577840"/>
-            <a:ext cx="10673791" cy="0"/>
-          </a:xfrm>
-          <a:prstGeom prst="line">
-            <a:avLst/>
-          </a:prstGeom>
-          <a:noFill/>
-          <a:ln w="12700">
-            <a:solidFill>
-              <a:srgbClr val="F0F0F0"/>
-            </a:solidFill>
-            <a:prstDash val="solid"/>
-          </a:ln>
-        </p:spPr>
-      </p:sp>
-      <p:sp>
-        <p:nvSpPr>
-          <p:cNvPr id="27" name="Text 25"/>
-          <p:cNvSpPr txBox="1"/>
-          <p:nvPr/>
-        </p:nvSpPr>
-        <p:spPr>
-          <a:xfrm>
-            <a:off x="758952" y="5806440"/>
-            <a:ext cx="8229600" cy="402336"/>
-          </a:xfrm>
-          <a:prstGeom prst="rect">
-            <a:avLst/>
-          </a:prstGeom>
-          <a:noFill/>
-          <a:ln/>
-        </p:spPr>
-        <p:txBody>
-          <a:bodyPr wrap="square" lIns="0" tIns="0" rIns="0" bIns="0" rtlCol="0" anchor="ctr"/>
-          <a:lstStyle/>
-          <a:p>
-            <a:pPr indent="0" marL="0">
-              <a:buNone/>
-            </a:pPr>
-            <a:r>
-              <a:rPr lang="en-US" sz="1900" dirty="0">
-                <a:solidFill>
-                  <a:srgbClr val="141414"/>
-                </a:solidFill>
-                <a:latin typeface="Pretendard SemiBold" pitchFamily="34" charset="0"/>
-                <a:ea typeface="Pretendard SemiBold" pitchFamily="34" charset="-122"/>
-                <a:cs typeface="Pretendard SemiBold" pitchFamily="34" charset="-120"/>
-              </a:rPr>
-              <a:t>벽과 떨어지는 상자의 차이는 부품 하나다.</a:t>
-            </a:r>
-            <a:endParaRPr lang="en-US" sz="1900" dirty="0"/>
+              <a:t>완성 상태 — 4단 계층</a:t>
+            </a:r>
+            <a:endParaRPr lang="en-US" sz="950" dirty="0"/>
           </a:p>
         </p:txBody>
       </p:sp>

--- a/docs/04_배포자료/슬라이드/7주차-유니티입문.pptx
+++ b/docs/04_배포자료/슬라이드/7주차-유니티입문.pptx
@@ -1748,7 +1748,7 @@
           <a:p>
             <a:r>
               <a:rPr lang="en-US" dirty="0"/>
-              <a:t>팔이 흩어지면 자식 Position이 부모 기준이라는 걸 다시 짚는다. (1.5, 0)은 원점에서가 아니라 부모에서 1.5다.</a:t>
+              <a:t>Scale X 는 전부 1 로 둬야 로컬 1 이 월드 1 이 된다. 부모 Scale X 가 1 이 아니면 자식의 로컬 거리가 눌리거나 늘어난다 — 오늘은 그 얘기까지 하지 않는다. Shoulder 를 (0,3) 으로 옮겨 자식 숫자가 전부 1 그대로인 걸 확인시킨다.</a:t>
             </a:r>
             <a:endParaRPr lang="en-US" dirty="0"/>
           </a:p>
@@ -13739,7 +13739,7 @@
         <p:spPr>
           <a:xfrm>
             <a:off x="758952" y="1965960"/>
-            <a:ext cx="3657600" cy="274320"/>
+            <a:ext cx="2377440" cy="274320"/>
           </a:xfrm>
           <a:prstGeom prst="rect">
             <a:avLst/>
@@ -13763,7 +13763,7 @@
                 <a:ea typeface="Pretendard SemiBold" pitchFamily="34" charset="-122"/>
                 <a:cs typeface="Pretendard SemiBold" pitchFamily="34" charset="-120"/>
               </a:rPr>
-              <a:t>계층 구조</a:t>
+              <a:t>계층</a:t>
             </a:r>
             <a:endParaRPr lang="en-US" sz="950" dirty="0"/>
           </a:p>
@@ -13771,14 +13771,92 @@
       </p:sp>
       <p:sp>
         <p:nvSpPr>
-          <p:cNvPr id="7" name="Shape 5"/>
+          <p:cNvPr id="7" name="Text 5"/>
+          <p:cNvSpPr txBox="1"/>
+          <p:nvPr/>
+        </p:nvSpPr>
+        <p:spPr>
+          <a:xfrm>
+            <a:off x="3776472" y="1965960"/>
+            <a:ext cx="914400" cy="274320"/>
+          </a:xfrm>
+          <a:prstGeom prst="rect">
+            <a:avLst/>
+          </a:prstGeom>
+          <a:noFill/>
+          <a:ln/>
+        </p:spPr>
+        <p:txBody>
+          <a:bodyPr wrap="square" lIns="0" tIns="0" rIns="0" bIns="0" rtlCol="0" anchor="ctr"/>
+          <a:lstStyle/>
+          <a:p>
+            <a:pPr algn="r" indent="0" marL="0">
+              <a:buNone/>
+            </a:pPr>
+            <a:r>
+              <a:rPr lang="en-US" sz="950" dirty="0">
+                <a:solidFill>
+                  <a:srgbClr val="707070"/>
+                </a:solidFill>
+                <a:latin typeface="Pretendard SemiBold" pitchFamily="34" charset="0"/>
+                <a:ea typeface="Pretendard SemiBold" pitchFamily="34" charset="-122"/>
+                <a:cs typeface="Pretendard SemiBold" pitchFamily="34" charset="-120"/>
+              </a:rPr>
+              <a:t>로컬 X</a:t>
+            </a:r>
+            <a:endParaRPr lang="en-US" sz="950" dirty="0"/>
+          </a:p>
+        </p:txBody>
+      </p:sp>
+      <p:sp>
+        <p:nvSpPr>
+          <p:cNvPr id="8" name="Text 6"/>
+          <p:cNvSpPr txBox="1"/>
+          <p:nvPr/>
+        </p:nvSpPr>
+        <p:spPr>
+          <a:xfrm>
+            <a:off x="4873752" y="1965960"/>
+            <a:ext cx="914400" cy="274320"/>
+          </a:xfrm>
+          <a:prstGeom prst="rect">
+            <a:avLst/>
+          </a:prstGeom>
+          <a:noFill/>
+          <a:ln/>
+        </p:spPr>
+        <p:txBody>
+          <a:bodyPr wrap="square" lIns="0" tIns="0" rIns="0" bIns="0" rtlCol="0" anchor="ctr"/>
+          <a:lstStyle/>
+          <a:p>
+            <a:pPr algn="r" indent="0" marL="0">
+              <a:buNone/>
+            </a:pPr>
+            <a:r>
+              <a:rPr lang="en-US" sz="950" dirty="0">
+                <a:solidFill>
+                  <a:srgbClr val="141414"/>
+                </a:solidFill>
+                <a:latin typeface="Pretendard SemiBold" pitchFamily="34" charset="0"/>
+                <a:ea typeface="Pretendard SemiBold" pitchFamily="34" charset="-122"/>
+                <a:cs typeface="Pretendard SemiBold" pitchFamily="34" charset="-120"/>
+              </a:rPr>
+              <a:t>월드 X</a:t>
+            </a:r>
+            <a:endParaRPr lang="en-US" sz="950" dirty="0"/>
+          </a:p>
+        </p:txBody>
+      </p:sp>
+      <p:sp>
+        <p:nvSpPr>
+          <p:cNvPr id="9" name="Shape 7"/>
           <p:cNvSpPr/>
           <p:nvPr/>
         </p:nvSpPr>
         <p:spPr>
           <a:xfrm>
             <a:off x="758952" y="2377440"/>
-            <a:ext cx="4937760" cy="0"/>
+            <a:ext cx="5029200" cy="0"/>
           </a:xfrm>
           <a:prstGeom prst="line">
             <a:avLst/>
@@ -13794,14 +13872,14 @@
       </p:sp>
       <p:sp>
         <p:nvSpPr>
-          <p:cNvPr id="8" name="Text 6"/>
+          <p:cNvPr id="10" name="Text 8"/>
           <p:cNvSpPr txBox="1"/>
           <p:nvPr/>
         </p:nvSpPr>
         <p:spPr>
           <a:xfrm>
             <a:off x="758952" y="2560320"/>
-            <a:ext cx="2560320" cy="329184"/>
+            <a:ext cx="2743200" cy="365760"/>
           </a:xfrm>
           <a:prstGeom prst="rect">
             <a:avLst/>
@@ -13833,53 +13911,92 @@
       </p:sp>
       <p:sp>
         <p:nvSpPr>
-          <p:cNvPr id="9" name="Text 7"/>
-          <p:cNvSpPr txBox="1"/>
-          <p:nvPr/>
-        </p:nvSpPr>
-        <p:spPr>
-          <a:xfrm>
-            <a:off x="3959352" y="2560320"/>
-            <a:ext cx="1737360" cy="329184"/>
-          </a:xfrm>
-          <a:prstGeom prst="rect">
-            <a:avLst/>
-          </a:prstGeom>
-          <a:noFill/>
-          <a:ln/>
-        </p:spPr>
-        <p:txBody>
-          <a:bodyPr wrap="square" lIns="0" tIns="0" rIns="0" bIns="0" rtlCol="0" anchor="ctr"/>
-          <a:lstStyle/>
-          <a:p>
-            <a:pPr indent="0" marL="0">
-              <a:buNone/>
-            </a:pPr>
-            <a:r>
-              <a:rPr lang="en-US" sz="1100" dirty="0">
-                <a:solidFill>
-                  <a:srgbClr val="ADADAD"/>
+          <p:cNvPr id="11" name="Text 9"/>
+          <p:cNvSpPr txBox="1"/>
+          <p:nvPr/>
+        </p:nvSpPr>
+        <p:spPr>
+          <a:xfrm>
+            <a:off x="3776472" y="2560320"/>
+            <a:ext cx="914400" cy="365760"/>
+          </a:xfrm>
+          <a:prstGeom prst="rect">
+            <a:avLst/>
+          </a:prstGeom>
+          <a:noFill/>
+          <a:ln/>
+        </p:spPr>
+        <p:txBody>
+          <a:bodyPr wrap="square" lIns="0" tIns="0" rIns="0" bIns="0" rtlCol="0" anchor="ctr"/>
+          <a:lstStyle/>
+          <a:p>
+            <a:pPr algn="r" indent="0" marL="0">
+              <a:buNone/>
+            </a:pPr>
+            <a:r>
+              <a:rPr lang="en-US" sz="1200" dirty="0">
+                <a:solidFill>
+                  <a:srgbClr val="707070"/>
                 </a:solidFill>
                 <a:latin typeface="Pretendard" pitchFamily="34" charset="0"/>
                 <a:ea typeface="Pretendard" pitchFamily="34" charset="-122"/>
                 <a:cs typeface="Pretendard" pitchFamily="34" charset="-120"/>
               </a:rPr>
-              <a:t>어깨 — 부모</a:t>
-            </a:r>
-            <a:endParaRPr lang="en-US" sz="1100" dirty="0"/>
-          </a:p>
-        </p:txBody>
-      </p:sp>
-      <p:sp>
-        <p:nvSpPr>
-          <p:cNvPr id="10" name="Shape 8"/>
+              <a:t>0</a:t>
+            </a:r>
+            <a:endParaRPr lang="en-US" sz="1200" dirty="0"/>
+          </a:p>
+        </p:txBody>
+      </p:sp>
+      <p:sp>
+        <p:nvSpPr>
+          <p:cNvPr id="12" name="Text 10"/>
+          <p:cNvSpPr txBox="1"/>
+          <p:nvPr/>
+        </p:nvSpPr>
+        <p:spPr>
+          <a:xfrm>
+            <a:off x="4873752" y="2560320"/>
+            <a:ext cx="914400" cy="365760"/>
+          </a:xfrm>
+          <a:prstGeom prst="rect">
+            <a:avLst/>
+          </a:prstGeom>
+          <a:noFill/>
+          <a:ln/>
+        </p:spPr>
+        <p:txBody>
+          <a:bodyPr wrap="square" lIns="0" tIns="0" rIns="0" bIns="0" rtlCol="0" anchor="ctr"/>
+          <a:lstStyle/>
+          <a:p>
+            <a:pPr algn="r" indent="0" marL="0">
+              <a:buNone/>
+            </a:pPr>
+            <a:r>
+              <a:rPr lang="en-US" sz="1550" dirty="0">
+                <a:solidFill>
+                  <a:srgbClr val="141414"/>
+                </a:solidFill>
+                <a:latin typeface="Pretendard SemiBold" pitchFamily="34" charset="0"/>
+                <a:ea typeface="Pretendard SemiBold" pitchFamily="34" charset="-122"/>
+                <a:cs typeface="Pretendard SemiBold" pitchFamily="34" charset="-120"/>
+              </a:rPr>
+              <a:t>0</a:t>
+            </a:r>
+            <a:endParaRPr lang="en-US" sz="1550" dirty="0"/>
+          </a:p>
+        </p:txBody>
+      </p:sp>
+      <p:sp>
+        <p:nvSpPr>
+          <p:cNvPr id="13" name="Shape 11"/>
           <p:cNvSpPr/>
           <p:nvPr/>
         </p:nvSpPr>
         <p:spPr>
           <a:xfrm>
-            <a:off x="758952" y="3017520"/>
-            <a:ext cx="4937760" cy="0"/>
+            <a:off x="758952" y="3054096"/>
+            <a:ext cx="5029200" cy="0"/>
           </a:xfrm>
           <a:prstGeom prst="line">
             <a:avLst/>
@@ -13895,14 +14012,14 @@
       </p:sp>
       <p:sp>
         <p:nvSpPr>
-          <p:cNvPr id="11" name="Text 9"/>
-          <p:cNvSpPr txBox="1"/>
-          <p:nvPr/>
-        </p:nvSpPr>
-        <p:spPr>
-          <a:xfrm>
-            <a:off x="1143000" y="3127248"/>
-            <a:ext cx="2560320" cy="329184"/>
+          <p:cNvPr id="14" name="Text 12"/>
+          <p:cNvSpPr txBox="1"/>
+          <p:nvPr/>
+        </p:nvSpPr>
+        <p:spPr>
+          <a:xfrm>
+            <a:off x="1124712" y="3163824"/>
+            <a:ext cx="2743200" cy="365760"/>
           </a:xfrm>
           <a:prstGeom prst="rect">
             <a:avLst/>
@@ -13934,53 +14051,92 @@
       </p:sp>
       <p:sp>
         <p:nvSpPr>
-          <p:cNvPr id="12" name="Text 10"/>
-          <p:cNvSpPr txBox="1"/>
-          <p:nvPr/>
-        </p:nvSpPr>
-        <p:spPr>
-          <a:xfrm>
-            <a:off x="3959352" y="3127248"/>
-            <a:ext cx="1737360" cy="329184"/>
-          </a:xfrm>
-          <a:prstGeom prst="rect">
-            <a:avLst/>
-          </a:prstGeom>
-          <a:noFill/>
-          <a:ln/>
-        </p:spPr>
-        <p:txBody>
-          <a:bodyPr wrap="square" lIns="0" tIns="0" rIns="0" bIns="0" rtlCol="0" anchor="ctr"/>
-          <a:lstStyle/>
-          <a:p>
-            <a:pPr indent="0" marL="0">
-              <a:buNone/>
-            </a:pPr>
-            <a:r>
-              <a:rPr lang="en-US" sz="1100" dirty="0">
-                <a:solidFill>
-                  <a:srgbClr val="ADADAD"/>
+          <p:cNvPr id="15" name="Text 13"/>
+          <p:cNvSpPr txBox="1"/>
+          <p:nvPr/>
+        </p:nvSpPr>
+        <p:spPr>
+          <a:xfrm>
+            <a:off x="3776472" y="3163824"/>
+            <a:ext cx="914400" cy="365760"/>
+          </a:xfrm>
+          <a:prstGeom prst="rect">
+            <a:avLst/>
+          </a:prstGeom>
+          <a:noFill/>
+          <a:ln/>
+        </p:spPr>
+        <p:txBody>
+          <a:bodyPr wrap="square" lIns="0" tIns="0" rIns="0" bIns="0" rtlCol="0" anchor="ctr"/>
+          <a:lstStyle/>
+          <a:p>
+            <a:pPr algn="r" indent="0" marL="0">
+              <a:buNone/>
+            </a:pPr>
+            <a:r>
+              <a:rPr lang="en-US" sz="1200" dirty="0">
+                <a:solidFill>
+                  <a:srgbClr val="707070"/>
                 </a:solidFill>
                 <a:latin typeface="Pretendard" pitchFamily="34" charset="0"/>
                 <a:ea typeface="Pretendard" pitchFamily="34" charset="-122"/>
                 <a:cs typeface="Pretendard" pitchFamily="34" charset="-120"/>
               </a:rPr>
-              <a:t>윗팔</a:t>
-            </a:r>
-            <a:endParaRPr lang="en-US" sz="1100" dirty="0"/>
-          </a:p>
-        </p:txBody>
-      </p:sp>
-      <p:sp>
-        <p:nvSpPr>
-          <p:cNvPr id="13" name="Shape 11"/>
+              <a:t>1</a:t>
+            </a:r>
+            <a:endParaRPr lang="en-US" sz="1200" dirty="0"/>
+          </a:p>
+        </p:txBody>
+      </p:sp>
+      <p:sp>
+        <p:nvSpPr>
+          <p:cNvPr id="16" name="Text 14"/>
+          <p:cNvSpPr txBox="1"/>
+          <p:nvPr/>
+        </p:nvSpPr>
+        <p:spPr>
+          <a:xfrm>
+            <a:off x="4873752" y="3163824"/>
+            <a:ext cx="914400" cy="365760"/>
+          </a:xfrm>
+          <a:prstGeom prst="rect">
+            <a:avLst/>
+          </a:prstGeom>
+          <a:noFill/>
+          <a:ln/>
+        </p:spPr>
+        <p:txBody>
+          <a:bodyPr wrap="square" lIns="0" tIns="0" rIns="0" bIns="0" rtlCol="0" anchor="ctr"/>
+          <a:lstStyle/>
+          <a:p>
+            <a:pPr algn="r" indent="0" marL="0">
+              <a:buNone/>
+            </a:pPr>
+            <a:r>
+              <a:rPr lang="en-US" sz="1550" dirty="0">
+                <a:solidFill>
+                  <a:srgbClr val="141414"/>
+                </a:solidFill>
+                <a:latin typeface="Pretendard SemiBold" pitchFamily="34" charset="0"/>
+                <a:ea typeface="Pretendard SemiBold" pitchFamily="34" charset="-122"/>
+                <a:cs typeface="Pretendard SemiBold" pitchFamily="34" charset="-120"/>
+              </a:rPr>
+              <a:t>1</a:t>
+            </a:r>
+            <a:endParaRPr lang="en-US" sz="1550" dirty="0"/>
+          </a:p>
+        </p:txBody>
+      </p:sp>
+      <p:sp>
+        <p:nvSpPr>
+          <p:cNvPr id="17" name="Shape 15"/>
           <p:cNvSpPr/>
           <p:nvPr/>
         </p:nvSpPr>
         <p:spPr>
           <a:xfrm>
-            <a:off x="758952" y="3584448"/>
-            <a:ext cx="4937760" cy="0"/>
+            <a:off x="758952" y="3657600"/>
+            <a:ext cx="5029200" cy="0"/>
           </a:xfrm>
           <a:prstGeom prst="line">
             <a:avLst/>
@@ -13996,14 +14152,14 @@
       </p:sp>
       <p:sp>
         <p:nvSpPr>
-          <p:cNvPr id="14" name="Text 12"/>
-          <p:cNvSpPr txBox="1"/>
-          <p:nvPr/>
-        </p:nvSpPr>
-        <p:spPr>
-          <a:xfrm>
-            <a:off x="1527048" y="3694176"/>
-            <a:ext cx="2560320" cy="329184"/>
+          <p:cNvPr id="18" name="Text 16"/>
+          <p:cNvSpPr txBox="1"/>
+          <p:nvPr/>
+        </p:nvSpPr>
+        <p:spPr>
+          <a:xfrm>
+            <a:off x="1490472" y="3767328"/>
+            <a:ext cx="2743200" cy="365760"/>
           </a:xfrm>
           <a:prstGeom prst="rect">
             <a:avLst/>
@@ -14035,53 +14191,92 @@
       </p:sp>
       <p:sp>
         <p:nvSpPr>
-          <p:cNvPr id="15" name="Text 13"/>
-          <p:cNvSpPr txBox="1"/>
-          <p:nvPr/>
-        </p:nvSpPr>
-        <p:spPr>
-          <a:xfrm>
-            <a:off x="3959352" y="3694176"/>
-            <a:ext cx="1737360" cy="329184"/>
-          </a:xfrm>
-          <a:prstGeom prst="rect">
-            <a:avLst/>
-          </a:prstGeom>
-          <a:noFill/>
-          <a:ln/>
-        </p:spPr>
-        <p:txBody>
-          <a:bodyPr wrap="square" lIns="0" tIns="0" rIns="0" bIns="0" rtlCol="0" anchor="ctr"/>
-          <a:lstStyle/>
-          <a:p>
-            <a:pPr indent="0" marL="0">
-              <a:buNone/>
-            </a:pPr>
-            <a:r>
-              <a:rPr lang="en-US" sz="1100" dirty="0">
-                <a:solidFill>
-                  <a:srgbClr val="ADADAD"/>
+          <p:cNvPr id="19" name="Text 17"/>
+          <p:cNvSpPr txBox="1"/>
+          <p:nvPr/>
+        </p:nvSpPr>
+        <p:spPr>
+          <a:xfrm>
+            <a:off x="3776472" y="3767328"/>
+            <a:ext cx="914400" cy="365760"/>
+          </a:xfrm>
+          <a:prstGeom prst="rect">
+            <a:avLst/>
+          </a:prstGeom>
+          <a:noFill/>
+          <a:ln/>
+        </p:spPr>
+        <p:txBody>
+          <a:bodyPr wrap="square" lIns="0" tIns="0" rIns="0" bIns="0" rtlCol="0" anchor="ctr"/>
+          <a:lstStyle/>
+          <a:p>
+            <a:pPr algn="r" indent="0" marL="0">
+              <a:buNone/>
+            </a:pPr>
+            <a:r>
+              <a:rPr lang="en-US" sz="1200" dirty="0">
+                <a:solidFill>
+                  <a:srgbClr val="707070"/>
                 </a:solidFill>
                 <a:latin typeface="Pretendard" pitchFamily="34" charset="0"/>
                 <a:ea typeface="Pretendard" pitchFamily="34" charset="-122"/>
                 <a:cs typeface="Pretendard" pitchFamily="34" charset="-120"/>
               </a:rPr>
-              <a:t>아랫팔</a:t>
-            </a:r>
-            <a:endParaRPr lang="en-US" sz="1100" dirty="0"/>
-          </a:p>
-        </p:txBody>
-      </p:sp>
-      <p:sp>
-        <p:nvSpPr>
-          <p:cNvPr id="16" name="Shape 14"/>
+              <a:t>1</a:t>
+            </a:r>
+            <a:endParaRPr lang="en-US" sz="1200" dirty="0"/>
+          </a:p>
+        </p:txBody>
+      </p:sp>
+      <p:sp>
+        <p:nvSpPr>
+          <p:cNvPr id="20" name="Text 18"/>
+          <p:cNvSpPr txBox="1"/>
+          <p:nvPr/>
+        </p:nvSpPr>
+        <p:spPr>
+          <a:xfrm>
+            <a:off x="4873752" y="3767328"/>
+            <a:ext cx="914400" cy="365760"/>
+          </a:xfrm>
+          <a:prstGeom prst="rect">
+            <a:avLst/>
+          </a:prstGeom>
+          <a:noFill/>
+          <a:ln/>
+        </p:spPr>
+        <p:txBody>
+          <a:bodyPr wrap="square" lIns="0" tIns="0" rIns="0" bIns="0" rtlCol="0" anchor="ctr"/>
+          <a:lstStyle/>
+          <a:p>
+            <a:pPr algn="r" indent="0" marL="0">
+              <a:buNone/>
+            </a:pPr>
+            <a:r>
+              <a:rPr lang="en-US" sz="1550" dirty="0">
+                <a:solidFill>
+                  <a:srgbClr val="141414"/>
+                </a:solidFill>
+                <a:latin typeface="Pretendard SemiBold" pitchFamily="34" charset="0"/>
+                <a:ea typeface="Pretendard SemiBold" pitchFamily="34" charset="-122"/>
+                <a:cs typeface="Pretendard SemiBold" pitchFamily="34" charset="-120"/>
+              </a:rPr>
+              <a:t>2</a:t>
+            </a:r>
+            <a:endParaRPr lang="en-US" sz="1550" dirty="0"/>
+          </a:p>
+        </p:txBody>
+      </p:sp>
+      <p:sp>
+        <p:nvSpPr>
+          <p:cNvPr id="21" name="Shape 19"/>
           <p:cNvSpPr/>
           <p:nvPr/>
         </p:nvSpPr>
         <p:spPr>
           <a:xfrm>
-            <a:off x="758952" y="4151376"/>
-            <a:ext cx="4937760" cy="0"/>
+            <a:off x="758952" y="4261104"/>
+            <a:ext cx="5029200" cy="0"/>
           </a:xfrm>
           <a:prstGeom prst="line">
             <a:avLst/>
@@ -14097,14 +14292,14 @@
       </p:sp>
       <p:sp>
         <p:nvSpPr>
-          <p:cNvPr id="17" name="Text 15"/>
-          <p:cNvSpPr txBox="1"/>
-          <p:nvPr/>
-        </p:nvSpPr>
-        <p:spPr>
-          <a:xfrm>
-            <a:off x="1911096" y="4261104"/>
-            <a:ext cx="2560320" cy="329184"/>
+          <p:cNvPr id="22" name="Text 20"/>
+          <p:cNvSpPr txBox="1"/>
+          <p:nvPr/>
+        </p:nvSpPr>
+        <p:spPr>
+          <a:xfrm>
+            <a:off x="1856232" y="4370832"/>
+            <a:ext cx="2743200" cy="365760"/>
           </a:xfrm>
           <a:prstGeom prst="rect">
             <a:avLst/>
@@ -14136,53 +14331,92 @@
       </p:sp>
       <p:sp>
         <p:nvSpPr>
-          <p:cNvPr id="18" name="Text 16"/>
-          <p:cNvSpPr txBox="1"/>
-          <p:nvPr/>
-        </p:nvSpPr>
-        <p:spPr>
-          <a:xfrm>
-            <a:off x="3959352" y="4261104"/>
-            <a:ext cx="1737360" cy="329184"/>
-          </a:xfrm>
-          <a:prstGeom prst="rect">
-            <a:avLst/>
-          </a:prstGeom>
-          <a:noFill/>
-          <a:ln/>
-        </p:spPr>
-        <p:txBody>
-          <a:bodyPr wrap="square" lIns="0" tIns="0" rIns="0" bIns="0" rtlCol="0" anchor="ctr"/>
-          <a:lstStyle/>
-          <a:p>
-            <a:pPr indent="0" marL="0">
-              <a:buNone/>
-            </a:pPr>
-            <a:r>
-              <a:rPr lang="en-US" sz="1100" dirty="0">
-                <a:solidFill>
-                  <a:srgbClr val="ADADAD"/>
+          <p:cNvPr id="23" name="Text 21"/>
+          <p:cNvSpPr txBox="1"/>
+          <p:nvPr/>
+        </p:nvSpPr>
+        <p:spPr>
+          <a:xfrm>
+            <a:off x="3776472" y="4370832"/>
+            <a:ext cx="914400" cy="365760"/>
+          </a:xfrm>
+          <a:prstGeom prst="rect">
+            <a:avLst/>
+          </a:prstGeom>
+          <a:noFill/>
+          <a:ln/>
+        </p:spPr>
+        <p:txBody>
+          <a:bodyPr wrap="square" lIns="0" tIns="0" rIns="0" bIns="0" rtlCol="0" anchor="ctr"/>
+          <a:lstStyle/>
+          <a:p>
+            <a:pPr algn="r" indent="0" marL="0">
+              <a:buNone/>
+            </a:pPr>
+            <a:r>
+              <a:rPr lang="en-US" sz="1200" dirty="0">
+                <a:solidFill>
+                  <a:srgbClr val="707070"/>
                 </a:solidFill>
                 <a:latin typeface="Pretendard" pitchFamily="34" charset="0"/>
                 <a:ea typeface="Pretendard" pitchFamily="34" charset="-122"/>
                 <a:cs typeface="Pretendard" pitchFamily="34" charset="-120"/>
               </a:rPr>
-              <a:t>손</a:t>
-            </a:r>
-            <a:endParaRPr lang="en-US" sz="1100" dirty="0"/>
-          </a:p>
-        </p:txBody>
-      </p:sp>
-      <p:sp>
-        <p:nvSpPr>
-          <p:cNvPr id="19" name="Shape 17"/>
+              <a:t>1</a:t>
+            </a:r>
+            <a:endParaRPr lang="en-US" sz="1200" dirty="0"/>
+          </a:p>
+        </p:txBody>
+      </p:sp>
+      <p:sp>
+        <p:nvSpPr>
+          <p:cNvPr id="24" name="Text 22"/>
+          <p:cNvSpPr txBox="1"/>
+          <p:nvPr/>
+        </p:nvSpPr>
+        <p:spPr>
+          <a:xfrm>
+            <a:off x="4873752" y="4370832"/>
+            <a:ext cx="914400" cy="365760"/>
+          </a:xfrm>
+          <a:prstGeom prst="rect">
+            <a:avLst/>
+          </a:prstGeom>
+          <a:noFill/>
+          <a:ln/>
+        </p:spPr>
+        <p:txBody>
+          <a:bodyPr wrap="square" lIns="0" tIns="0" rIns="0" bIns="0" rtlCol="0" anchor="ctr"/>
+          <a:lstStyle/>
+          <a:p>
+            <a:pPr algn="r" indent="0" marL="0">
+              <a:buNone/>
+            </a:pPr>
+            <a:r>
+              <a:rPr lang="en-US" sz="1550" dirty="0">
+                <a:solidFill>
+                  <a:srgbClr val="141414"/>
+                </a:solidFill>
+                <a:latin typeface="Pretendard SemiBold" pitchFamily="34" charset="0"/>
+                <a:ea typeface="Pretendard SemiBold" pitchFamily="34" charset="-122"/>
+                <a:cs typeface="Pretendard SemiBold" pitchFamily="34" charset="-120"/>
+              </a:rPr>
+              <a:t>3</a:t>
+            </a:r>
+            <a:endParaRPr lang="en-US" sz="1550" dirty="0"/>
+          </a:p>
+        </p:txBody>
+      </p:sp>
+      <p:sp>
+        <p:nvSpPr>
+          <p:cNvPr id="25" name="Shape 23"/>
           <p:cNvSpPr/>
           <p:nvPr/>
         </p:nvSpPr>
         <p:spPr>
           <a:xfrm>
-            <a:off x="758952" y="4718304"/>
-            <a:ext cx="4937760" cy="0"/>
+            <a:off x="758952" y="4864608"/>
+            <a:ext cx="5029200" cy="0"/>
           </a:xfrm>
           <a:prstGeom prst="line">
             <a:avLst/>
@@ -14198,14 +14432,53 @@
       </p:sp>
       <p:sp>
         <p:nvSpPr>
-          <p:cNvPr id="20" name="Text 18"/>
-          <p:cNvSpPr txBox="1"/>
-          <p:nvPr/>
-        </p:nvSpPr>
-        <p:spPr>
-          <a:xfrm>
-            <a:off x="758952" y="5029200"/>
-            <a:ext cx="4937760" cy="640080"/>
+          <p:cNvPr id="26" name="Text 24"/>
+          <p:cNvSpPr txBox="1"/>
+          <p:nvPr/>
+        </p:nvSpPr>
+        <p:spPr>
+          <a:xfrm>
+            <a:off x="758952" y="5138928"/>
+            <a:ext cx="5120640" cy="365760"/>
+          </a:xfrm>
+          <a:prstGeom prst="rect">
+            <a:avLst/>
+          </a:prstGeom>
+          <a:noFill/>
+          <a:ln/>
+        </p:spPr>
+        <p:txBody>
+          <a:bodyPr wrap="square" lIns="0" tIns="0" rIns="0" bIns="0" rtlCol="0" anchor="ctr"/>
+          <a:lstStyle/>
+          <a:p>
+            <a:pPr indent="0" marL="0">
+              <a:buNone/>
+            </a:pPr>
+            <a:r>
+              <a:rPr lang="en-US" sz="1900" dirty="0">
+                <a:solidFill>
+                  <a:srgbClr val="141414"/>
+                </a:solidFill>
+                <a:latin typeface="Pretendard SemiBold" pitchFamily="34" charset="0"/>
+                <a:ea typeface="Pretendard SemiBold" pitchFamily="34" charset="-122"/>
+                <a:cs typeface="Pretendard SemiBold" pitchFamily="34" charset="-120"/>
+              </a:rPr>
+              <a:t>로컬은 전부 1인데 월드는 0, 1, 2, 3이다.</a:t>
+            </a:r>
+            <a:endParaRPr lang="en-US" sz="1900" dirty="0"/>
+          </a:p>
+        </p:txBody>
+      </p:sp>
+      <p:sp>
+        <p:nvSpPr>
+          <p:cNvPr id="27" name="Text 25"/>
+          <p:cNvSpPr txBox="1"/>
+          <p:nvPr/>
+        </p:nvSpPr>
+        <p:spPr>
+          <a:xfrm>
+            <a:off x="758952" y="5596128"/>
+            <a:ext cx="5120640" cy="640080"/>
           </a:xfrm>
           <a:prstGeom prst="rect">
             <a:avLst/>
@@ -14232,7 +14505,7 @@
                 <a:ea typeface="Pretendard Light" pitchFamily="34" charset="-122"/>
                 <a:cs typeface="Pretendard Light" pitchFamily="34" charset="-120"/>
               </a:rPr>
-              <a:t>4개를 먼저 만들어 계층부터 잡고, 그다음 좌표를 넣는다. 반대로 하면 위치가 튄다.</a:t>
+              <a:t>각자 자기 부모에서 1만큼 떨어져 있기 때문이다. Shoulder만 부모가 없어서 로컬과 월드가 같다.</a:t>
             </a:r>
             <a:endParaRPr lang="en-US" sz="1200" dirty="0"/>
           </a:p>
@@ -14240,46 +14513,7 @@
       </p:sp>
       <p:sp>
         <p:nvSpPr>
-          <p:cNvPr id="21" name="Text 19"/>
-          <p:cNvSpPr txBox="1"/>
-          <p:nvPr/>
-        </p:nvSpPr>
-        <p:spPr>
-          <a:xfrm>
-            <a:off x="758952" y="5760720"/>
-            <a:ext cx="5212080" cy="347472"/>
-          </a:xfrm>
-          <a:prstGeom prst="rect">
-            <a:avLst/>
-          </a:prstGeom>
-          <a:noFill/>
-          <a:ln/>
-        </p:spPr>
-        <p:txBody>
-          <a:bodyPr wrap="square" lIns="0" tIns="0" rIns="0" bIns="0" rtlCol="0" anchor="ctr"/>
-          <a:lstStyle/>
-          <a:p>
-            <a:pPr indent="0" marL="0">
-              <a:buNone/>
-            </a:pPr>
-            <a:r>
-              <a:rPr lang="en-US" sz="1400" dirty="0">
-                <a:solidFill>
-                  <a:srgbClr val="141414"/>
-                </a:solidFill>
-                <a:latin typeface="Pretendard SemiBold" pitchFamily="34" charset="0"/>
-                <a:ea typeface="Pretendard SemiBold" pitchFamily="34" charset="-122"/>
-                <a:cs typeface="Pretendard SemiBold" pitchFamily="34" charset="-120"/>
-              </a:rPr>
-              <a:t>Shoulder만 돌렸는데 손까지 따라 움직이면 통과.</a:t>
-            </a:r>
-            <a:endParaRPr lang="en-US" sz="1400" dirty="0"/>
-          </a:p>
-        </p:txBody>
-      </p:sp>
-      <p:sp>
-        <p:nvSpPr>
-          <p:cNvPr id="22" name="Shape 20"/>
+          <p:cNvPr id="28" name="Shape 26"/>
           <p:cNvSpPr/>
           <p:nvPr/>
         </p:nvSpPr>
@@ -14306,7 +14540,7 @@
       </p:sp>
       <p:pic>
         <p:nvPicPr>
-          <p:cNvPr id="23" name="Image 0" descr="C:\Users\user\AppData\Local\Temp\claude\C--Users-user-Github-WaveBreaker\fd97bec6-cef8-4bf5-a447-9a0fa572b36e\scratchpad\shots2\final\033_Transform.png">    </p:cNvPr>
+          <p:cNvPr id="29" name="Image 0" descr="C:\Users\user\AppData\Local\Temp\claude\C--Users-user-Github-WaveBreaker\fd97bec6-cef8-4bf5-a447-9a0fa572b36e\scratchpad\shots2\final\033_Transform.png">    </p:cNvPr>
           <p:cNvPicPr>
             <a:picLocks noChangeAspect="1"/>
           </p:cNvPicPr>
@@ -14330,7 +14564,7 @@
       </p:pic>
       <p:sp>
         <p:nvSpPr>
-          <p:cNvPr id="24" name="Text 21"/>
+          <p:cNvPr id="30" name="Text 27"/>
           <p:cNvSpPr txBox="1"/>
           <p:nvPr/>
         </p:nvSpPr>
